--- a/experiments/20260804-budget-conditioning/ppt/sensing_routing_method_and_results.pptx
+++ b/experiments/20260804-budget-conditioning/ppt/sensing_routing_method_and_results.pptx
@@ -23,6 +23,12 @@
     <p:sldId id="336" r:id="rId30"/>
     <p:sldId id="337" r:id="rId31"/>
     <p:sldId id="338" r:id="rId32"/>
+    <p:sldId id="339" r:id="rId33"/>
+    <p:sldId id="340" r:id="rId34"/>
+    <p:sldId id="341" r:id="rId35"/>
+    <p:sldId id="342" r:id="rId36"/>
+    <p:sldId id="343" r:id="rId37"/>
+    <p:sldId id="344" r:id="rId38"/>
   </p:sldIdLst>
   <p:sldSz cx="12192000" cy="6858000"/>
   <p:notesSz cx="6858000" cy="9144000"/>
@@ -6264,7 +6270,7 @@
         </p:nvSpPr>
         <p:spPr>
           <a:xfrm>
-            <a:off x="1097280" y="1828800"/>
+            <a:off x="1097280" y="1737360"/>
             <a:ext cx="9875520" cy="914400"/>
           </a:xfrm>
           <a:prstGeom prst="rect">
@@ -6279,7 +6285,7 @@
           <a:lstStyle/>
           <a:p>
             <a:pPr>
-              <a:defRPr sz="1700" b="0"/>
+              <a:defRPr sz="1600" b="0"/>
             </a:pPr>
             <a:r>
               <a:t>• The problem and the network</a:t>
@@ -6287,31 +6293,39 @@
           </a:p>
           <a:p>
             <a:pPr>
-              <a:defRPr sz="1700" b="1"/>
+              <a:defRPr sz="1600" b="1"/>
             </a:pPr>
             <a:r>
-              <a:t>• Change (a) — the Gurobi objective: what it is now, and why it changed</a:t>
+              <a:t>• Change (a) — the objective: before vs now · why the weight is a switch (rigorous) · how each budget Bᵥ is set</a:t>
             </a:r>
           </a:p>
           <a:p>
             <a:pPr>
-              <a:defRPr sz="1700" b="1"/>
+              <a:defRPr sz="1600" b="0"/>
             </a:pPr>
             <a:r>
-              <a:t>• Change (b) — the neural network: what was redesigned, and why</a:t>
+              <a:t>• Where this sits in the literature — setting comparison</a:t>
             </a:r>
           </a:p>
           <a:p>
             <a:pPr>
-              <a:defRPr sz="1700" b="0"/>
+              <a:defRPr sz="1600" b="0"/>
             </a:pPr>
             <a:r>
-              <a:t>• Pipeline: offline label farm  →  supervised training  →  millisecond inference</a:t>
+              <a:t>• Pipelines: training  ·  case-by-case generation</a:t>
             </a:r>
           </a:p>
           <a:p>
             <a:pPr>
-              <a:defRPr sz="1700" b="0"/>
+              <a:defRPr sz="1600" b="1"/>
+            </a:pPr>
+            <a:r>
+              <a:t>• Change (b) — the model: overview + encoder + decoder (editable diagrams)</a:t>
+            </a:r>
+          </a:p>
+          <a:p>
+            <a:pPr>
+              <a:defRPr sz="1600" b="0"/>
             </a:pPr>
             <a:r>
               <a:t>• Evaluation design and results (3 seeds, 2 300 held-out cases)</a:t>
@@ -6447,31 +6461,15 @@
               <a:defRPr sz="1400" b="1"/>
             </a:pPr>
             <a:r>
-              <a:t>• Objective — maximise sensing coverage, pay for travel, respect each vehicle's budget:</a:t>
+              <a:t>• Objective: maximise the fleet's sensing coverage (union of occupied cells — overlap counts once), pay for travel, respect each vehicle's own budget (next slide, spelled out)</a:t>
             </a:r>
           </a:p>
           <a:p>
             <a:pPr>
-              <a:defRPr sz="1400" b="1"/>
+              <a:defRPr sz="1400" b="0"/>
             </a:pPr>
             <a:r>
-              <a:t>        min  [ α₁·Σ cost  −  α₂·Σ y(i,τ) ] / Σᵥ Bᵥ        s.t.  vehicle v reaches dᵥ by t₀ᵥ + Bᵥ</a:t>
-            </a:r>
-          </a:p>
-          <a:p>
-            <a:pPr>
-              <a:defRPr sz="1250" b="0"/>
-            </a:pPr>
-            <a:r>
-              <a:t>   – coverage = |union of occupied (link, time) cells| — overlap counts once</a:t>
-            </a:r>
-          </a:p>
-          <a:p>
-            <a:pPr>
-              <a:defRPr sz="1250" b="0"/>
-            </a:pPr>
-            <a:r>
-              <a:t>   – Bᵥ = the vehicle's shift length / remaining energy;  α = 0.3 / 0.7</a:t>
+              <a:t>• Bᵥ = the vehicle's shift length / remaining energy;  α = 0.3 / 0.7</a:t>
             </a:r>
           </a:p>
           <a:p>
@@ -6721,7 +6719,7 @@
           <a:p>
             <a:r>
               <a:rPr lang="en-US" altLang="zh-CN" sz="2800" dirty="0"/>
-              <a:t>Why the weight had to go</a:t>
+              <a:t>Objective, before vs now</a:t>
             </a:r>
             <a:endParaRPr lang="zh-CN" altLang="en-US" sz="2800" dirty="0"/>
           </a:p>
@@ -6735,8 +6733,8 @@
         </p:nvSpPr>
         <p:spPr>
           <a:xfrm>
-            <a:off x="640080" y="1417320"/>
-            <a:ext cx="10881360" cy="914400"/>
+            <a:off x="685800" y="1417320"/>
+            <a:ext cx="5486400" cy="274320"/>
           </a:xfrm>
           <a:prstGeom prst="rect">
             <a:avLst/>
@@ -6749,59 +6747,463 @@
           </a:bodyPr>
           <a:lstStyle/>
           <a:p>
+            <a:pPr algn="l">
+              <a:defRPr sz="1200" b="1">
+                <a:solidFill>
+                  <a:srgbClr val="52514E"/>
+                </a:solidFill>
+              </a:defRPr>
+            </a:pPr>
+            <a:r>
+              <a:t>BEFORE — weight-controlled, one global horizon H</a:t>
+            </a:r>
+          </a:p>
+        </p:txBody>
+      </p:sp>
+      <p:pic>
+        <p:nvPicPr>
+          <p:cNvPr id="205" name="Picture 204" descr="eq_old.png"/>
+          <p:cNvPicPr>
+            <a:picLocks noChangeAspect="1"/>
+          </p:cNvPicPr>
+          <p:nvPr/>
+        </p:nvPicPr>
+        <p:blipFill>
+          <a:blip r:embed="rId2"/>
+          <a:stretch>
+            <a:fillRect/>
+          </a:stretch>
+        </p:blipFill>
+        <p:spPr>
+          <a:xfrm>
+            <a:off x="3212565" y="1783080"/>
+            <a:ext cx="5766564" cy="566928"/>
+          </a:xfrm>
+          <a:prstGeom prst="rect">
+            <a:avLst/>
+          </a:prstGeom>
+        </p:spPr>
+      </p:pic>
+      <p:sp>
+        <p:nvSpPr>
+          <p:cNvPr id="206" name="TextBox 205"/>
+          <p:cNvSpPr txBox="1"/>
+          <p:nvPr/>
+        </p:nvSpPr>
+        <p:spPr>
+          <a:xfrm>
+            <a:off x="685800" y="2606040"/>
+            <a:ext cx="7315200" cy="274320"/>
+          </a:xfrm>
+          <a:prstGeom prst="rect">
+            <a:avLst/>
+          </a:prstGeom>
+          <a:noFill/>
+        </p:spPr>
+        <p:txBody>
+          <a:bodyPr wrap="square">
+            <a:spAutoFit/>
+          </a:bodyPr>
+          <a:lstStyle/>
+          <a:p>
+            <a:pPr algn="l">
+              <a:defRPr sz="1200" b="1">
+                <a:solidFill>
+                  <a:srgbClr val="EB6834"/>
+                </a:solidFill>
+              </a:defRPr>
+            </a:pPr>
+            <a:r>
+              <a:t>NOW — budget-controlled, per-vehicle deadline (objective terms unchanged)</a:t>
+            </a:r>
+          </a:p>
+        </p:txBody>
+      </p:sp>
+      <p:pic>
+        <p:nvPicPr>
+          <p:cNvPr id="207" name="Picture 206" descr="eq_new.png"/>
+          <p:cNvPicPr>
+            <a:picLocks noChangeAspect="1"/>
+          </p:cNvPicPr>
+          <p:nvPr/>
+        </p:nvPicPr>
+        <p:blipFill>
+          <a:blip r:embed="rId3"/>
+          <a:stretch>
+            <a:fillRect/>
+          </a:stretch>
+        </p:blipFill>
+        <p:spPr>
+          <a:xfrm>
+            <a:off x="2926611" y="2971800"/>
+            <a:ext cx="6338472" cy="658368"/>
+          </a:xfrm>
+          <a:prstGeom prst="rect">
+            <a:avLst/>
+          </a:prstGeom>
+        </p:spPr>
+      </p:pic>
+      <p:graphicFrame>
+        <p:nvGraphicFramePr>
+          <p:cNvPr id="208" name="Table 207"/>
+          <p:cNvGraphicFramePr>
+            <a:graphicFrameLocks noGrp="1"/>
+          </p:cNvGraphicFramePr>
+          <p:nvPr/>
+        </p:nvGraphicFramePr>
+        <p:xfrm>
+          <a:off x="1234440" y="4069080"/>
+          <a:ext cx="9692640" cy="1920240"/>
+        </p:xfrm>
+        <a:graphic>
+          <a:graphicData uri="http://schemas.openxmlformats.org/drawingml/2006/table">
+            <a:tbl>
+              <a:tblPr bandRow="1">
+                <a:tableStyleId>{5C22544A-7EE6-4342-B048-85BDC9FD1C3A}</a:tableStyleId>
+              </a:tblPr>
+              <a:tblGrid>
+                <a:gridCol w="2377440"/>
+                <a:gridCol w="3657600"/>
+                <a:gridCol w="3657600"/>
+              </a:tblGrid>
+              <a:tr h="384048">
+                <a:tc>
+                  <a:txBody>
+                    <a:bodyPr/>
+                    <a:lstStyle/>
+                    <a:p>
+                      <a:pPr>
+                        <a:defRPr sz="950" b="1">
+                          <a:solidFill>
+                            <a:srgbClr val="0B0B0B"/>
+                          </a:solidFill>
+                        </a:defRPr>
+                      </a:pPr>
+                      <a:r>
+                        <a:t>what changed</a:t>
+                      </a:r>
+                    </a:p>
+                  </a:txBody>
+                  <a:tcPr marL="45720" marR="45720" marT="13716" marB="13716" anchor="ctr">
+                    <a:solidFill>
+                      <a:srgbClr val="F2F4F7"/>
+                    </a:solidFill>
+                  </a:tcPr>
+                </a:tc>
+                <a:tc>
+                  <a:txBody>
+                    <a:bodyPr/>
+                    <a:lstStyle/>
+                    <a:p>
+                      <a:pPr algn="ctr">
+                        <a:defRPr sz="950" b="1">
+                          <a:solidFill>
+                            <a:srgbClr val="0B0B0B"/>
+                          </a:solidFill>
+                        </a:defRPr>
+                      </a:pPr>
+                      <a:r>
+                        <a:t>before</a:t>
+                      </a:r>
+                    </a:p>
+                  </a:txBody>
+                  <a:tcPr marL="45720" marR="45720" marT="13716" marB="13716" anchor="ctr">
+                    <a:solidFill>
+                      <a:srgbClr val="F2F4F7"/>
+                    </a:solidFill>
+                  </a:tcPr>
+                </a:tc>
+                <a:tc>
+                  <a:txBody>
+                    <a:bodyPr/>
+                    <a:lstStyle/>
+                    <a:p>
+                      <a:pPr algn="ctr">
+                        <a:defRPr sz="950" b="1">
+                          <a:solidFill>
+                            <a:srgbClr val="0B0B0B"/>
+                          </a:solidFill>
+                        </a:defRPr>
+                      </a:pPr>
+                      <a:r>
+                        <a:t>now</a:t>
+                      </a:r>
+                    </a:p>
+                  </a:txBody>
+                  <a:tcPr marL="45720" marR="45720" marT="13716" marB="13716" anchor="ctr">
+                    <a:solidFill>
+                      <a:srgbClr val="F2F4F7"/>
+                    </a:solidFill>
+                  </a:tcPr>
+                </a:tc>
+              </a:tr>
+              <a:tr h="384048">
+                <a:tc>
+                  <a:txBody>
+                    <a:bodyPr/>
+                    <a:lstStyle/>
+                    <a:p>
+                      <a:pPr>
+                        <a:defRPr sz="900" b="0">
+                          <a:solidFill>
+                            <a:srgbClr val="0B0B0B"/>
+                          </a:solidFill>
+                        </a:defRPr>
+                      </a:pPr>
+                      <a:r>
+                        <a:t>control variable</a:t>
+                      </a:r>
+                    </a:p>
+                  </a:txBody>
+                  <a:tcPr marL="45720" marR="45720" marT="13716" marB="13716" anchor="ctr"/>
+                </a:tc>
+                <a:tc>
+                  <a:txBody>
+                    <a:bodyPr/>
+                    <a:lstStyle/>
+                    <a:p>
+                      <a:pPr algn="ctr">
+                        <a:defRPr sz="900" b="0">
+                          <a:solidFill>
+                            <a:srgbClr val="0B0B0B"/>
+                          </a:solidFill>
+                        </a:defRPr>
+                      </a:pPr>
+                      <a:r>
+                        <a:t>weight α₂ (a preference)</a:t>
+                      </a:r>
+                    </a:p>
+                  </a:txBody>
+                  <a:tcPr marL="45720" marR="45720" marT="13716" marB="13716" anchor="ctr"/>
+                </a:tc>
+                <a:tc>
+                  <a:txBody>
+                    <a:bodyPr/>
+                    <a:lstStyle/>
+                    <a:p>
+                      <a:pPr algn="ctr">
+                        <a:defRPr sz="900" b="1">
+                          <a:solidFill>
+                            <a:srgbClr val="0B0B0B"/>
+                          </a:solidFill>
+                        </a:defRPr>
+                      </a:pPr>
+                      <a:r>
+                        <a:t>per-vehicle budget Bᵥ (a physical resource)</a:t>
+                      </a:r>
+                    </a:p>
+                  </a:txBody>
+                  <a:tcPr marL="45720" marR="45720" marT="13716" marB="13716" anchor="ctr"/>
+                </a:tc>
+              </a:tr>
+              <a:tr h="384048">
+                <a:tc>
+                  <a:txBody>
+                    <a:bodyPr/>
+                    <a:lstStyle/>
+                    <a:p>
+                      <a:pPr>
+                        <a:defRPr sz="900" b="0">
+                          <a:solidFill>
+                            <a:srgbClr val="0B0B0B"/>
+                          </a:solidFill>
+                        </a:defRPr>
+                      </a:pPr>
+                      <a:r>
+                        <a:t>hard constraint</a:t>
+                      </a:r>
+                    </a:p>
+                  </a:txBody>
+                  <a:tcPr marL="45720" marR="45720" marT="13716" marB="13716" anchor="ctr"/>
+                </a:tc>
+                <a:tc>
+                  <a:txBody>
+                    <a:bodyPr/>
+                    <a:lstStyle/>
+                    <a:p>
+                      <a:pPr algn="ctr">
+                        <a:defRPr sz="900" b="0">
+                          <a:solidFill>
+                            <a:srgbClr val="0B0B0B"/>
+                          </a:solidFill>
+                        </a:defRPr>
+                      </a:pPr>
+                      <a:r>
+                        <a:t>arrive by the global horizon H</a:t>
+                      </a:r>
+                    </a:p>
+                  </a:txBody>
+                  <a:tcPr marL="45720" marR="45720" marT="13716" marB="13716" anchor="ctr"/>
+                </a:tc>
+                <a:tc>
+                  <a:txBody>
+                    <a:bodyPr/>
+                    <a:lstStyle/>
+                    <a:p>
+                      <a:pPr algn="ctr">
+                        <a:defRPr sz="900" b="1">
+                          <a:solidFill>
+                            <a:srgbClr val="0B0B0B"/>
+                          </a:solidFill>
+                        </a:defRPr>
+                      </a:pPr>
+                      <a:r>
+                        <a:t>arrive by own deadline t₀ᵥ + Bᵥ</a:t>
+                      </a:r>
+                    </a:p>
+                  </a:txBody>
+                  <a:tcPr marL="45720" marR="45720" marT="13716" marB="13716" anchor="ctr"/>
+                </a:tc>
+              </a:tr>
+              <a:tr h="384048">
+                <a:tc>
+                  <a:txBody>
+                    <a:bodyPr/>
+                    <a:lstStyle/>
+                    <a:p>
+                      <a:pPr>
+                        <a:defRPr sz="900" b="0">
+                          <a:solidFill>
+                            <a:srgbClr val="0B0B0B"/>
+                          </a:solidFill>
+                        </a:defRPr>
+                      </a:pPr>
+                      <a:r>
+                        <a:t>normaliser</a:t>
+                      </a:r>
+                    </a:p>
+                  </a:txBody>
+                  <a:tcPr marL="45720" marR="45720" marT="13716" marB="13716" anchor="ctr"/>
+                </a:tc>
+                <a:tc>
+                  <a:txBody>
+                    <a:bodyPr/>
+                    <a:lstStyle/>
+                    <a:p>
+                      <a:pPr algn="ctr">
+                        <a:defRPr sz="900" b="0">
+                          <a:solidFill>
+                            <a:srgbClr val="0B0B0B"/>
+                          </a:solidFill>
+                        </a:defRPr>
+                      </a:pPr>
+                      <a:r>
+                        <a:t>V · H  (fleet × horizon)</a:t>
+                      </a:r>
+                    </a:p>
+                  </a:txBody>
+                  <a:tcPr marL="45720" marR="45720" marT="13716" marB="13716" anchor="ctr"/>
+                </a:tc>
+                <a:tc>
+                  <a:txBody>
+                    <a:bodyPr/>
+                    <a:lstStyle/>
+                    <a:p>
+                      <a:pPr algn="ctr">
+                        <a:defRPr sz="900" b="0">
+                          <a:solidFill>
+                            <a:srgbClr val="0B0B0B"/>
+                          </a:solidFill>
+                        </a:defRPr>
+                      </a:pPr>
+                      <a:r>
+                        <a:t>Σᵥ Bᵥ  (available driving time); cov ≤ cost ≤ Σᵥ Bᵥ keeps both terms in (0,1]</a:t>
+                      </a:r>
+                    </a:p>
+                  </a:txBody>
+                  <a:tcPr marL="45720" marR="45720" marT="13716" marB="13716" anchor="ctr"/>
+                </a:tc>
+              </a:tr>
+              <a:tr h="384048">
+                <a:tc>
+                  <a:txBody>
+                    <a:bodyPr/>
+                    <a:lstStyle/>
+                    <a:p>
+                      <a:pPr>
+                        <a:defRPr sz="900" b="0">
+                          <a:solidFill>
+                            <a:srgbClr val="0B0B0B"/>
+                          </a:solidFill>
+                        </a:defRPr>
+                      </a:pPr>
+                      <a:r>
+                        <a:t>solution response</a:t>
+                      </a:r>
+                    </a:p>
+                  </a:txBody>
+                  <a:tcPr marL="45720" marR="45720" marT="13716" marB="13716" anchor="ctr"/>
+                </a:tc>
+                <a:tc>
+                  <a:txBody>
+                    <a:bodyPr/>
+                    <a:lstStyle/>
+                    <a:p>
+                      <a:pPr algn="ctr">
+                        <a:defRPr sz="900" b="0">
+                          <a:solidFill>
+                            <a:srgbClr val="0B0B0B"/>
+                          </a:solidFill>
+                        </a:defRPr>
+                      </a:pPr>
+                      <a:r>
+                        <a:t>step function of α₂ (next 3 slides)</a:t>
+                      </a:r>
+                    </a:p>
+                  </a:txBody>
+                  <a:tcPr marL="45720" marR="45720" marT="13716" marB="13716" anchor="ctr"/>
+                </a:tc>
+                <a:tc>
+                  <a:txBody>
+                    <a:bodyPr/>
+                    <a:lstStyle/>
+                    <a:p>
+                      <a:pPr algn="ctr">
+                        <a:defRPr sz="900" b="1">
+                          <a:solidFill>
+                            <a:srgbClr val="0B0B0B"/>
+                          </a:solidFill>
+                        </a:defRPr>
+                      </a:pPr>
+                      <a:r>
+                        <a:t>monotone in Bᵥ — a usable dial</a:t>
+                      </a:r>
+                    </a:p>
+                  </a:txBody>
+                  <a:tcPr marL="45720" marR="45720" marT="13716" marB="13716" anchor="ctr"/>
+                </a:tc>
+              </a:tr>
+            </a:tbl>
+          </a:graphicData>
+        </a:graphic>
+      </p:graphicFrame>
+      <p:sp>
+        <p:nvSpPr>
+          <p:cNvPr id="209" name="TextBox 208"/>
+          <p:cNvSpPr txBox="1"/>
+          <p:nvPr/>
+        </p:nvSpPr>
+        <p:spPr>
+          <a:xfrm>
+            <a:off x="1874519" y="6144768"/>
+            <a:ext cx="9784080" cy="914400"/>
+          </a:xfrm>
+          <a:prstGeom prst="rect">
+            <a:avLst/>
+          </a:prstGeom>
+          <a:noFill/>
+        </p:spPr>
+        <p:txBody>
+          <a:bodyPr wrap="square">
+            <a:spAutoFit/>
+          </a:bodyPr>
+          <a:lstStyle/>
+          <a:p>
             <a:pPr>
-              <a:defRPr sz="1400" b="0"/>
+              <a:defRPr sz="1150" b="0"/>
             </a:pPr>
             <a:r>
-              <a:t>• The previous objective controlled the cost/coverage trade-off with the weight α₂ and capped every vehicle at the global horizon H:   min [ α₁·Σcost − α₂·Σy ] / (V·H)</a:t>
-            </a:r>
-          </a:p>
-          <a:p>
-            <a:pPr>
-              <a:defRPr sz="1400" b="0"/>
-            </a:pPr>
-            <a:r>
-              <a:t>• Both terms were correctly normalised — verified in (0,1] before α, max exactly 1.000 across the whole label set. Scaling was NOT the problem</a:t>
-            </a:r>
-          </a:p>
-          <a:p>
-            <a:pPr>
-              <a:defRPr sz="1400" b="1"/>
-            </a:pPr>
-            <a:r>
-              <a:t>• The problem is structural. One extra step through a fresh cell costs ΔC = 1 and buys ΔK ≤ 1, so the two terms are marginally 1:1 coupled:</a:t>
-            </a:r>
-          </a:p>
-          <a:p>
-            <a:pPr>
-              <a:defRPr sz="1400" b="1"/>
-            </a:pPr>
-            <a:r>
-              <a:t>        Δobj = (α₁ − α₂) / (V·H)        →  the sign flips at α₂/α₁ = 1, independent of any normaliser</a:t>
-            </a:r>
-          </a:p>
-          <a:p>
-            <a:pPr>
-              <a:defRPr sz="1400" b="0"/>
-            </a:pPr>
-            <a:r>
-              <a:t>• α₂ &gt; α₁ ⇒ EVERY detour is profitable ⇒ the optimum roams until the horizon stops it. α₂ &lt; α₁ ⇒ no detour is ever bought (coverage survives only as a tie-break)</a:t>
-            </a:r>
-          </a:p>
-          <a:p>
-            <a:pPr>
-              <a:defRPr sz="1400" b="1"/>
-            </a:pPr>
-            <a:r>
-              <a:t>• So the quantity that actually limited coverage was the HORIZON, not α. α selected one of two regimes; it could not set a position between them</a:t>
-            </a:r>
-          </a:p>
-          <a:p>
-            <a:pPr>
-              <a:defRPr sz="1400" b="0"/>
-            </a:pPr>
-            <a:r>
-              <a:t>• That matters for learning: conditioning a neural solver on α would teach it a switch, not a continuous semantics</a:t>
+              <a:t>• Verified reduction: at Bᵥ ≥ H the new MILP returns the old one's solution link-for-link — a strict generalisation, not a different problem</a:t>
             </a:r>
           </a:p>
         </p:txBody>
@@ -6815,6 +7217,633 @@
 </file>
 
 <file path=ppt/slides/slide16.xml><?xml version="1.0" encoding="utf-8"?>
+<p:sld xmlns:a="http://schemas.openxmlformats.org/drawingml/2006/main" xmlns:p="http://schemas.openxmlformats.org/presentationml/2006/main" xmlns:r="http://schemas.openxmlformats.org/officeDocument/2006/relationships">
+  <p:cSld>
+    <p:spTree>
+      <p:nvGrpSpPr>
+        <p:cNvPr id="1" name=""/>
+        <p:cNvGrpSpPr/>
+        <p:nvPr/>
+      </p:nvGrpSpPr>
+      <p:grpSpPr/>
+      <p:sp>
+        <p:nvSpPr>
+          <p:cNvPr id="7" name="文本占位符 6">
+            <a:extLst>
+              <a:ext uri="{FF2B5EF4-FFF2-40B4-BE49-F238E27FC236}">
+                <a16:creationId xmlns:a16="http://schemas.microsoft.com/office/drawing/2014/main" id="{33AE8DB3-4C29-0DE3-EB73-8D2BBFBB8CBF}"/>
+              </a:ext>
+            </a:extLst>
+          </p:cNvPr>
+          <p:cNvSpPr>
+            <a:spLocks noGrp="1"/>
+          </p:cNvSpPr>
+          <p:nvPr>
+            <p:ph type="body" sz="quarter" idx="11"/>
+          </p:nvPr>
+        </p:nvSpPr>
+        <p:spPr>
+          <a:xfrm>
+            <a:off x="336550" y="58738"/>
+            <a:ext cx="5759450" cy="622300"/>
+          </a:xfrm>
+        </p:spPr>
+        <p:txBody>
+          <a:bodyPr/>
+          <a:lstStyle/>
+          <a:p>
+            <a:r>
+              <a:rPr lang="en-US" altLang="zh-CN" dirty="0"/>
+              <a:t>Change (a) — objective</a:t>
+            </a:r>
+            <a:endParaRPr lang="zh-CN" altLang="en-US" dirty="0"/>
+          </a:p>
+        </p:txBody>
+      </p:sp>
+      <p:sp>
+        <p:nvSpPr>
+          <p:cNvPr id="203" name="文本占位符 5">
+            <a:extLst>
+              <a:ext uri="{FF2B5EF4-FFF2-40B4-BE49-F238E27FC236}">
+                <a16:creationId xmlns:a16="http://schemas.microsoft.com/office/drawing/2014/main" id="{A219F0BA-71F5-BA11-CCBD-9327897B98CC}"/>
+              </a:ext>
+            </a:extLst>
+          </p:cNvPr>
+          <p:cNvSpPr>
+            <a:spLocks noGrp="1"/>
+          </p:cNvSpPr>
+          <p:nvPr>
+            <p:ph type="body" sz="quarter" idx="10"/>
+          </p:nvPr>
+        </p:nvSpPr>
+        <p:spPr>
+          <a:xfrm>
+            <a:off x="0" y="820290"/>
+            <a:ext cx="5878224" cy="638175"/>
+          </a:xfrm>
+        </p:spPr>
+        <p:txBody>
+          <a:bodyPr/>
+          <a:lstStyle/>
+          <a:p>
+            <a:r>
+              <a:rPr lang="en-US" altLang="zh-CN" sz="2800" dirty="0"/>
+              <a:t>Why α is a switch — proof I</a:t>
+            </a:r>
+            <a:endParaRPr lang="zh-CN" altLang="en-US" sz="2800" dirty="0"/>
+          </a:p>
+        </p:txBody>
+      </p:sp>
+      <p:sp>
+        <p:nvSpPr>
+          <p:cNvPr id="204" name="TextBox 203"/>
+          <p:cNvSpPr txBox="1"/>
+          <p:nvPr/>
+        </p:nvSpPr>
+        <p:spPr>
+          <a:xfrm>
+            <a:off x="685800" y="1371600"/>
+            <a:ext cx="10789920" cy="274320"/>
+          </a:xfrm>
+          <a:prstGeom prst="rect">
+            <a:avLst/>
+          </a:prstGeom>
+          <a:noFill/>
+        </p:spPr>
+        <p:txBody>
+          <a:bodyPr wrap="square">
+            <a:spAutoFit/>
+          </a:bodyPr>
+          <a:lstStyle/>
+          <a:p>
+            <a:pPr algn="l">
+              <a:defRPr sz="1250" b="0">
+                <a:solidFill>
+                  <a:srgbClr val="52514E"/>
+                </a:solidFill>
+              </a:defRPr>
+            </a:pPr>
+            <a:r>
+              <a:t>Setup.  For a fixed instance (network, δ, tasks, deadlines), a feasible solution R = (R₁ … R_V):</a:t>
+            </a:r>
+          </a:p>
+        </p:txBody>
+      </p:sp>
+      <p:pic>
+        <p:nvPicPr>
+          <p:cNvPr id="205" name="Picture 204" descr="eq_def.png"/>
+          <p:cNvPicPr>
+            <a:picLocks noChangeAspect="1"/>
+          </p:cNvPicPr>
+          <p:nvPr/>
+        </p:nvPicPr>
+        <p:blipFill>
+          <a:blip r:embed="rId2"/>
+          <a:stretch>
+            <a:fillRect/>
+          </a:stretch>
+        </p:blipFill>
+        <p:spPr>
+          <a:xfrm>
+            <a:off x="2021866" y="1737360"/>
+            <a:ext cx="8147962" cy="475488"/>
+          </a:xfrm>
+          <a:prstGeom prst="rect">
+            <a:avLst/>
+          </a:prstGeom>
+        </p:spPr>
+      </p:pic>
+      <p:sp>
+        <p:nvSpPr>
+          <p:cNvPr id="206" name="TextBox 205"/>
+          <p:cNvSpPr txBox="1"/>
+          <p:nvPr/>
+        </p:nvSpPr>
+        <p:spPr>
+          <a:xfrm>
+            <a:off x="685800" y="2395728"/>
+            <a:ext cx="10789920" cy="274320"/>
+          </a:xfrm>
+          <a:prstGeom prst="rect">
+            <a:avLst/>
+          </a:prstGeom>
+          <a:noFill/>
+        </p:spPr>
+        <p:txBody>
+          <a:bodyPr wrap="square">
+            <a:spAutoFit/>
+          </a:bodyPr>
+          <a:lstStyle/>
+          <a:p>
+            <a:pPr algn="l">
+              <a:defRPr sz="1250" b="0">
+                <a:solidFill>
+                  <a:srgbClr val="52514E"/>
+                </a:solidFill>
+              </a:defRPr>
+            </a:pPr>
+            <a:r>
+              <a:t>Lemma (cell accounting).  Each time-step of travel occupies exactly one (link, time) cell, and the union counts every cell once. Hence</a:t>
+            </a:r>
+          </a:p>
+        </p:txBody>
+      </p:sp>
+      <p:pic>
+        <p:nvPicPr>
+          <p:cNvPr id="207" name="Picture 206" descr="eq_lemma.png"/>
+          <p:cNvPicPr>
+            <a:picLocks noChangeAspect="1"/>
+          </p:cNvPicPr>
+          <p:nvPr/>
+        </p:nvPicPr>
+        <p:blipFill>
+          <a:blip r:embed="rId3"/>
+          <a:stretch>
+            <a:fillRect/>
+          </a:stretch>
+        </p:blipFill>
+        <p:spPr>
+          <a:xfrm>
+            <a:off x="2085289" y="2798064"/>
+            <a:ext cx="8021117" cy="310896"/>
+          </a:xfrm>
+          <a:prstGeom prst="rect">
+            <a:avLst/>
+          </a:prstGeom>
+        </p:spPr>
+      </p:pic>
+      <p:sp>
+        <p:nvSpPr>
+          <p:cNvPr id="208" name="TextBox 207"/>
+          <p:cNvSpPr txBox="1"/>
+          <p:nvPr/>
+        </p:nvSpPr>
+        <p:spPr>
+          <a:xfrm>
+            <a:off x="685800" y="3246120"/>
+            <a:ext cx="10789920" cy="274320"/>
+          </a:xfrm>
+          <a:prstGeom prst="rect">
+            <a:avLst/>
+          </a:prstGeom>
+          <a:noFill/>
+        </p:spPr>
+        <p:txBody>
+          <a:bodyPr wrap="square">
+            <a:spAutoFit/>
+          </a:bodyPr>
+          <a:lstStyle/>
+          <a:p>
+            <a:pPr algn="l">
+              <a:defRPr sz="1100" b="0">
+                <a:solidFill>
+                  <a:srgbClr val="52514E"/>
+                </a:solidFill>
+              </a:defRPr>
+            </a:pPr>
+            <a:r>
+              <a:t>Measured on all 10 780 optimal labels: median K/C = 0.999; K = C exactly (zero overlap) in 84–93 % per shard — the zero-overlap regime is the TYPICAL one, not a corner case.</a:t>
+            </a:r>
+          </a:p>
+        </p:txBody>
+      </p:sp>
+      <p:sp>
+        <p:nvSpPr>
+          <p:cNvPr id="209" name="TextBox 208"/>
+          <p:cNvSpPr txBox="1"/>
+          <p:nvPr/>
+        </p:nvSpPr>
+        <p:spPr>
+          <a:xfrm>
+            <a:off x="685800" y="3931920"/>
+            <a:ext cx="10789920" cy="274320"/>
+          </a:xfrm>
+          <a:prstGeom prst="rect">
+            <a:avLst/>
+          </a:prstGeom>
+          <a:noFill/>
+        </p:spPr>
+        <p:txBody>
+          <a:bodyPr wrap="square">
+            <a:spAutoFit/>
+          </a:bodyPr>
+          <a:lstStyle/>
+          <a:p>
+            <a:pPr algn="l">
+              <a:defRPr sz="1250" b="1">
+                <a:solidFill>
+                  <a:srgbClr val="52514E"/>
+                </a:solidFill>
+              </a:defRPr>
+            </a:pPr>
+            <a:r>
+              <a:t>Theorem (collapse in the zero-overlap regime).  If K(R) = C(R) for the instance's candidate solutions, the objective degenerates to a single scalar multiple of total travel:</a:t>
+            </a:r>
+          </a:p>
+        </p:txBody>
+      </p:sp>
+      <p:pic>
+        <p:nvPicPr>
+          <p:cNvPr id="210" name="Picture 209" descr="eq_collapse.png"/>
+          <p:cNvPicPr>
+            <a:picLocks noChangeAspect="1"/>
+          </p:cNvPicPr>
+          <p:nvPr/>
+        </p:nvPicPr>
+        <p:blipFill>
+          <a:blip r:embed="rId4"/>
+          <a:stretch>
+            <a:fillRect/>
+          </a:stretch>
+        </p:blipFill>
+        <p:spPr>
+          <a:xfrm>
+            <a:off x="3673969" y="4462272"/>
+            <a:ext cx="4843756" cy="475488"/>
+          </a:xfrm>
+          <a:prstGeom prst="rect">
+            <a:avLst/>
+          </a:prstGeom>
+        </p:spPr>
+      </p:pic>
+      <p:sp>
+        <p:nvSpPr>
+          <p:cNvPr id="211" name="TextBox 210"/>
+          <p:cNvSpPr txBox="1"/>
+          <p:nvPr/>
+        </p:nvSpPr>
+        <p:spPr>
+          <a:xfrm>
+            <a:off x="640080" y="5166360"/>
+            <a:ext cx="10972800" cy="914400"/>
+          </a:xfrm>
+          <a:prstGeom prst="rect">
+            <a:avLst/>
+          </a:prstGeom>
+          <a:noFill/>
+        </p:spPr>
+        <p:txBody>
+          <a:bodyPr wrap="square">
+            <a:spAutoFit/>
+          </a:bodyPr>
+          <a:lstStyle/>
+          <a:p>
+            <a:pPr>
+              <a:defRPr sz="1200" b="1"/>
+            </a:pPr>
+            <a:r>
+              <a:t>• Minimising it therefore means:  α₂ &lt; α₁ → minimise C (min-time routes) ·  α₂ &gt; α₁ → MAXIMISE C (fill the budget) ·  α₂ = α₁ → every feasible solution ties (total degeneracy)</a:t>
+            </a:r>
+          </a:p>
+          <a:p>
+            <a:pPr>
+              <a:defRPr sz="1200" b="1"/>
+            </a:pPr>
+            <a:r>
+              <a:t>• The map  α₂ ↦ optimal-solution set  is a STEP function with its only jump at α₂/α₁ = 1. No value of α₂ selects anything between the two extremes — and this is independent of any normaliser N</a:t>
+            </a:r>
+          </a:p>
+          <a:p>
+            <a:pPr>
+              <a:defRPr sz="1200" b="0"/>
+            </a:pPr>
+            <a:r>
+              <a:t>• α's only residual role: for α₂ &lt; α₁ it breaks ties AMONG min-cost solutions (more coverage preferred at equal cost)</a:t>
+            </a:r>
+          </a:p>
+        </p:txBody>
+      </p:sp>
+    </p:spTree>
+  </p:cSld>
+  <p:clrMapOvr>
+    <a:masterClrMapping/>
+  </p:clrMapOvr>
+</p:sld>
+</file>
+
+<file path=ppt/slides/slide17.xml><?xml version="1.0" encoding="utf-8"?>
+<p:sld xmlns:a="http://schemas.openxmlformats.org/drawingml/2006/main" xmlns:p="http://schemas.openxmlformats.org/presentationml/2006/main" xmlns:r="http://schemas.openxmlformats.org/officeDocument/2006/relationships">
+  <p:cSld>
+    <p:spTree>
+      <p:nvGrpSpPr>
+        <p:cNvPr id="1" name=""/>
+        <p:cNvGrpSpPr/>
+        <p:nvPr/>
+      </p:nvGrpSpPr>
+      <p:grpSpPr/>
+      <p:sp>
+        <p:nvSpPr>
+          <p:cNvPr id="7" name="文本占位符 6">
+            <a:extLst>
+              <a:ext uri="{FF2B5EF4-FFF2-40B4-BE49-F238E27FC236}">
+                <a16:creationId xmlns:a16="http://schemas.microsoft.com/office/drawing/2014/main" id="{33AE8DB3-4C29-0DE3-EB73-8D2BBFBB8CBF}"/>
+              </a:ext>
+            </a:extLst>
+          </p:cNvPr>
+          <p:cNvSpPr>
+            <a:spLocks noGrp="1"/>
+          </p:cNvSpPr>
+          <p:nvPr>
+            <p:ph type="body" sz="quarter" idx="11"/>
+          </p:nvPr>
+        </p:nvSpPr>
+        <p:spPr>
+          <a:xfrm>
+            <a:off x="336550" y="58738"/>
+            <a:ext cx="5759450" cy="622300"/>
+          </a:xfrm>
+        </p:spPr>
+        <p:txBody>
+          <a:bodyPr/>
+          <a:lstStyle/>
+          <a:p>
+            <a:r>
+              <a:rPr lang="en-US" altLang="zh-CN" dirty="0"/>
+              <a:t>Change (a) — objective</a:t>
+            </a:r>
+            <a:endParaRPr lang="zh-CN" altLang="en-US" dirty="0"/>
+          </a:p>
+        </p:txBody>
+      </p:sp>
+      <p:sp>
+        <p:nvSpPr>
+          <p:cNvPr id="203" name="文本占位符 5">
+            <a:extLst>
+              <a:ext uri="{FF2B5EF4-FFF2-40B4-BE49-F238E27FC236}">
+                <a16:creationId xmlns:a16="http://schemas.microsoft.com/office/drawing/2014/main" id="{A219F0BA-71F5-BA11-CCBD-9327897B98CC}"/>
+              </a:ext>
+            </a:extLst>
+          </p:cNvPr>
+          <p:cNvSpPr>
+            <a:spLocks noGrp="1"/>
+          </p:cNvSpPr>
+          <p:nvPr>
+            <p:ph type="body" sz="quarter" idx="10"/>
+          </p:nvPr>
+        </p:nvSpPr>
+        <p:spPr>
+          <a:xfrm>
+            <a:off x="0" y="820290"/>
+            <a:ext cx="5878224" cy="638175"/>
+          </a:xfrm>
+        </p:spPr>
+        <p:txBody>
+          <a:bodyPr/>
+          <a:lstStyle/>
+          <a:p>
+            <a:r>
+              <a:rPr lang="en-US" altLang="zh-CN" sz="2800" dirty="0"/>
+              <a:t>Why α is a switch — proof II</a:t>
+            </a:r>
+            <a:endParaRPr lang="zh-CN" altLang="en-US" sz="2800" dirty="0"/>
+          </a:p>
+        </p:txBody>
+      </p:sp>
+      <p:sp>
+        <p:nvSpPr>
+          <p:cNvPr id="204" name="TextBox 203"/>
+          <p:cNvSpPr txBox="1"/>
+          <p:nvPr/>
+        </p:nvSpPr>
+        <p:spPr>
+          <a:xfrm>
+            <a:off x="685800" y="1371600"/>
+            <a:ext cx="10789920" cy="274320"/>
+          </a:xfrm>
+          <a:prstGeom prst="rect">
+            <a:avLst/>
+          </a:prstGeom>
+          <a:noFill/>
+        </p:spPr>
+        <p:txBody>
+          <a:bodyPr wrap="square">
+            <a:spAutoFit/>
+          </a:bodyPr>
+          <a:lstStyle/>
+          <a:p>
+            <a:pPr algn="l">
+              <a:defRPr sz="1250" b="0">
+                <a:solidFill>
+                  <a:srgbClr val="52514E"/>
+                </a:solidFill>
+              </a:defRPr>
+            </a:pPr>
+            <a:r>
+              <a:t>Proposition A (the cost regime is robust).  Let C* = min feasible cost and K₀ = best coverage among min-cost solutions. Using K ≤ C:</a:t>
+            </a:r>
+          </a:p>
+        </p:txBody>
+      </p:sp>
+      <p:pic>
+        <p:nvPicPr>
+          <p:cNvPr id="205" name="Picture 204" descr="eq_prop1.png"/>
+          <p:cNvPicPr>
+            <a:picLocks noChangeAspect="1"/>
+          </p:cNvPicPr>
+          <p:nvPr/>
+        </p:nvPicPr>
+        <p:blipFill>
+          <a:blip r:embed="rId2"/>
+          <a:stretch>
+            <a:fillRect/>
+          </a:stretch>
+        </p:blipFill>
+        <p:spPr>
+          <a:xfrm>
+            <a:off x="3434499" y="1773936"/>
+            <a:ext cx="5322696" cy="475488"/>
+          </a:xfrm>
+          <a:prstGeom prst="rect">
+            <a:avLst/>
+          </a:prstGeom>
+        </p:spPr>
+      </p:pic>
+      <p:sp>
+        <p:nvSpPr>
+          <p:cNvPr id="206" name="TextBox 205"/>
+          <p:cNvSpPr txBox="1"/>
+          <p:nvPr/>
+        </p:nvSpPr>
+        <p:spPr>
+          <a:xfrm>
+            <a:off x="640080" y="2395728"/>
+            <a:ext cx="10972800" cy="914400"/>
+          </a:xfrm>
+          <a:prstGeom prst="rect">
+            <a:avLst/>
+          </a:prstGeom>
+          <a:noFill/>
+        </p:spPr>
+        <p:txBody>
+          <a:bodyPr wrap="square">
+            <a:spAutoFit/>
+          </a:bodyPr>
+          <a:lstStyle/>
+          <a:p>
+            <a:pPr>
+              <a:defRPr sz="1150" b="0"/>
+            </a:pPr>
+            <a:r>
+              <a:t>• Proof: f(R) ≥ (α₁−α₂)C(R)/N for every R, while the best min-cost solution attains (α₁C* − α₂K₀)/N; compare. If a min-cost solution has zero overlap (K₀ = C*), the threshold is 0: EVERY optimum is min-cost — overlap only shifts the switch point, it cannot create interior positions</a:t>
+            </a:r>
+          </a:p>
+        </p:txBody>
+      </p:sp>
+      <p:sp>
+        <p:nvSpPr>
+          <p:cNvPr id="207" name="TextBox 206"/>
+          <p:cNvSpPr txBox="1"/>
+          <p:nvPr/>
+        </p:nvSpPr>
+        <p:spPr>
+          <a:xfrm>
+            <a:off x="685800" y="3127248"/>
+            <a:ext cx="10789920" cy="274320"/>
+          </a:xfrm>
+          <a:prstGeom prst="rect">
+            <a:avLst/>
+          </a:prstGeom>
+          <a:noFill/>
+        </p:spPr>
+        <p:txBody>
+          <a:bodyPr wrap="square">
+            <a:spAutoFit/>
+          </a:bodyPr>
+          <a:lstStyle/>
+          <a:p>
+            <a:pPr algn="l">
+              <a:defRPr sz="1250" b="0">
+                <a:solidFill>
+                  <a:srgbClr val="52514E"/>
+                </a:solidFill>
+              </a:defRPr>
+            </a:pPr>
+            <a:r>
+              <a:t>Proposition B (the roam regime saturates the budget).  A deadline-feasible detour of length k with ΔK fresh cells changes the objective by</a:t>
+            </a:r>
+          </a:p>
+        </p:txBody>
+      </p:sp>
+      <p:pic>
+        <p:nvPicPr>
+          <p:cNvPr id="208" name="Picture 207" descr="eq_prop2.png"/>
+          <p:cNvPicPr>
+            <a:picLocks noChangeAspect="1"/>
+          </p:cNvPicPr>
+          <p:nvPr/>
+        </p:nvPicPr>
+        <p:blipFill>
+          <a:blip r:embed="rId3"/>
+          <a:stretch>
+            <a:fillRect/>
+          </a:stretch>
+        </p:blipFill>
+        <p:spPr>
+          <a:xfrm>
+            <a:off x="3765974" y="3529584"/>
+            <a:ext cx="4659745" cy="457200"/>
+          </a:xfrm>
+          <a:prstGeom prst="rect">
+            <a:avLst/>
+          </a:prstGeom>
+        </p:spPr>
+      </p:pic>
+      <p:sp>
+        <p:nvSpPr>
+          <p:cNvPr id="209" name="TextBox 208"/>
+          <p:cNvSpPr txBox="1"/>
+          <p:nvPr/>
+        </p:nvSpPr>
+        <p:spPr>
+          <a:xfrm>
+            <a:off x="640080" y="4133087"/>
+            <a:ext cx="10972800" cy="914400"/>
+          </a:xfrm>
+          <a:prstGeom prst="rect">
+            <a:avLst/>
+          </a:prstGeom>
+          <a:noFill/>
+        </p:spPr>
+        <p:txBody>
+          <a:bodyPr wrap="square">
+            <a:spAutoFit/>
+          </a:bodyPr>
+          <a:lstStyle/>
+          <a:p>
+            <a:pPr>
+              <a:defRPr sz="1200" b="0"/>
+            </a:pPr>
+            <a:r>
+              <a:t>• For α₂ &gt; α₁ every FULLY-fresh detour (ΔK = k) strictly improves — so at any optimum, no vehicle can still afford one: budgets bind. The threshold ΔK/k &gt; α₁/α₂ also explains why solutions barely move across α₂ ∈ [0.52, 0.90] in the zero-overlap regime</a:t>
+            </a:r>
+          </a:p>
+          <a:p>
+            <a:pPr>
+              <a:defRPr sz="1200" b="1"/>
+            </a:pPr>
+            <a:r>
+              <a:t>• Conclusion: α selects one of two regimes; the quantity that positions a solution INSIDE the roam regime is the budget. C*(B) grows monotonically in bounded increments as B grows — a graded, learnable response</a:t>
+            </a:r>
+          </a:p>
+          <a:p>
+            <a:pPr>
+              <a:defRPr sz="1200" b="0"/>
+            </a:pPr>
+            <a:r>
+              <a:t>• That is change (a): keep α fixed (0.3/0.7, roam regime), move the control to the constraint — the per-vehicle budget Bᵥ. Next slide: both claims measured on one instance</a:t>
+            </a:r>
+          </a:p>
+        </p:txBody>
+      </p:sp>
+    </p:spTree>
+  </p:cSld>
+  <p:clrMapOvr>
+    <a:masterClrMapping/>
+  </p:clrMapOvr>
+</p:sld>
+</file>
+
+<file path=ppt/slides/slide18.xml><?xml version="1.0" encoding="utf-8"?>
 <p:sld xmlns:a="http://schemas.openxmlformats.org/drawingml/2006/main" xmlns:p="http://schemas.openxmlformats.org/presentationml/2006/main" xmlns:r="http://schemas.openxmlformats.org/officeDocument/2006/relationships">
   <p:cSld>
     <p:spTree>
@@ -6955,304 +7984,6 @@
 </p:sld>
 </file>
 
-<file path=ppt/slides/slide17.xml><?xml version="1.0" encoding="utf-8"?>
-<p:sld xmlns:a="http://schemas.openxmlformats.org/drawingml/2006/main" xmlns:p="http://schemas.openxmlformats.org/presentationml/2006/main" xmlns:r="http://schemas.openxmlformats.org/officeDocument/2006/relationships">
-  <p:cSld>
-    <p:spTree>
-      <p:nvGrpSpPr>
-        <p:cNvPr id="1" name=""/>
-        <p:cNvGrpSpPr/>
-        <p:nvPr/>
-      </p:nvGrpSpPr>
-      <p:grpSpPr/>
-      <p:sp>
-        <p:nvSpPr>
-          <p:cNvPr id="7" name="文本占位符 6">
-            <a:extLst>
-              <a:ext uri="{FF2B5EF4-FFF2-40B4-BE49-F238E27FC236}">
-                <a16:creationId xmlns:a16="http://schemas.microsoft.com/office/drawing/2014/main" id="{33AE8DB3-4C29-0DE3-EB73-8D2BBFBB8CBF}"/>
-              </a:ext>
-            </a:extLst>
-          </p:cNvPr>
-          <p:cNvSpPr>
-            <a:spLocks noGrp="1"/>
-          </p:cNvSpPr>
-          <p:nvPr>
-            <p:ph type="body" sz="quarter" idx="11"/>
-          </p:nvPr>
-        </p:nvSpPr>
-        <p:spPr>
-          <a:xfrm>
-            <a:off x="336550" y="58738"/>
-            <a:ext cx="5759450" cy="622300"/>
-          </a:xfrm>
-        </p:spPr>
-        <p:txBody>
-          <a:bodyPr/>
-          <a:lstStyle/>
-          <a:p>
-            <a:r>
-              <a:rPr lang="en-US" altLang="zh-CN" dirty="0"/>
-              <a:t>Change (a) — objective</a:t>
-            </a:r>
-            <a:endParaRPr lang="zh-CN" altLang="en-US" dirty="0"/>
-          </a:p>
-        </p:txBody>
-      </p:sp>
-      <p:sp>
-        <p:nvSpPr>
-          <p:cNvPr id="203" name="文本占位符 5">
-            <a:extLst>
-              <a:ext uri="{FF2B5EF4-FFF2-40B4-BE49-F238E27FC236}">
-                <a16:creationId xmlns:a16="http://schemas.microsoft.com/office/drawing/2014/main" id="{A219F0BA-71F5-BA11-CCBD-9327897B98CC}"/>
-              </a:ext>
-            </a:extLst>
-          </p:cNvPr>
-          <p:cNvSpPr>
-            <a:spLocks noGrp="1"/>
-          </p:cNvSpPr>
-          <p:nvPr>
-            <p:ph type="body" sz="quarter" idx="10"/>
-          </p:nvPr>
-        </p:nvSpPr>
-        <p:spPr>
-          <a:xfrm>
-            <a:off x="0" y="820290"/>
-            <a:ext cx="5878224" cy="638175"/>
-          </a:xfrm>
-        </p:spPr>
-        <p:txBody>
-          <a:bodyPr/>
-          <a:lstStyle/>
-          <a:p>
-            <a:r>
-              <a:rPr lang="en-US" altLang="zh-CN" sz="2800" dirty="0"/>
-              <a:t>The per-vehicle budget</a:t>
-            </a:r>
-            <a:endParaRPr lang="zh-CN" altLang="en-US" sz="2800" dirty="0"/>
-          </a:p>
-        </p:txBody>
-      </p:sp>
-      <p:sp>
-        <p:nvSpPr>
-          <p:cNvPr id="204" name="TextBox 203"/>
-          <p:cNvSpPr txBox="1"/>
-          <p:nvPr/>
-        </p:nvSpPr>
-        <p:spPr>
-          <a:xfrm>
-            <a:off x="640080" y="1463040"/>
-            <a:ext cx="10881360" cy="914400"/>
-          </a:xfrm>
-          <a:prstGeom prst="rect">
-            <a:avLst/>
-          </a:prstGeom>
-          <a:noFill/>
-        </p:spPr>
-        <p:txBody>
-          <a:bodyPr wrap="square">
-            <a:spAutoFit/>
-          </a:bodyPr>
-          <a:lstStyle/>
-          <a:p>
-            <a:pPr>
-              <a:defRPr sz="1350" b="1"/>
-            </a:pPr>
-            <a:r>
-              <a:t>• The control moves from a preference weight to a PHYSICAL constraint: each vehicle carries its own budget Bᵥ (shift length / remaining energy) and a hard deadline t₀ᵥ + Bᵥ</a:t>
-            </a:r>
-          </a:p>
-          <a:p>
-            <a:pPr>
-              <a:defRPr sz="1350" b="0"/>
-            </a:pPr>
-            <a:r>
-              <a:t>• Parameterised as a SLACK RATIO:  Bᵥ = ⌈ρᵥ · τᵐⁱⁿ(oᵥ, dᵥ, t₀ᵥ)⌉, where τᵐⁱⁿ is the earliest possible arrival. An absolute budget is not comparable across ODs — vacuous for near pairs, infeasible for far ones; ρ is comparable, and ρ is what the model is conditioned on</a:t>
-            </a:r>
-          </a:p>
-          <a:p>
-            <a:pPr>
-              <a:defRPr sz="1350" b="0"/>
-            </a:pPr>
-            <a:r>
-              <a:t>• Normaliser V·H → Σᵥ Bᵥ, the fleet's actually available driving time. The chain cov ≤ cost ≤ Σᵥ Bᵥ still holds, so both terms remain in (0,1] before α</a:t>
-            </a:r>
-          </a:p>
-          <a:p>
-            <a:pPr>
-              <a:defRPr sz="1350" b="0"/>
-            </a:pPr>
-            <a:r>
-              <a:t>• MILP changes: commodity key (o,d,t₀) → (o,d,t₀,B); the time-expanded DAG is pruned at min(H, t₀+B); the coverage grid stays on [0,H). Every solve asserts flow-decomposed objective ≡ Gurobi ObjVal and re-validates each deadline</a:t>
-            </a:r>
-          </a:p>
-          <a:p>
-            <a:pPr>
-              <a:defRPr sz="1350" b="1"/>
-            </a:pPr>
-            <a:r>
-              <a:t>• Verified: at Bᵥ ≥ H the budget MILP returns the full-horizon solution link-for-link — a strict generalisation, not a different problem</a:t>
-            </a:r>
-          </a:p>
-          <a:p>
-            <a:pPr>
-              <a:defRPr sz="1350" b="0"/>
-            </a:pPr>
-            <a:r>
-              <a:t>• Side effect worth having: tight budgets prune the DAG, so labelling runs ~30× faster (0.90 s mean per case) — which is what makes the label set below affordable</a:t>
-            </a:r>
-          </a:p>
-        </p:txBody>
-      </p:sp>
-    </p:spTree>
-  </p:cSld>
-  <p:clrMapOvr>
-    <a:masterClrMapping/>
-  </p:clrMapOvr>
-</p:sld>
-</file>
-
-<file path=ppt/slides/slide18.xml><?xml version="1.0" encoding="utf-8"?>
-<p:sld xmlns:a="http://schemas.openxmlformats.org/drawingml/2006/main" xmlns:p="http://schemas.openxmlformats.org/presentationml/2006/main" xmlns:r="http://schemas.openxmlformats.org/officeDocument/2006/relationships">
-  <p:cSld>
-    <p:spTree>
-      <p:nvGrpSpPr>
-        <p:cNvPr id="1" name=""/>
-        <p:cNvGrpSpPr/>
-        <p:nvPr/>
-      </p:nvGrpSpPr>
-      <p:grpSpPr/>
-      <p:sp>
-        <p:nvSpPr>
-          <p:cNvPr id="7" name="文本占位符 6">
-            <a:extLst>
-              <a:ext uri="{FF2B5EF4-FFF2-40B4-BE49-F238E27FC236}">
-                <a16:creationId xmlns:a16="http://schemas.microsoft.com/office/drawing/2014/main" id="{33AE8DB3-4C29-0DE3-EB73-8D2BBFBB8CBF}"/>
-              </a:ext>
-            </a:extLst>
-          </p:cNvPr>
-          <p:cNvSpPr>
-            <a:spLocks noGrp="1"/>
-          </p:cNvSpPr>
-          <p:nvPr>
-            <p:ph type="body" sz="quarter" idx="11"/>
-          </p:nvPr>
-        </p:nvSpPr>
-        <p:spPr>
-          <a:xfrm>
-            <a:off x="336550" y="58738"/>
-            <a:ext cx="5759450" cy="622300"/>
-          </a:xfrm>
-        </p:spPr>
-        <p:txBody>
-          <a:bodyPr/>
-          <a:lstStyle/>
-          <a:p>
-            <a:r>
-              <a:rPr lang="en-US" altLang="zh-CN" dirty="0"/>
-              <a:t>Method</a:t>
-            </a:r>
-            <a:endParaRPr lang="zh-CN" altLang="en-US" dirty="0"/>
-          </a:p>
-        </p:txBody>
-      </p:sp>
-      <p:sp>
-        <p:nvSpPr>
-          <p:cNvPr id="203" name="文本占位符 5">
-            <a:extLst>
-              <a:ext uri="{FF2B5EF4-FFF2-40B4-BE49-F238E27FC236}">
-                <a16:creationId xmlns:a16="http://schemas.microsoft.com/office/drawing/2014/main" id="{A219F0BA-71F5-BA11-CCBD-9327897B98CC}"/>
-              </a:ext>
-            </a:extLst>
-          </p:cNvPr>
-          <p:cNvSpPr>
-            <a:spLocks noGrp="1"/>
-          </p:cNvSpPr>
-          <p:nvPr>
-            <p:ph type="body" sz="quarter" idx="10"/>
-          </p:nvPr>
-        </p:nvSpPr>
-        <p:spPr>
-          <a:xfrm>
-            <a:off x="0" y="820290"/>
-            <a:ext cx="5878224" cy="638175"/>
-          </a:xfrm>
-        </p:spPr>
-        <p:txBody>
-          <a:bodyPr/>
-          <a:lstStyle/>
-          <a:p>
-            <a:r>
-              <a:rPr lang="en-US" altLang="zh-CN" sz="2800" dirty="0"/>
-              <a:t>Pipeline</a:t>
-            </a:r>
-            <a:endParaRPr lang="zh-CN" altLang="en-US" sz="2800" dirty="0"/>
-          </a:p>
-        </p:txBody>
-      </p:sp>
-      <p:pic>
-        <p:nvPicPr>
-          <p:cNvPr id="204" name="Picture 203" descr="figM1_pipeline.png"/>
-          <p:cNvPicPr>
-            <a:picLocks noChangeAspect="1"/>
-          </p:cNvPicPr>
-          <p:nvPr/>
-        </p:nvPicPr>
-        <p:blipFill>
-          <a:blip r:embed="rId2"/>
-          <a:stretch>
-            <a:fillRect/>
-          </a:stretch>
-        </p:blipFill>
-        <p:spPr>
-          <a:xfrm>
-            <a:off x="1295247" y="1417320"/>
-            <a:ext cx="9601200" cy="4047995"/>
-          </a:xfrm>
-          <a:prstGeom prst="rect">
-            <a:avLst/>
-          </a:prstGeom>
-        </p:spPr>
-      </p:pic>
-      <p:sp>
-        <p:nvSpPr>
-          <p:cNvPr id="205" name="TextBox 204"/>
-          <p:cNvSpPr txBox="1"/>
-          <p:nvPr/>
-        </p:nvSpPr>
-        <p:spPr>
-          <a:xfrm>
-            <a:off x="640080" y="5556754"/>
-            <a:ext cx="10881360" cy="914400"/>
-          </a:xfrm>
-          <a:prstGeom prst="rect">
-            <a:avLst/>
-          </a:prstGeom>
-          <a:noFill/>
-        </p:spPr>
-        <p:txBody>
-          <a:bodyPr wrap="square">
-            <a:spAutoFit/>
-          </a:bodyPr>
-          <a:lstStyle/>
-          <a:p>
-            <a:pPr>
-              <a:defRPr sz="1250" b="0"/>
-            </a:pPr>
-            <a:r>
-              <a:t>• Gurobi is the only source of solutions and the only benchmark; it runs OFFLINE. At deployment the model emits a full fleet plan in 6–9 ms with no solver call</a:t>
-            </a:r>
-          </a:p>
-        </p:txBody>
-      </p:sp>
-    </p:spTree>
-  </p:cSld>
-  <p:clrMapOvr>
-    <a:masterClrMapping/>
-  </p:clrMapOvr>
-</p:sld>
-</file>
-
 <file path=ppt/slides/slide19.xml><?xml version="1.0" encoding="utf-8"?>
 <p:sld xmlns:a="http://schemas.openxmlformats.org/drawingml/2006/main" xmlns:p="http://schemas.openxmlformats.org/presentationml/2006/main" xmlns:r="http://schemas.openxmlformats.org/officeDocument/2006/relationships">
   <p:cSld>
@@ -7291,7 +8022,7 @@
           <a:p>
             <a:r>
               <a:rPr lang="en-US" altLang="zh-CN" dirty="0"/>
-              <a:t>Change (b) — model</a:t>
+              <a:t>Change (a) — objective</a:t>
             </a:r>
             <a:endParaRPr lang="zh-CN" altLang="en-US" dirty="0"/>
           </a:p>
@@ -7325,15 +8056,50 @@
           <a:p>
             <a:r>
               <a:rPr lang="en-US" altLang="zh-CN" sz="2800" dirty="0"/>
-              <a:t>Architecture</a:t>
+              <a:t>How Bᵥ is set</a:t>
             </a:r>
             <a:endParaRPr lang="zh-CN" altLang="en-US" sz="2800" dirty="0"/>
+          </a:p>
+        </p:txBody>
+      </p:sp>
+      <p:sp>
+        <p:nvSpPr>
+          <p:cNvPr id="204" name="TextBox 203"/>
+          <p:cNvSpPr txBox="1"/>
+          <p:nvPr/>
+        </p:nvSpPr>
+        <p:spPr>
+          <a:xfrm>
+            <a:off x="685800" y="1371600"/>
+            <a:ext cx="10789920" cy="274320"/>
+          </a:xfrm>
+          <a:prstGeom prst="rect">
+            <a:avLst/>
+          </a:prstGeom>
+          <a:noFill/>
+        </p:spPr>
+        <p:txBody>
+          <a:bodyPr wrap="square">
+            <a:spAutoFit/>
+          </a:bodyPr>
+          <a:lstStyle/>
+          <a:p>
+            <a:pPr algn="l">
+              <a:defRPr sz="1250" b="1">
+                <a:solidFill>
+                  <a:srgbClr val="52514E"/>
+                </a:solidFill>
+              </a:defRPr>
+            </a:pPr>
+            <a:r>
+              <a:t>Bᵥ is NOT a fixed constant — it is derived per vehicle, per instance, from a slack ratio ρᵥ:</a:t>
+            </a:r>
           </a:p>
         </p:txBody>
       </p:sp>
       <p:pic>
         <p:nvPicPr>
-          <p:cNvPr id="204" name="Picture 203" descr="figM2_architecture.png"/>
+          <p:cNvPr id="205" name="Picture 204" descr="eq_budget.png"/>
           <p:cNvPicPr>
             <a:picLocks noChangeAspect="1"/>
           </p:cNvPicPr>
@@ -7347,8 +8113,32 @@
         </p:blipFill>
         <p:spPr>
           <a:xfrm>
-            <a:off x="1843887" y="1353312"/>
-            <a:ext cx="8503920" cy="4050742"/>
+            <a:off x="3618865" y="1737360"/>
+            <a:ext cx="4953965" cy="365760"/>
+          </a:xfrm>
+          <a:prstGeom prst="rect">
+            <a:avLst/>
+          </a:prstGeom>
+        </p:spPr>
+      </p:pic>
+      <p:pic>
+        <p:nvPicPr>
+          <p:cNvPr id="206" name="Picture 205" descr="eq_taumin.png"/>
+          <p:cNvPicPr>
+            <a:picLocks noChangeAspect="1"/>
+          </p:cNvPicPr>
+          <p:nvPr/>
+        </p:nvPicPr>
+        <p:blipFill>
+          <a:blip r:embed="rId3"/>
+          <a:stretch>
+            <a:fillRect/>
+          </a:stretch>
+        </p:blipFill>
+        <p:spPr>
+          <a:xfrm>
+            <a:off x="1918544" y="2212848"/>
+            <a:ext cx="8354607" cy="329184"/>
           </a:xfrm>
           <a:prstGeom prst="rect">
             <a:avLst/>
@@ -7357,14 +8147,14 @@
       </p:pic>
       <p:sp>
         <p:nvSpPr>
-          <p:cNvPr id="205" name="TextBox 204"/>
+          <p:cNvPr id="207" name="TextBox 206"/>
           <p:cNvSpPr txBox="1"/>
           <p:nvPr/>
         </p:nvSpPr>
         <p:spPr>
           <a:xfrm>
-            <a:off x="640080" y="5495494"/>
-            <a:ext cx="10881360" cy="914400"/>
+            <a:off x="640080" y="2724912"/>
+            <a:ext cx="10972800" cy="914400"/>
           </a:xfrm>
           <a:prstGeom prst="rect">
             <a:avLst/>
@@ -7381,7 +8171,47 @@
               <a:defRPr sz="1250" b="0"/>
             </a:pPr>
             <a:r>
-              <a:t>• Encoder runs once per case; the decoder writes the WHOLE fleet as one token sequence, so later vehicles attend to the routes already committed by earlier ones</a:t>
+              <a:t>• Step 1 — draw the slack ratio ρᵥ.  Training farm: per vehicle from the anchors {1.0, 1.5, 2.0, 3.0}; in 35 % of fleets all vehicles share one ρ (homogeneous), in 65 % each vehicle draws its own (heterogeneous). At TEST time ρ is arbitrary — including values never seen in training ({1.25, 1.75} interpolation, 4.0 extrapolation)</a:t>
+            </a:r>
+          </a:p>
+          <a:p>
+            <a:pPr>
+              <a:defRPr sz="1250" b="0"/>
+            </a:pPr>
+            <a:r>
+              <a:t>• Step 2 — compute the feasibility floor τᵐⁱⁿᵥ.  Earliest arrival o→d departing at t₀ under THIS instance's congestion δ (time-dependent Dijkstra) — instance-specific, not a table lookup</a:t>
+            </a:r>
+          </a:p>
+          <a:p>
+            <a:pPr>
+              <a:defRPr sz="1250" b="0"/>
+            </a:pPr>
+            <a:r>
+              <a:t>• Step 3 — Bᵥ = ⌈ρᵥ · τᵐⁱⁿᵥ⌉, floored at τᵐⁱⁿᵥ (a task is never born infeasible) and capped at H − t₀ᵥ (never beyond the coverage grid)</a:t>
+            </a:r>
+          </a:p>
+          <a:p>
+            <a:pPr>
+              <a:defRPr sz="1250" b="1"/>
+            </a:pPr>
+            <a:r>
+              <a:t>• Why a RATIO and not an absolute number: the same B = 100 is vacuous for a near OD (τᵐⁱⁿ = 14) and infeasible for a far one (τᵐⁱⁿ = 120). ρ is comparable across all ODs:  ρ = 1 ⇔ exactly the min-time trip;  ρ = 2 ⇔ twice the minimum time</a:t>
+            </a:r>
+          </a:p>
+          <a:p>
+            <a:pPr>
+              <a:defRPr sz="1250" b="0"/>
+            </a:pPr>
+            <a:r>
+              <a:t>• Worked example (the sweep instance, V = 3, τᵐⁱⁿ = [38, 120, 14]):  ρ = 1.5 for all ⇒  B = [57, 180, 21] — same slack semantics, very different absolute budgets</a:t>
+            </a:r>
+          </a:p>
+          <a:p>
+            <a:pPr>
+              <a:defRPr sz="1250" b="1"/>
+            </a:pPr>
+            <a:r>
+              <a:t>• Bᵥ then enters BOTH sides of the pipeline: the MILP constraint (labels) and the model input (conditioning) + the decoder feasibility mask</a:t>
             </a:r>
           </a:p>
         </p:txBody>
@@ -7541,7 +8371,7 @@
           <a:p>
             <a:r>
               <a:rPr lang="en-US" altLang="zh-CN" dirty="0"/>
-              <a:t>Change (b) — model</a:t>
+              <a:t>Literature</a:t>
             </a:r>
             <a:endParaRPr lang="zh-CN" altLang="en-US" dirty="0"/>
           </a:p>
@@ -7575,22 +8405,1820 @@
           <a:p>
             <a:r>
               <a:rPr lang="en-US" altLang="zh-CN" sz="2800" dirty="0"/>
-              <a:t>What changed, and why</a:t>
+              <a:t>Setting comparison</a:t>
             </a:r>
             <a:endParaRPr lang="zh-CN" altLang="en-US" sz="2800" dirty="0"/>
           </a:p>
         </p:txBody>
       </p:sp>
+      <p:graphicFrame>
+        <p:nvGraphicFramePr>
+          <p:cNvPr id="204" name="Table 203"/>
+          <p:cNvGraphicFramePr>
+            <a:graphicFrameLocks noGrp="1"/>
+          </p:cNvGraphicFramePr>
+          <p:nvPr/>
+        </p:nvGraphicFramePr>
+        <p:xfrm>
+          <a:off x="502920" y="1417320"/>
+          <a:ext cx="11201400" cy="4425696"/>
+        </p:xfrm>
+        <a:graphic>
+          <a:graphicData uri="http://schemas.openxmlformats.org/drawingml/2006/table">
+            <a:tbl>
+              <a:tblPr bandRow="1">
+                <a:tableStyleId>{5C22544A-7EE6-4342-B048-85BDC9FD1C3A}</a:tableStyleId>
+              </a:tblPr>
+              <a:tblGrid>
+                <a:gridCol w="2788920"/>
+                <a:gridCol w="1188720"/>
+                <a:gridCol w="1298448"/>
+                <a:gridCol w="1298448"/>
+                <a:gridCol w="1170432"/>
+                <a:gridCol w="1298448"/>
+                <a:gridCol w="1170432"/>
+                <a:gridCol w="987552"/>
+              </a:tblGrid>
+              <a:tr h="402336">
+                <a:tc>
+                  <a:txBody>
+                    <a:bodyPr/>
+                    <a:lstStyle/>
+                    <a:p>
+                      <a:pPr>
+                        <a:defRPr sz="880" b="1">
+                          <a:solidFill>
+                            <a:srgbClr val="0B0B0B"/>
+                          </a:solidFill>
+                        </a:defRPr>
+                      </a:pPr>
+                      <a:r>
+                        <a:t>work</a:t>
+                      </a:r>
+                    </a:p>
+                  </a:txBody>
+                  <a:tcPr marL="45720" marR="45720" marT="13716" marB="13716" anchor="ctr">
+                    <a:solidFill>
+                      <a:srgbClr val="F2F4F7"/>
+                    </a:solidFill>
+                  </a:tcPr>
+                </a:tc>
+                <a:tc>
+                  <a:txBody>
+                    <a:bodyPr/>
+                    <a:lstStyle/>
+                    <a:p>
+                      <a:pPr algn="ctr">
+                        <a:defRPr sz="880" b="1">
+                          <a:solidFill>
+                            <a:srgbClr val="0B0B0B"/>
+                          </a:solidFill>
+                        </a:defRPr>
+                      </a:pPr>
+                      <a:r>
+                        <a:t>selective</a:t>
+                      </a:r>
+                      <a:br/>
+                      <a:r>
+                        <a:t>(not visit-all)</a:t>
+                      </a:r>
+                    </a:p>
+                  </a:txBody>
+                  <a:tcPr marL="45720" marR="45720" marT="13716" marB="13716" anchor="ctr">
+                    <a:solidFill>
+                      <a:srgbClr val="F2F4F7"/>
+                    </a:solidFill>
+                  </a:tcPr>
+                </a:tc>
+                <a:tc>
+                  <a:txBody>
+                    <a:bodyPr/>
+                    <a:lstStyle/>
+                    <a:p>
+                      <a:pPr algn="ctr">
+                        <a:defRPr sz="880" b="1">
+                          <a:solidFill>
+                            <a:srgbClr val="0B0B0B"/>
+                          </a:solidFill>
+                        </a:defRPr>
+                      </a:pPr>
+                      <a:r>
+                        <a:t>per-vehicle</a:t>
+                      </a:r>
+                      <a:br/>
+                      <a:r>
+                        <a:t>(o,d,t₀,B)</a:t>
+                      </a:r>
+                    </a:p>
+                  </a:txBody>
+                  <a:tcPr marL="45720" marR="45720" marT="13716" marB="13716" anchor="ctr">
+                    <a:solidFill>
+                      <a:srgbClr val="F2F4F7"/>
+                    </a:solidFill>
+                  </a:tcPr>
+                </a:tc>
+                <a:tc>
+                  <a:txBody>
+                    <a:bodyPr/>
+                    <a:lstStyle/>
+                    <a:p>
+                      <a:pPr algn="ctr">
+                        <a:defRPr sz="880" b="1">
+                          <a:solidFill>
+                            <a:srgbClr val="0B0B0B"/>
+                          </a:solidFill>
+                        </a:defRPr>
+                      </a:pPr>
+                      <a:r>
+                        <a:t>arc-level fixed</a:t>
+                      </a:r>
+                      <a:br/>
+                      <a:r>
+                        <a:t>network</a:t>
+                      </a:r>
+                    </a:p>
+                  </a:txBody>
+                  <a:tcPr marL="45720" marR="45720" marT="13716" marB="13716" anchor="ctr">
+                    <a:solidFill>
+                      <a:srgbClr val="F2F4F7"/>
+                    </a:solidFill>
+                  </a:tcPr>
+                </a:tc>
+                <a:tc>
+                  <a:txBody>
+                    <a:bodyPr/>
+                    <a:lstStyle/>
+                    <a:p>
+                      <a:pPr algn="ctr">
+                        <a:defRPr sz="880" b="1">
+                          <a:solidFill>
+                            <a:srgbClr val="0B0B0B"/>
+                          </a:solidFill>
+                        </a:defRPr>
+                      </a:pPr>
+                      <a:r>
+                        <a:t>time-dep.</a:t>
+                      </a:r>
+                      <a:br/>
+                      <a:r>
+                        <a:t>travel</a:t>
+                      </a:r>
+                    </a:p>
+                  </a:txBody>
+                  <a:tcPr marL="45720" marR="45720" marT="13716" marB="13716" anchor="ctr">
+                    <a:solidFill>
+                      <a:srgbClr val="F2F4F7"/>
+                    </a:solidFill>
+                  </a:tcPr>
+                </a:tc>
+                <a:tc>
+                  <a:txBody>
+                    <a:bodyPr/>
+                    <a:lstStyle/>
+                    <a:p>
+                      <a:pPr algn="ctr">
+                        <a:defRPr sz="880" b="1">
+                          <a:solidFill>
+                            <a:srgbClr val="0B0B0B"/>
+                          </a:solidFill>
+                        </a:defRPr>
+                      </a:pPr>
+                      <a:r>
+                        <a:t>space–time</a:t>
+                      </a:r>
+                      <a:br/>
+                      <a:r>
+                        <a:t>coverage</a:t>
+                      </a:r>
+                    </a:p>
+                  </a:txBody>
+                  <a:tcPr marL="45720" marR="45720" marT="13716" marB="13716" anchor="ctr">
+                    <a:solidFill>
+                      <a:srgbClr val="F2F4F7"/>
+                    </a:solidFill>
+                  </a:tcPr>
+                </a:tc>
+                <a:tc>
+                  <a:txBody>
+                    <a:bodyPr/>
+                    <a:lstStyle/>
+                    <a:p>
+                      <a:pPr algn="ctr">
+                        <a:defRPr sz="880" b="1">
+                          <a:solidFill>
+                            <a:srgbClr val="0B0B0B"/>
+                          </a:solidFill>
+                        </a:defRPr>
+                      </a:pPr>
+                      <a:r>
+                        <a:t>learned</a:t>
+                      </a:r>
+                      <a:br/>
+                      <a:r>
+                        <a:t>amortised</a:t>
+                      </a:r>
+                    </a:p>
+                  </a:txBody>
+                  <a:tcPr marL="45720" marR="45720" marT="13716" marB="13716" anchor="ctr">
+                    <a:solidFill>
+                      <a:srgbClr val="F2F4F7"/>
+                    </a:solidFill>
+                  </a:tcPr>
+                </a:tc>
+                <a:tc>
+                  <a:txBody>
+                    <a:bodyPr/>
+                    <a:lstStyle/>
+                    <a:p>
+                      <a:pPr algn="ctr">
+                        <a:defRPr sz="880" b="1">
+                          <a:solidFill>
+                            <a:srgbClr val="0B0B0B"/>
+                          </a:solidFill>
+                        </a:defRPr>
+                      </a:pPr>
+                      <a:r>
+                        <a:t>budget</a:t>
+                      </a:r>
+                      <a:br/>
+                      <a:r>
+                        <a:t>0-shot</a:t>
+                      </a:r>
+                    </a:p>
+                  </a:txBody>
+                  <a:tcPr marL="45720" marR="45720" marT="13716" marB="13716" anchor="ctr">
+                    <a:solidFill>
+                      <a:srgbClr val="F2F4F7"/>
+                    </a:solidFill>
+                  </a:tcPr>
+                </a:tc>
+              </a:tr>
+              <a:tr h="402336">
+                <a:tc>
+                  <a:txBody>
+                    <a:bodyPr/>
+                    <a:lstStyle/>
+                    <a:p>
+                      <a:pPr>
+                        <a:defRPr sz="860" b="0">
+                          <a:solidFill>
+                            <a:srgbClr val="0B0B0B"/>
+                          </a:solidFill>
+                        </a:defRPr>
+                      </a:pPr>
+                      <a:r>
+                        <a:t>Kool AM '19 (OP)</a:t>
+                      </a:r>
+                    </a:p>
+                  </a:txBody>
+                  <a:tcPr marL="45720" marR="45720" marT="13716" marB="13716" anchor="ctr"/>
+                </a:tc>
+                <a:tc>
+                  <a:txBody>
+                    <a:bodyPr/>
+                    <a:lstStyle/>
+                    <a:p>
+                      <a:pPr algn="ctr">
+                        <a:defRPr sz="860" b="1">
+                          <a:solidFill>
+                            <a:srgbClr val="1BAF7A"/>
+                          </a:solidFill>
+                        </a:defRPr>
+                      </a:pPr>
+                      <a:r>
+                        <a:t>✓</a:t>
+                      </a:r>
+                    </a:p>
+                  </a:txBody>
+                  <a:tcPr marL="45720" marR="45720" marT="13716" marB="13716" anchor="ctr"/>
+                </a:tc>
+                <a:tc>
+                  <a:txBody>
+                    <a:bodyPr/>
+                    <a:lstStyle/>
+                    <a:p>
+                      <a:pPr algn="ctr">
+                        <a:defRPr sz="860" b="0">
+                          <a:solidFill>
+                            <a:srgbClr val="8A8880"/>
+                          </a:solidFill>
+                        </a:defRPr>
+                      </a:pPr>
+                      <a:r>
+                        <a:t>—</a:t>
+                      </a:r>
+                    </a:p>
+                  </a:txBody>
+                  <a:tcPr marL="45720" marR="45720" marT="13716" marB="13716" anchor="ctr"/>
+                </a:tc>
+                <a:tc>
+                  <a:txBody>
+                    <a:bodyPr/>
+                    <a:lstStyle/>
+                    <a:p>
+                      <a:pPr algn="ctr">
+                        <a:defRPr sz="860" b="0">
+                          <a:solidFill>
+                            <a:srgbClr val="8A8880"/>
+                          </a:solidFill>
+                        </a:defRPr>
+                      </a:pPr>
+                      <a:r>
+                        <a:t>—</a:t>
+                      </a:r>
+                    </a:p>
+                  </a:txBody>
+                  <a:tcPr marL="45720" marR="45720" marT="13716" marB="13716" anchor="ctr"/>
+                </a:tc>
+                <a:tc>
+                  <a:txBody>
+                    <a:bodyPr/>
+                    <a:lstStyle/>
+                    <a:p>
+                      <a:pPr algn="ctr">
+                        <a:defRPr sz="860" b="0">
+                          <a:solidFill>
+                            <a:srgbClr val="8A8880"/>
+                          </a:solidFill>
+                        </a:defRPr>
+                      </a:pPr>
+                      <a:r>
+                        <a:t>—</a:t>
+                      </a:r>
+                    </a:p>
+                  </a:txBody>
+                  <a:tcPr marL="45720" marR="45720" marT="13716" marB="13716" anchor="ctr"/>
+                </a:tc>
+                <a:tc>
+                  <a:txBody>
+                    <a:bodyPr/>
+                    <a:lstStyle/>
+                    <a:p>
+                      <a:pPr algn="ctr">
+                        <a:defRPr sz="860" b="0">
+                          <a:solidFill>
+                            <a:srgbClr val="8A8880"/>
+                          </a:solidFill>
+                        </a:defRPr>
+                      </a:pPr>
+                      <a:r>
+                        <a:t>—</a:t>
+                      </a:r>
+                    </a:p>
+                  </a:txBody>
+                  <a:tcPr marL="45720" marR="45720" marT="13716" marB="13716" anchor="ctr"/>
+                </a:tc>
+                <a:tc>
+                  <a:txBody>
+                    <a:bodyPr/>
+                    <a:lstStyle/>
+                    <a:p>
+                      <a:pPr algn="ctr">
+                        <a:defRPr sz="860" b="1">
+                          <a:solidFill>
+                            <a:srgbClr val="1BAF7A"/>
+                          </a:solidFill>
+                        </a:defRPr>
+                      </a:pPr>
+                      <a:r>
+                        <a:t>✓</a:t>
+                      </a:r>
+                    </a:p>
+                  </a:txBody>
+                  <a:tcPr marL="45720" marR="45720" marT="13716" marB="13716" anchor="ctr"/>
+                </a:tc>
+                <a:tc>
+                  <a:txBody>
+                    <a:bodyPr/>
+                    <a:lstStyle/>
+                    <a:p>
+                      <a:pPr algn="ctr">
+                        <a:defRPr sz="860" b="0">
+                          <a:solidFill>
+                            <a:srgbClr val="8A8880"/>
+                          </a:solidFill>
+                        </a:defRPr>
+                      </a:pPr>
+                      <a:r>
+                        <a:t>—</a:t>
+                      </a:r>
+                    </a:p>
+                  </a:txBody>
+                  <a:tcPr marL="45720" marR="45720" marT="13716" marB="13716" anchor="ctr"/>
+                </a:tc>
+              </a:tr>
+              <a:tr h="402336">
+                <a:tc>
+                  <a:txBody>
+                    <a:bodyPr/>
+                    <a:lstStyle/>
+                    <a:p>
+                      <a:pPr>
+                        <a:defRPr sz="860" b="0">
+                          <a:solidFill>
+                            <a:srgbClr val="0B0B0B"/>
+                          </a:solidFill>
+                        </a:defRPr>
+                      </a:pPr>
+                      <a:r>
+                        <a:t>TOP-Former '25 (TOP)</a:t>
+                      </a:r>
+                    </a:p>
+                  </a:txBody>
+                  <a:tcPr marL="45720" marR="45720" marT="13716" marB="13716" anchor="ctr"/>
+                </a:tc>
+                <a:tc>
+                  <a:txBody>
+                    <a:bodyPr/>
+                    <a:lstStyle/>
+                    <a:p>
+                      <a:pPr algn="ctr">
+                        <a:defRPr sz="860" b="1">
+                          <a:solidFill>
+                            <a:srgbClr val="1BAF7A"/>
+                          </a:solidFill>
+                        </a:defRPr>
+                      </a:pPr>
+                      <a:r>
+                        <a:t>✓</a:t>
+                      </a:r>
+                    </a:p>
+                  </a:txBody>
+                  <a:tcPr marL="45720" marR="45720" marT="13716" marB="13716" anchor="ctr"/>
+                </a:tc>
+                <a:tc>
+                  <a:txBody>
+                    <a:bodyPr/>
+                    <a:lstStyle/>
+                    <a:p>
+                      <a:pPr algn="ctr">
+                        <a:defRPr sz="860" b="0">
+                          <a:solidFill>
+                            <a:srgbClr val="52514E"/>
+                          </a:solidFill>
+                        </a:defRPr>
+                      </a:pPr>
+                      <a:r>
+                        <a:t>budget only,</a:t>
+                      </a:r>
+                      <a:br/>
+                      <a:r>
+                        <a:t>homog.</a:t>
+                      </a:r>
+                    </a:p>
+                  </a:txBody>
+                  <a:tcPr marL="45720" marR="45720" marT="13716" marB="13716" anchor="ctr"/>
+                </a:tc>
+                <a:tc>
+                  <a:txBody>
+                    <a:bodyPr/>
+                    <a:lstStyle/>
+                    <a:p>
+                      <a:pPr algn="ctr">
+                        <a:defRPr sz="860" b="0">
+                          <a:solidFill>
+                            <a:srgbClr val="8A8880"/>
+                          </a:solidFill>
+                        </a:defRPr>
+                      </a:pPr>
+                      <a:r>
+                        <a:t>—</a:t>
+                      </a:r>
+                    </a:p>
+                  </a:txBody>
+                  <a:tcPr marL="45720" marR="45720" marT="13716" marB="13716" anchor="ctr"/>
+                </a:tc>
+                <a:tc>
+                  <a:txBody>
+                    <a:bodyPr/>
+                    <a:lstStyle/>
+                    <a:p>
+                      <a:pPr algn="ctr">
+                        <a:defRPr sz="860" b="0">
+                          <a:solidFill>
+                            <a:srgbClr val="8A8880"/>
+                          </a:solidFill>
+                        </a:defRPr>
+                      </a:pPr>
+                      <a:r>
+                        <a:t>—</a:t>
+                      </a:r>
+                    </a:p>
+                  </a:txBody>
+                  <a:tcPr marL="45720" marR="45720" marT="13716" marB="13716" anchor="ctr"/>
+                </a:tc>
+                <a:tc>
+                  <a:txBody>
+                    <a:bodyPr/>
+                    <a:lstStyle/>
+                    <a:p>
+                      <a:pPr algn="ctr">
+                        <a:defRPr sz="860" b="0">
+                          <a:solidFill>
+                            <a:srgbClr val="8A8880"/>
+                          </a:solidFill>
+                        </a:defRPr>
+                      </a:pPr>
+                      <a:r>
+                        <a:t>—</a:t>
+                      </a:r>
+                    </a:p>
+                  </a:txBody>
+                  <a:tcPr marL="45720" marR="45720" marT="13716" marB="13716" anchor="ctr"/>
+                </a:tc>
+                <a:tc>
+                  <a:txBody>
+                    <a:bodyPr/>
+                    <a:lstStyle/>
+                    <a:p>
+                      <a:pPr algn="ctr">
+                        <a:defRPr sz="860" b="1">
+                          <a:solidFill>
+                            <a:srgbClr val="1BAF7A"/>
+                          </a:solidFill>
+                        </a:defRPr>
+                      </a:pPr>
+                      <a:r>
+                        <a:t>✓</a:t>
+                      </a:r>
+                    </a:p>
+                  </a:txBody>
+                  <a:tcPr marL="45720" marR="45720" marT="13716" marB="13716" anchor="ctr"/>
+                </a:tc>
+                <a:tc>
+                  <a:txBody>
+                    <a:bodyPr/>
+                    <a:lstStyle/>
+                    <a:p>
+                      <a:pPr algn="ctr">
+                        <a:defRPr sz="860" b="0">
+                          <a:solidFill>
+                            <a:srgbClr val="8A8880"/>
+                          </a:solidFill>
+                        </a:defRPr>
+                      </a:pPr>
+                      <a:r>
+                        <a:t>—</a:t>
+                      </a:r>
+                    </a:p>
+                  </a:txBody>
+                  <a:tcPr marL="45720" marR="45720" marT="13716" marB="13716" anchor="ctr"/>
+                </a:tc>
+              </a:tr>
+              <a:tr h="402336">
+                <a:tc>
+                  <a:txBody>
+                    <a:bodyPr/>
+                    <a:lstStyle/>
+                    <a:p>
+                      <a:pPr>
+                        <a:defRPr sz="860" b="0">
+                          <a:solidFill>
+                            <a:srgbClr val="0B0B0B"/>
+                          </a:solidFill>
+                        </a:defRPr>
+                      </a:pPr>
+                      <a:r>
+                        <a:t>UAS-MSTOP '23</a:t>
+                      </a:r>
+                    </a:p>
+                  </a:txBody>
+                  <a:tcPr marL="45720" marR="45720" marT="13716" marB="13716" anchor="ctr"/>
+                </a:tc>
+                <a:tc>
+                  <a:txBody>
+                    <a:bodyPr/>
+                    <a:lstStyle/>
+                    <a:p>
+                      <a:pPr algn="ctr">
+                        <a:defRPr sz="860" b="1">
+                          <a:solidFill>
+                            <a:srgbClr val="1BAF7A"/>
+                          </a:solidFill>
+                        </a:defRPr>
+                      </a:pPr>
+                      <a:r>
+                        <a:t>✓</a:t>
+                      </a:r>
+                    </a:p>
+                  </a:txBody>
+                  <a:tcPr marL="45720" marR="45720" marT="13716" marB="13716" anchor="ctr"/>
+                </a:tc>
+                <a:tc>
+                  <a:txBody>
+                    <a:bodyPr/>
+                    <a:lstStyle/>
+                    <a:p>
+                      <a:pPr algn="ctr">
+                        <a:defRPr sz="860" b="0">
+                          <a:solidFill>
+                            <a:srgbClr val="52514E"/>
+                          </a:solidFill>
+                        </a:defRPr>
+                      </a:pPr>
+                      <a:r>
+                        <a:t>start + fuel</a:t>
+                      </a:r>
+                    </a:p>
+                  </a:txBody>
+                  <a:tcPr marL="45720" marR="45720" marT="13716" marB="13716" anchor="ctr"/>
+                </a:tc>
+                <a:tc>
+                  <a:txBody>
+                    <a:bodyPr/>
+                    <a:lstStyle/>
+                    <a:p>
+                      <a:pPr algn="ctr">
+                        <a:defRPr sz="860" b="0">
+                          <a:solidFill>
+                            <a:srgbClr val="8A8880"/>
+                          </a:solidFill>
+                        </a:defRPr>
+                      </a:pPr>
+                      <a:r>
+                        <a:t>—</a:t>
+                      </a:r>
+                    </a:p>
+                  </a:txBody>
+                  <a:tcPr marL="45720" marR="45720" marT="13716" marB="13716" anchor="ctr"/>
+                </a:tc>
+                <a:tc>
+                  <a:txBody>
+                    <a:bodyPr/>
+                    <a:lstStyle/>
+                    <a:p>
+                      <a:pPr algn="ctr">
+                        <a:defRPr sz="860" b="0">
+                          <a:solidFill>
+                            <a:srgbClr val="8A8880"/>
+                          </a:solidFill>
+                        </a:defRPr>
+                      </a:pPr>
+                      <a:r>
+                        <a:t>—</a:t>
+                      </a:r>
+                    </a:p>
+                  </a:txBody>
+                  <a:tcPr marL="45720" marR="45720" marT="13716" marB="13716" anchor="ctr"/>
+                </a:tc>
+                <a:tc>
+                  <a:txBody>
+                    <a:bodyPr/>
+                    <a:lstStyle/>
+                    <a:p>
+                      <a:pPr algn="ctr">
+                        <a:defRPr sz="860" b="0">
+                          <a:solidFill>
+                            <a:srgbClr val="8A8880"/>
+                          </a:solidFill>
+                        </a:defRPr>
+                      </a:pPr>
+                      <a:r>
+                        <a:t>—</a:t>
+                      </a:r>
+                    </a:p>
+                  </a:txBody>
+                  <a:tcPr marL="45720" marR="45720" marT="13716" marB="13716" anchor="ctr"/>
+                </a:tc>
+                <a:tc>
+                  <a:txBody>
+                    <a:bodyPr/>
+                    <a:lstStyle/>
+                    <a:p>
+                      <a:pPr algn="ctr">
+                        <a:defRPr sz="860" b="1">
+                          <a:solidFill>
+                            <a:srgbClr val="1BAF7A"/>
+                          </a:solidFill>
+                        </a:defRPr>
+                      </a:pPr>
+                      <a:r>
+                        <a:t>✓</a:t>
+                      </a:r>
+                    </a:p>
+                  </a:txBody>
+                  <a:tcPr marL="45720" marR="45720" marT="13716" marB="13716" anchor="ctr"/>
+                </a:tc>
+                <a:tc>
+                  <a:txBody>
+                    <a:bodyPr/>
+                    <a:lstStyle/>
+                    <a:p>
+                      <a:pPr algn="ctr">
+                        <a:defRPr sz="860" b="0">
+                          <a:solidFill>
+                            <a:srgbClr val="8A8880"/>
+                          </a:solidFill>
+                        </a:defRPr>
+                      </a:pPr>
+                      <a:r>
+                        <a:t>—</a:t>
+                      </a:r>
+                    </a:p>
+                  </a:txBody>
+                  <a:tcPr marL="45720" marR="45720" marT="13716" marB="13716" anchor="ctr"/>
+                </a:tc>
+              </a:tr>
+              <a:tr h="402336">
+                <a:tc>
+                  <a:txBody>
+                    <a:bodyPr/>
+                    <a:lstStyle/>
+                    <a:p>
+                      <a:pPr>
+                        <a:defRPr sz="860" b="0">
+                          <a:solidFill>
+                            <a:srgbClr val="0B0B0B"/>
+                          </a:solidFill>
+                        </a:defRPr>
+                      </a:pPr>
+                      <a:r>
+                        <a:t>MTPOMO / MVMoE / RouteFinder</a:t>
+                      </a:r>
+                    </a:p>
+                  </a:txBody>
+                  <a:tcPr marL="45720" marR="45720" marT="13716" marB="13716" anchor="ctr"/>
+                </a:tc>
+                <a:tc>
+                  <a:txBody>
+                    <a:bodyPr/>
+                    <a:lstStyle/>
+                    <a:p>
+                      <a:pPr algn="ctr">
+                        <a:defRPr sz="860" b="0">
+                          <a:solidFill>
+                            <a:srgbClr val="8A8880"/>
+                          </a:solidFill>
+                        </a:defRPr>
+                      </a:pPr>
+                      <a:r>
+                        <a:t>—</a:t>
+                      </a:r>
+                    </a:p>
+                  </a:txBody>
+                  <a:tcPr marL="45720" marR="45720" marT="13716" marB="13716" anchor="ctr"/>
+                </a:tc>
+                <a:tc>
+                  <a:txBody>
+                    <a:bodyPr/>
+                    <a:lstStyle/>
+                    <a:p>
+                      <a:pPr algn="ctr">
+                        <a:defRPr sz="860" b="0">
+                          <a:solidFill>
+                            <a:srgbClr val="52514E"/>
+                          </a:solidFill>
+                        </a:defRPr>
+                      </a:pPr>
+                      <a:r>
+                        <a:t>L / O attrs</a:t>
+                      </a:r>
+                    </a:p>
+                  </a:txBody>
+                  <a:tcPr marL="45720" marR="45720" marT="13716" marB="13716" anchor="ctr"/>
+                </a:tc>
+                <a:tc>
+                  <a:txBody>
+                    <a:bodyPr/>
+                    <a:lstStyle/>
+                    <a:p>
+                      <a:pPr algn="ctr">
+                        <a:defRPr sz="860" b="0">
+                          <a:solidFill>
+                            <a:srgbClr val="8A8880"/>
+                          </a:solidFill>
+                        </a:defRPr>
+                      </a:pPr>
+                      <a:r>
+                        <a:t>—</a:t>
+                      </a:r>
+                    </a:p>
+                  </a:txBody>
+                  <a:tcPr marL="45720" marR="45720" marT="13716" marB="13716" anchor="ctr"/>
+                </a:tc>
+                <a:tc>
+                  <a:txBody>
+                    <a:bodyPr/>
+                    <a:lstStyle/>
+                    <a:p>
+                      <a:pPr algn="ctr">
+                        <a:defRPr sz="860" b="0">
+                          <a:solidFill>
+                            <a:srgbClr val="8A8880"/>
+                          </a:solidFill>
+                        </a:defRPr>
+                      </a:pPr>
+                      <a:r>
+                        <a:t>—</a:t>
+                      </a:r>
+                    </a:p>
+                  </a:txBody>
+                  <a:tcPr marL="45720" marR="45720" marT="13716" marB="13716" anchor="ctr"/>
+                </a:tc>
+                <a:tc>
+                  <a:txBody>
+                    <a:bodyPr/>
+                    <a:lstStyle/>
+                    <a:p>
+                      <a:pPr algn="ctr">
+                        <a:defRPr sz="860" b="0">
+                          <a:solidFill>
+                            <a:srgbClr val="8A8880"/>
+                          </a:solidFill>
+                        </a:defRPr>
+                      </a:pPr>
+                      <a:r>
+                        <a:t>—</a:t>
+                      </a:r>
+                    </a:p>
+                  </a:txBody>
+                  <a:tcPr marL="45720" marR="45720" marT="13716" marB="13716" anchor="ctr"/>
+                </a:tc>
+                <a:tc>
+                  <a:txBody>
+                    <a:bodyPr/>
+                    <a:lstStyle/>
+                    <a:p>
+                      <a:pPr algn="ctr">
+                        <a:defRPr sz="860" b="1">
+                          <a:solidFill>
+                            <a:srgbClr val="1BAF7A"/>
+                          </a:solidFill>
+                        </a:defRPr>
+                      </a:pPr>
+                      <a:r>
+                        <a:t>✓</a:t>
+                      </a:r>
+                    </a:p>
+                  </a:txBody>
+                  <a:tcPr marL="45720" marR="45720" marT="13716" marB="13716" anchor="ctr"/>
+                </a:tc>
+                <a:tc>
+                  <a:txBody>
+                    <a:bodyPr/>
+                    <a:lstStyle/>
+                    <a:p>
+                      <a:pPr algn="ctr">
+                        <a:defRPr sz="860" b="0">
+                          <a:solidFill>
+                            <a:srgbClr val="52514E"/>
+                          </a:solidFill>
+                        </a:defRPr>
+                      </a:pPr>
+                      <a:r>
+                        <a:t>variant-</a:t>
+                      </a:r>
+                      <a:br/>
+                      <a:r>
+                        <a:t>level</a:t>
+                      </a:r>
+                    </a:p>
+                  </a:txBody>
+                  <a:tcPr marL="45720" marR="45720" marT="13716" marB="13716" anchor="ctr"/>
+                </a:tc>
+              </a:tr>
+              <a:tr h="402336">
+                <a:tc>
+                  <a:txBody>
+                    <a:bodyPr/>
+                    <a:lstStyle/>
+                    <a:p>
+                      <a:pPr>
+                        <a:defRPr sz="860" b="0">
+                          <a:solidFill>
+                            <a:srgbClr val="0B0B0B"/>
+                          </a:solidFill>
+                        </a:defRPr>
+                      </a:pPr>
+                      <a:r>
+                        <a:t>GOAL '25 (incl. OP task)</a:t>
+                      </a:r>
+                    </a:p>
+                  </a:txBody>
+                  <a:tcPr marL="45720" marR="45720" marT="13716" marB="13716" anchor="ctr"/>
+                </a:tc>
+                <a:tc>
+                  <a:txBody>
+                    <a:bodyPr/>
+                    <a:lstStyle/>
+                    <a:p>
+                      <a:pPr algn="ctr">
+                        <a:defRPr sz="860" b="0">
+                          <a:solidFill>
+                            <a:srgbClr val="52514E"/>
+                          </a:solidFill>
+                        </a:defRPr>
+                      </a:pPr>
+                      <a:r>
+                        <a:t>part</a:t>
+                      </a:r>
+                    </a:p>
+                  </a:txBody>
+                  <a:tcPr marL="45720" marR="45720" marT="13716" marB="13716" anchor="ctr"/>
+                </a:tc>
+                <a:tc>
+                  <a:txBody>
+                    <a:bodyPr/>
+                    <a:lstStyle/>
+                    <a:p>
+                      <a:pPr algn="ctr">
+                        <a:defRPr sz="860" b="0">
+                          <a:solidFill>
+                            <a:srgbClr val="8A8880"/>
+                          </a:solidFill>
+                        </a:defRPr>
+                      </a:pPr>
+                      <a:r>
+                        <a:t>—</a:t>
+                      </a:r>
+                    </a:p>
+                  </a:txBody>
+                  <a:tcPr marL="45720" marR="45720" marT="13716" marB="13716" anchor="ctr"/>
+                </a:tc>
+                <a:tc>
+                  <a:txBody>
+                    <a:bodyPr/>
+                    <a:lstStyle/>
+                    <a:p>
+                      <a:pPr algn="ctr">
+                        <a:defRPr sz="860" b="0">
+                          <a:solidFill>
+                            <a:srgbClr val="8A8880"/>
+                          </a:solidFill>
+                        </a:defRPr>
+                      </a:pPr>
+                      <a:r>
+                        <a:t>—</a:t>
+                      </a:r>
+                    </a:p>
+                  </a:txBody>
+                  <a:tcPr marL="45720" marR="45720" marT="13716" marB="13716" anchor="ctr"/>
+                </a:tc>
+                <a:tc>
+                  <a:txBody>
+                    <a:bodyPr/>
+                    <a:lstStyle/>
+                    <a:p>
+                      <a:pPr algn="ctr">
+                        <a:defRPr sz="860" b="0">
+                          <a:solidFill>
+                            <a:srgbClr val="8A8880"/>
+                          </a:solidFill>
+                        </a:defRPr>
+                      </a:pPr>
+                      <a:r>
+                        <a:t>—</a:t>
+                      </a:r>
+                    </a:p>
+                  </a:txBody>
+                  <a:tcPr marL="45720" marR="45720" marT="13716" marB="13716" anchor="ctr"/>
+                </a:tc>
+                <a:tc>
+                  <a:txBody>
+                    <a:bodyPr/>
+                    <a:lstStyle/>
+                    <a:p>
+                      <a:pPr algn="ctr">
+                        <a:defRPr sz="860" b="0">
+                          <a:solidFill>
+                            <a:srgbClr val="8A8880"/>
+                          </a:solidFill>
+                        </a:defRPr>
+                      </a:pPr>
+                      <a:r>
+                        <a:t>—</a:t>
+                      </a:r>
+                    </a:p>
+                  </a:txBody>
+                  <a:tcPr marL="45720" marR="45720" marT="13716" marB="13716" anchor="ctr"/>
+                </a:tc>
+                <a:tc>
+                  <a:txBody>
+                    <a:bodyPr/>
+                    <a:lstStyle/>
+                    <a:p>
+                      <a:pPr algn="ctr">
+                        <a:defRPr sz="860" b="1">
+                          <a:solidFill>
+                            <a:srgbClr val="1BAF7A"/>
+                          </a:solidFill>
+                        </a:defRPr>
+                      </a:pPr>
+                      <a:r>
+                        <a:t>✓</a:t>
+                      </a:r>
+                    </a:p>
+                  </a:txBody>
+                  <a:tcPr marL="45720" marR="45720" marT="13716" marB="13716" anchor="ctr"/>
+                </a:tc>
+                <a:tc>
+                  <a:txBody>
+                    <a:bodyPr/>
+                    <a:lstStyle/>
+                    <a:p>
+                      <a:pPr algn="ctr">
+                        <a:defRPr sz="860" b="0">
+                          <a:solidFill>
+                            <a:srgbClr val="8A8880"/>
+                          </a:solidFill>
+                        </a:defRPr>
+                      </a:pPr>
+                      <a:r>
+                        <a:t>—</a:t>
+                      </a:r>
+                    </a:p>
+                  </a:txBody>
+                  <a:tcPr marL="45720" marR="45720" marT="13716" marB="13716" anchor="ctr"/>
+                </a:tc>
+              </a:tr>
+              <a:tr h="402336">
+                <a:tc>
+                  <a:txBody>
+                    <a:bodyPr/>
+                    <a:lstStyle/>
+                    <a:p>
+                      <a:pPr>
+                        <a:defRPr sz="860" b="0">
+                          <a:solidFill>
+                            <a:srgbClr val="0B0B0B"/>
+                          </a:solidFill>
+                        </a:defRPr>
+                      </a:pPr>
+                      <a:r>
+                        <a:t>FM-MCVRP '24 (fixed graph SL)</a:t>
+                      </a:r>
+                    </a:p>
+                  </a:txBody>
+                  <a:tcPr marL="45720" marR="45720" marT="13716" marB="13716" anchor="ctr"/>
+                </a:tc>
+                <a:tc>
+                  <a:txBody>
+                    <a:bodyPr/>
+                    <a:lstStyle/>
+                    <a:p>
+                      <a:pPr algn="ctr">
+                        <a:defRPr sz="860" b="0">
+                          <a:solidFill>
+                            <a:srgbClr val="8A8880"/>
+                          </a:solidFill>
+                        </a:defRPr>
+                      </a:pPr>
+                      <a:r>
+                        <a:t>—</a:t>
+                      </a:r>
+                    </a:p>
+                  </a:txBody>
+                  <a:tcPr marL="45720" marR="45720" marT="13716" marB="13716" anchor="ctr"/>
+                </a:tc>
+                <a:tc>
+                  <a:txBody>
+                    <a:bodyPr/>
+                    <a:lstStyle/>
+                    <a:p>
+                      <a:pPr algn="ctr">
+                        <a:defRPr sz="860" b="0">
+                          <a:solidFill>
+                            <a:srgbClr val="8A8880"/>
+                          </a:solidFill>
+                        </a:defRPr>
+                      </a:pPr>
+                      <a:r>
+                        <a:t>—</a:t>
+                      </a:r>
+                    </a:p>
+                  </a:txBody>
+                  <a:tcPr marL="45720" marR="45720" marT="13716" marB="13716" anchor="ctr"/>
+                </a:tc>
+                <a:tc>
+                  <a:txBody>
+                    <a:bodyPr/>
+                    <a:lstStyle/>
+                    <a:p>
+                      <a:pPr algn="ctr">
+                        <a:defRPr sz="860" b="0">
+                          <a:solidFill>
+                            <a:srgbClr val="52514E"/>
+                          </a:solidFill>
+                        </a:defRPr>
+                      </a:pPr>
+                      <a:r>
+                        <a:t>fixed graph,</a:t>
+                      </a:r>
+                      <a:br/>
+                      <a:r>
+                        <a:t>nodes</a:t>
+                      </a:r>
+                    </a:p>
+                  </a:txBody>
+                  <a:tcPr marL="45720" marR="45720" marT="13716" marB="13716" anchor="ctr"/>
+                </a:tc>
+                <a:tc>
+                  <a:txBody>
+                    <a:bodyPr/>
+                    <a:lstStyle/>
+                    <a:p>
+                      <a:pPr algn="ctr">
+                        <a:defRPr sz="860" b="0">
+                          <a:solidFill>
+                            <a:srgbClr val="8A8880"/>
+                          </a:solidFill>
+                        </a:defRPr>
+                      </a:pPr>
+                      <a:r>
+                        <a:t>—</a:t>
+                      </a:r>
+                    </a:p>
+                  </a:txBody>
+                  <a:tcPr marL="45720" marR="45720" marT="13716" marB="13716" anchor="ctr"/>
+                </a:tc>
+                <a:tc>
+                  <a:txBody>
+                    <a:bodyPr/>
+                    <a:lstStyle/>
+                    <a:p>
+                      <a:pPr algn="ctr">
+                        <a:defRPr sz="860" b="0">
+                          <a:solidFill>
+                            <a:srgbClr val="8A8880"/>
+                          </a:solidFill>
+                        </a:defRPr>
+                      </a:pPr>
+                      <a:r>
+                        <a:t>—</a:t>
+                      </a:r>
+                    </a:p>
+                  </a:txBody>
+                  <a:tcPr marL="45720" marR="45720" marT="13716" marB="13716" anchor="ctr"/>
+                </a:tc>
+                <a:tc>
+                  <a:txBody>
+                    <a:bodyPr/>
+                    <a:lstStyle/>
+                    <a:p>
+                      <a:pPr algn="ctr">
+                        <a:defRPr sz="860" b="1">
+                          <a:solidFill>
+                            <a:srgbClr val="1BAF7A"/>
+                          </a:solidFill>
+                        </a:defRPr>
+                      </a:pPr>
+                      <a:r>
+                        <a:t>✓</a:t>
+                      </a:r>
+                    </a:p>
+                  </a:txBody>
+                  <a:tcPr marL="45720" marR="45720" marT="13716" marB="13716" anchor="ctr"/>
+                </a:tc>
+                <a:tc>
+                  <a:txBody>
+                    <a:bodyPr/>
+                    <a:lstStyle/>
+                    <a:p>
+                      <a:pPr algn="ctr">
+                        <a:defRPr sz="860" b="0">
+                          <a:solidFill>
+                            <a:srgbClr val="8A8880"/>
+                          </a:solidFill>
+                        </a:defRPr>
+                      </a:pPr>
+                      <a:r>
+                        <a:t>—</a:t>
+                      </a:r>
+                    </a:p>
+                  </a:txBody>
+                  <a:tcPr marL="45720" marR="45720" marT="13716" marB="13716" anchor="ctr"/>
+                </a:tc>
+              </a:tr>
+              <a:tr h="402336">
+                <a:tc>
+                  <a:txBody>
+                    <a:bodyPr/>
+                    <a:lstStyle/>
+                    <a:p>
+                      <a:pPr>
+                        <a:defRPr sz="860" b="0">
+                          <a:solidFill>
+                            <a:srgbClr val="0B0B0B"/>
+                          </a:solidFill>
+                        </a:defRPr>
+                      </a:pPr>
+                      <a:r>
+                        <a:t>SED2AM '25 (TD-VRP)</a:t>
+                      </a:r>
+                    </a:p>
+                  </a:txBody>
+                  <a:tcPr marL="45720" marR="45720" marT="13716" marB="13716" anchor="ctr"/>
+                </a:tc>
+                <a:tc>
+                  <a:txBody>
+                    <a:bodyPr/>
+                    <a:lstStyle/>
+                    <a:p>
+                      <a:pPr algn="ctr">
+                        <a:defRPr sz="860" b="0">
+                          <a:solidFill>
+                            <a:srgbClr val="8A8880"/>
+                          </a:solidFill>
+                        </a:defRPr>
+                      </a:pPr>
+                      <a:r>
+                        <a:t>—</a:t>
+                      </a:r>
+                    </a:p>
+                  </a:txBody>
+                  <a:tcPr marL="45720" marR="45720" marT="13716" marB="13716" anchor="ctr"/>
+                </a:tc>
+                <a:tc>
+                  <a:txBody>
+                    <a:bodyPr/>
+                    <a:lstStyle/>
+                    <a:p>
+                      <a:pPr algn="ctr">
+                        <a:defRPr sz="860" b="0">
+                          <a:solidFill>
+                            <a:srgbClr val="8A8880"/>
+                          </a:solidFill>
+                        </a:defRPr>
+                      </a:pPr>
+                      <a:r>
+                        <a:t>—</a:t>
+                      </a:r>
+                    </a:p>
+                  </a:txBody>
+                  <a:tcPr marL="45720" marR="45720" marT="13716" marB="13716" anchor="ctr"/>
+                </a:tc>
+                <a:tc>
+                  <a:txBody>
+                    <a:bodyPr/>
+                    <a:lstStyle/>
+                    <a:p>
+                      <a:pPr algn="ctr">
+                        <a:defRPr sz="860" b="0">
+                          <a:solidFill>
+                            <a:srgbClr val="52514E"/>
+                          </a:solidFill>
+                        </a:defRPr>
+                      </a:pPr>
+                      <a:r>
+                        <a:t>road data</a:t>
+                      </a:r>
+                    </a:p>
+                  </a:txBody>
+                  <a:tcPr marL="45720" marR="45720" marT="13716" marB="13716" anchor="ctr"/>
+                </a:tc>
+                <a:tc>
+                  <a:txBody>
+                    <a:bodyPr/>
+                    <a:lstStyle/>
+                    <a:p>
+                      <a:pPr algn="ctr">
+                        <a:defRPr sz="860" b="1">
+                          <a:solidFill>
+                            <a:srgbClr val="1BAF7A"/>
+                          </a:solidFill>
+                        </a:defRPr>
+                      </a:pPr>
+                      <a:r>
+                        <a:t>✓</a:t>
+                      </a:r>
+                    </a:p>
+                  </a:txBody>
+                  <a:tcPr marL="45720" marR="45720" marT="13716" marB="13716" anchor="ctr"/>
+                </a:tc>
+                <a:tc>
+                  <a:txBody>
+                    <a:bodyPr/>
+                    <a:lstStyle/>
+                    <a:p>
+                      <a:pPr algn="ctr">
+                        <a:defRPr sz="860" b="0">
+                          <a:solidFill>
+                            <a:srgbClr val="8A8880"/>
+                          </a:solidFill>
+                        </a:defRPr>
+                      </a:pPr>
+                      <a:r>
+                        <a:t>—</a:t>
+                      </a:r>
+                    </a:p>
+                  </a:txBody>
+                  <a:tcPr marL="45720" marR="45720" marT="13716" marB="13716" anchor="ctr"/>
+                </a:tc>
+                <a:tc>
+                  <a:txBody>
+                    <a:bodyPr/>
+                    <a:lstStyle/>
+                    <a:p>
+                      <a:pPr algn="ctr">
+                        <a:defRPr sz="860" b="1">
+                          <a:solidFill>
+                            <a:srgbClr val="1BAF7A"/>
+                          </a:solidFill>
+                        </a:defRPr>
+                      </a:pPr>
+                      <a:r>
+                        <a:t>✓</a:t>
+                      </a:r>
+                    </a:p>
+                  </a:txBody>
+                  <a:tcPr marL="45720" marR="45720" marT="13716" marB="13716" anchor="ctr"/>
+                </a:tc>
+                <a:tc>
+                  <a:txBody>
+                    <a:bodyPr/>
+                    <a:lstStyle/>
+                    <a:p>
+                      <a:pPr algn="ctr">
+                        <a:defRPr sz="860" b="0">
+                          <a:solidFill>
+                            <a:srgbClr val="8A8880"/>
+                          </a:solidFill>
+                        </a:defRPr>
+                      </a:pPr>
+                      <a:r>
+                        <a:t>—</a:t>
+                      </a:r>
+                    </a:p>
+                  </a:txBody>
+                  <a:tcPr marL="45720" marR="45720" marT="13716" marB="13716" anchor="ctr"/>
+                </a:tc>
+              </a:tr>
+              <a:tr h="402336">
+                <a:tc>
+                  <a:txBody>
+                    <a:bodyPr/>
+                    <a:lstStyle/>
+                    <a:p>
+                      <a:pPr>
+                        <a:defRPr sz="860" b="0">
+                          <a:solidFill>
+                            <a:srgbClr val="0B0B0B"/>
+                          </a:solidFill>
+                        </a:defRPr>
+                      </a:pPr>
+                      <a:r>
+                        <a:t>Neural CARP '19–'26</a:t>
+                      </a:r>
+                    </a:p>
+                  </a:txBody>
+                  <a:tcPr marL="45720" marR="45720" marT="13716" marB="13716" anchor="ctr"/>
+                </a:tc>
+                <a:tc>
+                  <a:txBody>
+                    <a:bodyPr/>
+                    <a:lstStyle/>
+                    <a:p>
+                      <a:pPr algn="ctr">
+                        <a:defRPr sz="860" b="0">
+                          <a:solidFill>
+                            <a:srgbClr val="8A8880"/>
+                          </a:solidFill>
+                        </a:defRPr>
+                      </a:pPr>
+                      <a:r>
+                        <a:t>—</a:t>
+                      </a:r>
+                    </a:p>
+                  </a:txBody>
+                  <a:tcPr marL="45720" marR="45720" marT="13716" marB="13716" anchor="ctr"/>
+                </a:tc>
+                <a:tc>
+                  <a:txBody>
+                    <a:bodyPr/>
+                    <a:lstStyle/>
+                    <a:p>
+                      <a:pPr algn="ctr">
+                        <a:defRPr sz="860" b="0">
+                          <a:solidFill>
+                            <a:srgbClr val="8A8880"/>
+                          </a:solidFill>
+                        </a:defRPr>
+                      </a:pPr>
+                      <a:r>
+                        <a:t>—</a:t>
+                      </a:r>
+                    </a:p>
+                  </a:txBody>
+                  <a:tcPr marL="45720" marR="45720" marT="13716" marB="13716" anchor="ctr"/>
+                </a:tc>
+                <a:tc>
+                  <a:txBody>
+                    <a:bodyPr/>
+                    <a:lstStyle/>
+                    <a:p>
+                      <a:pPr algn="ctr">
+                        <a:defRPr sz="860" b="1">
+                          <a:solidFill>
+                            <a:srgbClr val="1BAF7A"/>
+                          </a:solidFill>
+                        </a:defRPr>
+                      </a:pPr>
+                      <a:r>
+                        <a:t>✓</a:t>
+                      </a:r>
+                    </a:p>
+                  </a:txBody>
+                  <a:tcPr marL="45720" marR="45720" marT="13716" marB="13716" anchor="ctr"/>
+                </a:tc>
+                <a:tc>
+                  <a:txBody>
+                    <a:bodyPr/>
+                    <a:lstStyle/>
+                    <a:p>
+                      <a:pPr algn="ctr">
+                        <a:defRPr sz="860" b="0">
+                          <a:solidFill>
+                            <a:srgbClr val="8A8880"/>
+                          </a:solidFill>
+                        </a:defRPr>
+                      </a:pPr>
+                      <a:r>
+                        <a:t>—</a:t>
+                      </a:r>
+                    </a:p>
+                  </a:txBody>
+                  <a:tcPr marL="45720" marR="45720" marT="13716" marB="13716" anchor="ctr"/>
+                </a:tc>
+                <a:tc>
+                  <a:txBody>
+                    <a:bodyPr/>
+                    <a:lstStyle/>
+                    <a:p>
+                      <a:pPr algn="ctr">
+                        <a:defRPr sz="860" b="0">
+                          <a:solidFill>
+                            <a:srgbClr val="8A8880"/>
+                          </a:solidFill>
+                        </a:defRPr>
+                      </a:pPr>
+                      <a:r>
+                        <a:t>—</a:t>
+                      </a:r>
+                    </a:p>
+                  </a:txBody>
+                  <a:tcPr marL="45720" marR="45720" marT="13716" marB="13716" anchor="ctr"/>
+                </a:tc>
+                <a:tc>
+                  <a:txBody>
+                    <a:bodyPr/>
+                    <a:lstStyle/>
+                    <a:p>
+                      <a:pPr algn="ctr">
+                        <a:defRPr sz="860" b="1">
+                          <a:solidFill>
+                            <a:srgbClr val="1BAF7A"/>
+                          </a:solidFill>
+                        </a:defRPr>
+                      </a:pPr>
+                      <a:r>
+                        <a:t>✓</a:t>
+                      </a:r>
+                    </a:p>
+                  </a:txBody>
+                  <a:tcPr marL="45720" marR="45720" marT="13716" marB="13716" anchor="ctr"/>
+                </a:tc>
+                <a:tc>
+                  <a:txBody>
+                    <a:bodyPr/>
+                    <a:lstStyle/>
+                    <a:p>
+                      <a:pPr algn="ctr">
+                        <a:defRPr sz="860" b="0">
+                          <a:solidFill>
+                            <a:srgbClr val="8A8880"/>
+                          </a:solidFill>
+                        </a:defRPr>
+                      </a:pPr>
+                      <a:r>
+                        <a:t>—</a:t>
+                      </a:r>
+                    </a:p>
+                  </a:txBody>
+                  <a:tcPr marL="45720" marR="45720" marT="13716" marB="13716" anchor="ctr"/>
+                </a:tc>
+              </a:tr>
+              <a:tr h="402336">
+                <a:tc>
+                  <a:txBody>
+                    <a:bodyPr/>
+                    <a:lstStyle/>
+                    <a:p>
+                      <a:pPr>
+                        <a:defRPr sz="860" b="0">
+                          <a:solidFill>
+                            <a:srgbClr val="0B0B0B"/>
+                          </a:solidFill>
+                        </a:defRPr>
+                      </a:pPr>
+                      <a:r>
+                        <a:t>Drive-by sensing OR (Han'24, Chen'24, Zhu'14)</a:t>
+                      </a:r>
+                    </a:p>
+                  </a:txBody>
+                  <a:tcPr marL="45720" marR="45720" marT="13716" marB="13716" anchor="ctr"/>
+                </a:tc>
+                <a:tc>
+                  <a:txBody>
+                    <a:bodyPr/>
+                    <a:lstStyle/>
+                    <a:p>
+                      <a:pPr algn="ctr">
+                        <a:defRPr sz="860" b="1">
+                          <a:solidFill>
+                            <a:srgbClr val="1BAF7A"/>
+                          </a:solidFill>
+                        </a:defRPr>
+                      </a:pPr>
+                      <a:r>
+                        <a:t>✓</a:t>
+                      </a:r>
+                    </a:p>
+                  </a:txBody>
+                  <a:tcPr marL="45720" marR="45720" marT="13716" marB="13716" anchor="ctr"/>
+                </a:tc>
+                <a:tc>
+                  <a:txBody>
+                    <a:bodyPr/>
+                    <a:lstStyle/>
+                    <a:p>
+                      <a:pPr algn="ctr">
+                        <a:defRPr sz="860" b="0">
+                          <a:solidFill>
+                            <a:srgbClr val="52514E"/>
+                          </a:solidFill>
+                        </a:defRPr>
+                      </a:pPr>
+                      <a:r>
+                        <a:t>part</a:t>
+                      </a:r>
+                    </a:p>
+                  </a:txBody>
+                  <a:tcPr marL="45720" marR="45720" marT="13716" marB="13716" anchor="ctr"/>
+                </a:tc>
+                <a:tc>
+                  <a:txBody>
+                    <a:bodyPr/>
+                    <a:lstStyle/>
+                    <a:p>
+                      <a:pPr algn="ctr">
+                        <a:defRPr sz="860" b="1">
+                          <a:solidFill>
+                            <a:srgbClr val="1BAF7A"/>
+                          </a:solidFill>
+                        </a:defRPr>
+                      </a:pPr>
+                      <a:r>
+                        <a:t>✓</a:t>
+                      </a:r>
+                    </a:p>
+                  </a:txBody>
+                  <a:tcPr marL="45720" marR="45720" marT="13716" marB="13716" anchor="ctr"/>
+                </a:tc>
+                <a:tc>
+                  <a:txBody>
+                    <a:bodyPr/>
+                    <a:lstStyle/>
+                    <a:p>
+                      <a:pPr algn="ctr">
+                        <a:defRPr sz="860" b="0">
+                          <a:solidFill>
+                            <a:srgbClr val="52514E"/>
+                          </a:solidFill>
+                        </a:defRPr>
+                      </a:pPr>
+                      <a:r>
+                        <a:t>part</a:t>
+                      </a:r>
+                    </a:p>
+                  </a:txBody>
+                  <a:tcPr marL="45720" marR="45720" marT="13716" marB="13716" anchor="ctr"/>
+                </a:tc>
+                <a:tc>
+                  <a:txBody>
+                    <a:bodyPr/>
+                    <a:lstStyle/>
+                    <a:p>
+                      <a:pPr algn="ctr">
+                        <a:defRPr sz="860" b="1">
+                          <a:solidFill>
+                            <a:srgbClr val="1BAF7A"/>
+                          </a:solidFill>
+                        </a:defRPr>
+                      </a:pPr>
+                      <a:r>
+                        <a:t>✓</a:t>
+                      </a:r>
+                    </a:p>
+                  </a:txBody>
+                  <a:tcPr marL="45720" marR="45720" marT="13716" marB="13716" anchor="ctr"/>
+                </a:tc>
+                <a:tc>
+                  <a:txBody>
+                    <a:bodyPr/>
+                    <a:lstStyle/>
+                    <a:p>
+                      <a:pPr algn="ctr">
+                        <a:defRPr sz="860" b="0">
+                          <a:solidFill>
+                            <a:srgbClr val="8A8880"/>
+                          </a:solidFill>
+                        </a:defRPr>
+                      </a:pPr>
+                      <a:r>
+                        <a:t>—</a:t>
+                      </a:r>
+                    </a:p>
+                  </a:txBody>
+                  <a:tcPr marL="45720" marR="45720" marT="13716" marB="13716" anchor="ctr"/>
+                </a:tc>
+                <a:tc>
+                  <a:txBody>
+                    <a:bodyPr/>
+                    <a:lstStyle/>
+                    <a:p>
+                      <a:pPr algn="ctr">
+                        <a:defRPr sz="860" b="0">
+                          <a:solidFill>
+                            <a:srgbClr val="8A8880"/>
+                          </a:solidFill>
+                        </a:defRPr>
+                      </a:pPr>
+                      <a:r>
+                        <a:t>—</a:t>
+                      </a:r>
+                    </a:p>
+                  </a:txBody>
+                  <a:tcPr marL="45720" marR="45720" marT="13716" marB="13716" anchor="ctr"/>
+                </a:tc>
+              </a:tr>
+              <a:tr h="402336">
+                <a:tc>
+                  <a:txBody>
+                    <a:bodyPr/>
+                    <a:lstStyle/>
+                    <a:p>
+                      <a:pPr>
+                        <a:defRPr sz="860" b="1">
+                          <a:solidFill>
+                            <a:srgbClr val="EB6834"/>
+                          </a:solidFill>
+                        </a:defRPr>
+                      </a:pPr>
+                      <a:r>
+                        <a:t>OURS (benchmark v1)</a:t>
+                      </a:r>
+                    </a:p>
+                  </a:txBody>
+                  <a:tcPr marL="45720" marR="45720" marT="13716" marB="13716" anchor="ctr"/>
+                </a:tc>
+                <a:tc>
+                  <a:txBody>
+                    <a:bodyPr/>
+                    <a:lstStyle/>
+                    <a:p>
+                      <a:pPr algn="ctr">
+                        <a:defRPr sz="860" b="1">
+                          <a:solidFill>
+                            <a:srgbClr val="1BAF7A"/>
+                          </a:solidFill>
+                        </a:defRPr>
+                      </a:pPr>
+                      <a:r>
+                        <a:t>✓</a:t>
+                      </a:r>
+                    </a:p>
+                  </a:txBody>
+                  <a:tcPr marL="45720" marR="45720" marT="13716" marB="13716" anchor="ctr"/>
+                </a:tc>
+                <a:tc>
+                  <a:txBody>
+                    <a:bodyPr/>
+                    <a:lstStyle/>
+                    <a:p>
+                      <a:pPr algn="ctr">
+                        <a:defRPr sz="860" b="1">
+                          <a:solidFill>
+                            <a:srgbClr val="1BAF7A"/>
+                          </a:solidFill>
+                        </a:defRPr>
+                      </a:pPr>
+                      <a:r>
+                        <a:t>✓</a:t>
+                      </a:r>
+                    </a:p>
+                  </a:txBody>
+                  <a:tcPr marL="45720" marR="45720" marT="13716" marB="13716" anchor="ctr"/>
+                </a:tc>
+                <a:tc>
+                  <a:txBody>
+                    <a:bodyPr/>
+                    <a:lstStyle/>
+                    <a:p>
+                      <a:pPr algn="ctr">
+                        <a:defRPr sz="860" b="1">
+                          <a:solidFill>
+                            <a:srgbClr val="1BAF7A"/>
+                          </a:solidFill>
+                        </a:defRPr>
+                      </a:pPr>
+                      <a:r>
+                        <a:t>✓</a:t>
+                      </a:r>
+                    </a:p>
+                  </a:txBody>
+                  <a:tcPr marL="45720" marR="45720" marT="13716" marB="13716" anchor="ctr"/>
+                </a:tc>
+                <a:tc>
+                  <a:txBody>
+                    <a:bodyPr/>
+                    <a:lstStyle/>
+                    <a:p>
+                      <a:pPr algn="ctr">
+                        <a:defRPr sz="860" b="1">
+                          <a:solidFill>
+                            <a:srgbClr val="1BAF7A"/>
+                          </a:solidFill>
+                        </a:defRPr>
+                      </a:pPr>
+                      <a:r>
+                        <a:t>✓</a:t>
+                      </a:r>
+                    </a:p>
+                  </a:txBody>
+                  <a:tcPr marL="45720" marR="45720" marT="13716" marB="13716" anchor="ctr"/>
+                </a:tc>
+                <a:tc>
+                  <a:txBody>
+                    <a:bodyPr/>
+                    <a:lstStyle/>
+                    <a:p>
+                      <a:pPr algn="ctr">
+                        <a:defRPr sz="860" b="1">
+                          <a:solidFill>
+                            <a:srgbClr val="1BAF7A"/>
+                          </a:solidFill>
+                        </a:defRPr>
+                      </a:pPr>
+                      <a:r>
+                        <a:t>✓</a:t>
+                      </a:r>
+                    </a:p>
+                  </a:txBody>
+                  <a:tcPr marL="45720" marR="45720" marT="13716" marB="13716" anchor="ctr"/>
+                </a:tc>
+                <a:tc>
+                  <a:txBody>
+                    <a:bodyPr/>
+                    <a:lstStyle/>
+                    <a:p>
+                      <a:pPr algn="ctr">
+                        <a:defRPr sz="860" b="1">
+                          <a:solidFill>
+                            <a:srgbClr val="1BAF7A"/>
+                          </a:solidFill>
+                        </a:defRPr>
+                      </a:pPr>
+                      <a:r>
+                        <a:t>✓</a:t>
+                      </a:r>
+                    </a:p>
+                  </a:txBody>
+                  <a:tcPr marL="45720" marR="45720" marT="13716" marB="13716" anchor="ctr"/>
+                </a:tc>
+                <a:tc>
+                  <a:txBody>
+                    <a:bodyPr/>
+                    <a:lstStyle/>
+                    <a:p>
+                      <a:pPr algn="ctr">
+                        <a:defRPr sz="860" b="1">
+                          <a:solidFill>
+                            <a:srgbClr val="1BAF7A"/>
+                          </a:solidFill>
+                        </a:defRPr>
+                      </a:pPr>
+                      <a:r>
+                        <a:t>✓</a:t>
+                      </a:r>
+                    </a:p>
+                  </a:txBody>
+                  <a:tcPr marL="45720" marR="45720" marT="13716" marB="13716" anchor="ctr"/>
+                </a:tc>
+              </a:tr>
+            </a:tbl>
+          </a:graphicData>
+        </a:graphic>
+      </p:graphicFrame>
       <p:sp>
         <p:nvSpPr>
-          <p:cNvPr id="204" name="TextBox 203"/>
+          <p:cNvPr id="205" name="TextBox 204"/>
           <p:cNvSpPr txBox="1"/>
           <p:nvPr/>
         </p:nvSpPr>
         <p:spPr>
           <a:xfrm>
-            <a:off x="640080" y="1417320"/>
-            <a:ext cx="10881360" cy="914400"/>
+            <a:off x="1874519" y="6053328"/>
+            <a:ext cx="9784080" cy="914400"/>
           </a:xfrm>
           <a:prstGeom prst="rect">
             <a:avLst/>
@@ -7604,66 +10232,10 @@
           <a:lstStyle/>
           <a:p>
             <a:pPr>
-              <a:defRPr sz="1300" b="0"/>
+              <a:defRPr sz="1100" b="1"/>
             </a:pPr>
             <a:r>
-              <a:t>• Starting point: the network and the OD set are fixed, so the original model could bake the instance into its weights — one configuration, one trained model</a:t>
-            </a:r>
-          </a:p>
-          <a:p>
-            <a:pPr>
-              <a:defRPr sz="1300" b="1"/>
-            </a:pPr>
-            <a:r>
-              <a:t>• ① Instance attributes moved OUT of the weights and INTO the input.</a:t>
-            </a:r>
-          </a:p>
-          <a:p>
-            <a:pPr>
-              <a:defRPr sz="1150" b="0"/>
-            </a:pPr>
-            <a:r>
-              <a:t>   – task token = Emb_o(o) + Emb_d(d) + Proj(t₀) + Proj([ρᵥ, Bᵥ/H]) — one token per vehicle, V tokens appended to the 80 link tokens</a:t>
-            </a:r>
-          </a:p>
-          <a:p>
-            <a:pPr>
-              <a:defRPr sz="1150" b="0"/>
-            </a:pPr>
-            <a:r>
-              <a:t>   – Why: a single model then serves every OD pair, fleet size, departure time and budget, and the encoder can reason about the fleet jointly. This is the attribute-conditioning recipe the routing foundation models use (RouteFinder / MTPOMO); our budget plays the role their capacity plays</a:t>
-            </a:r>
-          </a:p>
-          <a:p>
-            <a:pPr>
-              <a:defRPr sz="1300" b="1"/>
-            </a:pPr>
-            <a:r>
-              <a:t>• ② The feasibility mask threshold became the vehicle's OWN deadline.</a:t>
-            </a:r>
-          </a:p>
-          <a:p>
-            <a:pPr>
-              <a:defRPr sz="1150" b="0"/>
-            </a:pPr>
-            <a:r>
-              <a:t>   – logits[illegal] = −∞ before softmax, with illegal = {not a successor / U-turn, cannot reach own destination within t₀+B (time-dependent Dijkstra query), SEP not adjacent to own gate}</a:t>
-            </a:r>
-          </a:p>
-          <a:p>
-            <a:pPr>
-              <a:defRPr sz="1150" b="0"/>
-            </a:pPr>
-            <a:r>
-              <a:t>   – Why this is the important one: the budget gets a HARD mechanical channel into decoding instead of only a soft preference implied by the labels. Feasibility is therefore enforced, not learned — and a budget value never seen in training still produces a feasible route</a:t>
-            </a:r>
-          </a:p>
-          <a:p>
-            <a:pPr>
-              <a:defRPr sz="1300" b="0"/>
-            </a:pPr>
-            <a:r>
-              <a:t>• The mask has no parameters: rules guarantee feasibility, the network only ranks legal moves</a:t>
+              <a:t>• No existing work is identical: every neighbour misses ≥ 2 columns. The application shelf (bottom) has the right problem but no learning; the neural shelves have learning but not this problem</a:t>
             </a:r>
           </a:p>
         </p:txBody>
@@ -7714,7 +10286,7 @@
           <a:p>
             <a:r>
               <a:rPr lang="en-US" altLang="zh-CN" dirty="0"/>
-              <a:t>Method</a:t>
+              <a:t>Literature</a:t>
             </a:r>
             <a:endParaRPr lang="zh-CN" altLang="en-US" dirty="0"/>
           </a:p>
@@ -7748,7 +10320,7 @@
           <a:p>
             <a:r>
               <a:rPr lang="en-US" altLang="zh-CN" sz="2800" dirty="0"/>
-              <a:t>Label farm &amp; training</a:t>
+              <a:t>Neighbours vs ours</a:t>
             </a:r>
             <a:endParaRPr lang="zh-CN" altLang="en-US" sz="2800" dirty="0"/>
           </a:p>
@@ -7762,8 +10334,8 @@
         </p:nvSpPr>
         <p:spPr>
           <a:xfrm>
-            <a:off x="640080" y="1463040"/>
-            <a:ext cx="10881360" cy="914400"/>
+            <a:off x="640080" y="1417320"/>
+            <a:ext cx="10972800" cy="914400"/>
           </a:xfrm>
           <a:prstGeom prst="rect">
             <a:avLst/>
@@ -7777,66 +10349,74 @@
           <a:lstStyle/>
           <a:p>
             <a:pPr>
-              <a:defRPr sz="1350" b="0"/>
+              <a:defRPr sz="1250" b="1"/>
             </a:pPr>
             <a:r>
-              <a:t>• Label farm (parallel, resumable):  δ ~ iid{0,1}⁸⁰ · V ∈ {2,3,4,6} · ODs stratified by difficulty tercile with 4 pairs held out · t₀ ∈ {0..5} · per-vehicle ρ</a:t>
+              <a:t>• Closest three, and exactly what they miss:</a:t>
             </a:r>
           </a:p>
           <a:p>
             <a:pPr>
-              <a:defRPr sz="1200" b="0"/>
+              <a:defRPr sz="1100" b="0"/>
             </a:pPr>
             <a:r>
-              <a:t>   – ρ anchors seen in training: {1.0, 1.5, 2.0, 3.0}. HELD OUT: {1.25, 1.75} and {4.0}</a:t>
+              <a:t>   – TOP-Former (closest neural): team + per-vehicle budget MASKING — but one shared depot, homogeneous budget, synchronized start, Euclidean nodes, static prizes, RL</a:t>
             </a:r>
           </a:p>
           <a:p>
             <a:pPr>
-              <a:defRPr sz="1200" b="0"/>
+              <a:defRPr sz="1100" b="0"/>
             </a:pPr>
             <a:r>
-              <a:t>   – 65 % of fleets heterogeneous (each vehicle its own ρ), 35 % homogeneous</a:t>
+              <a:t>   – FM-MCVRP (closest recipe): fixed graph + SL + joint fleet sequence — but visit-all min-cost CVRP, no budgets, no time dependence, deliberately sub-optimal labels</a:t>
             </a:r>
           </a:p>
           <a:p>
             <a:pPr>
-              <a:defRPr sz="1350" b="1"/>
+              <a:defRPr sz="1100" b="0"/>
             </a:pPr>
             <a:r>
-              <a:t>• 10 780 labels · 0 errors · 0 solves hit the 60 s cap · 0.90 s mean · ~17 min on 15 workers</a:t>
+              <a:t>   – Han et al. '24 TR-B (closest problem): space–time sensing utility + budget on real networks — but pure OR, per-instance solving, no learned router at all</a:t>
             </a:r>
           </a:p>
           <a:p>
             <a:pPr>
-              <a:defRPr sz="1200" b="0"/>
+              <a:defRPr sz="1250" b="1"/>
             </a:pPr>
             <a:r>
-              <a:t>   – 8 000 train · 800 same-distribution test · 400 OD zero-shot · 400 fleet extrapolation · 400 + 300 unseen-budget · 60 instances × 8 ρ for the response curve</a:t>
+              <a:t>• Honesty box — every ingredient of our network exists somewhere: mask kernel (Kool), attribute conditioning (MTPOMO / RouteFinder), fixed-graph SL + joint sequence (FM-MCVRP), centralized team decoding (TOP-Former)</a:t>
             </a:r>
           </a:p>
           <a:p>
             <a:pPr>
-              <a:defRPr sz="1350" b="1"/>
+              <a:defRPr sz="1250" b="1"/>
             </a:pPr>
             <a:r>
-              <a:t>• Training: teacher forcing, next-link cross-entropy (PAD ignored), AdamW, batch 32, 60 epochs. No solver and no generation inside the training loop</a:t>
+              <a:t>• What is ours: (C1) the first learned amortised solver for THIS problem class — budget-constrained team sensing-coverage routing, arc-level, time-dependent — the bridge between the two shelves</a:t>
             </a:r>
           </a:p>
           <a:p>
             <a:pPr>
-              <a:defRPr sz="1350" b="1"/>
+              <a:defRPr sz="1100" b="0"/>
             </a:pPr>
             <a:r>
-              <a:t>• Model selection is NOT on cross-entropy: every epoch runs masked-greedy decoding on a validation slice and keeps the checkpoint with the best true objective gap</a:t>
+              <a:t>   – (C2) the switch-vs-dial analysis: exact characterisation of when a scalarisation weight cannot position solutions, and the constructive replacement (budget in the constraint)</a:t>
             </a:r>
           </a:p>
           <a:p>
             <a:pPr>
-              <a:defRPr sz="1350" b="0"/>
+              <a:defRPr sz="1100" b="0"/>
             </a:pPr>
             <a:r>
-              <a:t>• 1.04 M parameters · ~4 min per seed on one RTX 3090 · 3 seeds</a:t>
+              <a:t>   – (C3) value-level zero-shot evaluation: unseen CONTINUOUS budgets (interp + extrap) + a solver-tracked response curve — extends the variant-level zero-shot of MTPOMO / RouteFinder</a:t>
+            </a:r>
+          </a:p>
+          <a:p>
+            <a:pPr>
+              <a:defRPr sz="1250" b="0"/>
+            </a:pPr>
+            <a:r>
+              <a:t>• Threats we track: uniform-utility degeneracy (wᵢ pending) · toy scale (80 links) · greedy-only decoding · fast-moving neighbours (DeCoST ICLR'26)</a:t>
             </a:r>
           </a:p>
         </p:txBody>
@@ -7887,7 +10467,7 @@
           <a:p>
             <a:r>
               <a:rPr lang="en-US" altLang="zh-CN" dirty="0"/>
-              <a:t>Evaluation</a:t>
+              <a:t>Pipeline 1 / 2</a:t>
             </a:r>
             <a:endParaRPr lang="zh-CN" altLang="en-US" dirty="0"/>
           </a:p>
@@ -7921,7 +10501,5326 @@
           <a:p>
             <a:r>
               <a:rPr lang="en-US" altLang="zh-CN" sz="2800" dirty="0"/>
-              <a:t>Design</a:t>
+              <a:t>Training (offline, run once)</a:t>
+            </a:r>
+            <a:endParaRPr lang="zh-CN" altLang="en-US" sz="2800" dirty="0"/>
+          </a:p>
+        </p:txBody>
+      </p:sp>
+      <p:sp>
+        <p:nvSpPr>
+          <p:cNvPr id="204" name="Rounded Rectangle 203"/>
+          <p:cNvSpPr/>
+          <p:nvPr/>
+        </p:nvSpPr>
+        <p:spPr>
+          <a:xfrm>
+            <a:off x="502920" y="1417320"/>
+            <a:ext cx="2048256" cy="1005840"/>
+          </a:xfrm>
+          <a:prstGeom prst="roundRect">
+            <a:avLst>
+              <a:gd name="adj" fmla="val 10000"/>
+            </a:avLst>
+          </a:prstGeom>
+          <a:solidFill>
+            <a:srgbClr val="F2F4F7"/>
+          </a:solidFill>
+          <a:ln w="15240">
+            <a:solidFill>
+              <a:srgbClr val="C9C8C2"/>
+            </a:solidFill>
+          </a:ln>
+          <a:effectLst/>
+        </p:spPr>
+        <p:style>
+          <a:lnRef idx="1">
+            <a:schemeClr val="accent1"/>
+          </a:lnRef>
+          <a:fillRef idx="3">
+            <a:schemeClr val="accent1"/>
+          </a:fillRef>
+          <a:effectRef idx="2">
+            <a:schemeClr val="accent1"/>
+          </a:effectRef>
+          <a:fontRef idx="minor">
+            <a:schemeClr val="lt1"/>
+          </a:fontRef>
+        </p:style>
+        <p:txBody>
+          <a:bodyPr rtlCol="0" anchor="ctr" wrap="square" lIns="54864" rIns="54864" tIns="27432" bIns="27432"/>
+          <a:lstStyle/>
+          <a:p>
+            <a:pPr algn="ctr">
+              <a:defRPr sz="1150" b="1">
+                <a:solidFill>
+                  <a:srgbClr val="0B0B0B"/>
+                </a:solidFill>
+              </a:defRPr>
+            </a:pPr>
+            <a:r>
+              <a:t>Environment</a:t>
+            </a:r>
+          </a:p>
+          <a:p>
+            <a:pPr algn="ctr">
+              <a:defRPr sz="880">
+                <a:solidFill>
+                  <a:srgbClr val="52514E"/>
+                </a:solidFill>
+              </a:defRPr>
+            </a:pPr>
+            <a:r>
+              <a:t>fixed 4×4 · 80 links</a:t>
+            </a:r>
+            <a:br/>
+            <a:r>
+              <a:t>c(i,t) time-dependent</a:t>
+            </a:r>
+            <a:br/>
+            <a:r>
+              <a:t>TD-Dijkstra oracle</a:t>
+            </a:r>
+          </a:p>
+        </p:txBody>
+      </p:sp>
+      <p:sp>
+        <p:nvSpPr>
+          <p:cNvPr id="205" name="Rounded Rectangle 204"/>
+          <p:cNvSpPr/>
+          <p:nvPr/>
+        </p:nvSpPr>
+        <p:spPr>
+          <a:xfrm>
+            <a:off x="2734056" y="1417320"/>
+            <a:ext cx="2048256" cy="1005840"/>
+          </a:xfrm>
+          <a:prstGeom prst="roundRect">
+            <a:avLst>
+              <a:gd name="adj" fmla="val 10000"/>
+            </a:avLst>
+          </a:prstGeom>
+          <a:solidFill>
+            <a:srgbClr val="F2F4F7"/>
+          </a:solidFill>
+          <a:ln w="15240">
+            <a:solidFill>
+              <a:srgbClr val="C9C8C2"/>
+            </a:solidFill>
+          </a:ln>
+          <a:effectLst/>
+        </p:spPr>
+        <p:style>
+          <a:lnRef idx="1">
+            <a:schemeClr val="accent1"/>
+          </a:lnRef>
+          <a:fillRef idx="3">
+            <a:schemeClr val="accent1"/>
+          </a:fillRef>
+          <a:effectRef idx="2">
+            <a:schemeClr val="accent1"/>
+          </a:effectRef>
+          <a:fontRef idx="minor">
+            <a:schemeClr val="lt1"/>
+          </a:fontRef>
+        </p:style>
+        <p:txBody>
+          <a:bodyPr rtlCol="0" anchor="ctr" wrap="square" lIns="54864" rIns="54864" tIns="27432" bIns="27432"/>
+          <a:lstStyle/>
+          <a:p>
+            <a:pPr algn="ctr">
+              <a:defRPr sz="1150" b="1">
+                <a:solidFill>
+                  <a:srgbClr val="0B0B0B"/>
+                </a:solidFill>
+              </a:defRPr>
+            </a:pPr>
+            <a:r>
+              <a:t>Case sampler</a:t>
+            </a:r>
+          </a:p>
+          <a:p>
+            <a:pPr algn="ctr">
+              <a:defRPr sz="880">
+                <a:solidFill>
+                  <a:srgbClr val="52514E"/>
+                </a:solidFill>
+              </a:defRPr>
+            </a:pPr>
+            <a:r>
+              <a:t>δ ~ {0,1}⁸⁰ · V ∈ {2,3,4,6}</a:t>
+            </a:r>
+            <a:br/>
+            <a:r>
+              <a:t>ODs stratified + 4 held out</a:t>
+            </a:r>
+            <a:br/>
+            <a:r>
+              <a:t>t₀ ∈ {0…5}</a:t>
+            </a:r>
+          </a:p>
+        </p:txBody>
+      </p:sp>
+      <p:sp>
+        <p:nvSpPr>
+          <p:cNvPr id="206" name="Rounded Rectangle 205"/>
+          <p:cNvSpPr/>
+          <p:nvPr/>
+        </p:nvSpPr>
+        <p:spPr>
+          <a:xfrm>
+            <a:off x="4965192" y="1417320"/>
+            <a:ext cx="2048256" cy="1005840"/>
+          </a:xfrm>
+          <a:prstGeom prst="roundRect">
+            <a:avLst>
+              <a:gd name="adj" fmla="val 10000"/>
+            </a:avLst>
+          </a:prstGeom>
+          <a:solidFill>
+            <a:srgbClr val="FDF1E9"/>
+          </a:solidFill>
+          <a:ln w="15240">
+            <a:solidFill>
+              <a:srgbClr val="EB6834"/>
+            </a:solidFill>
+          </a:ln>
+          <a:effectLst/>
+        </p:spPr>
+        <p:style>
+          <a:lnRef idx="1">
+            <a:schemeClr val="accent1"/>
+          </a:lnRef>
+          <a:fillRef idx="3">
+            <a:schemeClr val="accent1"/>
+          </a:fillRef>
+          <a:effectRef idx="2">
+            <a:schemeClr val="accent1"/>
+          </a:effectRef>
+          <a:fontRef idx="minor">
+            <a:schemeClr val="lt1"/>
+          </a:fontRef>
+        </p:style>
+        <p:txBody>
+          <a:bodyPr rtlCol="0" anchor="ctr" wrap="square" lIns="54864" rIns="54864" tIns="27432" bIns="27432"/>
+          <a:lstStyle/>
+          <a:p>
+            <a:pPr algn="ctr">
+              <a:defRPr sz="1150" b="1">
+                <a:solidFill>
+                  <a:srgbClr val="0B0B0B"/>
+                </a:solidFill>
+              </a:defRPr>
+            </a:pPr>
+            <a:r>
+              <a:t>Budget assignment</a:t>
+            </a:r>
+          </a:p>
+          <a:p>
+            <a:pPr algn="ctr">
+              <a:defRPr sz="880">
+                <a:solidFill>
+                  <a:srgbClr val="52514E"/>
+                </a:solidFill>
+              </a:defRPr>
+            </a:pPr>
+            <a:r>
+              <a:t>ρᵥ ~ anchors {1, 1.5, 2, 3}</a:t>
+            </a:r>
+            <a:br/>
+            <a:r>
+              <a:t>Bᵥ = ⌈ρᵥ·τᵐⁱⁿᵥ⌉</a:t>
+            </a:r>
+            <a:br/>
+            <a:r>
+              <a:t>65 % heterogeneous fleets</a:t>
+            </a:r>
+          </a:p>
+        </p:txBody>
+      </p:sp>
+      <p:sp>
+        <p:nvSpPr>
+          <p:cNvPr id="207" name="Rounded Rectangle 206"/>
+          <p:cNvSpPr/>
+          <p:nvPr/>
+        </p:nvSpPr>
+        <p:spPr>
+          <a:xfrm>
+            <a:off x="7196328" y="1417320"/>
+            <a:ext cx="2048256" cy="1005840"/>
+          </a:xfrm>
+          <a:prstGeom prst="roundRect">
+            <a:avLst>
+              <a:gd name="adj" fmla="val 10000"/>
+            </a:avLst>
+          </a:prstGeom>
+          <a:solidFill>
+            <a:srgbClr val="EAF1FB"/>
+          </a:solidFill>
+          <a:ln w="15240">
+            <a:solidFill>
+              <a:srgbClr val="2A78D6"/>
+            </a:solidFill>
+          </a:ln>
+          <a:effectLst/>
+        </p:spPr>
+        <p:style>
+          <a:lnRef idx="1">
+            <a:schemeClr val="accent1"/>
+          </a:lnRef>
+          <a:fillRef idx="3">
+            <a:schemeClr val="accent1"/>
+          </a:fillRef>
+          <a:effectRef idx="2">
+            <a:schemeClr val="accent1"/>
+          </a:effectRef>
+          <a:fontRef idx="minor">
+            <a:schemeClr val="lt1"/>
+          </a:fontRef>
+        </p:style>
+        <p:txBody>
+          <a:bodyPr rtlCol="0" anchor="ctr" wrap="square" lIns="54864" rIns="54864" tIns="27432" bIns="27432"/>
+          <a:lstStyle/>
+          <a:p>
+            <a:pPr algn="ctr">
+              <a:defRPr sz="1150" b="1">
+                <a:solidFill>
+                  <a:srgbClr val="2A78D6"/>
+                </a:solidFill>
+              </a:defRPr>
+            </a:pPr>
+            <a:r>
+              <a:t>Gurobi MILP</a:t>
+            </a:r>
+          </a:p>
+          <a:p>
+            <a:pPr algn="ctr">
+              <a:defRPr sz="880">
+                <a:solidFill>
+                  <a:srgbClr val="52514E"/>
+                </a:solidFill>
+              </a:defRPr>
+            </a:pPr>
+            <a:r>
+              <a:t>time-expanded flow</a:t>
+            </a:r>
+            <a:br/>
+            <a:r>
+              <a:t>per-vehicle deadline t₀+B</a:t>
+            </a:r>
+            <a:br/>
+            <a:r>
+              <a:t>MIPGap 2 % · 0.90 s/case</a:t>
+            </a:r>
+          </a:p>
+        </p:txBody>
+      </p:sp>
+      <p:sp>
+        <p:nvSpPr>
+          <p:cNvPr id="208" name="Rounded Rectangle 207"/>
+          <p:cNvSpPr/>
+          <p:nvPr/>
+        </p:nvSpPr>
+        <p:spPr>
+          <a:xfrm>
+            <a:off x="9427464" y="1417320"/>
+            <a:ext cx="2048256" cy="1005840"/>
+          </a:xfrm>
+          <a:prstGeom prst="roundRect">
+            <a:avLst>
+              <a:gd name="adj" fmla="val 10000"/>
+            </a:avLst>
+          </a:prstGeom>
+          <a:solidFill>
+            <a:srgbClr val="F2F4F7"/>
+          </a:solidFill>
+          <a:ln w="15240">
+            <a:solidFill>
+              <a:srgbClr val="C9C8C2"/>
+            </a:solidFill>
+          </a:ln>
+          <a:effectLst/>
+        </p:spPr>
+        <p:style>
+          <a:lnRef idx="1">
+            <a:schemeClr val="accent1"/>
+          </a:lnRef>
+          <a:fillRef idx="3">
+            <a:schemeClr val="accent1"/>
+          </a:fillRef>
+          <a:effectRef idx="2">
+            <a:schemeClr val="accent1"/>
+          </a:effectRef>
+          <a:fontRef idx="minor">
+            <a:schemeClr val="lt1"/>
+          </a:fontRef>
+        </p:style>
+        <p:txBody>
+          <a:bodyPr rtlCol="0" anchor="ctr" wrap="square" lIns="54864" rIns="54864" tIns="27432" bIns="27432"/>
+          <a:lstStyle/>
+          <a:p>
+            <a:pPr algn="ctr">
+              <a:defRPr sz="1150" b="1">
+                <a:solidFill>
+                  <a:srgbClr val="0B0B0B"/>
+                </a:solidFill>
+              </a:defRPr>
+            </a:pPr>
+            <a:r>
+              <a:t>Label set</a:t>
+            </a:r>
+          </a:p>
+          <a:p>
+            <a:pPr algn="ctr">
+              <a:defRPr sz="880">
+                <a:solidFill>
+                  <a:srgbClr val="52514E"/>
+                </a:solidFill>
+              </a:defRPr>
+            </a:pPr>
+            <a:r>
+              <a:t>10 780 (case, routes)</a:t>
+            </a:r>
+            <a:br/>
+            <a:r>
+              <a:t>0 errors · 0 hit the cap</a:t>
+            </a:r>
+            <a:br/>
+            <a:r>
+              <a:t>~17 min · 15 workers</a:t>
+            </a:r>
+          </a:p>
+        </p:txBody>
+      </p:sp>
+      <p:cxnSp>
+        <p:nvCxnSpPr>
+          <p:cNvPr id="209" name="Connector 208"/>
+          <p:cNvCxnSpPr>
+            <a:stCxn id="204" idx="3"/>
+            <a:endCxn id="205" idx="1"/>
+          </p:cNvCxnSpPr>
+          <p:nvPr/>
+        </p:nvCxnSpPr>
+        <p:spPr>
+          <a:xfrm flipV="1">
+            <a:off x="2551176" y="1920240"/>
+            <a:ext cx="182880" cy="0"/>
+          </a:xfrm>
+          <a:prstGeom prst="bentConnector3">
+            <a:avLst/>
+          </a:prstGeom>
+          <a:ln w="19050">
+            <a:solidFill>
+              <a:srgbClr val="8A8880"/>
+            </a:solidFill>
+            <a:tailEnd type="triangle" w="med" len="med"/>
+          </a:ln>
+          <a:effectLst/>
+        </p:spPr>
+        <p:style>
+          <a:lnRef idx="2">
+            <a:schemeClr val="accent1"/>
+          </a:lnRef>
+          <a:fillRef idx="0">
+            <a:schemeClr val="accent1"/>
+          </a:fillRef>
+          <a:effectRef idx="1">
+            <a:schemeClr val="accent1"/>
+          </a:effectRef>
+          <a:fontRef idx="minor">
+            <a:schemeClr val="tx1"/>
+          </a:fontRef>
+        </p:style>
+      </p:cxnSp>
+      <p:cxnSp>
+        <p:nvCxnSpPr>
+          <p:cNvPr id="210" name="Connector 209"/>
+          <p:cNvCxnSpPr>
+            <a:stCxn id="205" idx="3"/>
+            <a:endCxn id="206" idx="1"/>
+          </p:cNvCxnSpPr>
+          <p:nvPr/>
+        </p:nvCxnSpPr>
+        <p:spPr>
+          <a:xfrm flipV="1">
+            <a:off x="4782312" y="1920240"/>
+            <a:ext cx="182880" cy="0"/>
+          </a:xfrm>
+          <a:prstGeom prst="bentConnector3">
+            <a:avLst/>
+          </a:prstGeom>
+          <a:ln w="19050">
+            <a:solidFill>
+              <a:srgbClr val="8A8880"/>
+            </a:solidFill>
+            <a:tailEnd type="triangle" w="med" len="med"/>
+          </a:ln>
+          <a:effectLst/>
+        </p:spPr>
+        <p:style>
+          <a:lnRef idx="2">
+            <a:schemeClr val="accent1"/>
+          </a:lnRef>
+          <a:fillRef idx="0">
+            <a:schemeClr val="accent1"/>
+          </a:fillRef>
+          <a:effectRef idx="1">
+            <a:schemeClr val="accent1"/>
+          </a:effectRef>
+          <a:fontRef idx="minor">
+            <a:schemeClr val="tx1"/>
+          </a:fontRef>
+        </p:style>
+      </p:cxnSp>
+      <p:cxnSp>
+        <p:nvCxnSpPr>
+          <p:cNvPr id="211" name="Connector 210"/>
+          <p:cNvCxnSpPr>
+            <a:stCxn id="206" idx="3"/>
+            <a:endCxn id="207" idx="1"/>
+          </p:cNvCxnSpPr>
+          <p:nvPr/>
+        </p:nvCxnSpPr>
+        <p:spPr>
+          <a:xfrm flipV="1">
+            <a:off x="7013448" y="1920240"/>
+            <a:ext cx="182880" cy="0"/>
+          </a:xfrm>
+          <a:prstGeom prst="bentConnector3">
+            <a:avLst/>
+          </a:prstGeom>
+          <a:ln w="19050">
+            <a:solidFill>
+              <a:srgbClr val="8A8880"/>
+            </a:solidFill>
+            <a:tailEnd type="triangle" w="med" len="med"/>
+          </a:ln>
+          <a:effectLst/>
+        </p:spPr>
+        <p:style>
+          <a:lnRef idx="2">
+            <a:schemeClr val="accent1"/>
+          </a:lnRef>
+          <a:fillRef idx="0">
+            <a:schemeClr val="accent1"/>
+          </a:fillRef>
+          <a:effectRef idx="1">
+            <a:schemeClr val="accent1"/>
+          </a:effectRef>
+          <a:fontRef idx="minor">
+            <a:schemeClr val="tx1"/>
+          </a:fontRef>
+        </p:style>
+      </p:cxnSp>
+      <p:cxnSp>
+        <p:nvCxnSpPr>
+          <p:cNvPr id="212" name="Connector 211"/>
+          <p:cNvCxnSpPr>
+            <a:stCxn id="207" idx="3"/>
+            <a:endCxn id="208" idx="1"/>
+          </p:cNvCxnSpPr>
+          <p:nvPr/>
+        </p:nvCxnSpPr>
+        <p:spPr>
+          <a:xfrm flipV="1">
+            <a:off x="9244584" y="1920240"/>
+            <a:ext cx="182880" cy="0"/>
+          </a:xfrm>
+          <a:prstGeom prst="bentConnector3">
+            <a:avLst/>
+          </a:prstGeom>
+          <a:ln w="19050">
+            <a:solidFill>
+              <a:srgbClr val="8A8880"/>
+            </a:solidFill>
+            <a:tailEnd type="triangle" w="med" len="med"/>
+          </a:ln>
+          <a:effectLst/>
+        </p:spPr>
+        <p:style>
+          <a:lnRef idx="2">
+            <a:schemeClr val="accent1"/>
+          </a:lnRef>
+          <a:fillRef idx="0">
+            <a:schemeClr val="accent1"/>
+          </a:fillRef>
+          <a:effectRef idx="1">
+            <a:schemeClr val="accent1"/>
+          </a:effectRef>
+          <a:fontRef idx="minor">
+            <a:schemeClr val="tx1"/>
+          </a:fontRef>
+        </p:style>
+      </p:cxnSp>
+      <p:sp>
+        <p:nvSpPr>
+          <p:cNvPr id="213" name="Rounded Rectangle 212"/>
+          <p:cNvSpPr/>
+          <p:nvPr/>
+        </p:nvSpPr>
+        <p:spPr>
+          <a:xfrm>
+            <a:off x="502920" y="3063240"/>
+            <a:ext cx="2615184" cy="1005840"/>
+          </a:xfrm>
+          <a:prstGeom prst="roundRect">
+            <a:avLst>
+              <a:gd name="adj" fmla="val 10000"/>
+            </a:avLst>
+          </a:prstGeom>
+          <a:solidFill>
+            <a:srgbClr val="F2F4F7"/>
+          </a:solidFill>
+          <a:ln w="15240">
+            <a:solidFill>
+              <a:srgbClr val="C9C8C2"/>
+            </a:solidFill>
+          </a:ln>
+          <a:effectLst/>
+        </p:spPr>
+        <p:style>
+          <a:lnRef idx="1">
+            <a:schemeClr val="accent1"/>
+          </a:lnRef>
+          <a:fillRef idx="3">
+            <a:schemeClr val="accent1"/>
+          </a:fillRef>
+          <a:effectRef idx="2">
+            <a:schemeClr val="accent1"/>
+          </a:effectRef>
+          <a:fontRef idx="minor">
+            <a:schemeClr val="lt1"/>
+          </a:fontRef>
+        </p:style>
+        <p:txBody>
+          <a:bodyPr rtlCol="0" anchor="ctr" wrap="square" lIns="54864" rIns="54864" tIns="27432" bIns="27432"/>
+          <a:lstStyle/>
+          <a:p>
+            <a:pPr algn="ctr">
+              <a:defRPr sz="1150" b="1">
+                <a:solidFill>
+                  <a:srgbClr val="0B0B0B"/>
+                </a:solidFill>
+              </a:defRPr>
+            </a:pPr>
+            <a:r>
+              <a:t>Tokenise</a:t>
+            </a:r>
+          </a:p>
+          <a:p>
+            <a:pPr algn="ctr">
+              <a:defRPr sz="880">
+                <a:solidFill>
+                  <a:srgbClr val="52514E"/>
+                </a:solidFill>
+              </a:defRPr>
+            </a:pPr>
+            <a:r>
+              <a:t>[BOS v₁-links SEP v₂-links</a:t>
+            </a:r>
+            <a:br/>
+            <a:r>
+              <a:t>SEP … EOS] · vocab 84</a:t>
+            </a:r>
+            <a:br/>
+            <a:r>
+              <a:t>one string = whole fleet</a:t>
+            </a:r>
+          </a:p>
+        </p:txBody>
+      </p:sp>
+      <p:sp>
+        <p:nvSpPr>
+          <p:cNvPr id="214" name="Rounded Rectangle 213"/>
+          <p:cNvSpPr/>
+          <p:nvPr/>
+        </p:nvSpPr>
+        <p:spPr>
+          <a:xfrm>
+            <a:off x="3319272" y="3063240"/>
+            <a:ext cx="2615184" cy="1005840"/>
+          </a:xfrm>
+          <a:prstGeom prst="roundRect">
+            <a:avLst>
+              <a:gd name="adj" fmla="val 10000"/>
+            </a:avLst>
+          </a:prstGeom>
+          <a:solidFill>
+            <a:srgbClr val="F2F4F7"/>
+          </a:solidFill>
+          <a:ln w="15240">
+            <a:solidFill>
+              <a:srgbClr val="C9C8C2"/>
+            </a:solidFill>
+          </a:ln>
+          <a:effectLst/>
+        </p:spPr>
+        <p:style>
+          <a:lnRef idx="1">
+            <a:schemeClr val="accent1"/>
+          </a:lnRef>
+          <a:fillRef idx="3">
+            <a:schemeClr val="accent1"/>
+          </a:fillRef>
+          <a:effectRef idx="2">
+            <a:schemeClr val="accent1"/>
+          </a:effectRef>
+          <a:fontRef idx="minor">
+            <a:schemeClr val="lt1"/>
+          </a:fontRef>
+        </p:style>
+        <p:txBody>
+          <a:bodyPr rtlCol="0" anchor="ctr" wrap="square" lIns="54864" rIns="54864" tIns="27432" bIns="27432"/>
+          <a:lstStyle/>
+          <a:p>
+            <a:pPr algn="ctr">
+              <a:defRPr sz="1150" b="1">
+                <a:solidFill>
+                  <a:srgbClr val="0B0B0B"/>
+                </a:solidFill>
+              </a:defRPr>
+            </a:pPr>
+            <a:r>
+              <a:t>Teacher forcing</a:t>
+            </a:r>
+          </a:p>
+          <a:p>
+            <a:pPr algn="ctr">
+              <a:defRPr sz="880">
+                <a:solidFill>
+                  <a:srgbClr val="52514E"/>
+                </a:solidFill>
+              </a:defRPr>
+            </a:pPr>
+            <a:r>
+              <a:t>predict the next link token</a:t>
+            </a:r>
+            <a:br/>
+            <a:r>
+              <a:t>cross-entropy (PAD ignored)</a:t>
+            </a:r>
+            <a:br/>
+            <a:r>
+              <a:t>AdamW 3e-4 · batch 32 · 60 ep</a:t>
+            </a:r>
+          </a:p>
+        </p:txBody>
+      </p:sp>
+      <p:sp>
+        <p:nvSpPr>
+          <p:cNvPr id="215" name="Rounded Rectangle 214"/>
+          <p:cNvSpPr/>
+          <p:nvPr/>
+        </p:nvSpPr>
+        <p:spPr>
+          <a:xfrm>
+            <a:off x="6135624" y="3063240"/>
+            <a:ext cx="2615184" cy="1005840"/>
+          </a:xfrm>
+          <a:prstGeom prst="roundRect">
+            <a:avLst>
+              <a:gd name="adj" fmla="val 10000"/>
+            </a:avLst>
+          </a:prstGeom>
+          <a:solidFill>
+            <a:srgbClr val="FDF1E9"/>
+          </a:solidFill>
+          <a:ln w="15240">
+            <a:solidFill>
+              <a:srgbClr val="EB6834"/>
+            </a:solidFill>
+          </a:ln>
+          <a:effectLst/>
+        </p:spPr>
+        <p:style>
+          <a:lnRef idx="1">
+            <a:schemeClr val="accent1"/>
+          </a:lnRef>
+          <a:fillRef idx="3">
+            <a:schemeClr val="accent1"/>
+          </a:fillRef>
+          <a:effectRef idx="2">
+            <a:schemeClr val="accent1"/>
+          </a:effectRef>
+          <a:fontRef idx="minor">
+            <a:schemeClr val="lt1"/>
+          </a:fontRef>
+        </p:style>
+        <p:txBody>
+          <a:bodyPr rtlCol="0" anchor="ctr" wrap="square" lIns="54864" rIns="54864" tIns="27432" bIns="27432"/>
+          <a:lstStyle/>
+          <a:p>
+            <a:pPr algn="ctr">
+              <a:defRPr sz="1150" b="1">
+                <a:solidFill>
+                  <a:srgbClr val="0B0B0B"/>
+                </a:solidFill>
+              </a:defRPr>
+            </a:pPr>
+            <a:r>
+              <a:t>Select by GENERATION</a:t>
+            </a:r>
+          </a:p>
+          <a:p>
+            <a:pPr algn="ctr">
+              <a:defRPr sz="880">
+                <a:solidFill>
+                  <a:srgbClr val="52514E"/>
+                </a:solidFill>
+              </a:defRPr>
+            </a:pPr>
+            <a:r>
+              <a:t>each epoch: masked-greedy</a:t>
+            </a:r>
+            <a:br/>
+            <a:r>
+              <a:t>decode 150 val cases →</a:t>
+            </a:r>
+            <a:br/>
+            <a:r>
+              <a:t>TRUE objective gap</a:t>
+            </a:r>
+          </a:p>
+        </p:txBody>
+      </p:sp>
+      <p:sp>
+        <p:nvSpPr>
+          <p:cNvPr id="216" name="Rounded Rectangle 215"/>
+          <p:cNvSpPr/>
+          <p:nvPr/>
+        </p:nvSpPr>
+        <p:spPr>
+          <a:xfrm>
+            <a:off x="8951976" y="3063240"/>
+            <a:ext cx="2615184" cy="1005840"/>
+          </a:xfrm>
+          <a:prstGeom prst="roundRect">
+            <a:avLst>
+              <a:gd name="adj" fmla="val 10000"/>
+            </a:avLst>
+          </a:prstGeom>
+          <a:solidFill>
+            <a:srgbClr val="F2F4F7"/>
+          </a:solidFill>
+          <a:ln w="15240">
+            <a:solidFill>
+              <a:srgbClr val="C9C8C2"/>
+            </a:solidFill>
+          </a:ln>
+          <a:effectLst/>
+        </p:spPr>
+        <p:style>
+          <a:lnRef idx="1">
+            <a:schemeClr val="accent1"/>
+          </a:lnRef>
+          <a:fillRef idx="3">
+            <a:schemeClr val="accent1"/>
+          </a:fillRef>
+          <a:effectRef idx="2">
+            <a:schemeClr val="accent1"/>
+          </a:effectRef>
+          <a:fontRef idx="minor">
+            <a:schemeClr val="lt1"/>
+          </a:fontRef>
+        </p:style>
+        <p:txBody>
+          <a:bodyPr rtlCol="0" anchor="ctr" wrap="square" lIns="54864" rIns="54864" tIns="27432" bIns="27432"/>
+          <a:lstStyle/>
+          <a:p>
+            <a:pPr algn="ctr">
+              <a:defRPr sz="1150" b="1">
+                <a:solidFill>
+                  <a:srgbClr val="0B0B0B"/>
+                </a:solidFill>
+              </a:defRPr>
+            </a:pPr>
+            <a:r>
+              <a:t>Best checkpoint</a:t>
+            </a:r>
+          </a:p>
+          <a:p>
+            <a:pPr algn="ctr">
+              <a:defRPr sz="880">
+                <a:solidFill>
+                  <a:srgbClr val="52514E"/>
+                </a:solidFill>
+              </a:defRPr>
+            </a:pPr>
+            <a:r>
+              <a:t>1.04 M params</a:t>
+            </a:r>
+            <a:br/>
+            <a:r>
+              <a:t>3 seeds · ~4 min/seed</a:t>
+            </a:r>
+            <a:br/>
+            <a:r>
+              <a:t>(one RTX 3090)</a:t>
+            </a:r>
+          </a:p>
+        </p:txBody>
+      </p:sp>
+      <p:cxnSp>
+        <p:nvCxnSpPr>
+          <p:cNvPr id="217" name="Connector 216"/>
+          <p:cNvCxnSpPr>
+            <a:stCxn id="213" idx="3"/>
+            <a:endCxn id="214" idx="1"/>
+          </p:cNvCxnSpPr>
+          <p:nvPr/>
+        </p:nvCxnSpPr>
+        <p:spPr>
+          <a:xfrm flipV="1">
+            <a:off x="3118104" y="3566160"/>
+            <a:ext cx="201168" cy="0"/>
+          </a:xfrm>
+          <a:prstGeom prst="bentConnector3">
+            <a:avLst/>
+          </a:prstGeom>
+          <a:ln w="19050">
+            <a:solidFill>
+              <a:srgbClr val="8A8880"/>
+            </a:solidFill>
+            <a:tailEnd type="triangle" w="med" len="med"/>
+          </a:ln>
+          <a:effectLst/>
+        </p:spPr>
+        <p:style>
+          <a:lnRef idx="2">
+            <a:schemeClr val="accent1"/>
+          </a:lnRef>
+          <a:fillRef idx="0">
+            <a:schemeClr val="accent1"/>
+          </a:fillRef>
+          <a:effectRef idx="1">
+            <a:schemeClr val="accent1"/>
+          </a:effectRef>
+          <a:fontRef idx="minor">
+            <a:schemeClr val="tx1"/>
+          </a:fontRef>
+        </p:style>
+      </p:cxnSp>
+      <p:cxnSp>
+        <p:nvCxnSpPr>
+          <p:cNvPr id="218" name="Connector 217"/>
+          <p:cNvCxnSpPr>
+            <a:stCxn id="214" idx="3"/>
+            <a:endCxn id="215" idx="1"/>
+          </p:cNvCxnSpPr>
+          <p:nvPr/>
+        </p:nvCxnSpPr>
+        <p:spPr>
+          <a:xfrm flipV="1">
+            <a:off x="5934456" y="3566160"/>
+            <a:ext cx="201168" cy="0"/>
+          </a:xfrm>
+          <a:prstGeom prst="bentConnector3">
+            <a:avLst/>
+          </a:prstGeom>
+          <a:ln w="19050">
+            <a:solidFill>
+              <a:srgbClr val="8A8880"/>
+            </a:solidFill>
+            <a:tailEnd type="triangle" w="med" len="med"/>
+          </a:ln>
+          <a:effectLst/>
+        </p:spPr>
+        <p:style>
+          <a:lnRef idx="2">
+            <a:schemeClr val="accent1"/>
+          </a:lnRef>
+          <a:fillRef idx="0">
+            <a:schemeClr val="accent1"/>
+          </a:fillRef>
+          <a:effectRef idx="1">
+            <a:schemeClr val="accent1"/>
+          </a:effectRef>
+          <a:fontRef idx="minor">
+            <a:schemeClr val="tx1"/>
+          </a:fontRef>
+        </p:style>
+      </p:cxnSp>
+      <p:cxnSp>
+        <p:nvCxnSpPr>
+          <p:cNvPr id="219" name="Connector 218"/>
+          <p:cNvCxnSpPr>
+            <a:stCxn id="215" idx="3"/>
+            <a:endCxn id="216" idx="1"/>
+          </p:cNvCxnSpPr>
+          <p:nvPr/>
+        </p:nvCxnSpPr>
+        <p:spPr>
+          <a:xfrm flipV="1">
+            <a:off x="8750808" y="3566160"/>
+            <a:ext cx="201168" cy="0"/>
+          </a:xfrm>
+          <a:prstGeom prst="bentConnector3">
+            <a:avLst/>
+          </a:prstGeom>
+          <a:ln w="19050">
+            <a:solidFill>
+              <a:srgbClr val="8A8880"/>
+            </a:solidFill>
+            <a:tailEnd type="triangle" w="med" len="med"/>
+          </a:ln>
+          <a:effectLst/>
+        </p:spPr>
+        <p:style>
+          <a:lnRef idx="2">
+            <a:schemeClr val="accent1"/>
+          </a:lnRef>
+          <a:fillRef idx="0">
+            <a:schemeClr val="accent1"/>
+          </a:fillRef>
+          <a:effectRef idx="1">
+            <a:schemeClr val="accent1"/>
+          </a:effectRef>
+          <a:fontRef idx="minor">
+            <a:schemeClr val="tx1"/>
+          </a:fontRef>
+        </p:style>
+      </p:cxnSp>
+      <p:cxnSp>
+        <p:nvCxnSpPr>
+          <p:cNvPr id="220" name="Connector 219"/>
+          <p:cNvCxnSpPr>
+            <a:stCxn id="208" idx="2"/>
+            <a:endCxn id="213" idx="0"/>
+          </p:cNvCxnSpPr>
+          <p:nvPr/>
+        </p:nvCxnSpPr>
+        <p:spPr>
+          <a:xfrm flipH="1">
+            <a:off x="1810512" y="2423160"/>
+            <a:ext cx="8641080" cy="640080"/>
+          </a:xfrm>
+          <a:prstGeom prst="bentConnector3">
+            <a:avLst/>
+          </a:prstGeom>
+          <a:ln w="19050">
+            <a:solidFill>
+              <a:srgbClr val="8A8880"/>
+            </a:solidFill>
+            <a:tailEnd type="triangle" w="med" len="med"/>
+          </a:ln>
+          <a:effectLst/>
+        </p:spPr>
+        <p:style>
+          <a:lnRef idx="2">
+            <a:schemeClr val="accent1"/>
+          </a:lnRef>
+          <a:fillRef idx="0">
+            <a:schemeClr val="accent1"/>
+          </a:fillRef>
+          <a:effectRef idx="1">
+            <a:schemeClr val="accent1"/>
+          </a:effectRef>
+          <a:fontRef idx="minor">
+            <a:schemeClr val="tx1"/>
+          </a:fontRef>
+        </p:style>
+      </p:cxnSp>
+      <p:sp>
+        <p:nvSpPr>
+          <p:cNvPr id="221" name="TextBox 220"/>
+          <p:cNvSpPr txBox="1"/>
+          <p:nvPr/>
+        </p:nvSpPr>
+        <p:spPr>
+          <a:xfrm>
+            <a:off x="640080" y="4434840"/>
+            <a:ext cx="10972800" cy="914400"/>
+          </a:xfrm>
+          <a:prstGeom prst="rect">
+            <a:avLst/>
+          </a:prstGeom>
+          <a:noFill/>
+        </p:spPr>
+        <p:txBody>
+          <a:bodyPr wrap="square">
+            <a:spAutoFit/>
+          </a:bodyPr>
+          <a:lstStyle/>
+          <a:p>
+            <a:pPr>
+              <a:defRPr sz="1200" b="0"/>
+            </a:pPr>
+            <a:r>
+              <a:t>• Loss is imitation only: next-link cross-entropy on Gurobi's sequences — no solver, no decoding, no reward inside the training loop</a:t>
+            </a:r>
+          </a:p>
+          <a:p>
+            <a:pPr>
+              <a:defRPr sz="1200" b="1"/>
+            </a:pPr>
+            <a:r>
+              <a:t>• Model selection is NOT the training loss: CE keeps improving while true solution quality can worsen (imitation overfitting) — selecting on generated-solution gap catches this</a:t>
+            </a:r>
+          </a:p>
+          <a:p>
+            <a:pPr>
+              <a:defRPr sz="1200" b="0"/>
+            </a:pPr>
+            <a:r>
+              <a:t>• The budget enters twice already at training time: as an input feature ([ρᵥ, Bᵥ/H] in the task token) and inside the validation decoder's feasibility mask</a:t>
+            </a:r>
+          </a:p>
+          <a:p>
+            <a:pPr>
+              <a:defRPr sz="1200" b="0"/>
+            </a:pPr>
+            <a:r>
+              <a:t>• Everything above runs once; retraining is ~20 min end-to-end (farm + 3 seeds)</a:t>
+            </a:r>
+          </a:p>
+        </p:txBody>
+      </p:sp>
+    </p:spTree>
+  </p:cSld>
+  <p:clrMapOvr>
+    <a:masterClrMapping/>
+  </p:clrMapOvr>
+</p:sld>
+</file>
+
+<file path=ppt/slides/slide23.xml><?xml version="1.0" encoding="utf-8"?>
+<p:sld xmlns:a="http://schemas.openxmlformats.org/drawingml/2006/main" xmlns:p="http://schemas.openxmlformats.org/presentationml/2006/main" xmlns:r="http://schemas.openxmlformats.org/officeDocument/2006/relationships">
+  <p:cSld>
+    <p:spTree>
+      <p:nvGrpSpPr>
+        <p:cNvPr id="1" name=""/>
+        <p:cNvGrpSpPr/>
+        <p:nvPr/>
+      </p:nvGrpSpPr>
+      <p:grpSpPr/>
+      <p:sp>
+        <p:nvSpPr>
+          <p:cNvPr id="7" name="文本占位符 6">
+            <a:extLst>
+              <a:ext uri="{FF2B5EF4-FFF2-40B4-BE49-F238E27FC236}">
+                <a16:creationId xmlns:a16="http://schemas.microsoft.com/office/drawing/2014/main" id="{33AE8DB3-4C29-0DE3-EB73-8D2BBFBB8CBF}"/>
+              </a:ext>
+            </a:extLst>
+          </p:cNvPr>
+          <p:cNvSpPr>
+            <a:spLocks noGrp="1"/>
+          </p:cNvSpPr>
+          <p:nvPr>
+            <p:ph type="body" sz="quarter" idx="11"/>
+          </p:nvPr>
+        </p:nvSpPr>
+        <p:spPr>
+          <a:xfrm>
+            <a:off x="336550" y="58738"/>
+            <a:ext cx="5759450" cy="622300"/>
+          </a:xfrm>
+        </p:spPr>
+        <p:txBody>
+          <a:bodyPr/>
+          <a:lstStyle/>
+          <a:p>
+            <a:r>
+              <a:rPr lang="en-US" altLang="zh-CN" dirty="0"/>
+              <a:t>Pipeline 2 / 2</a:t>
+            </a:r>
+            <a:endParaRPr lang="zh-CN" altLang="en-US" dirty="0"/>
+          </a:p>
+        </p:txBody>
+      </p:sp>
+      <p:sp>
+        <p:nvSpPr>
+          <p:cNvPr id="203" name="文本占位符 5">
+            <a:extLst>
+              <a:ext uri="{FF2B5EF4-FFF2-40B4-BE49-F238E27FC236}">
+                <a16:creationId xmlns:a16="http://schemas.microsoft.com/office/drawing/2014/main" id="{A219F0BA-71F5-BA11-CCBD-9327897B98CC}"/>
+              </a:ext>
+            </a:extLst>
+          </p:cNvPr>
+          <p:cNvSpPr>
+            <a:spLocks noGrp="1"/>
+          </p:cNvSpPr>
+          <p:nvPr>
+            <p:ph type="body" sz="quarter" idx="10"/>
+          </p:nvPr>
+        </p:nvSpPr>
+        <p:spPr>
+          <a:xfrm>
+            <a:off x="0" y="820290"/>
+            <a:ext cx="5878224" cy="638175"/>
+          </a:xfrm>
+        </p:spPr>
+        <p:txBody>
+          <a:bodyPr/>
+          <a:lstStyle/>
+          <a:p>
+            <a:r>
+              <a:rPr lang="en-US" altLang="zh-CN" sz="2800" dirty="0"/>
+              <a:t>Generation (online, per case)</a:t>
+            </a:r>
+            <a:endParaRPr lang="zh-CN" altLang="en-US" sz="2800" dirty="0"/>
+          </a:p>
+        </p:txBody>
+      </p:sp>
+      <p:sp>
+        <p:nvSpPr>
+          <p:cNvPr id="204" name="Rounded Rectangle 203"/>
+          <p:cNvSpPr/>
+          <p:nvPr/>
+        </p:nvSpPr>
+        <p:spPr>
+          <a:xfrm>
+            <a:off x="502920" y="1600200"/>
+            <a:ext cx="2148840" cy="1097280"/>
+          </a:xfrm>
+          <a:prstGeom prst="roundRect">
+            <a:avLst>
+              <a:gd name="adj" fmla="val 10000"/>
+            </a:avLst>
+          </a:prstGeom>
+          <a:solidFill>
+            <a:srgbClr val="F2F4F7"/>
+          </a:solidFill>
+          <a:ln w="15240">
+            <a:solidFill>
+              <a:srgbClr val="C9C8C2"/>
+            </a:solidFill>
+          </a:ln>
+          <a:effectLst/>
+        </p:spPr>
+        <p:style>
+          <a:lnRef idx="1">
+            <a:schemeClr val="accent1"/>
+          </a:lnRef>
+          <a:fillRef idx="3">
+            <a:schemeClr val="accent1"/>
+          </a:fillRef>
+          <a:effectRef idx="2">
+            <a:schemeClr val="accent1"/>
+          </a:effectRef>
+          <a:fontRef idx="minor">
+            <a:schemeClr val="lt1"/>
+          </a:fontRef>
+        </p:style>
+        <p:txBody>
+          <a:bodyPr rtlCol="0" anchor="ctr" wrap="square" lIns="54864" rIns="54864" tIns="27432" bIns="27432"/>
+          <a:lstStyle/>
+          <a:p>
+            <a:pPr algn="ctr">
+              <a:defRPr sz="1150" b="1">
+                <a:solidFill>
+                  <a:srgbClr val="0B0B0B"/>
+                </a:solidFill>
+              </a:defRPr>
+            </a:pPr>
+            <a:r>
+              <a:t>New case</a:t>
+            </a:r>
+          </a:p>
+          <a:p>
+            <a:pPr algn="ctr">
+              <a:defRPr sz="880">
+                <a:solidFill>
+                  <a:srgbClr val="52514E"/>
+                </a:solidFill>
+              </a:defRPr>
+            </a:pPr>
+            <a:r>
+              <a:t>today's δ</a:t>
+            </a:r>
+            <a:br/>
+            <a:r>
+              <a:t>V tasks (o, d, t₀, B)</a:t>
+            </a:r>
+          </a:p>
+        </p:txBody>
+      </p:sp>
+      <p:sp>
+        <p:nvSpPr>
+          <p:cNvPr id="205" name="Rounded Rectangle 204"/>
+          <p:cNvSpPr/>
+          <p:nvPr/>
+        </p:nvSpPr>
+        <p:spPr>
+          <a:xfrm>
+            <a:off x="2971800" y="1600200"/>
+            <a:ext cx="2514600" cy="1097280"/>
+          </a:xfrm>
+          <a:prstGeom prst="roundRect">
+            <a:avLst>
+              <a:gd name="adj" fmla="val 10000"/>
+            </a:avLst>
+          </a:prstGeom>
+          <a:solidFill>
+            <a:srgbClr val="F2F4F7"/>
+          </a:solidFill>
+          <a:ln w="15240">
+            <a:solidFill>
+              <a:srgbClr val="C9C8C2"/>
+            </a:solidFill>
+          </a:ln>
+          <a:effectLst/>
+        </p:spPr>
+        <p:style>
+          <a:lnRef idx="1">
+            <a:schemeClr val="accent1"/>
+          </a:lnRef>
+          <a:fillRef idx="3">
+            <a:schemeClr val="accent1"/>
+          </a:fillRef>
+          <a:effectRef idx="2">
+            <a:schemeClr val="accent1"/>
+          </a:effectRef>
+          <a:fontRef idx="minor">
+            <a:schemeClr val="lt1"/>
+          </a:fontRef>
+        </p:style>
+        <p:txBody>
+          <a:bodyPr rtlCol="0" anchor="ctr" wrap="square" lIns="54864" rIns="54864" tIns="27432" bIns="27432"/>
+          <a:lstStyle/>
+          <a:p>
+            <a:pPr algn="ctr">
+              <a:defRPr sz="1150" b="1">
+                <a:solidFill>
+                  <a:srgbClr val="0B0B0B"/>
+                </a:solidFill>
+              </a:defRPr>
+            </a:pPr>
+            <a:r>
+              <a:t>Encoder — runs ONCE</a:t>
+            </a:r>
+          </a:p>
+          <a:p>
+            <a:pPr algn="ctr">
+              <a:defRPr sz="880">
+                <a:solidFill>
+                  <a:srgbClr val="52514E"/>
+                </a:solidFill>
+              </a:defRPr>
+            </a:pPr>
+            <a:r>
+              <a:t>80 link tokens + V task</a:t>
+            </a:r>
+            <a:br/>
+            <a:r>
+              <a:t>tokens → case memory</a:t>
+            </a:r>
+          </a:p>
+        </p:txBody>
+      </p:sp>
+      <p:sp>
+        <p:nvSpPr>
+          <p:cNvPr id="206" name="Rounded Rectangle 205"/>
+          <p:cNvSpPr/>
+          <p:nvPr/>
+        </p:nvSpPr>
+        <p:spPr>
+          <a:xfrm>
+            <a:off x="5806440" y="1600200"/>
+            <a:ext cx="3246120" cy="1097280"/>
+          </a:xfrm>
+          <a:prstGeom prst="roundRect">
+            <a:avLst>
+              <a:gd name="adj" fmla="val 10000"/>
+            </a:avLst>
+          </a:prstGeom>
+          <a:solidFill>
+            <a:srgbClr val="FDF1E9"/>
+          </a:solidFill>
+          <a:ln w="15240">
+            <a:solidFill>
+              <a:srgbClr val="EB6834"/>
+            </a:solidFill>
+          </a:ln>
+          <a:effectLst/>
+        </p:spPr>
+        <p:style>
+          <a:lnRef idx="1">
+            <a:schemeClr val="accent1"/>
+          </a:lnRef>
+          <a:fillRef idx="3">
+            <a:schemeClr val="accent1"/>
+          </a:fillRef>
+          <a:effectRef idx="2">
+            <a:schemeClr val="accent1"/>
+          </a:effectRef>
+          <a:fontRef idx="minor">
+            <a:schemeClr val="lt1"/>
+          </a:fontRef>
+        </p:style>
+        <p:txBody>
+          <a:bodyPr rtlCol="0" anchor="ctr" wrap="square" lIns="54864" rIns="54864" tIns="27432" bIns="27432"/>
+          <a:lstStyle/>
+          <a:p>
+            <a:pPr algn="ctr">
+              <a:defRPr sz="1150" b="1">
+                <a:solidFill>
+                  <a:srgbClr val="0B0B0B"/>
+                </a:solidFill>
+              </a:defRPr>
+            </a:pPr>
+            <a:r>
+              <a:t>Autoregressive step</a:t>
+            </a:r>
+          </a:p>
+          <a:p>
+            <a:pPr algn="ctr">
+              <a:defRPr sz="880">
+                <a:solidFill>
+                  <a:srgbClr val="52514E"/>
+                </a:solidFill>
+              </a:defRPr>
+            </a:pPr>
+            <a:r>
+              <a:t>decoder → logits over 84</a:t>
+            </a:r>
+            <a:br/>
+            <a:r>
+              <a:t>+ feasibility mask (−∞)</a:t>
+            </a:r>
+            <a:br/>
+            <a:r>
+              <a:t>→ argmax next link</a:t>
+            </a:r>
+          </a:p>
+        </p:txBody>
+      </p:sp>
+      <p:sp>
+        <p:nvSpPr>
+          <p:cNvPr id="207" name="Rounded Rectangle 206"/>
+          <p:cNvSpPr/>
+          <p:nvPr/>
+        </p:nvSpPr>
+        <p:spPr>
+          <a:xfrm>
+            <a:off x="9646920" y="1600200"/>
+            <a:ext cx="2057400" cy="1097280"/>
+          </a:xfrm>
+          <a:prstGeom prst="roundRect">
+            <a:avLst>
+              <a:gd name="adj" fmla="val 10000"/>
+            </a:avLst>
+          </a:prstGeom>
+          <a:solidFill>
+            <a:srgbClr val="F2F4F7"/>
+          </a:solidFill>
+          <a:ln w="15240">
+            <a:solidFill>
+              <a:srgbClr val="C9C8C2"/>
+            </a:solidFill>
+          </a:ln>
+          <a:effectLst/>
+        </p:spPr>
+        <p:style>
+          <a:lnRef idx="1">
+            <a:schemeClr val="accent1"/>
+          </a:lnRef>
+          <a:fillRef idx="3">
+            <a:schemeClr val="accent1"/>
+          </a:fillRef>
+          <a:effectRef idx="2">
+            <a:schemeClr val="accent1"/>
+          </a:effectRef>
+          <a:fontRef idx="minor">
+            <a:schemeClr val="lt1"/>
+          </a:fontRef>
+        </p:style>
+        <p:txBody>
+          <a:bodyPr rtlCol="0" anchor="ctr" wrap="square" lIns="54864" rIns="54864" tIns="27432" bIns="27432"/>
+          <a:lstStyle/>
+          <a:p>
+            <a:pPr algn="ctr">
+              <a:defRPr sz="1150" b="1">
+                <a:solidFill>
+                  <a:srgbClr val="0B0B0B"/>
+                </a:solidFill>
+              </a:defRPr>
+            </a:pPr>
+            <a:r>
+              <a:t>V routes</a:t>
+            </a:r>
+          </a:p>
+          <a:p>
+            <a:pPr algn="ctr">
+              <a:defRPr sz="880">
+                <a:solidFill>
+                  <a:srgbClr val="52514E"/>
+                </a:solidFill>
+              </a:defRPr>
+            </a:pPr>
+            <a:r>
+              <a:t>feasible by</a:t>
+            </a:r>
+            <a:br/>
+            <a:r>
+              <a:t>construction</a:t>
+            </a:r>
+          </a:p>
+        </p:txBody>
+      </p:sp>
+      <p:cxnSp>
+        <p:nvCxnSpPr>
+          <p:cNvPr id="208" name="Connector 207"/>
+          <p:cNvCxnSpPr>
+            <a:stCxn id="204" idx="3"/>
+            <a:endCxn id="205" idx="1"/>
+          </p:cNvCxnSpPr>
+          <p:nvPr/>
+        </p:nvCxnSpPr>
+        <p:spPr>
+          <a:xfrm flipV="1">
+            <a:off x="2651760" y="2148840"/>
+            <a:ext cx="320040" cy="0"/>
+          </a:xfrm>
+          <a:prstGeom prst="bentConnector3">
+            <a:avLst/>
+          </a:prstGeom>
+          <a:ln w="19050">
+            <a:solidFill>
+              <a:srgbClr val="8A8880"/>
+            </a:solidFill>
+            <a:tailEnd type="triangle" w="med" len="med"/>
+          </a:ln>
+          <a:effectLst/>
+        </p:spPr>
+        <p:style>
+          <a:lnRef idx="2">
+            <a:schemeClr val="accent1"/>
+          </a:lnRef>
+          <a:fillRef idx="0">
+            <a:schemeClr val="accent1"/>
+          </a:fillRef>
+          <a:effectRef idx="1">
+            <a:schemeClr val="accent1"/>
+          </a:effectRef>
+          <a:fontRef idx="minor">
+            <a:schemeClr val="tx1"/>
+          </a:fontRef>
+        </p:style>
+      </p:cxnSp>
+      <p:cxnSp>
+        <p:nvCxnSpPr>
+          <p:cNvPr id="209" name="Connector 208"/>
+          <p:cNvCxnSpPr>
+            <a:stCxn id="205" idx="3"/>
+            <a:endCxn id="206" idx="1"/>
+          </p:cNvCxnSpPr>
+          <p:nvPr/>
+        </p:nvCxnSpPr>
+        <p:spPr>
+          <a:xfrm flipV="1">
+            <a:off x="5486400" y="2148840"/>
+            <a:ext cx="320040" cy="0"/>
+          </a:xfrm>
+          <a:prstGeom prst="bentConnector3">
+            <a:avLst/>
+          </a:prstGeom>
+          <a:ln w="19050">
+            <a:solidFill>
+              <a:srgbClr val="8A8880"/>
+            </a:solidFill>
+            <a:tailEnd type="triangle" w="med" len="med"/>
+          </a:ln>
+          <a:effectLst/>
+        </p:spPr>
+        <p:style>
+          <a:lnRef idx="2">
+            <a:schemeClr val="accent1"/>
+          </a:lnRef>
+          <a:fillRef idx="0">
+            <a:schemeClr val="accent1"/>
+          </a:fillRef>
+          <a:effectRef idx="1">
+            <a:schemeClr val="accent1"/>
+          </a:effectRef>
+          <a:fontRef idx="minor">
+            <a:schemeClr val="tx1"/>
+          </a:fontRef>
+        </p:style>
+      </p:cxnSp>
+      <p:cxnSp>
+        <p:nvCxnSpPr>
+          <p:cNvPr id="210" name="Connector 209"/>
+          <p:cNvCxnSpPr>
+            <a:stCxn id="206" idx="3"/>
+            <a:endCxn id="207" idx="1"/>
+          </p:cNvCxnSpPr>
+          <p:nvPr/>
+        </p:nvCxnSpPr>
+        <p:spPr>
+          <a:xfrm flipV="1">
+            <a:off x="9052560" y="2148840"/>
+            <a:ext cx="594360" cy="0"/>
+          </a:xfrm>
+          <a:prstGeom prst="bentConnector3">
+            <a:avLst/>
+          </a:prstGeom>
+          <a:ln w="19050">
+            <a:solidFill>
+              <a:srgbClr val="8A8880"/>
+            </a:solidFill>
+            <a:tailEnd type="triangle" w="med" len="med"/>
+          </a:ln>
+          <a:effectLst/>
+        </p:spPr>
+        <p:style>
+          <a:lnRef idx="2">
+            <a:schemeClr val="accent1"/>
+          </a:lnRef>
+          <a:fillRef idx="0">
+            <a:schemeClr val="accent1"/>
+          </a:fillRef>
+          <a:effectRef idx="1">
+            <a:schemeClr val="accent1"/>
+          </a:effectRef>
+          <a:fontRef idx="minor">
+            <a:schemeClr val="tx1"/>
+          </a:fontRef>
+        </p:style>
+      </p:cxnSp>
+      <p:sp>
+        <p:nvSpPr>
+          <p:cNvPr id="211" name="Rounded Rectangle 210"/>
+          <p:cNvSpPr/>
+          <p:nvPr/>
+        </p:nvSpPr>
+        <p:spPr>
+          <a:xfrm>
+            <a:off x="6080760" y="3154680"/>
+            <a:ext cx="3246120" cy="566928"/>
+          </a:xfrm>
+          <a:prstGeom prst="roundRect">
+            <a:avLst>
+              <a:gd name="adj" fmla="val 10000"/>
+            </a:avLst>
+          </a:prstGeom>
+          <a:solidFill>
+            <a:srgbClr val="F7F7F5"/>
+          </a:solidFill>
+          <a:ln w="15240">
+            <a:solidFill>
+              <a:srgbClr val="8A8880"/>
+            </a:solidFill>
+          </a:ln>
+          <a:effectLst/>
+        </p:spPr>
+        <p:style>
+          <a:lnRef idx="1">
+            <a:schemeClr val="accent1"/>
+          </a:lnRef>
+          <a:fillRef idx="3">
+            <a:schemeClr val="accent1"/>
+          </a:fillRef>
+          <a:effectRef idx="2">
+            <a:schemeClr val="accent1"/>
+          </a:effectRef>
+          <a:fontRef idx="minor">
+            <a:schemeClr val="lt1"/>
+          </a:fontRef>
+        </p:style>
+        <p:txBody>
+          <a:bodyPr rtlCol="0" anchor="ctr" wrap="square" lIns="54864" rIns="54864" tIns="27432" bIns="27432"/>
+          <a:lstStyle/>
+          <a:p>
+            <a:pPr algn="ctr">
+              <a:defRPr sz="950" b="0">
+                <a:solidFill>
+                  <a:srgbClr val="0B0B0B"/>
+                </a:solidFill>
+              </a:defRPr>
+            </a:pPr>
+            <a:r>
+              <a:t>⟲  append token · t += c(l, t) · repeat until EOS</a:t>
+            </a:r>
+          </a:p>
+        </p:txBody>
+      </p:sp>
+      <p:cxnSp>
+        <p:nvCxnSpPr>
+          <p:cNvPr id="212" name="Connector 211"/>
+          <p:cNvCxnSpPr>
+            <a:stCxn id="206" idx="2"/>
+            <a:endCxn id="211" idx="0"/>
+          </p:cNvCxnSpPr>
+          <p:nvPr/>
+        </p:nvCxnSpPr>
+        <p:spPr>
+          <a:xfrm>
+            <a:off x="7429500" y="2697480"/>
+            <a:ext cx="274320" cy="457200"/>
+          </a:xfrm>
+          <a:prstGeom prst="bentConnector3">
+            <a:avLst/>
+          </a:prstGeom>
+          <a:ln w="19050">
+            <a:solidFill>
+              <a:srgbClr val="8A8880"/>
+            </a:solidFill>
+            <a:tailEnd type="triangle" w="med" len="med"/>
+          </a:ln>
+          <a:effectLst/>
+        </p:spPr>
+        <p:style>
+          <a:lnRef idx="2">
+            <a:schemeClr val="accent1"/>
+          </a:lnRef>
+          <a:fillRef idx="0">
+            <a:schemeClr val="accent1"/>
+          </a:fillRef>
+          <a:effectRef idx="1">
+            <a:schemeClr val="accent1"/>
+          </a:effectRef>
+          <a:fontRef idx="minor">
+            <a:schemeClr val="tx1"/>
+          </a:fontRef>
+        </p:style>
+      </p:cxnSp>
+      <p:sp>
+        <p:nvSpPr>
+          <p:cNvPr id="213" name="Rounded Rectangle 212"/>
+          <p:cNvSpPr/>
+          <p:nvPr/>
+        </p:nvSpPr>
+        <p:spPr>
+          <a:xfrm>
+            <a:off x="914400" y="3017520"/>
+            <a:ext cx="4114800" cy="1417320"/>
+          </a:xfrm>
+          <a:prstGeom prst="roundRect">
+            <a:avLst>
+              <a:gd name="adj" fmla="val 10000"/>
+            </a:avLst>
+          </a:prstGeom>
+          <a:solidFill>
+            <a:srgbClr val="FDF1E9"/>
+          </a:solidFill>
+          <a:ln w="15240">
+            <a:solidFill>
+              <a:srgbClr val="EB6834"/>
+            </a:solidFill>
+          </a:ln>
+          <a:effectLst/>
+        </p:spPr>
+        <p:style>
+          <a:lnRef idx="1">
+            <a:schemeClr val="accent1"/>
+          </a:lnRef>
+          <a:fillRef idx="3">
+            <a:schemeClr val="accent1"/>
+          </a:fillRef>
+          <a:effectRef idx="2">
+            <a:schemeClr val="accent1"/>
+          </a:effectRef>
+          <a:fontRef idx="minor">
+            <a:schemeClr val="lt1"/>
+          </a:fontRef>
+        </p:style>
+        <p:txBody>
+          <a:bodyPr rtlCol="0" anchor="ctr" wrap="square" lIns="54864" rIns="54864" tIns="27432" bIns="27432"/>
+          <a:lstStyle/>
+          <a:p>
+            <a:pPr algn="ctr">
+              <a:defRPr sz="1150" b="1">
+                <a:solidFill>
+                  <a:srgbClr val="EB6834"/>
+                </a:solidFill>
+              </a:defRPr>
+            </a:pPr>
+            <a:r>
+              <a:t>Feasibility mask (0 parameters)</a:t>
+            </a:r>
+          </a:p>
+          <a:p>
+            <a:pPr algn="ctr">
+              <a:defRPr sz="919">
+                <a:solidFill>
+                  <a:srgbClr val="52514E"/>
+                </a:solidFill>
+              </a:defRPr>
+            </a:pPr>
+            <a:r>
+              <a:t>① not a road successor / U-turn</a:t>
+            </a:r>
+            <a:br/>
+            <a:r>
+              <a:t>② cannot reach OWN destination by t₀ᵥ + Bᵥ  (TD-Dijkstra query)</a:t>
+            </a:r>
+            <a:br/>
+            <a:r>
+              <a:t>③ SEP only when parked next to own gate; EOS after V SEPs</a:t>
+            </a:r>
+          </a:p>
+        </p:txBody>
+      </p:sp>
+      <p:cxnSp>
+        <p:nvCxnSpPr>
+          <p:cNvPr id="214" name="Connector 213"/>
+          <p:cNvCxnSpPr>
+            <a:stCxn id="213" idx="0"/>
+            <a:endCxn id="206" idx="2"/>
+          </p:cNvCxnSpPr>
+          <p:nvPr/>
+        </p:nvCxnSpPr>
+        <p:spPr>
+          <a:xfrm flipV="1">
+            <a:off x="2971800" y="2697480"/>
+            <a:ext cx="4457700" cy="320040"/>
+          </a:xfrm>
+          <a:prstGeom prst="bentConnector3">
+            <a:avLst/>
+          </a:prstGeom>
+          <a:ln w="19050">
+            <a:solidFill>
+              <a:srgbClr val="EB6834"/>
+            </a:solidFill>
+            <a:tailEnd type="triangle" w="med" len="med"/>
+          </a:ln>
+          <a:effectLst/>
+        </p:spPr>
+        <p:style>
+          <a:lnRef idx="2">
+            <a:schemeClr val="accent1"/>
+          </a:lnRef>
+          <a:fillRef idx="0">
+            <a:schemeClr val="accent1"/>
+          </a:fillRef>
+          <a:effectRef idx="1">
+            <a:schemeClr val="accent1"/>
+          </a:effectRef>
+          <a:fontRef idx="minor">
+            <a:schemeClr val="tx1"/>
+          </a:fontRef>
+        </p:style>
+      </p:cxnSp>
+      <p:sp>
+        <p:nvSpPr>
+          <p:cNvPr id="215" name="TextBox 214"/>
+          <p:cNvSpPr txBox="1"/>
+          <p:nvPr/>
+        </p:nvSpPr>
+        <p:spPr>
+          <a:xfrm>
+            <a:off x="640080" y="4846320"/>
+            <a:ext cx="10972800" cy="914400"/>
+          </a:xfrm>
+          <a:prstGeom prst="rect">
+            <a:avLst/>
+          </a:prstGeom>
+          <a:noFill/>
+        </p:spPr>
+        <p:txBody>
+          <a:bodyPr wrap="square">
+            <a:spAutoFit/>
+          </a:bodyPr>
+          <a:lstStyle/>
+          <a:p>
+            <a:pPr>
+              <a:defRPr sz="1200" b="1"/>
+            </a:pPr>
+            <a:r>
+              <a:t>• 6–9 ms per case on one GPU — including the mask's earliest-arrival queries; no solver call anywhere at deployment</a:t>
+            </a:r>
+          </a:p>
+          <a:p>
+            <a:pPr>
+              <a:defRPr sz="1200" b="1"/>
+            </a:pPr>
+            <a:r>
+              <a:t>• The mask is why unseen budgets stay feasible: feasibility is ENFORCED by rules, the network only ranks the legal moves (the budget has a hard mechanical channel, not just a soft preference from the labels)</a:t>
+            </a:r>
+          </a:p>
+          <a:p>
+            <a:pPr>
+              <a:defRPr sz="1200" b="0"/>
+            </a:pPr>
+            <a:r>
+              <a:t>• SEP ends a vehicle; decoding continues with the next vehicle from its own (o, t₀) — later vehicles see earlier routes through self-attention (coordination)</a:t>
+            </a:r>
+          </a:p>
+          <a:p>
+            <a:pPr>
+              <a:defRPr sz="1200" b="0"/>
+            </a:pPr>
+            <a:r>
+              <a:t>• Today: greedy decoding. Multi-sample (nucleus) decoding is the known next lever — inference-only, no retraining</a:t>
+            </a:r>
+          </a:p>
+        </p:txBody>
+      </p:sp>
+    </p:spTree>
+  </p:cSld>
+  <p:clrMapOvr>
+    <a:masterClrMapping/>
+  </p:clrMapOvr>
+</p:sld>
+</file>
+
+<file path=ppt/slides/slide24.xml><?xml version="1.0" encoding="utf-8"?>
+<p:sld xmlns:a="http://schemas.openxmlformats.org/drawingml/2006/main" xmlns:p="http://schemas.openxmlformats.org/presentationml/2006/main" xmlns:r="http://schemas.openxmlformats.org/officeDocument/2006/relationships">
+  <p:cSld>
+    <p:spTree>
+      <p:nvGrpSpPr>
+        <p:cNvPr id="1" name=""/>
+        <p:cNvGrpSpPr/>
+        <p:nvPr/>
+      </p:nvGrpSpPr>
+      <p:grpSpPr/>
+      <p:sp>
+        <p:nvSpPr>
+          <p:cNvPr id="7" name="文本占位符 6">
+            <a:extLst>
+              <a:ext uri="{FF2B5EF4-FFF2-40B4-BE49-F238E27FC236}">
+                <a16:creationId xmlns:a16="http://schemas.microsoft.com/office/drawing/2014/main" id="{33AE8DB3-4C29-0DE3-EB73-8D2BBFBB8CBF}"/>
+              </a:ext>
+            </a:extLst>
+          </p:cNvPr>
+          <p:cNvSpPr>
+            <a:spLocks noGrp="1"/>
+          </p:cNvSpPr>
+          <p:nvPr>
+            <p:ph type="body" sz="quarter" idx="11"/>
+          </p:nvPr>
+        </p:nvSpPr>
+        <p:spPr>
+          <a:xfrm>
+            <a:off x="336550" y="58738"/>
+            <a:ext cx="5759450" cy="622300"/>
+          </a:xfrm>
+        </p:spPr>
+        <p:txBody>
+          <a:bodyPr/>
+          <a:lstStyle/>
+          <a:p>
+            <a:r>
+              <a:rPr lang="en-US" altLang="zh-CN" dirty="0"/>
+              <a:t>Change (b) — model</a:t>
+            </a:r>
+            <a:endParaRPr lang="zh-CN" altLang="en-US" dirty="0"/>
+          </a:p>
+        </p:txBody>
+      </p:sp>
+      <p:sp>
+        <p:nvSpPr>
+          <p:cNvPr id="203" name="文本占位符 5">
+            <a:extLst>
+              <a:ext uri="{FF2B5EF4-FFF2-40B4-BE49-F238E27FC236}">
+                <a16:creationId xmlns:a16="http://schemas.microsoft.com/office/drawing/2014/main" id="{A219F0BA-71F5-BA11-CCBD-9327897B98CC}"/>
+              </a:ext>
+            </a:extLst>
+          </p:cNvPr>
+          <p:cNvSpPr>
+            <a:spLocks noGrp="1"/>
+          </p:cNvSpPr>
+          <p:nvPr>
+            <p:ph type="body" sz="quarter" idx="10"/>
+          </p:nvPr>
+        </p:nvSpPr>
+        <p:spPr>
+          <a:xfrm>
+            <a:off x="0" y="820290"/>
+            <a:ext cx="5878224" cy="638175"/>
+          </a:xfrm>
+        </p:spPr>
+        <p:txBody>
+          <a:bodyPr/>
+          <a:lstStyle/>
+          <a:p>
+            <a:r>
+              <a:rPr lang="en-US" altLang="zh-CN" sz="2800" dirty="0"/>
+              <a:t>Architecture overview</a:t>
+            </a:r>
+            <a:endParaRPr lang="zh-CN" altLang="en-US" sz="2800" dirty="0"/>
+          </a:p>
+        </p:txBody>
+      </p:sp>
+      <p:sp>
+        <p:nvSpPr>
+          <p:cNvPr id="204" name="Rounded Rectangle 203"/>
+          <p:cNvSpPr/>
+          <p:nvPr/>
+        </p:nvSpPr>
+        <p:spPr>
+          <a:xfrm>
+            <a:off x="502920" y="1645920"/>
+            <a:ext cx="2240280" cy="1371600"/>
+          </a:xfrm>
+          <a:prstGeom prst="roundRect">
+            <a:avLst>
+              <a:gd name="adj" fmla="val 10000"/>
+            </a:avLst>
+          </a:prstGeom>
+          <a:solidFill>
+            <a:srgbClr val="F2F4F7"/>
+          </a:solidFill>
+          <a:ln w="15240">
+            <a:solidFill>
+              <a:srgbClr val="C9C8C2"/>
+            </a:solidFill>
+          </a:ln>
+          <a:effectLst/>
+        </p:spPr>
+        <p:style>
+          <a:lnRef idx="1">
+            <a:schemeClr val="accent1"/>
+          </a:lnRef>
+          <a:fillRef idx="3">
+            <a:schemeClr val="accent1"/>
+          </a:fillRef>
+          <a:effectRef idx="2">
+            <a:schemeClr val="accent1"/>
+          </a:effectRef>
+          <a:fontRef idx="minor">
+            <a:schemeClr val="lt1"/>
+          </a:fontRef>
+        </p:style>
+        <p:txBody>
+          <a:bodyPr rtlCol="0" anchor="ctr" wrap="square" lIns="54864" rIns="54864" tIns="27432" bIns="27432"/>
+          <a:lstStyle/>
+          <a:p>
+            <a:pPr algn="ctr">
+              <a:defRPr sz="1150" b="1">
+                <a:solidFill>
+                  <a:srgbClr val="0B0B0B"/>
+                </a:solidFill>
+              </a:defRPr>
+            </a:pPr>
+            <a:r>
+              <a:t>Inputs</a:t>
+            </a:r>
+          </a:p>
+          <a:p>
+            <a:pPr algn="ctr">
+              <a:defRPr sz="880">
+                <a:solidFill>
+                  <a:srgbClr val="52514E"/>
+                </a:solidFill>
+              </a:defRPr>
+            </a:pPr>
+            <a:r>
+              <a:t>congestion δ (80)</a:t>
+            </a:r>
+            <a:br/>
+            <a:r>
+              <a:t>V tasks</a:t>
+            </a:r>
+            <a:br/>
+            <a:r>
+              <a:t>(o, d, t₀, ρ, B/H)</a:t>
+            </a:r>
+          </a:p>
+        </p:txBody>
+      </p:sp>
+      <p:sp>
+        <p:nvSpPr>
+          <p:cNvPr id="205" name="Rounded Rectangle 204"/>
+          <p:cNvSpPr/>
+          <p:nvPr/>
+        </p:nvSpPr>
+        <p:spPr>
+          <a:xfrm>
+            <a:off x="3154680" y="1645920"/>
+            <a:ext cx="2331720" cy="1371600"/>
+          </a:xfrm>
+          <a:prstGeom prst="roundRect">
+            <a:avLst>
+              <a:gd name="adj" fmla="val 10000"/>
+            </a:avLst>
+          </a:prstGeom>
+          <a:solidFill>
+            <a:srgbClr val="F2F4F7"/>
+          </a:solidFill>
+          <a:ln w="15240">
+            <a:solidFill>
+              <a:srgbClr val="C9C8C2"/>
+            </a:solidFill>
+          </a:ln>
+          <a:effectLst/>
+        </p:spPr>
+        <p:style>
+          <a:lnRef idx="1">
+            <a:schemeClr val="accent1"/>
+          </a:lnRef>
+          <a:fillRef idx="3">
+            <a:schemeClr val="accent1"/>
+          </a:fillRef>
+          <a:effectRef idx="2">
+            <a:schemeClr val="accent1"/>
+          </a:effectRef>
+          <a:fontRef idx="minor">
+            <a:schemeClr val="lt1"/>
+          </a:fontRef>
+        </p:style>
+        <p:txBody>
+          <a:bodyPr rtlCol="0" anchor="ctr" wrap="square" lIns="54864" rIns="54864" tIns="27432" bIns="27432"/>
+          <a:lstStyle/>
+          <a:p>
+            <a:pPr algn="ctr">
+              <a:defRPr sz="1150" b="1">
+                <a:solidFill>
+                  <a:srgbClr val="0B0B0B"/>
+                </a:solidFill>
+              </a:defRPr>
+            </a:pPr>
+            <a:r>
+              <a:t>Transformer encoder</a:t>
+            </a:r>
+          </a:p>
+          <a:p>
+            <a:pPr algn="ctr">
+              <a:defRPr sz="880">
+                <a:solidFill>
+                  <a:srgbClr val="52514E"/>
+                </a:solidFill>
+              </a:defRPr>
+            </a:pPr>
+            <a:r>
+              <a:t>×3 layers · d = 128</a:t>
+            </a:r>
+            <a:br/>
+            <a:r>
+              <a:t>4 heads · pre-norm</a:t>
+            </a:r>
+            <a:br/>
+            <a:r>
+              <a:t>runs once per case</a:t>
+            </a:r>
+          </a:p>
+        </p:txBody>
+      </p:sp>
+      <p:sp>
+        <p:nvSpPr>
+          <p:cNvPr id="206" name="Rounded Rectangle 205"/>
+          <p:cNvSpPr/>
+          <p:nvPr/>
+        </p:nvSpPr>
+        <p:spPr>
+          <a:xfrm>
+            <a:off x="5897880" y="1645920"/>
+            <a:ext cx="2240280" cy="1371600"/>
+          </a:xfrm>
+          <a:prstGeom prst="roundRect">
+            <a:avLst>
+              <a:gd name="adj" fmla="val 10000"/>
+            </a:avLst>
+          </a:prstGeom>
+          <a:solidFill>
+            <a:srgbClr val="EAF1FB"/>
+          </a:solidFill>
+          <a:ln w="15240">
+            <a:solidFill>
+              <a:srgbClr val="2A78D6"/>
+            </a:solidFill>
+          </a:ln>
+          <a:effectLst/>
+        </p:spPr>
+        <p:style>
+          <a:lnRef idx="1">
+            <a:schemeClr val="accent1"/>
+          </a:lnRef>
+          <a:fillRef idx="3">
+            <a:schemeClr val="accent1"/>
+          </a:fillRef>
+          <a:effectRef idx="2">
+            <a:schemeClr val="accent1"/>
+          </a:effectRef>
+          <a:fontRef idx="minor">
+            <a:schemeClr val="lt1"/>
+          </a:fontRef>
+        </p:style>
+        <p:txBody>
+          <a:bodyPr rtlCol="0" anchor="ctr" wrap="square" lIns="54864" rIns="54864" tIns="27432" bIns="27432"/>
+          <a:lstStyle/>
+          <a:p>
+            <a:pPr algn="ctr">
+              <a:defRPr sz="1150" b="1">
+                <a:solidFill>
+                  <a:srgbClr val="2A78D6"/>
+                </a:solidFill>
+              </a:defRPr>
+            </a:pPr>
+            <a:r>
+              <a:t>Case memory</a:t>
+            </a:r>
+          </a:p>
+          <a:p>
+            <a:pPr algn="ctr">
+              <a:defRPr sz="880">
+                <a:solidFill>
+                  <a:srgbClr val="52514E"/>
+                </a:solidFill>
+              </a:defRPr>
+            </a:pPr>
+            <a:r>
+              <a:t>(80 + V) × d</a:t>
+            </a:r>
+          </a:p>
+        </p:txBody>
+      </p:sp>
+      <p:sp>
+        <p:nvSpPr>
+          <p:cNvPr id="207" name="Rounded Rectangle 206"/>
+          <p:cNvSpPr/>
+          <p:nvPr/>
+        </p:nvSpPr>
+        <p:spPr>
+          <a:xfrm>
+            <a:off x="8732520" y="1645920"/>
+            <a:ext cx="2926080" cy="1371600"/>
+          </a:xfrm>
+          <a:prstGeom prst="roundRect">
+            <a:avLst>
+              <a:gd name="adj" fmla="val 10000"/>
+            </a:avLst>
+          </a:prstGeom>
+          <a:solidFill>
+            <a:srgbClr val="F2F4F7"/>
+          </a:solidFill>
+          <a:ln w="15240">
+            <a:solidFill>
+              <a:srgbClr val="C9C8C2"/>
+            </a:solidFill>
+          </a:ln>
+          <a:effectLst/>
+        </p:spPr>
+        <p:style>
+          <a:lnRef idx="1">
+            <a:schemeClr val="accent1"/>
+          </a:lnRef>
+          <a:fillRef idx="3">
+            <a:schemeClr val="accent1"/>
+          </a:fillRef>
+          <a:effectRef idx="2">
+            <a:schemeClr val="accent1"/>
+          </a:effectRef>
+          <a:fontRef idx="minor">
+            <a:schemeClr val="lt1"/>
+          </a:fontRef>
+        </p:style>
+        <p:txBody>
+          <a:bodyPr rtlCol="0" anchor="ctr" wrap="square" lIns="54864" rIns="54864" tIns="27432" bIns="27432"/>
+          <a:lstStyle/>
+          <a:p>
+            <a:pPr algn="ctr">
+              <a:defRPr sz="1150" b="1">
+                <a:solidFill>
+                  <a:srgbClr val="0B0B0B"/>
+                </a:solidFill>
+              </a:defRPr>
+            </a:pPr>
+            <a:r>
+              <a:t>Autoregressive decoder</a:t>
+            </a:r>
+          </a:p>
+          <a:p>
+            <a:pPr algn="ctr">
+              <a:defRPr sz="880">
+                <a:solidFill>
+                  <a:srgbClr val="52514E"/>
+                </a:solidFill>
+              </a:defRPr>
+            </a:pPr>
+            <a:r>
+              <a:t>joint fleet sequence</a:t>
+            </a:r>
+            <a:br/>
+            <a:r>
+              <a:t>×3 blocks → head (84)</a:t>
+            </a:r>
+            <a:br/>
+            <a:r>
+              <a:t>→ masked softmax</a:t>
+            </a:r>
+          </a:p>
+        </p:txBody>
+      </p:sp>
+      <p:sp>
+        <p:nvSpPr>
+          <p:cNvPr id="208" name="Rounded Rectangle 207"/>
+          <p:cNvSpPr/>
+          <p:nvPr/>
+        </p:nvSpPr>
+        <p:spPr>
+          <a:xfrm>
+            <a:off x="8732520" y="3749039"/>
+            <a:ext cx="2926080" cy="1188720"/>
+          </a:xfrm>
+          <a:prstGeom prst="roundRect">
+            <a:avLst>
+              <a:gd name="adj" fmla="val 10000"/>
+            </a:avLst>
+          </a:prstGeom>
+          <a:solidFill>
+            <a:srgbClr val="FDF1E9"/>
+          </a:solidFill>
+          <a:ln w="15240">
+            <a:solidFill>
+              <a:srgbClr val="EB6834"/>
+            </a:solidFill>
+          </a:ln>
+          <a:effectLst/>
+        </p:spPr>
+        <p:style>
+          <a:lnRef idx="1">
+            <a:schemeClr val="accent1"/>
+          </a:lnRef>
+          <a:fillRef idx="3">
+            <a:schemeClr val="accent1"/>
+          </a:fillRef>
+          <a:effectRef idx="2">
+            <a:schemeClr val="accent1"/>
+          </a:effectRef>
+          <a:fontRef idx="minor">
+            <a:schemeClr val="lt1"/>
+          </a:fontRef>
+        </p:style>
+        <p:txBody>
+          <a:bodyPr rtlCol="0" anchor="ctr" wrap="square" lIns="54864" rIns="54864" tIns="27432" bIns="27432"/>
+          <a:lstStyle/>
+          <a:p>
+            <a:pPr algn="ctr">
+              <a:defRPr sz="1150" b="1">
+                <a:solidFill>
+                  <a:srgbClr val="EB6834"/>
+                </a:solidFill>
+              </a:defRPr>
+            </a:pPr>
+            <a:r>
+              <a:t>Feasibility mask</a:t>
+            </a:r>
+          </a:p>
+          <a:p>
+            <a:pPr algn="ctr">
+              <a:defRPr sz="880">
+                <a:solidFill>
+                  <a:srgbClr val="52514E"/>
+                </a:solidFill>
+              </a:defRPr>
+            </a:pPr>
+            <a:r>
+              <a:t>topology · OWN deadline</a:t>
+            </a:r>
+            <a:br/>
+            <a:r>
+              <a:t>t₀ᵥ + Bᵥ · SEP/EOS grammar</a:t>
+            </a:r>
+          </a:p>
+        </p:txBody>
+      </p:sp>
+      <p:sp>
+        <p:nvSpPr>
+          <p:cNvPr id="209" name="Rounded Rectangle 208"/>
+          <p:cNvSpPr/>
+          <p:nvPr/>
+        </p:nvSpPr>
+        <p:spPr>
+          <a:xfrm>
+            <a:off x="5120640" y="3749039"/>
+            <a:ext cx="2651760" cy="1188720"/>
+          </a:xfrm>
+          <a:prstGeom prst="roundRect">
+            <a:avLst>
+              <a:gd name="adj" fmla="val 10000"/>
+            </a:avLst>
+          </a:prstGeom>
+          <a:solidFill>
+            <a:srgbClr val="F2F4F7"/>
+          </a:solidFill>
+          <a:ln w="15240">
+            <a:solidFill>
+              <a:srgbClr val="C9C8C2"/>
+            </a:solidFill>
+          </a:ln>
+          <a:effectLst/>
+        </p:spPr>
+        <p:style>
+          <a:lnRef idx="1">
+            <a:schemeClr val="accent1"/>
+          </a:lnRef>
+          <a:fillRef idx="3">
+            <a:schemeClr val="accent1"/>
+          </a:fillRef>
+          <a:effectRef idx="2">
+            <a:schemeClr val="accent1"/>
+          </a:effectRef>
+          <a:fontRef idx="minor">
+            <a:schemeClr val="lt1"/>
+          </a:fontRef>
+        </p:style>
+        <p:txBody>
+          <a:bodyPr rtlCol="0" anchor="ctr" wrap="square" lIns="54864" rIns="54864" tIns="27432" bIns="27432"/>
+          <a:lstStyle/>
+          <a:p>
+            <a:pPr algn="ctr">
+              <a:defRPr sz="1150" b="1">
+                <a:solidFill>
+                  <a:srgbClr val="0B0B0B"/>
+                </a:solidFill>
+              </a:defRPr>
+            </a:pPr>
+            <a:r>
+              <a:t>Fleet plan</a:t>
+            </a:r>
+          </a:p>
+          <a:p>
+            <a:pPr algn="ctr">
+              <a:defRPr sz="880">
+                <a:solidFill>
+                  <a:srgbClr val="52514E"/>
+                </a:solidFill>
+              </a:defRPr>
+            </a:pPr>
+            <a:r>
+              <a:t>V feasible routes</a:t>
+            </a:r>
+            <a:br/>
+            <a:r>
+              <a:t>6–9 ms per case</a:t>
+            </a:r>
+          </a:p>
+        </p:txBody>
+      </p:sp>
+      <p:cxnSp>
+        <p:nvCxnSpPr>
+          <p:cNvPr id="210" name="Connector 209"/>
+          <p:cNvCxnSpPr>
+            <a:stCxn id="204" idx="3"/>
+            <a:endCxn id="205" idx="1"/>
+          </p:cNvCxnSpPr>
+          <p:nvPr/>
+        </p:nvCxnSpPr>
+        <p:spPr>
+          <a:xfrm flipV="1">
+            <a:off x="2743200" y="2331720"/>
+            <a:ext cx="411480" cy="0"/>
+          </a:xfrm>
+          <a:prstGeom prst="bentConnector3">
+            <a:avLst/>
+          </a:prstGeom>
+          <a:ln w="19050">
+            <a:solidFill>
+              <a:srgbClr val="8A8880"/>
+            </a:solidFill>
+            <a:tailEnd type="triangle" w="med" len="med"/>
+          </a:ln>
+          <a:effectLst/>
+        </p:spPr>
+        <p:style>
+          <a:lnRef idx="2">
+            <a:schemeClr val="accent1"/>
+          </a:lnRef>
+          <a:fillRef idx="0">
+            <a:schemeClr val="accent1"/>
+          </a:fillRef>
+          <a:effectRef idx="1">
+            <a:schemeClr val="accent1"/>
+          </a:effectRef>
+          <a:fontRef idx="minor">
+            <a:schemeClr val="tx1"/>
+          </a:fontRef>
+        </p:style>
+      </p:cxnSp>
+      <p:cxnSp>
+        <p:nvCxnSpPr>
+          <p:cNvPr id="211" name="Connector 210"/>
+          <p:cNvCxnSpPr>
+            <a:stCxn id="205" idx="3"/>
+            <a:endCxn id="206" idx="1"/>
+          </p:cNvCxnSpPr>
+          <p:nvPr/>
+        </p:nvCxnSpPr>
+        <p:spPr>
+          <a:xfrm flipV="1">
+            <a:off x="5486400" y="2331720"/>
+            <a:ext cx="411480" cy="0"/>
+          </a:xfrm>
+          <a:prstGeom prst="bentConnector3">
+            <a:avLst/>
+          </a:prstGeom>
+          <a:ln w="19050">
+            <a:solidFill>
+              <a:srgbClr val="8A8880"/>
+            </a:solidFill>
+            <a:tailEnd type="triangle" w="med" len="med"/>
+          </a:ln>
+          <a:effectLst/>
+        </p:spPr>
+        <p:style>
+          <a:lnRef idx="2">
+            <a:schemeClr val="accent1"/>
+          </a:lnRef>
+          <a:fillRef idx="0">
+            <a:schemeClr val="accent1"/>
+          </a:fillRef>
+          <a:effectRef idx="1">
+            <a:schemeClr val="accent1"/>
+          </a:effectRef>
+          <a:fontRef idx="minor">
+            <a:schemeClr val="tx1"/>
+          </a:fontRef>
+        </p:style>
+      </p:cxnSp>
+      <p:cxnSp>
+        <p:nvCxnSpPr>
+          <p:cNvPr id="212" name="Connector 211"/>
+          <p:cNvCxnSpPr>
+            <a:stCxn id="206" idx="3"/>
+            <a:endCxn id="207" idx="1"/>
+          </p:cNvCxnSpPr>
+          <p:nvPr/>
+        </p:nvCxnSpPr>
+        <p:spPr>
+          <a:xfrm flipV="1">
+            <a:off x="8138160" y="2331720"/>
+            <a:ext cx="594360" cy="0"/>
+          </a:xfrm>
+          <a:prstGeom prst="bentConnector3">
+            <a:avLst/>
+          </a:prstGeom>
+          <a:ln w="19050">
+            <a:solidFill>
+              <a:srgbClr val="8A8880"/>
+            </a:solidFill>
+            <a:tailEnd type="triangle" w="med" len="med"/>
+          </a:ln>
+          <a:effectLst/>
+        </p:spPr>
+        <p:style>
+          <a:lnRef idx="2">
+            <a:schemeClr val="accent1"/>
+          </a:lnRef>
+          <a:fillRef idx="0">
+            <a:schemeClr val="accent1"/>
+          </a:fillRef>
+          <a:effectRef idx="1">
+            <a:schemeClr val="accent1"/>
+          </a:effectRef>
+          <a:fontRef idx="minor">
+            <a:schemeClr val="tx1"/>
+          </a:fontRef>
+        </p:style>
+      </p:cxnSp>
+      <p:cxnSp>
+        <p:nvCxnSpPr>
+          <p:cNvPr id="213" name="Connector 212"/>
+          <p:cNvCxnSpPr>
+            <a:stCxn id="208" idx="0"/>
+            <a:endCxn id="207" idx="2"/>
+          </p:cNvCxnSpPr>
+          <p:nvPr/>
+        </p:nvCxnSpPr>
+        <p:spPr>
+          <a:xfrm flipH="1" flipV="1">
+            <a:off x="10195560" y="3017520"/>
+            <a:ext cx="0" cy="731519"/>
+          </a:xfrm>
+          <a:prstGeom prst="bentConnector3">
+            <a:avLst/>
+          </a:prstGeom>
+          <a:ln w="19050">
+            <a:solidFill>
+              <a:srgbClr val="EB6834"/>
+            </a:solidFill>
+            <a:tailEnd type="triangle" w="med" len="med"/>
+          </a:ln>
+          <a:effectLst/>
+        </p:spPr>
+        <p:style>
+          <a:lnRef idx="2">
+            <a:schemeClr val="accent1"/>
+          </a:lnRef>
+          <a:fillRef idx="0">
+            <a:schemeClr val="accent1"/>
+          </a:fillRef>
+          <a:effectRef idx="1">
+            <a:schemeClr val="accent1"/>
+          </a:effectRef>
+          <a:fontRef idx="minor">
+            <a:schemeClr val="tx1"/>
+          </a:fontRef>
+        </p:style>
+      </p:cxnSp>
+      <p:cxnSp>
+        <p:nvCxnSpPr>
+          <p:cNvPr id="214" name="Connector 213"/>
+          <p:cNvCxnSpPr>
+            <a:stCxn id="207" idx="2"/>
+            <a:endCxn id="209" idx="3"/>
+          </p:cNvCxnSpPr>
+          <p:nvPr/>
+        </p:nvCxnSpPr>
+        <p:spPr>
+          <a:xfrm flipH="1">
+            <a:off x="7772400" y="3017520"/>
+            <a:ext cx="2423160" cy="1325879"/>
+          </a:xfrm>
+          <a:prstGeom prst="bentConnector3">
+            <a:avLst/>
+          </a:prstGeom>
+          <a:ln w="19050">
+            <a:solidFill>
+              <a:srgbClr val="8A8880"/>
+            </a:solidFill>
+            <a:tailEnd type="triangle" w="med" len="med"/>
+          </a:ln>
+          <a:effectLst/>
+        </p:spPr>
+        <p:style>
+          <a:lnRef idx="2">
+            <a:schemeClr val="accent1"/>
+          </a:lnRef>
+          <a:fillRef idx="0">
+            <a:schemeClr val="accent1"/>
+          </a:fillRef>
+          <a:effectRef idx="1">
+            <a:schemeClr val="accent1"/>
+          </a:effectRef>
+          <a:fontRef idx="minor">
+            <a:schemeClr val="tx1"/>
+          </a:fontRef>
+        </p:style>
+      </p:cxnSp>
+      <p:sp>
+        <p:nvSpPr>
+          <p:cNvPr id="215" name="TextBox 214"/>
+          <p:cNvSpPr txBox="1"/>
+          <p:nvPr/>
+        </p:nvSpPr>
+        <p:spPr>
+          <a:xfrm>
+            <a:off x="5760720" y="3127248"/>
+            <a:ext cx="2514600" cy="274320"/>
+          </a:xfrm>
+          <a:prstGeom prst="rect">
+            <a:avLst/>
+          </a:prstGeom>
+          <a:noFill/>
+        </p:spPr>
+        <p:txBody>
+          <a:bodyPr wrap="square">
+            <a:spAutoFit/>
+          </a:bodyPr>
+          <a:lstStyle/>
+          <a:p>
+            <a:pPr algn="ctr">
+              <a:defRPr sz="860" b="0">
+                <a:solidFill>
+                  <a:srgbClr val="52514E"/>
+                </a:solidFill>
+              </a:defRPr>
+            </a:pPr>
+            <a:r>
+              <a:t>the decoder cross-attends to the</a:t>
+            </a:r>
+            <a:br/>
+            <a:r>
+              <a:t>case memory at EVERY step</a:t>
+            </a:r>
+          </a:p>
+        </p:txBody>
+      </p:sp>
+      <p:sp>
+        <p:nvSpPr>
+          <p:cNvPr id="216" name="TextBox 215"/>
+          <p:cNvSpPr txBox="1"/>
+          <p:nvPr/>
+        </p:nvSpPr>
+        <p:spPr>
+          <a:xfrm>
+            <a:off x="640080" y="5349240"/>
+            <a:ext cx="10972800" cy="914400"/>
+          </a:xfrm>
+          <a:prstGeom prst="rect">
+            <a:avLst/>
+          </a:prstGeom>
+          <a:noFill/>
+        </p:spPr>
+        <p:txBody>
+          <a:bodyPr wrap="square">
+            <a:spAutoFit/>
+          </a:bodyPr>
+          <a:lstStyle/>
+          <a:p>
+            <a:pPr>
+              <a:defRPr sz="1200" b="1"/>
+            </a:pPr>
+            <a:r>
+              <a:t>• The two redesign points (details on the next two slides):</a:t>
+            </a:r>
+          </a:p>
+          <a:p>
+            <a:pPr>
+              <a:defRPr sz="1050" b="0"/>
+            </a:pPr>
+            <a:r>
+              <a:t>   – ① instance attributes (o, d, t₀, B) moved OUT of the weights and INTO the input — one model serves every OD, fleet size, departure and budget</a:t>
+            </a:r>
+          </a:p>
+          <a:p>
+            <a:pPr>
+              <a:defRPr sz="1050" b="0"/>
+            </a:pPr>
+            <a:r>
+              <a:t>   – ② the mask threshold is each vehicle's OWN deadline t₀ᵥ + Bᵥ — unseen budgets stay feasible by construction</a:t>
+            </a:r>
+          </a:p>
+          <a:p>
+            <a:pPr>
+              <a:defRPr sz="1200" b="0"/>
+            </a:pPr>
+            <a:r>
+              <a:t>• All diagram elements are native shapes — fully editable (boxes, elbow connectors)</a:t>
+            </a:r>
+          </a:p>
+        </p:txBody>
+      </p:sp>
+    </p:spTree>
+  </p:cSld>
+  <p:clrMapOvr>
+    <a:masterClrMapping/>
+  </p:clrMapOvr>
+</p:sld>
+</file>
+
+<file path=ppt/slides/slide25.xml><?xml version="1.0" encoding="utf-8"?>
+<p:sld xmlns:a="http://schemas.openxmlformats.org/drawingml/2006/main" xmlns:p="http://schemas.openxmlformats.org/presentationml/2006/main" xmlns:r="http://schemas.openxmlformats.org/officeDocument/2006/relationships">
+  <p:cSld>
+    <p:spTree>
+      <p:nvGrpSpPr>
+        <p:cNvPr id="1" name=""/>
+        <p:cNvGrpSpPr/>
+        <p:nvPr/>
+      </p:nvGrpSpPr>
+      <p:grpSpPr/>
+      <p:sp>
+        <p:nvSpPr>
+          <p:cNvPr id="7" name="文本占位符 6">
+            <a:extLst>
+              <a:ext uri="{FF2B5EF4-FFF2-40B4-BE49-F238E27FC236}">
+                <a16:creationId xmlns:a16="http://schemas.microsoft.com/office/drawing/2014/main" id="{33AE8DB3-4C29-0DE3-EB73-8D2BBFBB8CBF}"/>
+              </a:ext>
+            </a:extLst>
+          </p:cNvPr>
+          <p:cNvSpPr>
+            <a:spLocks noGrp="1"/>
+          </p:cNvSpPr>
+          <p:nvPr>
+            <p:ph type="body" sz="quarter" idx="11"/>
+          </p:nvPr>
+        </p:nvSpPr>
+        <p:spPr>
+          <a:xfrm>
+            <a:off x="336550" y="58738"/>
+            <a:ext cx="5759450" cy="622300"/>
+          </a:xfrm>
+        </p:spPr>
+        <p:txBody>
+          <a:bodyPr/>
+          <a:lstStyle/>
+          <a:p>
+            <a:r>
+              <a:rPr lang="en-US" altLang="zh-CN" dirty="0"/>
+              <a:t>Change (b) — model</a:t>
+            </a:r>
+            <a:endParaRPr lang="zh-CN" altLang="en-US" dirty="0"/>
+          </a:p>
+        </p:txBody>
+      </p:sp>
+      <p:sp>
+        <p:nvSpPr>
+          <p:cNvPr id="203" name="文本占位符 5">
+            <a:extLst>
+              <a:ext uri="{FF2B5EF4-FFF2-40B4-BE49-F238E27FC236}">
+                <a16:creationId xmlns:a16="http://schemas.microsoft.com/office/drawing/2014/main" id="{A219F0BA-71F5-BA11-CCBD-9327897B98CC}"/>
+              </a:ext>
+            </a:extLst>
+          </p:cNvPr>
+          <p:cNvSpPr>
+            <a:spLocks noGrp="1"/>
+          </p:cNvSpPr>
+          <p:nvPr>
+            <p:ph type="body" sz="quarter" idx="10"/>
+          </p:nvPr>
+        </p:nvSpPr>
+        <p:spPr>
+          <a:xfrm>
+            <a:off x="0" y="820290"/>
+            <a:ext cx="5878224" cy="638175"/>
+          </a:xfrm>
+        </p:spPr>
+        <p:txBody>
+          <a:bodyPr/>
+          <a:lstStyle/>
+          <a:p>
+            <a:r>
+              <a:rPr lang="en-US" altLang="zh-CN" sz="2800" dirty="0"/>
+              <a:t>Encoder — token construction</a:t>
+            </a:r>
+            <a:endParaRPr lang="zh-CN" altLang="en-US" sz="2800" dirty="0"/>
+          </a:p>
+        </p:txBody>
+      </p:sp>
+      <p:sp>
+        <p:nvSpPr>
+          <p:cNvPr id="204" name="TextBox 203"/>
+          <p:cNvSpPr txBox="1"/>
+          <p:nvPr/>
+        </p:nvSpPr>
+        <p:spPr>
+          <a:xfrm>
+            <a:off x="640080" y="1371600"/>
+            <a:ext cx="4206240" cy="274320"/>
+          </a:xfrm>
+          <a:prstGeom prst="rect">
+            <a:avLst/>
+          </a:prstGeom>
+          <a:noFill/>
+        </p:spPr>
+        <p:txBody>
+          <a:bodyPr wrap="square">
+            <a:spAutoFit/>
+          </a:bodyPr>
+          <a:lstStyle/>
+          <a:p>
+            <a:pPr algn="l">
+              <a:defRPr sz="1150" b="1">
+                <a:solidFill>
+                  <a:srgbClr val="52514E"/>
+                </a:solidFill>
+              </a:defRPr>
+            </a:pPr>
+            <a:r>
+              <a:t>Link tokens  (×80, one per directed link)</a:t>
+            </a:r>
+          </a:p>
+        </p:txBody>
+      </p:sp>
+      <p:sp>
+        <p:nvSpPr>
+          <p:cNvPr id="205" name="Rounded Rectangle 204"/>
+          <p:cNvSpPr/>
+          <p:nvPr/>
+        </p:nvSpPr>
+        <p:spPr>
+          <a:xfrm>
+            <a:off x="640080" y="1691640"/>
+            <a:ext cx="1783080" cy="566928"/>
+          </a:xfrm>
+          <a:prstGeom prst="roundRect">
+            <a:avLst>
+              <a:gd name="adj" fmla="val 10000"/>
+            </a:avLst>
+          </a:prstGeom>
+          <a:solidFill>
+            <a:srgbClr val="F2F4F7"/>
+          </a:solidFill>
+          <a:ln w="15240">
+            <a:solidFill>
+              <a:srgbClr val="C9C8C2"/>
+            </a:solidFill>
+          </a:ln>
+          <a:effectLst/>
+        </p:spPr>
+        <p:style>
+          <a:lnRef idx="1">
+            <a:schemeClr val="accent1"/>
+          </a:lnRef>
+          <a:fillRef idx="3">
+            <a:schemeClr val="accent1"/>
+          </a:fillRef>
+          <a:effectRef idx="2">
+            <a:schemeClr val="accent1"/>
+          </a:effectRef>
+          <a:fontRef idx="minor">
+            <a:schemeClr val="lt1"/>
+          </a:fontRef>
+        </p:style>
+        <p:txBody>
+          <a:bodyPr rtlCol="0" anchor="ctr" wrap="square" lIns="54864" rIns="54864" tIns="27432" bIns="27432"/>
+          <a:lstStyle/>
+          <a:p>
+            <a:pPr algn="ctr">
+              <a:defRPr sz="1000" b="0">
+                <a:solidFill>
+                  <a:srgbClr val="0B0B0B"/>
+                </a:solidFill>
+              </a:defRPr>
+            </a:pPr>
+            <a:r>
+              <a:t>Emb(link id)</a:t>
+            </a:r>
+          </a:p>
+        </p:txBody>
+      </p:sp>
+      <p:sp>
+        <p:nvSpPr>
+          <p:cNvPr id="206" name="Rounded Rectangle 205"/>
+          <p:cNvSpPr/>
+          <p:nvPr/>
+        </p:nvSpPr>
+        <p:spPr>
+          <a:xfrm>
+            <a:off x="2697480" y="1691640"/>
+            <a:ext cx="1783080" cy="566928"/>
+          </a:xfrm>
+          <a:prstGeom prst="roundRect">
+            <a:avLst>
+              <a:gd name="adj" fmla="val 10000"/>
+            </a:avLst>
+          </a:prstGeom>
+          <a:solidFill>
+            <a:srgbClr val="F2F4F7"/>
+          </a:solidFill>
+          <a:ln w="15240">
+            <a:solidFill>
+              <a:srgbClr val="C9C8C2"/>
+            </a:solidFill>
+          </a:ln>
+          <a:effectLst/>
+        </p:spPr>
+        <p:style>
+          <a:lnRef idx="1">
+            <a:schemeClr val="accent1"/>
+          </a:lnRef>
+          <a:fillRef idx="3">
+            <a:schemeClr val="accent1"/>
+          </a:fillRef>
+          <a:effectRef idx="2">
+            <a:schemeClr val="accent1"/>
+          </a:effectRef>
+          <a:fontRef idx="minor">
+            <a:schemeClr val="lt1"/>
+          </a:fontRef>
+        </p:style>
+        <p:txBody>
+          <a:bodyPr rtlCol="0" anchor="ctr" wrap="square" lIns="54864" rIns="54864" tIns="27432" bIns="27432"/>
+          <a:lstStyle/>
+          <a:p>
+            <a:pPr algn="ctr">
+              <a:defRPr sz="1000" b="0">
+                <a:solidFill>
+                  <a:srgbClr val="0B0B0B"/>
+                </a:solidFill>
+              </a:defRPr>
+            </a:pPr>
+            <a:r>
+              <a:t>W · δᵢ</a:t>
+            </a:r>
+          </a:p>
+        </p:txBody>
+      </p:sp>
+      <p:sp>
+        <p:nvSpPr>
+          <p:cNvPr id="207" name="Rounded Rectangle 206"/>
+          <p:cNvSpPr/>
+          <p:nvPr/>
+        </p:nvSpPr>
+        <p:spPr>
+          <a:xfrm>
+            <a:off x="1417320" y="2651760"/>
+            <a:ext cx="2514600" cy="566928"/>
+          </a:xfrm>
+          <a:prstGeom prst="roundRect">
+            <a:avLst>
+              <a:gd name="adj" fmla="val 10000"/>
+            </a:avLst>
+          </a:prstGeom>
+          <a:solidFill>
+            <a:srgbClr val="F2F4F7"/>
+          </a:solidFill>
+          <a:ln w="15240">
+            <a:solidFill>
+              <a:srgbClr val="C9C8C2"/>
+            </a:solidFill>
+          </a:ln>
+          <a:effectLst/>
+        </p:spPr>
+        <p:style>
+          <a:lnRef idx="1">
+            <a:schemeClr val="accent1"/>
+          </a:lnRef>
+          <a:fillRef idx="3">
+            <a:schemeClr val="accent1"/>
+          </a:fillRef>
+          <a:effectRef idx="2">
+            <a:schemeClr val="accent1"/>
+          </a:effectRef>
+          <a:fontRef idx="minor">
+            <a:schemeClr val="lt1"/>
+          </a:fontRef>
+        </p:style>
+        <p:txBody>
+          <a:bodyPr rtlCol="0" anchor="ctr" wrap="square" lIns="54864" rIns="54864" tIns="27432" bIns="27432"/>
+          <a:lstStyle/>
+          <a:p>
+            <a:pPr algn="ctr">
+              <a:defRPr sz="1050" b="1">
+                <a:solidFill>
+                  <a:srgbClr val="0B0B0B"/>
+                </a:solidFill>
+              </a:defRPr>
+            </a:pPr>
+            <a:r>
+              <a:t>link token  (d)</a:t>
+            </a:r>
+          </a:p>
+        </p:txBody>
+      </p:sp>
+      <p:cxnSp>
+        <p:nvCxnSpPr>
+          <p:cNvPr id="208" name="Connector 207"/>
+          <p:cNvCxnSpPr>
+            <a:stCxn id="205" idx="2"/>
+            <a:endCxn id="207" idx="0"/>
+          </p:cNvCxnSpPr>
+          <p:nvPr/>
+        </p:nvCxnSpPr>
+        <p:spPr>
+          <a:xfrm>
+            <a:off x="1531620" y="2258568"/>
+            <a:ext cx="1143000" cy="393192"/>
+          </a:xfrm>
+          <a:prstGeom prst="bentConnector3">
+            <a:avLst/>
+          </a:prstGeom>
+          <a:ln w="19050">
+            <a:solidFill>
+              <a:srgbClr val="8A8880"/>
+            </a:solidFill>
+            <a:tailEnd type="triangle" w="med" len="med"/>
+          </a:ln>
+          <a:effectLst/>
+        </p:spPr>
+        <p:style>
+          <a:lnRef idx="2">
+            <a:schemeClr val="accent1"/>
+          </a:lnRef>
+          <a:fillRef idx="0">
+            <a:schemeClr val="accent1"/>
+          </a:fillRef>
+          <a:effectRef idx="1">
+            <a:schemeClr val="accent1"/>
+          </a:effectRef>
+          <a:fontRef idx="minor">
+            <a:schemeClr val="tx1"/>
+          </a:fontRef>
+        </p:style>
+      </p:cxnSp>
+      <p:cxnSp>
+        <p:nvCxnSpPr>
+          <p:cNvPr id="209" name="Connector 208"/>
+          <p:cNvCxnSpPr>
+            <a:stCxn id="206" idx="2"/>
+            <a:endCxn id="207" idx="0"/>
+          </p:cNvCxnSpPr>
+          <p:nvPr/>
+        </p:nvCxnSpPr>
+        <p:spPr>
+          <a:xfrm flipH="1">
+            <a:off x="2674620" y="2258568"/>
+            <a:ext cx="914400" cy="393192"/>
+          </a:xfrm>
+          <a:prstGeom prst="bentConnector3">
+            <a:avLst/>
+          </a:prstGeom>
+          <a:ln w="19050">
+            <a:solidFill>
+              <a:srgbClr val="8A8880"/>
+            </a:solidFill>
+            <a:tailEnd type="triangle" w="med" len="med"/>
+          </a:ln>
+          <a:effectLst/>
+        </p:spPr>
+        <p:style>
+          <a:lnRef idx="2">
+            <a:schemeClr val="accent1"/>
+          </a:lnRef>
+          <a:fillRef idx="0">
+            <a:schemeClr val="accent1"/>
+          </a:fillRef>
+          <a:effectRef idx="1">
+            <a:schemeClr val="accent1"/>
+          </a:effectRef>
+          <a:fontRef idx="minor">
+            <a:schemeClr val="tx1"/>
+          </a:fontRef>
+        </p:style>
+      </p:cxnSp>
+      <p:sp>
+        <p:nvSpPr>
+          <p:cNvPr id="210" name="TextBox 209"/>
+          <p:cNvSpPr txBox="1"/>
+          <p:nvPr/>
+        </p:nvSpPr>
+        <p:spPr>
+          <a:xfrm>
+            <a:off x="5120640" y="1371600"/>
+            <a:ext cx="6583680" cy="274320"/>
+          </a:xfrm>
+          <a:prstGeom prst="rect">
+            <a:avLst/>
+          </a:prstGeom>
+          <a:noFill/>
+        </p:spPr>
+        <p:txBody>
+          <a:bodyPr wrap="square">
+            <a:spAutoFit/>
+          </a:bodyPr>
+          <a:lstStyle/>
+          <a:p>
+            <a:pPr algn="l">
+              <a:defRPr sz="1150" b="1">
+                <a:solidFill>
+                  <a:srgbClr val="EB6834"/>
+                </a:solidFill>
+              </a:defRPr>
+            </a:pPr>
+            <a:r>
+              <a:t>Task tokens  (×V, one per vehicle — redesign ①: attributes as INPUT)</a:t>
+            </a:r>
+          </a:p>
+        </p:txBody>
+      </p:sp>
+      <p:sp>
+        <p:nvSpPr>
+          <p:cNvPr id="211" name="Rounded Rectangle 210"/>
+          <p:cNvSpPr/>
+          <p:nvPr/>
+        </p:nvSpPr>
+        <p:spPr>
+          <a:xfrm>
+            <a:off x="5120640" y="1691640"/>
+            <a:ext cx="1481328" cy="566928"/>
+          </a:xfrm>
+          <a:prstGeom prst="roundRect">
+            <a:avLst>
+              <a:gd name="adj" fmla="val 10000"/>
+            </a:avLst>
+          </a:prstGeom>
+          <a:solidFill>
+            <a:srgbClr val="F2F4F7"/>
+          </a:solidFill>
+          <a:ln w="15240">
+            <a:solidFill>
+              <a:srgbClr val="C9C8C2"/>
+            </a:solidFill>
+          </a:ln>
+          <a:effectLst/>
+        </p:spPr>
+        <p:style>
+          <a:lnRef idx="1">
+            <a:schemeClr val="accent1"/>
+          </a:lnRef>
+          <a:fillRef idx="3">
+            <a:schemeClr val="accent1"/>
+          </a:fillRef>
+          <a:effectRef idx="2">
+            <a:schemeClr val="accent1"/>
+          </a:effectRef>
+          <a:fontRef idx="minor">
+            <a:schemeClr val="lt1"/>
+          </a:fontRef>
+        </p:style>
+        <p:txBody>
+          <a:bodyPr rtlCol="0" anchor="ctr" wrap="square" lIns="54864" rIns="54864" tIns="27432" bIns="27432"/>
+          <a:lstStyle/>
+          <a:p>
+            <a:pPr algn="ctr">
+              <a:defRPr sz="1000" b="0">
+                <a:solidFill>
+                  <a:srgbClr val="0B0B0B"/>
+                </a:solidFill>
+              </a:defRPr>
+            </a:pPr>
+            <a:r>
+              <a:t>Emb_o(o)</a:t>
+            </a:r>
+          </a:p>
+        </p:txBody>
+      </p:sp>
+      <p:sp>
+        <p:nvSpPr>
+          <p:cNvPr id="212" name="Rounded Rectangle 211"/>
+          <p:cNvSpPr/>
+          <p:nvPr/>
+        </p:nvSpPr>
+        <p:spPr>
+          <a:xfrm>
+            <a:off x="6784848" y="1691640"/>
+            <a:ext cx="1481328" cy="566928"/>
+          </a:xfrm>
+          <a:prstGeom prst="roundRect">
+            <a:avLst>
+              <a:gd name="adj" fmla="val 10000"/>
+            </a:avLst>
+          </a:prstGeom>
+          <a:solidFill>
+            <a:srgbClr val="F2F4F7"/>
+          </a:solidFill>
+          <a:ln w="15240">
+            <a:solidFill>
+              <a:srgbClr val="C9C8C2"/>
+            </a:solidFill>
+          </a:ln>
+          <a:effectLst/>
+        </p:spPr>
+        <p:style>
+          <a:lnRef idx="1">
+            <a:schemeClr val="accent1"/>
+          </a:lnRef>
+          <a:fillRef idx="3">
+            <a:schemeClr val="accent1"/>
+          </a:fillRef>
+          <a:effectRef idx="2">
+            <a:schemeClr val="accent1"/>
+          </a:effectRef>
+          <a:fontRef idx="minor">
+            <a:schemeClr val="lt1"/>
+          </a:fontRef>
+        </p:style>
+        <p:txBody>
+          <a:bodyPr rtlCol="0" anchor="ctr" wrap="square" lIns="54864" rIns="54864" tIns="27432" bIns="27432"/>
+          <a:lstStyle/>
+          <a:p>
+            <a:pPr algn="ctr">
+              <a:defRPr sz="1000" b="0">
+                <a:solidFill>
+                  <a:srgbClr val="0B0B0B"/>
+                </a:solidFill>
+              </a:defRPr>
+            </a:pPr>
+            <a:r>
+              <a:t>Emb_d(d)</a:t>
+            </a:r>
+          </a:p>
+        </p:txBody>
+      </p:sp>
+      <p:sp>
+        <p:nvSpPr>
+          <p:cNvPr id="213" name="Rounded Rectangle 212"/>
+          <p:cNvSpPr/>
+          <p:nvPr/>
+        </p:nvSpPr>
+        <p:spPr>
+          <a:xfrm>
+            <a:off x="8449056" y="1691640"/>
+            <a:ext cx="1481328" cy="566928"/>
+          </a:xfrm>
+          <a:prstGeom prst="roundRect">
+            <a:avLst>
+              <a:gd name="adj" fmla="val 10000"/>
+            </a:avLst>
+          </a:prstGeom>
+          <a:solidFill>
+            <a:srgbClr val="F2F4F7"/>
+          </a:solidFill>
+          <a:ln w="15240">
+            <a:solidFill>
+              <a:srgbClr val="C9C8C2"/>
+            </a:solidFill>
+          </a:ln>
+          <a:effectLst/>
+        </p:spPr>
+        <p:style>
+          <a:lnRef idx="1">
+            <a:schemeClr val="accent1"/>
+          </a:lnRef>
+          <a:fillRef idx="3">
+            <a:schemeClr val="accent1"/>
+          </a:fillRef>
+          <a:effectRef idx="2">
+            <a:schemeClr val="accent1"/>
+          </a:effectRef>
+          <a:fontRef idx="minor">
+            <a:schemeClr val="lt1"/>
+          </a:fontRef>
+        </p:style>
+        <p:txBody>
+          <a:bodyPr rtlCol="0" anchor="ctr" wrap="square" lIns="54864" rIns="54864" tIns="27432" bIns="27432"/>
+          <a:lstStyle/>
+          <a:p>
+            <a:pPr algn="ctr">
+              <a:defRPr sz="1000" b="0">
+                <a:solidFill>
+                  <a:srgbClr val="0B0B0B"/>
+                </a:solidFill>
+              </a:defRPr>
+            </a:pPr>
+            <a:r>
+              <a:t>Proj(t₀)</a:t>
+            </a:r>
+          </a:p>
+        </p:txBody>
+      </p:sp>
+      <p:sp>
+        <p:nvSpPr>
+          <p:cNvPr id="214" name="Rounded Rectangle 213"/>
+          <p:cNvSpPr/>
+          <p:nvPr/>
+        </p:nvSpPr>
+        <p:spPr>
+          <a:xfrm>
+            <a:off x="10113264" y="1691640"/>
+            <a:ext cx="1572768" cy="566928"/>
+          </a:xfrm>
+          <a:prstGeom prst="roundRect">
+            <a:avLst>
+              <a:gd name="adj" fmla="val 10000"/>
+            </a:avLst>
+          </a:prstGeom>
+          <a:solidFill>
+            <a:srgbClr val="FDF1E9"/>
+          </a:solidFill>
+          <a:ln w="15240">
+            <a:solidFill>
+              <a:srgbClr val="EB6834"/>
+            </a:solidFill>
+          </a:ln>
+          <a:effectLst/>
+        </p:spPr>
+        <p:style>
+          <a:lnRef idx="1">
+            <a:schemeClr val="accent1"/>
+          </a:lnRef>
+          <a:fillRef idx="3">
+            <a:schemeClr val="accent1"/>
+          </a:fillRef>
+          <a:effectRef idx="2">
+            <a:schemeClr val="accent1"/>
+          </a:effectRef>
+          <a:fontRef idx="minor">
+            <a:schemeClr val="lt1"/>
+          </a:fontRef>
+        </p:style>
+        <p:txBody>
+          <a:bodyPr rtlCol="0" anchor="ctr" wrap="square" lIns="54864" rIns="54864" tIns="27432" bIns="27432"/>
+          <a:lstStyle/>
+          <a:p>
+            <a:pPr algn="ctr">
+              <a:defRPr sz="1000" b="0">
+                <a:solidFill>
+                  <a:srgbClr val="EB6834"/>
+                </a:solidFill>
+              </a:defRPr>
+            </a:pPr>
+            <a:r>
+              <a:t>Proj([ρ, B/H])</a:t>
+            </a:r>
+          </a:p>
+        </p:txBody>
+      </p:sp>
+      <p:sp>
+        <p:nvSpPr>
+          <p:cNvPr id="215" name="Rounded Rectangle 214"/>
+          <p:cNvSpPr/>
+          <p:nvPr/>
+        </p:nvSpPr>
+        <p:spPr>
+          <a:xfrm>
+            <a:off x="7178040" y="2651760"/>
+            <a:ext cx="2514600" cy="566928"/>
+          </a:xfrm>
+          <a:prstGeom prst="roundRect">
+            <a:avLst>
+              <a:gd name="adj" fmla="val 10000"/>
+            </a:avLst>
+          </a:prstGeom>
+          <a:solidFill>
+            <a:srgbClr val="FDF1E9"/>
+          </a:solidFill>
+          <a:ln w="15240">
+            <a:solidFill>
+              <a:srgbClr val="EB6834"/>
+            </a:solidFill>
+          </a:ln>
+          <a:effectLst/>
+        </p:spPr>
+        <p:style>
+          <a:lnRef idx="1">
+            <a:schemeClr val="accent1"/>
+          </a:lnRef>
+          <a:fillRef idx="3">
+            <a:schemeClr val="accent1"/>
+          </a:fillRef>
+          <a:effectRef idx="2">
+            <a:schemeClr val="accent1"/>
+          </a:effectRef>
+          <a:fontRef idx="minor">
+            <a:schemeClr val="lt1"/>
+          </a:fontRef>
+        </p:style>
+        <p:txBody>
+          <a:bodyPr rtlCol="0" anchor="ctr" wrap="square" lIns="54864" rIns="54864" tIns="27432" bIns="27432"/>
+          <a:lstStyle/>
+          <a:p>
+            <a:pPr algn="ctr">
+              <a:defRPr sz="1050" b="1">
+                <a:solidFill>
+                  <a:srgbClr val="0B0B0B"/>
+                </a:solidFill>
+              </a:defRPr>
+            </a:pPr>
+            <a:r>
+              <a:t>task token  (d)</a:t>
+            </a:r>
+          </a:p>
+        </p:txBody>
+      </p:sp>
+      <p:cxnSp>
+        <p:nvCxnSpPr>
+          <p:cNvPr id="216" name="Connector 215"/>
+          <p:cNvCxnSpPr>
+            <a:stCxn id="211" idx="2"/>
+            <a:endCxn id="215" idx="0"/>
+          </p:cNvCxnSpPr>
+          <p:nvPr/>
+        </p:nvCxnSpPr>
+        <p:spPr>
+          <a:xfrm>
+            <a:off x="5861304" y="2258568"/>
+            <a:ext cx="2574036" cy="393192"/>
+          </a:xfrm>
+          <a:prstGeom prst="bentConnector3">
+            <a:avLst/>
+          </a:prstGeom>
+          <a:ln w="19050">
+            <a:solidFill>
+              <a:srgbClr val="8A8880"/>
+            </a:solidFill>
+            <a:tailEnd type="triangle" w="med" len="med"/>
+          </a:ln>
+          <a:effectLst/>
+        </p:spPr>
+        <p:style>
+          <a:lnRef idx="2">
+            <a:schemeClr val="accent1"/>
+          </a:lnRef>
+          <a:fillRef idx="0">
+            <a:schemeClr val="accent1"/>
+          </a:fillRef>
+          <a:effectRef idx="1">
+            <a:schemeClr val="accent1"/>
+          </a:effectRef>
+          <a:fontRef idx="minor">
+            <a:schemeClr val="tx1"/>
+          </a:fontRef>
+        </p:style>
+      </p:cxnSp>
+      <p:cxnSp>
+        <p:nvCxnSpPr>
+          <p:cNvPr id="217" name="Connector 216"/>
+          <p:cNvCxnSpPr>
+            <a:stCxn id="212" idx="2"/>
+            <a:endCxn id="215" idx="0"/>
+          </p:cNvCxnSpPr>
+          <p:nvPr/>
+        </p:nvCxnSpPr>
+        <p:spPr>
+          <a:xfrm>
+            <a:off x="7525512" y="2258568"/>
+            <a:ext cx="909828" cy="393192"/>
+          </a:xfrm>
+          <a:prstGeom prst="bentConnector3">
+            <a:avLst/>
+          </a:prstGeom>
+          <a:ln w="19050">
+            <a:solidFill>
+              <a:srgbClr val="8A8880"/>
+            </a:solidFill>
+            <a:tailEnd type="triangle" w="med" len="med"/>
+          </a:ln>
+          <a:effectLst/>
+        </p:spPr>
+        <p:style>
+          <a:lnRef idx="2">
+            <a:schemeClr val="accent1"/>
+          </a:lnRef>
+          <a:fillRef idx="0">
+            <a:schemeClr val="accent1"/>
+          </a:fillRef>
+          <a:effectRef idx="1">
+            <a:schemeClr val="accent1"/>
+          </a:effectRef>
+          <a:fontRef idx="minor">
+            <a:schemeClr val="tx1"/>
+          </a:fontRef>
+        </p:style>
+      </p:cxnSp>
+      <p:cxnSp>
+        <p:nvCxnSpPr>
+          <p:cNvPr id="218" name="Connector 217"/>
+          <p:cNvCxnSpPr>
+            <a:stCxn id="213" idx="2"/>
+            <a:endCxn id="215" idx="0"/>
+          </p:cNvCxnSpPr>
+          <p:nvPr/>
+        </p:nvCxnSpPr>
+        <p:spPr>
+          <a:xfrm flipH="1">
+            <a:off x="8435340" y="2258568"/>
+            <a:ext cx="754380" cy="393192"/>
+          </a:xfrm>
+          <a:prstGeom prst="bentConnector3">
+            <a:avLst/>
+          </a:prstGeom>
+          <a:ln w="19050">
+            <a:solidFill>
+              <a:srgbClr val="8A8880"/>
+            </a:solidFill>
+            <a:tailEnd type="triangle" w="med" len="med"/>
+          </a:ln>
+          <a:effectLst/>
+        </p:spPr>
+        <p:style>
+          <a:lnRef idx="2">
+            <a:schemeClr val="accent1"/>
+          </a:lnRef>
+          <a:fillRef idx="0">
+            <a:schemeClr val="accent1"/>
+          </a:fillRef>
+          <a:effectRef idx="1">
+            <a:schemeClr val="accent1"/>
+          </a:effectRef>
+          <a:fontRef idx="minor">
+            <a:schemeClr val="tx1"/>
+          </a:fontRef>
+        </p:style>
+      </p:cxnSp>
+      <p:cxnSp>
+        <p:nvCxnSpPr>
+          <p:cNvPr id="219" name="Connector 218"/>
+          <p:cNvCxnSpPr>
+            <a:stCxn id="214" idx="2"/>
+            <a:endCxn id="215" idx="0"/>
+          </p:cNvCxnSpPr>
+          <p:nvPr/>
+        </p:nvCxnSpPr>
+        <p:spPr>
+          <a:xfrm flipH="1">
+            <a:off x="8435340" y="2258568"/>
+            <a:ext cx="2464308" cy="393192"/>
+          </a:xfrm>
+          <a:prstGeom prst="bentConnector3">
+            <a:avLst/>
+          </a:prstGeom>
+          <a:ln w="19050">
+            <a:solidFill>
+              <a:srgbClr val="8A8880"/>
+            </a:solidFill>
+            <a:tailEnd type="triangle" w="med" len="med"/>
+          </a:ln>
+          <a:effectLst/>
+        </p:spPr>
+        <p:style>
+          <a:lnRef idx="2">
+            <a:schemeClr val="accent1"/>
+          </a:lnRef>
+          <a:fillRef idx="0">
+            <a:schemeClr val="accent1"/>
+          </a:fillRef>
+          <a:effectRef idx="1">
+            <a:schemeClr val="accent1"/>
+          </a:effectRef>
+          <a:fontRef idx="minor">
+            <a:schemeClr val="tx1"/>
+          </a:fontRef>
+        </p:style>
+      </p:cxnSp>
+      <p:sp>
+        <p:nvSpPr>
+          <p:cNvPr id="220" name="TextBox 219"/>
+          <p:cNvSpPr txBox="1"/>
+          <p:nvPr/>
+        </p:nvSpPr>
+        <p:spPr>
+          <a:xfrm>
+            <a:off x="1417320" y="2395728"/>
+            <a:ext cx="2514600" cy="274320"/>
+          </a:xfrm>
+          <a:prstGeom prst="rect">
+            <a:avLst/>
+          </a:prstGeom>
+          <a:noFill/>
+        </p:spPr>
+        <p:txBody>
+          <a:bodyPr wrap="square">
+            <a:spAutoFit/>
+          </a:bodyPr>
+          <a:lstStyle/>
+          <a:p>
+            <a:pPr algn="ctr">
+              <a:defRPr sz="850" b="0">
+                <a:solidFill>
+                  <a:srgbClr val="52514E"/>
+                </a:solidFill>
+              </a:defRPr>
+            </a:pPr>
+            <a:r>
+              <a:t>sum</a:t>
+            </a:r>
+          </a:p>
+        </p:txBody>
+      </p:sp>
+      <p:sp>
+        <p:nvSpPr>
+          <p:cNvPr id="221" name="TextBox 220"/>
+          <p:cNvSpPr txBox="1"/>
+          <p:nvPr/>
+        </p:nvSpPr>
+        <p:spPr>
+          <a:xfrm>
+            <a:off x="7178040" y="2395728"/>
+            <a:ext cx="2514600" cy="274320"/>
+          </a:xfrm>
+          <a:prstGeom prst="rect">
+            <a:avLst/>
+          </a:prstGeom>
+          <a:noFill/>
+        </p:spPr>
+        <p:txBody>
+          <a:bodyPr wrap="square">
+            <a:spAutoFit/>
+          </a:bodyPr>
+          <a:lstStyle/>
+          <a:p>
+            <a:pPr algn="ctr">
+              <a:defRPr sz="850" b="0">
+                <a:solidFill>
+                  <a:srgbClr val="52514E"/>
+                </a:solidFill>
+              </a:defRPr>
+            </a:pPr>
+            <a:r>
+              <a:t>sum (4 attribute channels)</a:t>
+            </a:r>
+          </a:p>
+        </p:txBody>
+      </p:sp>
+      <p:sp>
+        <p:nvSpPr>
+          <p:cNvPr id="222" name="Rounded Rectangle 221"/>
+          <p:cNvSpPr/>
+          <p:nvPr/>
+        </p:nvSpPr>
+        <p:spPr>
+          <a:xfrm>
+            <a:off x="3337560" y="3657600"/>
+            <a:ext cx="5486400" cy="548640"/>
+          </a:xfrm>
+          <a:prstGeom prst="roundRect">
+            <a:avLst>
+              <a:gd name="adj" fmla="val 10000"/>
+            </a:avLst>
+          </a:prstGeom>
+          <a:solidFill>
+            <a:srgbClr val="F2F4F7"/>
+          </a:solidFill>
+          <a:ln w="15240">
+            <a:solidFill>
+              <a:srgbClr val="C9C8C2"/>
+            </a:solidFill>
+          </a:ln>
+          <a:effectLst/>
+        </p:spPr>
+        <p:style>
+          <a:lnRef idx="1">
+            <a:schemeClr val="accent1"/>
+          </a:lnRef>
+          <a:fillRef idx="3">
+            <a:schemeClr val="accent1"/>
+          </a:fillRef>
+          <a:effectRef idx="2">
+            <a:schemeClr val="accent1"/>
+          </a:effectRef>
+          <a:fontRef idx="minor">
+            <a:schemeClr val="lt1"/>
+          </a:fontRef>
+        </p:style>
+        <p:txBody>
+          <a:bodyPr rtlCol="0" anchor="ctr" wrap="square" lIns="54864" rIns="54864" tIns="27432" bIns="27432"/>
+          <a:lstStyle/>
+          <a:p>
+            <a:pPr algn="ctr">
+              <a:defRPr sz="1050" b="0">
+                <a:solidFill>
+                  <a:srgbClr val="0B0B0B"/>
+                </a:solidFill>
+              </a:defRPr>
+            </a:pPr>
+            <a:r>
+              <a:t>concatenate:  (80 + V) tokens</a:t>
+            </a:r>
+          </a:p>
+        </p:txBody>
+      </p:sp>
+      <p:cxnSp>
+        <p:nvCxnSpPr>
+          <p:cNvPr id="223" name="Connector 222"/>
+          <p:cNvCxnSpPr>
+            <a:stCxn id="207" idx="2"/>
+            <a:endCxn id="222" idx="0"/>
+          </p:cNvCxnSpPr>
+          <p:nvPr/>
+        </p:nvCxnSpPr>
+        <p:spPr>
+          <a:xfrm>
+            <a:off x="2674620" y="3218688"/>
+            <a:ext cx="3406140" cy="438912"/>
+          </a:xfrm>
+          <a:prstGeom prst="bentConnector3">
+            <a:avLst/>
+          </a:prstGeom>
+          <a:ln w="19050">
+            <a:solidFill>
+              <a:srgbClr val="8A8880"/>
+            </a:solidFill>
+            <a:tailEnd type="triangle" w="med" len="med"/>
+          </a:ln>
+          <a:effectLst/>
+        </p:spPr>
+        <p:style>
+          <a:lnRef idx="2">
+            <a:schemeClr val="accent1"/>
+          </a:lnRef>
+          <a:fillRef idx="0">
+            <a:schemeClr val="accent1"/>
+          </a:fillRef>
+          <a:effectRef idx="1">
+            <a:schemeClr val="accent1"/>
+          </a:effectRef>
+          <a:fontRef idx="minor">
+            <a:schemeClr val="tx1"/>
+          </a:fontRef>
+        </p:style>
+      </p:cxnSp>
+      <p:cxnSp>
+        <p:nvCxnSpPr>
+          <p:cNvPr id="224" name="Connector 223"/>
+          <p:cNvCxnSpPr>
+            <a:stCxn id="215" idx="2"/>
+            <a:endCxn id="222" idx="0"/>
+          </p:cNvCxnSpPr>
+          <p:nvPr/>
+        </p:nvCxnSpPr>
+        <p:spPr>
+          <a:xfrm flipH="1">
+            <a:off x="6080760" y="3218688"/>
+            <a:ext cx="2354580" cy="438912"/>
+          </a:xfrm>
+          <a:prstGeom prst="bentConnector3">
+            <a:avLst/>
+          </a:prstGeom>
+          <a:ln w="19050">
+            <a:solidFill>
+              <a:srgbClr val="8A8880"/>
+            </a:solidFill>
+            <a:tailEnd type="triangle" w="med" len="med"/>
+          </a:ln>
+          <a:effectLst/>
+        </p:spPr>
+        <p:style>
+          <a:lnRef idx="2">
+            <a:schemeClr val="accent1"/>
+          </a:lnRef>
+          <a:fillRef idx="0">
+            <a:schemeClr val="accent1"/>
+          </a:fillRef>
+          <a:effectRef idx="1">
+            <a:schemeClr val="accent1"/>
+          </a:effectRef>
+          <a:fontRef idx="minor">
+            <a:schemeClr val="tx1"/>
+          </a:fontRef>
+        </p:style>
+      </p:cxnSp>
+      <p:sp>
+        <p:nvSpPr>
+          <p:cNvPr id="225" name="Rounded Rectangle 224"/>
+          <p:cNvSpPr/>
+          <p:nvPr/>
+        </p:nvSpPr>
+        <p:spPr>
+          <a:xfrm>
+            <a:off x="3337560" y="4572000"/>
+            <a:ext cx="5486400" cy="658368"/>
+          </a:xfrm>
+          <a:prstGeom prst="roundRect">
+            <a:avLst>
+              <a:gd name="adj" fmla="val 10000"/>
+            </a:avLst>
+          </a:prstGeom>
+          <a:solidFill>
+            <a:srgbClr val="F2F4F7"/>
+          </a:solidFill>
+          <a:ln w="15240">
+            <a:solidFill>
+              <a:srgbClr val="C9C8C2"/>
+            </a:solidFill>
+          </a:ln>
+          <a:effectLst/>
+        </p:spPr>
+        <p:style>
+          <a:lnRef idx="1">
+            <a:schemeClr val="accent1"/>
+          </a:lnRef>
+          <a:fillRef idx="3">
+            <a:schemeClr val="accent1"/>
+          </a:fillRef>
+          <a:effectRef idx="2">
+            <a:schemeClr val="accent1"/>
+          </a:effectRef>
+          <a:fontRef idx="minor">
+            <a:schemeClr val="lt1"/>
+          </a:fontRef>
+        </p:style>
+        <p:txBody>
+          <a:bodyPr rtlCol="0" anchor="ctr" wrap="square" lIns="54864" rIns="54864" tIns="27432" bIns="27432"/>
+          <a:lstStyle/>
+          <a:p>
+            <a:pPr algn="ctr">
+              <a:defRPr sz="1150" b="1">
+                <a:solidFill>
+                  <a:srgbClr val="0B0B0B"/>
+                </a:solidFill>
+              </a:defRPr>
+            </a:pPr>
+            <a:r>
+              <a:t>Transformer encoder  ×3</a:t>
+            </a:r>
+          </a:p>
+          <a:p>
+            <a:pPr algn="ctr">
+              <a:defRPr sz="880">
+                <a:solidFill>
+                  <a:srgbClr val="52514E"/>
+                </a:solidFill>
+              </a:defRPr>
+            </a:pPr>
+            <a:r>
+              <a:t>self-attention + FFN · d = 128 · 4 heads · pre-norm</a:t>
+            </a:r>
+          </a:p>
+        </p:txBody>
+      </p:sp>
+      <p:cxnSp>
+        <p:nvCxnSpPr>
+          <p:cNvPr id="226" name="Connector 225"/>
+          <p:cNvCxnSpPr>
+            <a:stCxn id="222" idx="2"/>
+            <a:endCxn id="225" idx="0"/>
+          </p:cNvCxnSpPr>
+          <p:nvPr/>
+        </p:nvCxnSpPr>
+        <p:spPr>
+          <a:xfrm flipH="1">
+            <a:off x="6080760" y="4206240"/>
+            <a:ext cx="0" cy="365760"/>
+          </a:xfrm>
+          <a:prstGeom prst="bentConnector3">
+            <a:avLst/>
+          </a:prstGeom>
+          <a:ln w="19050">
+            <a:solidFill>
+              <a:srgbClr val="8A8880"/>
+            </a:solidFill>
+            <a:tailEnd type="triangle" w="med" len="med"/>
+          </a:ln>
+          <a:effectLst/>
+        </p:spPr>
+        <p:style>
+          <a:lnRef idx="2">
+            <a:schemeClr val="accent1"/>
+          </a:lnRef>
+          <a:fillRef idx="0">
+            <a:schemeClr val="accent1"/>
+          </a:fillRef>
+          <a:effectRef idx="1">
+            <a:schemeClr val="accent1"/>
+          </a:effectRef>
+          <a:fontRef idx="minor">
+            <a:schemeClr val="tx1"/>
+          </a:fontRef>
+        </p:style>
+      </p:cxnSp>
+      <p:sp>
+        <p:nvSpPr>
+          <p:cNvPr id="227" name="Rounded Rectangle 226"/>
+          <p:cNvSpPr/>
+          <p:nvPr/>
+        </p:nvSpPr>
+        <p:spPr>
+          <a:xfrm>
+            <a:off x="3337560" y="5577840"/>
+            <a:ext cx="5486400" cy="548640"/>
+          </a:xfrm>
+          <a:prstGeom prst="roundRect">
+            <a:avLst>
+              <a:gd name="adj" fmla="val 10000"/>
+            </a:avLst>
+          </a:prstGeom>
+          <a:solidFill>
+            <a:srgbClr val="EAF1FB"/>
+          </a:solidFill>
+          <a:ln w="15240">
+            <a:solidFill>
+              <a:srgbClr val="2A78D6"/>
+            </a:solidFill>
+          </a:ln>
+          <a:effectLst/>
+        </p:spPr>
+        <p:style>
+          <a:lnRef idx="1">
+            <a:schemeClr val="accent1"/>
+          </a:lnRef>
+          <a:fillRef idx="3">
+            <a:schemeClr val="accent1"/>
+          </a:fillRef>
+          <a:effectRef idx="2">
+            <a:schemeClr val="accent1"/>
+          </a:effectRef>
+          <a:fontRef idx="minor">
+            <a:schemeClr val="lt1"/>
+          </a:fontRef>
+        </p:style>
+        <p:txBody>
+          <a:bodyPr rtlCol="0" anchor="ctr" wrap="square" lIns="54864" rIns="54864" tIns="27432" bIns="27432"/>
+          <a:lstStyle/>
+          <a:p>
+            <a:pPr algn="ctr">
+              <a:defRPr sz="1050" b="1">
+                <a:solidFill>
+                  <a:srgbClr val="2A78D6"/>
+                </a:solidFill>
+              </a:defRPr>
+            </a:pPr>
+            <a:r>
+              <a:t>case memory   (80 + V) × d</a:t>
+            </a:r>
+          </a:p>
+        </p:txBody>
+      </p:sp>
+      <p:cxnSp>
+        <p:nvCxnSpPr>
+          <p:cNvPr id="228" name="Connector 227"/>
+          <p:cNvCxnSpPr>
+            <a:stCxn id="225" idx="2"/>
+            <a:endCxn id="227" idx="0"/>
+          </p:cNvCxnSpPr>
+          <p:nvPr/>
+        </p:nvCxnSpPr>
+        <p:spPr>
+          <a:xfrm flipH="1">
+            <a:off x="6080760" y="5230368"/>
+            <a:ext cx="0" cy="347472"/>
+          </a:xfrm>
+          <a:prstGeom prst="bentConnector3">
+            <a:avLst/>
+          </a:prstGeom>
+          <a:ln w="19050">
+            <a:solidFill>
+              <a:srgbClr val="8A8880"/>
+            </a:solidFill>
+            <a:tailEnd type="triangle" w="med" len="med"/>
+          </a:ln>
+          <a:effectLst/>
+        </p:spPr>
+        <p:style>
+          <a:lnRef idx="2">
+            <a:schemeClr val="accent1"/>
+          </a:lnRef>
+          <a:fillRef idx="0">
+            <a:schemeClr val="accent1"/>
+          </a:fillRef>
+          <a:effectRef idx="1">
+            <a:schemeClr val="accent1"/>
+          </a:effectRef>
+          <a:fontRef idx="minor">
+            <a:schemeClr val="tx1"/>
+          </a:fontRef>
+        </p:style>
+      </p:cxnSp>
+      <p:sp>
+        <p:nvSpPr>
+          <p:cNvPr id="229" name="TextBox 228"/>
+          <p:cNvSpPr txBox="1"/>
+          <p:nvPr/>
+        </p:nvSpPr>
+        <p:spPr>
+          <a:xfrm>
+            <a:off x="1874519" y="6217920"/>
+            <a:ext cx="9784080" cy="914400"/>
+          </a:xfrm>
+          <a:prstGeom prst="rect">
+            <a:avLst/>
+          </a:prstGeom>
+          <a:noFill/>
+        </p:spPr>
+        <p:txBody>
+          <a:bodyPr wrap="square">
+            <a:spAutoFit/>
+          </a:bodyPr>
+          <a:lstStyle/>
+          <a:p>
+            <a:pPr>
+              <a:defRPr sz="1050" b="0"/>
+            </a:pPr>
+            <a:r>
+              <a:t>• Why ①: one set of weights serves every OD pair, fleet size, departure and budget; the encoder reasons about the fleet JOINTLY. Same recipe as the routing foundation models (RouteFinder / MTPOMO attribute embeddings) — our budget plays their capacity's role</a:t>
+            </a:r>
+          </a:p>
+        </p:txBody>
+      </p:sp>
+    </p:spTree>
+  </p:cSld>
+  <p:clrMapOvr>
+    <a:masterClrMapping/>
+  </p:clrMapOvr>
+</p:sld>
+</file>
+
+<file path=ppt/slides/slide26.xml><?xml version="1.0" encoding="utf-8"?>
+<p:sld xmlns:a="http://schemas.openxmlformats.org/drawingml/2006/main" xmlns:p="http://schemas.openxmlformats.org/presentationml/2006/main" xmlns:r="http://schemas.openxmlformats.org/officeDocument/2006/relationships">
+  <p:cSld>
+    <p:spTree>
+      <p:nvGrpSpPr>
+        <p:cNvPr id="1" name=""/>
+        <p:cNvGrpSpPr/>
+        <p:nvPr/>
+      </p:nvGrpSpPr>
+      <p:grpSpPr/>
+      <p:sp>
+        <p:nvSpPr>
+          <p:cNvPr id="7" name="文本占位符 6">
+            <a:extLst>
+              <a:ext uri="{FF2B5EF4-FFF2-40B4-BE49-F238E27FC236}">
+                <a16:creationId xmlns:a16="http://schemas.microsoft.com/office/drawing/2014/main" id="{33AE8DB3-4C29-0DE3-EB73-8D2BBFBB8CBF}"/>
+              </a:ext>
+            </a:extLst>
+          </p:cNvPr>
+          <p:cNvSpPr>
+            <a:spLocks noGrp="1"/>
+          </p:cNvSpPr>
+          <p:nvPr>
+            <p:ph type="body" sz="quarter" idx="11"/>
+          </p:nvPr>
+        </p:nvSpPr>
+        <p:spPr>
+          <a:xfrm>
+            <a:off x="336550" y="58738"/>
+            <a:ext cx="5759450" cy="622300"/>
+          </a:xfrm>
+        </p:spPr>
+        <p:txBody>
+          <a:bodyPr/>
+          <a:lstStyle/>
+          <a:p>
+            <a:r>
+              <a:rPr lang="en-US" altLang="zh-CN" dirty="0"/>
+              <a:t>Change (b) — model</a:t>
+            </a:r>
+            <a:endParaRPr lang="zh-CN" altLang="en-US" dirty="0"/>
+          </a:p>
+        </p:txBody>
+      </p:sp>
+      <p:sp>
+        <p:nvSpPr>
+          <p:cNvPr id="203" name="文本占位符 5">
+            <a:extLst>
+              <a:ext uri="{FF2B5EF4-FFF2-40B4-BE49-F238E27FC236}">
+                <a16:creationId xmlns:a16="http://schemas.microsoft.com/office/drawing/2014/main" id="{A219F0BA-71F5-BA11-CCBD-9327897B98CC}"/>
+              </a:ext>
+            </a:extLst>
+          </p:cNvPr>
+          <p:cNvSpPr>
+            <a:spLocks noGrp="1"/>
+          </p:cNvSpPr>
+          <p:nvPr>
+            <p:ph type="body" sz="quarter" idx="10"/>
+          </p:nvPr>
+        </p:nvSpPr>
+        <p:spPr>
+          <a:xfrm>
+            <a:off x="0" y="820290"/>
+            <a:ext cx="5878224" cy="638175"/>
+          </a:xfrm>
+        </p:spPr>
+        <p:txBody>
+          <a:bodyPr/>
+          <a:lstStyle/>
+          <a:p>
+            <a:r>
+              <a:rPr lang="en-US" altLang="zh-CN" sz="2800" dirty="0"/>
+              <a:t>Decoder — one step</a:t>
+            </a:r>
+            <a:endParaRPr lang="zh-CN" altLang="en-US" sz="2800" dirty="0"/>
+          </a:p>
+        </p:txBody>
+      </p:sp>
+      <p:sp>
+        <p:nvSpPr>
+          <p:cNvPr id="204" name="Rounded Rectangle 203"/>
+          <p:cNvSpPr/>
+          <p:nvPr/>
+        </p:nvSpPr>
+        <p:spPr>
+          <a:xfrm>
+            <a:off x="3017520" y="1417320"/>
+            <a:ext cx="713232" cy="475488"/>
+          </a:xfrm>
+          <a:prstGeom prst="roundRect">
+            <a:avLst>
+              <a:gd name="adj" fmla="val 10000"/>
+            </a:avLst>
+          </a:prstGeom>
+          <a:solidFill>
+            <a:srgbClr val="F2F4F7"/>
+          </a:solidFill>
+          <a:ln w="15240">
+            <a:solidFill>
+              <a:srgbClr val="C9C8C2"/>
+            </a:solidFill>
+          </a:ln>
+          <a:effectLst/>
+        </p:spPr>
+        <p:style>
+          <a:lnRef idx="1">
+            <a:schemeClr val="accent1"/>
+          </a:lnRef>
+          <a:fillRef idx="3">
+            <a:schemeClr val="accent1"/>
+          </a:fillRef>
+          <a:effectRef idx="2">
+            <a:schemeClr val="accent1"/>
+          </a:effectRef>
+          <a:fontRef idx="minor">
+            <a:schemeClr val="lt1"/>
+          </a:fontRef>
+        </p:style>
+        <p:txBody>
+          <a:bodyPr rtlCol="0" anchor="ctr" wrap="square" lIns="54864" rIns="54864" tIns="27432" bIns="27432"/>
+          <a:lstStyle/>
+          <a:p>
+            <a:pPr algn="ctr">
+              <a:defRPr sz="950" b="0">
+                <a:solidFill>
+                  <a:srgbClr val="0B0B0B"/>
+                </a:solidFill>
+              </a:defRPr>
+            </a:pPr>
+            <a:r>
+              <a:t>BOS</a:t>
+            </a:r>
+          </a:p>
+        </p:txBody>
+      </p:sp>
+      <p:sp>
+        <p:nvSpPr>
+          <p:cNvPr id="205" name="Rounded Rectangle 204"/>
+          <p:cNvSpPr/>
+          <p:nvPr/>
+        </p:nvSpPr>
+        <p:spPr>
+          <a:xfrm>
+            <a:off x="3822191" y="1417320"/>
+            <a:ext cx="713232" cy="475488"/>
+          </a:xfrm>
+          <a:prstGeom prst="roundRect">
+            <a:avLst>
+              <a:gd name="adj" fmla="val 10000"/>
+            </a:avLst>
+          </a:prstGeom>
+          <a:solidFill>
+            <a:srgbClr val="F2F4F7"/>
+          </a:solidFill>
+          <a:ln w="15240">
+            <a:solidFill>
+              <a:srgbClr val="C9C8C2"/>
+            </a:solidFill>
+          </a:ln>
+          <a:effectLst/>
+        </p:spPr>
+        <p:style>
+          <a:lnRef idx="1">
+            <a:schemeClr val="accent1"/>
+          </a:lnRef>
+          <a:fillRef idx="3">
+            <a:schemeClr val="accent1"/>
+          </a:fillRef>
+          <a:effectRef idx="2">
+            <a:schemeClr val="accent1"/>
+          </a:effectRef>
+          <a:fontRef idx="minor">
+            <a:schemeClr val="lt1"/>
+          </a:fontRef>
+        </p:style>
+        <p:txBody>
+          <a:bodyPr rtlCol="0" anchor="ctr" wrap="square" lIns="54864" rIns="54864" tIns="27432" bIns="27432"/>
+          <a:lstStyle/>
+          <a:p>
+            <a:pPr algn="ctr">
+              <a:defRPr sz="950" b="0">
+                <a:solidFill>
+                  <a:srgbClr val="0B0B0B"/>
+                </a:solidFill>
+              </a:defRPr>
+            </a:pPr>
+            <a:r>
+              <a:t>l₁</a:t>
+            </a:r>
+          </a:p>
+        </p:txBody>
+      </p:sp>
+      <p:sp>
+        <p:nvSpPr>
+          <p:cNvPr id="206" name="Rounded Rectangle 205"/>
+          <p:cNvSpPr/>
+          <p:nvPr/>
+        </p:nvSpPr>
+        <p:spPr>
+          <a:xfrm>
+            <a:off x="4626864" y="1417320"/>
+            <a:ext cx="713232" cy="475488"/>
+          </a:xfrm>
+          <a:prstGeom prst="roundRect">
+            <a:avLst>
+              <a:gd name="adj" fmla="val 10000"/>
+            </a:avLst>
+          </a:prstGeom>
+          <a:solidFill>
+            <a:srgbClr val="F2F4F7"/>
+          </a:solidFill>
+          <a:ln w="15240">
+            <a:solidFill>
+              <a:srgbClr val="C9C8C2"/>
+            </a:solidFill>
+          </a:ln>
+          <a:effectLst/>
+        </p:spPr>
+        <p:style>
+          <a:lnRef idx="1">
+            <a:schemeClr val="accent1"/>
+          </a:lnRef>
+          <a:fillRef idx="3">
+            <a:schemeClr val="accent1"/>
+          </a:fillRef>
+          <a:effectRef idx="2">
+            <a:schemeClr val="accent1"/>
+          </a:effectRef>
+          <a:fontRef idx="minor">
+            <a:schemeClr val="lt1"/>
+          </a:fontRef>
+        </p:style>
+        <p:txBody>
+          <a:bodyPr rtlCol="0" anchor="ctr" wrap="square" lIns="54864" rIns="54864" tIns="27432" bIns="27432"/>
+          <a:lstStyle/>
+          <a:p>
+            <a:pPr algn="ctr">
+              <a:defRPr sz="950" b="0">
+                <a:solidFill>
+                  <a:srgbClr val="0B0B0B"/>
+                </a:solidFill>
+              </a:defRPr>
+            </a:pPr>
+            <a:r>
+              <a:t>l₂</a:t>
+            </a:r>
+          </a:p>
+        </p:txBody>
+      </p:sp>
+      <p:sp>
+        <p:nvSpPr>
+          <p:cNvPr id="207" name="Rounded Rectangle 206"/>
+          <p:cNvSpPr/>
+          <p:nvPr/>
+        </p:nvSpPr>
+        <p:spPr>
+          <a:xfrm>
+            <a:off x="5431536" y="1417320"/>
+            <a:ext cx="713232" cy="475488"/>
+          </a:xfrm>
+          <a:prstGeom prst="roundRect">
+            <a:avLst>
+              <a:gd name="adj" fmla="val 10000"/>
+            </a:avLst>
+          </a:prstGeom>
+          <a:solidFill>
+            <a:srgbClr val="FDF1E9"/>
+          </a:solidFill>
+          <a:ln w="15240">
+            <a:solidFill>
+              <a:srgbClr val="EB6834"/>
+            </a:solidFill>
+          </a:ln>
+          <a:effectLst/>
+        </p:spPr>
+        <p:style>
+          <a:lnRef idx="1">
+            <a:schemeClr val="accent1"/>
+          </a:lnRef>
+          <a:fillRef idx="3">
+            <a:schemeClr val="accent1"/>
+          </a:fillRef>
+          <a:effectRef idx="2">
+            <a:schemeClr val="accent1"/>
+          </a:effectRef>
+          <a:fontRef idx="minor">
+            <a:schemeClr val="lt1"/>
+          </a:fontRef>
+        </p:style>
+        <p:txBody>
+          <a:bodyPr rtlCol="0" anchor="ctr" wrap="square" lIns="54864" rIns="54864" tIns="27432" bIns="27432"/>
+          <a:lstStyle/>
+          <a:p>
+            <a:pPr algn="ctr">
+              <a:defRPr sz="950" b="0">
+                <a:solidFill>
+                  <a:srgbClr val="EB6834"/>
+                </a:solidFill>
+              </a:defRPr>
+            </a:pPr>
+            <a:r>
+              <a:t>SEP</a:t>
+            </a:r>
+          </a:p>
+        </p:txBody>
+      </p:sp>
+      <p:sp>
+        <p:nvSpPr>
+          <p:cNvPr id="208" name="Rounded Rectangle 207"/>
+          <p:cNvSpPr/>
+          <p:nvPr/>
+        </p:nvSpPr>
+        <p:spPr>
+          <a:xfrm>
+            <a:off x="6236208" y="1417320"/>
+            <a:ext cx="713232" cy="475488"/>
+          </a:xfrm>
+          <a:prstGeom prst="roundRect">
+            <a:avLst>
+              <a:gd name="adj" fmla="val 10000"/>
+            </a:avLst>
+          </a:prstGeom>
+          <a:solidFill>
+            <a:srgbClr val="F2F4F7"/>
+          </a:solidFill>
+          <a:ln w="15240">
+            <a:solidFill>
+              <a:srgbClr val="C9C8C2"/>
+            </a:solidFill>
+          </a:ln>
+          <a:effectLst/>
+        </p:spPr>
+        <p:style>
+          <a:lnRef idx="1">
+            <a:schemeClr val="accent1"/>
+          </a:lnRef>
+          <a:fillRef idx="3">
+            <a:schemeClr val="accent1"/>
+          </a:fillRef>
+          <a:effectRef idx="2">
+            <a:schemeClr val="accent1"/>
+          </a:effectRef>
+          <a:fontRef idx="minor">
+            <a:schemeClr val="lt1"/>
+          </a:fontRef>
+        </p:style>
+        <p:txBody>
+          <a:bodyPr rtlCol="0" anchor="ctr" wrap="square" lIns="54864" rIns="54864" tIns="27432" bIns="27432"/>
+          <a:lstStyle/>
+          <a:p>
+            <a:pPr algn="ctr">
+              <a:defRPr sz="950" b="0">
+                <a:solidFill>
+                  <a:srgbClr val="0B0B0B"/>
+                </a:solidFill>
+              </a:defRPr>
+            </a:pPr>
+            <a:r>
+              <a:t>l₁</a:t>
+            </a:r>
+          </a:p>
+        </p:txBody>
+      </p:sp>
+      <p:sp>
+        <p:nvSpPr>
+          <p:cNvPr id="209" name="Rounded Rectangle 208"/>
+          <p:cNvSpPr/>
+          <p:nvPr/>
+        </p:nvSpPr>
+        <p:spPr>
+          <a:xfrm>
+            <a:off x="7040880" y="1417320"/>
+            <a:ext cx="713232" cy="475488"/>
+          </a:xfrm>
+          <a:prstGeom prst="roundRect">
+            <a:avLst>
+              <a:gd name="adj" fmla="val 10000"/>
+            </a:avLst>
+          </a:prstGeom>
+          <a:solidFill>
+            <a:srgbClr val="F2F4F7"/>
+          </a:solidFill>
+          <a:ln w="15240">
+            <a:solidFill>
+              <a:srgbClr val="C9C8C2"/>
+            </a:solidFill>
+          </a:ln>
+          <a:effectLst/>
+        </p:spPr>
+        <p:style>
+          <a:lnRef idx="1">
+            <a:schemeClr val="accent1"/>
+          </a:lnRef>
+          <a:fillRef idx="3">
+            <a:schemeClr val="accent1"/>
+          </a:fillRef>
+          <a:effectRef idx="2">
+            <a:schemeClr val="accent1"/>
+          </a:effectRef>
+          <a:fontRef idx="minor">
+            <a:schemeClr val="lt1"/>
+          </a:fontRef>
+        </p:style>
+        <p:txBody>
+          <a:bodyPr rtlCol="0" anchor="ctr" wrap="square" lIns="54864" rIns="54864" tIns="27432" bIns="27432"/>
+          <a:lstStyle/>
+          <a:p>
+            <a:pPr algn="ctr">
+              <a:defRPr sz="950" b="0">
+                <a:solidFill>
+                  <a:srgbClr val="0B0B0B"/>
+                </a:solidFill>
+              </a:defRPr>
+            </a:pPr>
+            <a:r>
+              <a:t>…</a:t>
+            </a:r>
+          </a:p>
+        </p:txBody>
+      </p:sp>
+      <p:sp>
+        <p:nvSpPr>
+          <p:cNvPr id="210" name="TextBox 209"/>
+          <p:cNvSpPr txBox="1"/>
+          <p:nvPr/>
+        </p:nvSpPr>
+        <p:spPr>
+          <a:xfrm>
+            <a:off x="3017520" y="1115568"/>
+            <a:ext cx="6400800" cy="274320"/>
+          </a:xfrm>
+          <a:prstGeom prst="rect">
+            <a:avLst/>
+          </a:prstGeom>
+          <a:noFill/>
+        </p:spPr>
+        <p:txBody>
+          <a:bodyPr wrap="square">
+            <a:spAutoFit/>
+          </a:bodyPr>
+          <a:lstStyle/>
+          <a:p>
+            <a:pPr algn="l">
+              <a:defRPr sz="900" b="0">
+                <a:solidFill>
+                  <a:srgbClr val="52514E"/>
+                </a:solidFill>
+              </a:defRPr>
+            </a:pPr>
+            <a:r>
+              <a:t>partial JOINT fleet sequence — SEP parks a vehicle, the next one starts from its own (o, t₀)</a:t>
+            </a:r>
+          </a:p>
+        </p:txBody>
+      </p:sp>
+      <p:sp>
+        <p:nvSpPr>
+          <p:cNvPr id="211" name="Rounded Rectangle 210"/>
+          <p:cNvSpPr/>
+          <p:nvPr/>
+        </p:nvSpPr>
+        <p:spPr>
+          <a:xfrm>
+            <a:off x="3291840" y="2240280"/>
+            <a:ext cx="4206240" cy="530352"/>
+          </a:xfrm>
+          <a:prstGeom prst="roundRect">
+            <a:avLst>
+              <a:gd name="adj" fmla="val 10000"/>
+            </a:avLst>
+          </a:prstGeom>
+          <a:solidFill>
+            <a:srgbClr val="F2F4F7"/>
+          </a:solidFill>
+          <a:ln w="15240">
+            <a:solidFill>
+              <a:srgbClr val="C9C8C2"/>
+            </a:solidFill>
+          </a:ln>
+          <a:effectLst/>
+        </p:spPr>
+        <p:style>
+          <a:lnRef idx="1">
+            <a:schemeClr val="accent1"/>
+          </a:lnRef>
+          <a:fillRef idx="3">
+            <a:schemeClr val="accent1"/>
+          </a:fillRef>
+          <a:effectRef idx="2">
+            <a:schemeClr val="accent1"/>
+          </a:effectRef>
+          <a:fontRef idx="minor">
+            <a:schemeClr val="lt1"/>
+          </a:fontRef>
+        </p:style>
+        <p:txBody>
+          <a:bodyPr rtlCol="0" anchor="ctr" wrap="square" lIns="54864" rIns="54864" tIns="27432" bIns="27432"/>
+          <a:lstStyle/>
+          <a:p>
+            <a:pPr algn="ctr">
+              <a:defRPr sz="1000" b="0">
+                <a:solidFill>
+                  <a:srgbClr val="0B0B0B"/>
+                </a:solidFill>
+              </a:defRPr>
+            </a:pPr>
+            <a:r>
+              <a:t>masked self-attention (causal)</a:t>
+            </a:r>
+          </a:p>
+        </p:txBody>
+      </p:sp>
+      <p:sp>
+        <p:nvSpPr>
+          <p:cNvPr id="212" name="Rounded Rectangle 211"/>
+          <p:cNvSpPr/>
+          <p:nvPr/>
+        </p:nvSpPr>
+        <p:spPr>
+          <a:xfrm>
+            <a:off x="3291840" y="3063240"/>
+            <a:ext cx="4206240" cy="530352"/>
+          </a:xfrm>
+          <a:prstGeom prst="roundRect">
+            <a:avLst>
+              <a:gd name="adj" fmla="val 10000"/>
+            </a:avLst>
+          </a:prstGeom>
+          <a:solidFill>
+            <a:srgbClr val="F2F4F7"/>
+          </a:solidFill>
+          <a:ln w="15240">
+            <a:solidFill>
+              <a:srgbClr val="C9C8C2"/>
+            </a:solidFill>
+          </a:ln>
+          <a:effectLst/>
+        </p:spPr>
+        <p:style>
+          <a:lnRef idx="1">
+            <a:schemeClr val="accent1"/>
+          </a:lnRef>
+          <a:fillRef idx="3">
+            <a:schemeClr val="accent1"/>
+          </a:fillRef>
+          <a:effectRef idx="2">
+            <a:schemeClr val="accent1"/>
+          </a:effectRef>
+          <a:fontRef idx="minor">
+            <a:schemeClr val="lt1"/>
+          </a:fontRef>
+        </p:style>
+        <p:txBody>
+          <a:bodyPr rtlCol="0" anchor="ctr" wrap="square" lIns="54864" rIns="54864" tIns="27432" bIns="27432"/>
+          <a:lstStyle/>
+          <a:p>
+            <a:pPr algn="ctr">
+              <a:defRPr sz="1000" b="0">
+                <a:solidFill>
+                  <a:srgbClr val="0B0B0B"/>
+                </a:solidFill>
+              </a:defRPr>
+            </a:pPr>
+            <a:r>
+              <a:t>cross-attention → case memory</a:t>
+            </a:r>
+          </a:p>
+        </p:txBody>
+      </p:sp>
+      <p:sp>
+        <p:nvSpPr>
+          <p:cNvPr id="213" name="Rounded Rectangle 212"/>
+          <p:cNvSpPr/>
+          <p:nvPr/>
+        </p:nvSpPr>
+        <p:spPr>
+          <a:xfrm>
+            <a:off x="3291840" y="3886200"/>
+            <a:ext cx="4206240" cy="530352"/>
+          </a:xfrm>
+          <a:prstGeom prst="roundRect">
+            <a:avLst>
+              <a:gd name="adj" fmla="val 10000"/>
+            </a:avLst>
+          </a:prstGeom>
+          <a:solidFill>
+            <a:srgbClr val="F2F4F7"/>
+          </a:solidFill>
+          <a:ln w="15240">
+            <a:solidFill>
+              <a:srgbClr val="C9C8C2"/>
+            </a:solidFill>
+          </a:ln>
+          <a:effectLst/>
+        </p:spPr>
+        <p:style>
+          <a:lnRef idx="1">
+            <a:schemeClr val="accent1"/>
+          </a:lnRef>
+          <a:fillRef idx="3">
+            <a:schemeClr val="accent1"/>
+          </a:fillRef>
+          <a:effectRef idx="2">
+            <a:schemeClr val="accent1"/>
+          </a:effectRef>
+          <a:fontRef idx="minor">
+            <a:schemeClr val="lt1"/>
+          </a:fontRef>
+        </p:style>
+        <p:txBody>
+          <a:bodyPr rtlCol="0" anchor="ctr" wrap="square" lIns="54864" rIns="54864" tIns="27432" bIns="27432"/>
+          <a:lstStyle/>
+          <a:p>
+            <a:pPr algn="ctr">
+              <a:defRPr sz="1000" b="0">
+                <a:solidFill>
+                  <a:srgbClr val="0B0B0B"/>
+                </a:solidFill>
+              </a:defRPr>
+            </a:pPr>
+            <a:r>
+              <a:t>FFN     (decoder block ×3)</a:t>
+            </a:r>
+          </a:p>
+        </p:txBody>
+      </p:sp>
+      <p:sp>
+        <p:nvSpPr>
+          <p:cNvPr id="214" name="Rounded Rectangle 213"/>
+          <p:cNvSpPr/>
+          <p:nvPr/>
+        </p:nvSpPr>
+        <p:spPr>
+          <a:xfrm>
+            <a:off x="3291840" y="4709160"/>
+            <a:ext cx="4206240" cy="530352"/>
+          </a:xfrm>
+          <a:prstGeom prst="roundRect">
+            <a:avLst>
+              <a:gd name="adj" fmla="val 10000"/>
+            </a:avLst>
+          </a:prstGeom>
+          <a:solidFill>
+            <a:srgbClr val="F2F4F7"/>
+          </a:solidFill>
+          <a:ln w="15240">
+            <a:solidFill>
+              <a:srgbClr val="C9C8C2"/>
+            </a:solidFill>
+          </a:ln>
+          <a:effectLst/>
+        </p:spPr>
+        <p:style>
+          <a:lnRef idx="1">
+            <a:schemeClr val="accent1"/>
+          </a:lnRef>
+          <a:fillRef idx="3">
+            <a:schemeClr val="accent1"/>
+          </a:fillRef>
+          <a:effectRef idx="2">
+            <a:schemeClr val="accent1"/>
+          </a:effectRef>
+          <a:fontRef idx="minor">
+            <a:schemeClr val="lt1"/>
+          </a:fontRef>
+        </p:style>
+        <p:txBody>
+          <a:bodyPr rtlCol="0" anchor="ctr" wrap="square" lIns="54864" rIns="54864" tIns="27432" bIns="27432"/>
+          <a:lstStyle/>
+          <a:p>
+            <a:pPr algn="ctr">
+              <a:defRPr sz="1000" b="0">
+                <a:solidFill>
+                  <a:srgbClr val="0B0B0B"/>
+                </a:solidFill>
+              </a:defRPr>
+            </a:pPr>
+            <a:r>
+              <a:t>linear head → logits over vocab (84)</a:t>
+            </a:r>
+          </a:p>
+        </p:txBody>
+      </p:sp>
+      <p:sp>
+        <p:nvSpPr>
+          <p:cNvPr id="215" name="Rounded Rectangle 214"/>
+          <p:cNvSpPr/>
+          <p:nvPr/>
+        </p:nvSpPr>
+        <p:spPr>
+          <a:xfrm>
+            <a:off x="3291840" y="5532120"/>
+            <a:ext cx="4206240" cy="530352"/>
+          </a:xfrm>
+          <a:prstGeom prst="roundRect">
+            <a:avLst>
+              <a:gd name="adj" fmla="val 10000"/>
+            </a:avLst>
+          </a:prstGeom>
+          <a:solidFill>
+            <a:srgbClr val="F2F4F7"/>
+          </a:solidFill>
+          <a:ln w="15240">
+            <a:solidFill>
+              <a:srgbClr val="C9C8C2"/>
+            </a:solidFill>
+          </a:ln>
+          <a:effectLst/>
+        </p:spPr>
+        <p:style>
+          <a:lnRef idx="1">
+            <a:schemeClr val="accent1"/>
+          </a:lnRef>
+          <a:fillRef idx="3">
+            <a:schemeClr val="accent1"/>
+          </a:fillRef>
+          <a:effectRef idx="2">
+            <a:schemeClr val="accent1"/>
+          </a:effectRef>
+          <a:fontRef idx="minor">
+            <a:schemeClr val="lt1"/>
+          </a:fontRef>
+        </p:style>
+        <p:txBody>
+          <a:bodyPr rtlCol="0" anchor="ctr" wrap="square" lIns="54864" rIns="54864" tIns="27432" bIns="27432"/>
+          <a:lstStyle/>
+          <a:p>
+            <a:pPr algn="ctr">
+              <a:defRPr sz="1000" b="0">
+                <a:solidFill>
+                  <a:srgbClr val="0B0B0B"/>
+                </a:solidFill>
+              </a:defRPr>
+            </a:pPr>
+            <a:r>
+              <a:t>softmax → next link (argmax / sample)</a:t>
+            </a:r>
+          </a:p>
+        </p:txBody>
+      </p:sp>
+      <p:cxnSp>
+        <p:nvCxnSpPr>
+          <p:cNvPr id="216" name="Connector 215"/>
+          <p:cNvCxnSpPr>
+            <a:stCxn id="207" idx="2"/>
+            <a:endCxn id="211" idx="0"/>
+          </p:cNvCxnSpPr>
+          <p:nvPr/>
+        </p:nvCxnSpPr>
+        <p:spPr>
+          <a:xfrm flipH="1">
+            <a:off x="5394960" y="1892808"/>
+            <a:ext cx="393192" cy="347472"/>
+          </a:xfrm>
+          <a:prstGeom prst="bentConnector3">
+            <a:avLst/>
+          </a:prstGeom>
+          <a:ln w="19050">
+            <a:solidFill>
+              <a:srgbClr val="8A8880"/>
+            </a:solidFill>
+            <a:tailEnd type="triangle" w="med" len="med"/>
+          </a:ln>
+          <a:effectLst/>
+        </p:spPr>
+        <p:style>
+          <a:lnRef idx="2">
+            <a:schemeClr val="accent1"/>
+          </a:lnRef>
+          <a:fillRef idx="0">
+            <a:schemeClr val="accent1"/>
+          </a:fillRef>
+          <a:effectRef idx="1">
+            <a:schemeClr val="accent1"/>
+          </a:effectRef>
+          <a:fontRef idx="minor">
+            <a:schemeClr val="tx1"/>
+          </a:fontRef>
+        </p:style>
+      </p:cxnSp>
+      <p:cxnSp>
+        <p:nvCxnSpPr>
+          <p:cNvPr id="217" name="Connector 216"/>
+          <p:cNvCxnSpPr>
+            <a:stCxn id="211" idx="2"/>
+            <a:endCxn id="212" idx="0"/>
+          </p:cNvCxnSpPr>
+          <p:nvPr/>
+        </p:nvCxnSpPr>
+        <p:spPr>
+          <a:xfrm flipH="1">
+            <a:off x="5394960" y="2770632"/>
+            <a:ext cx="0" cy="292608"/>
+          </a:xfrm>
+          <a:prstGeom prst="bentConnector3">
+            <a:avLst/>
+          </a:prstGeom>
+          <a:ln w="19050">
+            <a:solidFill>
+              <a:srgbClr val="8A8880"/>
+            </a:solidFill>
+            <a:tailEnd type="triangle" w="med" len="med"/>
+          </a:ln>
+          <a:effectLst/>
+        </p:spPr>
+        <p:style>
+          <a:lnRef idx="2">
+            <a:schemeClr val="accent1"/>
+          </a:lnRef>
+          <a:fillRef idx="0">
+            <a:schemeClr val="accent1"/>
+          </a:fillRef>
+          <a:effectRef idx="1">
+            <a:schemeClr val="accent1"/>
+          </a:effectRef>
+          <a:fontRef idx="minor">
+            <a:schemeClr val="tx1"/>
+          </a:fontRef>
+        </p:style>
+      </p:cxnSp>
+      <p:cxnSp>
+        <p:nvCxnSpPr>
+          <p:cNvPr id="218" name="Connector 217"/>
+          <p:cNvCxnSpPr>
+            <a:stCxn id="212" idx="2"/>
+            <a:endCxn id="213" idx="0"/>
+          </p:cNvCxnSpPr>
+          <p:nvPr/>
+        </p:nvCxnSpPr>
+        <p:spPr>
+          <a:xfrm flipH="1">
+            <a:off x="5394960" y="3593592"/>
+            <a:ext cx="0" cy="292608"/>
+          </a:xfrm>
+          <a:prstGeom prst="bentConnector3">
+            <a:avLst/>
+          </a:prstGeom>
+          <a:ln w="19050">
+            <a:solidFill>
+              <a:srgbClr val="8A8880"/>
+            </a:solidFill>
+            <a:tailEnd type="triangle" w="med" len="med"/>
+          </a:ln>
+          <a:effectLst/>
+        </p:spPr>
+        <p:style>
+          <a:lnRef idx="2">
+            <a:schemeClr val="accent1"/>
+          </a:lnRef>
+          <a:fillRef idx="0">
+            <a:schemeClr val="accent1"/>
+          </a:fillRef>
+          <a:effectRef idx="1">
+            <a:schemeClr val="accent1"/>
+          </a:effectRef>
+          <a:fontRef idx="minor">
+            <a:schemeClr val="tx1"/>
+          </a:fontRef>
+        </p:style>
+      </p:cxnSp>
+      <p:cxnSp>
+        <p:nvCxnSpPr>
+          <p:cNvPr id="219" name="Connector 218"/>
+          <p:cNvCxnSpPr>
+            <a:stCxn id="213" idx="2"/>
+            <a:endCxn id="214" idx="0"/>
+          </p:cNvCxnSpPr>
+          <p:nvPr/>
+        </p:nvCxnSpPr>
+        <p:spPr>
+          <a:xfrm flipH="1">
+            <a:off x="5394960" y="4416552"/>
+            <a:ext cx="0" cy="292608"/>
+          </a:xfrm>
+          <a:prstGeom prst="bentConnector3">
+            <a:avLst/>
+          </a:prstGeom>
+          <a:ln w="19050">
+            <a:solidFill>
+              <a:srgbClr val="8A8880"/>
+            </a:solidFill>
+            <a:tailEnd type="triangle" w="med" len="med"/>
+          </a:ln>
+          <a:effectLst/>
+        </p:spPr>
+        <p:style>
+          <a:lnRef idx="2">
+            <a:schemeClr val="accent1"/>
+          </a:lnRef>
+          <a:fillRef idx="0">
+            <a:schemeClr val="accent1"/>
+          </a:fillRef>
+          <a:effectRef idx="1">
+            <a:schemeClr val="accent1"/>
+          </a:effectRef>
+          <a:fontRef idx="minor">
+            <a:schemeClr val="tx1"/>
+          </a:fontRef>
+        </p:style>
+      </p:cxnSp>
+      <p:cxnSp>
+        <p:nvCxnSpPr>
+          <p:cNvPr id="220" name="Connector 219"/>
+          <p:cNvCxnSpPr>
+            <a:stCxn id="214" idx="2"/>
+            <a:endCxn id="215" idx="0"/>
+          </p:cNvCxnSpPr>
+          <p:nvPr/>
+        </p:nvCxnSpPr>
+        <p:spPr>
+          <a:xfrm flipH="1">
+            <a:off x="5394960" y="5239512"/>
+            <a:ext cx="0" cy="292608"/>
+          </a:xfrm>
+          <a:prstGeom prst="bentConnector3">
+            <a:avLst/>
+          </a:prstGeom>
+          <a:ln w="19050">
+            <a:solidFill>
+              <a:srgbClr val="8A8880"/>
+            </a:solidFill>
+            <a:tailEnd type="triangle" w="med" len="med"/>
+          </a:ln>
+          <a:effectLst/>
+        </p:spPr>
+        <p:style>
+          <a:lnRef idx="2">
+            <a:schemeClr val="accent1"/>
+          </a:lnRef>
+          <a:fillRef idx="0">
+            <a:schemeClr val="accent1"/>
+          </a:fillRef>
+          <a:effectRef idx="1">
+            <a:schemeClr val="accent1"/>
+          </a:effectRef>
+          <a:fontRef idx="minor">
+            <a:schemeClr val="tx1"/>
+          </a:fontRef>
+        </p:style>
+      </p:cxnSp>
+      <p:sp>
+        <p:nvSpPr>
+          <p:cNvPr id="221" name="Rounded Rectangle 220"/>
+          <p:cNvSpPr/>
+          <p:nvPr/>
+        </p:nvSpPr>
+        <p:spPr>
+          <a:xfrm>
+            <a:off x="640080" y="3063240"/>
+            <a:ext cx="2011680" cy="530352"/>
+          </a:xfrm>
+          <a:prstGeom prst="roundRect">
+            <a:avLst>
+              <a:gd name="adj" fmla="val 10000"/>
+            </a:avLst>
+          </a:prstGeom>
+          <a:solidFill>
+            <a:srgbClr val="EAF1FB"/>
+          </a:solidFill>
+          <a:ln w="15240">
+            <a:solidFill>
+              <a:srgbClr val="2A78D6"/>
+            </a:solidFill>
+          </a:ln>
+          <a:effectLst/>
+        </p:spPr>
+        <p:style>
+          <a:lnRef idx="1">
+            <a:schemeClr val="accent1"/>
+          </a:lnRef>
+          <a:fillRef idx="3">
+            <a:schemeClr val="accent1"/>
+          </a:fillRef>
+          <a:effectRef idx="2">
+            <a:schemeClr val="accent1"/>
+          </a:effectRef>
+          <a:fontRef idx="minor">
+            <a:schemeClr val="lt1"/>
+          </a:fontRef>
+        </p:style>
+        <p:txBody>
+          <a:bodyPr rtlCol="0" anchor="ctr" wrap="square" lIns="54864" rIns="54864" tIns="27432" bIns="27432"/>
+          <a:lstStyle/>
+          <a:p>
+            <a:pPr algn="ctr">
+              <a:defRPr sz="1000" b="0">
+                <a:solidFill>
+                  <a:srgbClr val="2A78D6"/>
+                </a:solidFill>
+              </a:defRPr>
+            </a:pPr>
+            <a:r>
+              <a:t>case memory</a:t>
+            </a:r>
+          </a:p>
+        </p:txBody>
+      </p:sp>
+      <p:cxnSp>
+        <p:nvCxnSpPr>
+          <p:cNvPr id="222" name="Connector 221"/>
+          <p:cNvCxnSpPr>
+            <a:stCxn id="221" idx="3"/>
+            <a:endCxn id="212" idx="1"/>
+          </p:cNvCxnSpPr>
+          <p:nvPr/>
+        </p:nvCxnSpPr>
+        <p:spPr>
+          <a:xfrm flipV="1">
+            <a:off x="2651760" y="3328416"/>
+            <a:ext cx="640080" cy="0"/>
+          </a:xfrm>
+          <a:prstGeom prst="bentConnector3">
+            <a:avLst/>
+          </a:prstGeom>
+          <a:ln w="19050">
+            <a:solidFill>
+              <a:srgbClr val="2A78D6"/>
+            </a:solidFill>
+            <a:tailEnd type="triangle" w="med" len="med"/>
+          </a:ln>
+          <a:effectLst/>
+        </p:spPr>
+        <p:style>
+          <a:lnRef idx="2">
+            <a:schemeClr val="accent1"/>
+          </a:lnRef>
+          <a:fillRef idx="0">
+            <a:schemeClr val="accent1"/>
+          </a:fillRef>
+          <a:effectRef idx="1">
+            <a:schemeClr val="accent1"/>
+          </a:effectRef>
+          <a:fontRef idx="minor">
+            <a:schemeClr val="tx1"/>
+          </a:fontRef>
+        </p:style>
+      </p:cxnSp>
+      <p:sp>
+        <p:nvSpPr>
+          <p:cNvPr id="223" name="Rounded Rectangle 222"/>
+          <p:cNvSpPr/>
+          <p:nvPr/>
+        </p:nvSpPr>
+        <p:spPr>
+          <a:xfrm>
+            <a:off x="8275320" y="3566160"/>
+            <a:ext cx="3383280" cy="1737360"/>
+          </a:xfrm>
+          <a:prstGeom prst="roundRect">
+            <a:avLst>
+              <a:gd name="adj" fmla="val 10000"/>
+            </a:avLst>
+          </a:prstGeom>
+          <a:solidFill>
+            <a:srgbClr val="FDF1E9"/>
+          </a:solidFill>
+          <a:ln w="15240">
+            <a:solidFill>
+              <a:srgbClr val="EB6834"/>
+            </a:solidFill>
+          </a:ln>
+          <a:effectLst/>
+        </p:spPr>
+        <p:style>
+          <a:lnRef idx="1">
+            <a:schemeClr val="accent1"/>
+          </a:lnRef>
+          <a:fillRef idx="3">
+            <a:schemeClr val="accent1"/>
+          </a:fillRef>
+          <a:effectRef idx="2">
+            <a:schemeClr val="accent1"/>
+          </a:effectRef>
+          <a:fontRef idx="minor">
+            <a:schemeClr val="lt1"/>
+          </a:fontRef>
+        </p:style>
+        <p:txBody>
+          <a:bodyPr rtlCol="0" anchor="ctr" wrap="square" lIns="54864" rIns="54864" tIns="27432" bIns="27432"/>
+          <a:lstStyle/>
+          <a:p>
+            <a:pPr algn="ctr">
+              <a:defRPr sz="1150" b="1">
+                <a:solidFill>
+                  <a:srgbClr val="EB6834"/>
+                </a:solidFill>
+              </a:defRPr>
+            </a:pPr>
+            <a:r>
+              <a:t>feasibility mask — redesign ②</a:t>
+            </a:r>
+          </a:p>
+          <a:p>
+            <a:pPr algn="ctr">
+              <a:defRPr sz="919">
+                <a:solidFill>
+                  <a:srgbClr val="52514E"/>
+                </a:solidFill>
+              </a:defRPr>
+            </a:pPr>
+            <a:r>
+              <a:t>logits[illegal] = −∞</a:t>
+            </a:r>
+            <a:br/>
+            <a:r>
+              <a:t>① not a successor / U-turn</a:t>
+            </a:r>
+            <a:br/>
+            <a:r>
+              <a:t>② cannot reach own dest by t₀ᵥ + Bᵥ</a:t>
+            </a:r>
+            <a:br/>
+            <a:r>
+              <a:t>③ SEP only next to own gate</a:t>
+            </a:r>
+          </a:p>
+        </p:txBody>
+      </p:sp>
+      <p:cxnSp>
+        <p:nvCxnSpPr>
+          <p:cNvPr id="224" name="Connector 223"/>
+          <p:cNvCxnSpPr>
+            <a:stCxn id="223" idx="1"/>
+            <a:endCxn id="214" idx="3"/>
+          </p:cNvCxnSpPr>
+          <p:nvPr/>
+        </p:nvCxnSpPr>
+        <p:spPr>
+          <a:xfrm flipH="1">
+            <a:off x="7498080" y="4434840"/>
+            <a:ext cx="777240" cy="539496"/>
+          </a:xfrm>
+          <a:prstGeom prst="bentConnector3">
+            <a:avLst/>
+          </a:prstGeom>
+          <a:ln w="19050">
+            <a:solidFill>
+              <a:srgbClr val="EB6834"/>
+            </a:solidFill>
+            <a:tailEnd type="triangle" w="med" len="med"/>
+          </a:ln>
+          <a:effectLst/>
+        </p:spPr>
+        <p:style>
+          <a:lnRef idx="2">
+            <a:schemeClr val="accent1"/>
+          </a:lnRef>
+          <a:fillRef idx="0">
+            <a:schemeClr val="accent1"/>
+          </a:fillRef>
+          <a:effectRef idx="1">
+            <a:schemeClr val="accent1"/>
+          </a:effectRef>
+          <a:fontRef idx="minor">
+            <a:schemeClr val="tx1"/>
+          </a:fontRef>
+        </p:style>
+      </p:cxnSp>
+      <p:cxnSp>
+        <p:nvCxnSpPr>
+          <p:cNvPr id="225" name="Connector 224"/>
+          <p:cNvCxnSpPr>
+            <a:stCxn id="215" idx="3"/>
+            <a:endCxn id="209" idx="2"/>
+          </p:cNvCxnSpPr>
+          <p:nvPr/>
+        </p:nvCxnSpPr>
+        <p:spPr>
+          <a:xfrm flipH="1" flipV="1">
+            <a:off x="7397496" y="1892808"/>
+            <a:ext cx="100584" cy="3904488"/>
+          </a:xfrm>
+          <a:prstGeom prst="bentConnector3">
+            <a:avLst/>
+          </a:prstGeom>
+          <a:ln w="19050">
+            <a:solidFill>
+              <a:srgbClr val="8A8880"/>
+            </a:solidFill>
+            <a:tailEnd type="triangle" w="med" len="med"/>
+          </a:ln>
+          <a:effectLst/>
+        </p:spPr>
+        <p:style>
+          <a:lnRef idx="2">
+            <a:schemeClr val="accent1"/>
+          </a:lnRef>
+          <a:fillRef idx="0">
+            <a:schemeClr val="accent1"/>
+          </a:fillRef>
+          <a:effectRef idx="1">
+            <a:schemeClr val="accent1"/>
+          </a:effectRef>
+          <a:fontRef idx="minor">
+            <a:schemeClr val="tx1"/>
+          </a:fontRef>
+        </p:style>
+      </p:cxnSp>
+      <p:sp>
+        <p:nvSpPr>
+          <p:cNvPr id="226" name="TextBox 225"/>
+          <p:cNvSpPr txBox="1"/>
+          <p:nvPr/>
+        </p:nvSpPr>
+        <p:spPr>
+          <a:xfrm>
+            <a:off x="7699248" y="2212848"/>
+            <a:ext cx="3840480" cy="274320"/>
+          </a:xfrm>
+          <a:prstGeom prst="rect">
+            <a:avLst/>
+          </a:prstGeom>
+          <a:noFill/>
+        </p:spPr>
+        <p:txBody>
+          <a:bodyPr wrap="square">
+            <a:spAutoFit/>
+          </a:bodyPr>
+          <a:lstStyle/>
+          <a:p>
+            <a:pPr algn="l">
+              <a:defRPr sz="840" b="0">
+                <a:solidFill>
+                  <a:srgbClr val="52514E"/>
+                </a:solidFill>
+              </a:defRPr>
+            </a:pPr>
+            <a:r>
+              <a:t>append next token · advance clock t += c(l, t) · repeat until EOS</a:t>
+            </a:r>
+          </a:p>
+        </p:txBody>
+      </p:sp>
+      <p:sp>
+        <p:nvSpPr>
+          <p:cNvPr id="227" name="TextBox 226"/>
+          <p:cNvSpPr txBox="1"/>
+          <p:nvPr/>
+        </p:nvSpPr>
+        <p:spPr>
+          <a:xfrm>
+            <a:off x="1874519" y="6217920"/>
+            <a:ext cx="9784080" cy="914400"/>
+          </a:xfrm>
+          <a:prstGeom prst="rect">
+            <a:avLst/>
+          </a:prstGeom>
+          <a:noFill/>
+        </p:spPr>
+        <p:txBody>
+          <a:bodyPr wrap="square">
+            <a:spAutoFit/>
+          </a:bodyPr>
+          <a:lstStyle/>
+          <a:p>
+            <a:pPr>
+              <a:defRPr sz="1050" b="0"/>
+            </a:pPr>
+            <a:r>
+              <a:t>• Why ②: the budget gets a HARD channel into decoding (mask), not only a soft preference from labels — feasibility is enforced, not learned, so budgets never seen in training still decode to feasible routes. The mask has no parameters</a:t>
+            </a:r>
+          </a:p>
+        </p:txBody>
+      </p:sp>
+    </p:spTree>
+  </p:cSld>
+  <p:clrMapOvr>
+    <a:masterClrMapping/>
+  </p:clrMapOvr>
+</p:sld>
+</file>
+
+<file path=ppt/slides/slide27.xml><?xml version="1.0" encoding="utf-8"?>
+<p:sld xmlns:a="http://schemas.openxmlformats.org/drawingml/2006/main" xmlns:p="http://schemas.openxmlformats.org/presentationml/2006/main" xmlns:r="http://schemas.openxmlformats.org/officeDocument/2006/relationships">
+  <p:cSld>
+    <p:spTree>
+      <p:nvGrpSpPr>
+        <p:cNvPr id="1" name=""/>
+        <p:cNvGrpSpPr/>
+        <p:nvPr/>
+      </p:nvGrpSpPr>
+      <p:grpSpPr/>
+      <p:sp>
+        <p:nvSpPr>
+          <p:cNvPr id="7" name="文本占位符 6">
+            <a:extLst>
+              <a:ext uri="{FF2B5EF4-FFF2-40B4-BE49-F238E27FC236}">
+                <a16:creationId xmlns:a16="http://schemas.microsoft.com/office/drawing/2014/main" id="{33AE8DB3-4C29-0DE3-EB73-8D2BBFBB8CBF}"/>
+              </a:ext>
+            </a:extLst>
+          </p:cNvPr>
+          <p:cNvSpPr>
+            <a:spLocks noGrp="1"/>
+          </p:cNvSpPr>
+          <p:nvPr>
+            <p:ph type="body" sz="quarter" idx="11"/>
+          </p:nvPr>
+        </p:nvSpPr>
+        <p:spPr>
+          <a:xfrm>
+            <a:off x="336550" y="58738"/>
+            <a:ext cx="5759450" cy="622300"/>
+          </a:xfrm>
+        </p:spPr>
+        <p:txBody>
+          <a:bodyPr/>
+          <a:lstStyle/>
+          <a:p>
+            <a:r>
+              <a:rPr lang="en-US" altLang="zh-CN" dirty="0"/>
+              <a:t>Data</a:t>
+            </a:r>
+            <a:endParaRPr lang="zh-CN" altLang="en-US" dirty="0"/>
+          </a:p>
+        </p:txBody>
+      </p:sp>
+      <p:sp>
+        <p:nvSpPr>
+          <p:cNvPr id="203" name="文本占位符 5">
+            <a:extLst>
+              <a:ext uri="{FF2B5EF4-FFF2-40B4-BE49-F238E27FC236}">
+                <a16:creationId xmlns:a16="http://schemas.microsoft.com/office/drawing/2014/main" id="{A219F0BA-71F5-BA11-CCBD-9327897B98CC}"/>
+              </a:ext>
+            </a:extLst>
+          </p:cNvPr>
+          <p:cNvSpPr>
+            <a:spLocks noGrp="1"/>
+          </p:cNvSpPr>
+          <p:nvPr>
+            <p:ph type="body" sz="quarter" idx="10"/>
+          </p:nvPr>
+        </p:nvSpPr>
+        <p:spPr>
+          <a:xfrm>
+            <a:off x="0" y="820290"/>
+            <a:ext cx="5878224" cy="638175"/>
+          </a:xfrm>
+        </p:spPr>
+        <p:txBody>
+          <a:bodyPr/>
+          <a:lstStyle/>
+          <a:p>
+            <a:r>
+              <a:rPr lang="en-US" altLang="zh-CN" sz="2800" dirty="0"/>
+              <a:t>Label set</a:t>
             </a:r>
             <a:endParaRPr lang="zh-CN" altLang="en-US" sz="2800" dirty="0"/>
           </a:p>
@@ -7953,7 +15852,15 @@
               <a:defRPr sz="1350" b="1"/>
             </a:pPr>
             <a:r>
-              <a:t>• Five layers, 2 300 cases, none of them seen in training:</a:t>
+              <a:t>• 10 780 Gurobi labels · 0 errors · 0 solves hit the 60 s cap · 0.90 s mean per case (tight budgets prune the time-expanded graph → labelling ~30× faster than the full-horizon farm) · ~17 min on 15 workers, fully resumable</a:t>
+            </a:r>
+          </a:p>
+          <a:p>
+            <a:pPr>
+              <a:defRPr sz="1350" b="1"/>
+            </a:pPr>
+            <a:r>
+              <a:t>• Shards:</a:t>
             </a:r>
           </a:p>
           <a:p>
@@ -7961,7 +15868,7 @@
               <a:defRPr sz="1200" b="0"/>
             </a:pPr>
             <a:r>
-              <a:t>   – L1 same-distribution — 800 fresh cases (trained ODs, new δ / task mixes)</a:t>
+              <a:t>   – train 8 000 · same-distribution test 800</a:t>
             </a:r>
           </a:p>
           <a:p>
@@ -7969,7 +15876,7 @@
               <a:defRPr sz="1200" b="0"/>
             </a:pPr>
             <a:r>
-              <a:t>   – L2 OD ZERO-SHOT — 400 cases on 4 OD pairs never trained (G1→G5, G6→G2, G4→G8, G7→G3)</a:t>
+              <a:t>   – OD zero-shot 400 (4 gate pairs never trained) · fleet extrapolation 400 (V ∈ {5,8})</a:t>
             </a:r>
           </a:p>
           <a:p>
@@ -7977,7 +15884,7 @@
               <a:defRPr sz="1200" b="0"/>
             </a:pPr>
             <a:r>
-              <a:t>   – L3 fleet extrapolation — 400 cases with V ∈ {5, 8}, trained on {2,3,4,6}</a:t>
+              <a:t>   – UNSEEN-budget interpolation 400 (ρ ∈ {1.25, 1.75}) · extrapolation 300 (ρ = 4.0)</a:t>
             </a:r>
           </a:p>
           <a:p>
@@ -7985,23 +15892,7 @@
               <a:defRPr sz="1200" b="0"/>
             </a:pPr>
             <a:r>
-              <a:t>   – L4a UNSEEN budget, interpolation — 400 cases at ρ ∈ {1.25, 1.75}</a:t>
-            </a:r>
-          </a:p>
-          <a:p>
-            <a:pPr>
-              <a:defRPr sz="1200" b="0"/>
-            </a:pPr>
-            <a:r>
-              <a:t>   – L4b UNSEEN budget, extrapolation — 300 cases at ρ = 4.0, beyond the trained range</a:t>
-            </a:r>
-          </a:p>
-          <a:p>
-            <a:pPr>
-              <a:defRPr sz="1350" b="1"/>
-            </a:pPr>
-            <a:r>
-              <a:t>• Plus a RESPONSE CURVE: 60 fixed instances re-solved at every ρ by both Gurobi and the model — the test of whether the budget was learned as a continuous quantity or as a handful of memorised settings</a:t>
+              <a:t>   – response curve: 60 fixed instances × 8 ρ values, re-solved by Gurobi at every ρ</a:t>
             </a:r>
           </a:p>
           <a:p>
@@ -8009,7 +15900,7 @@
               <a:defRPr sz="1350" b="0"/>
             </a:pPr>
             <a:r>
-              <a:t>• Metrics: feasibility rate · objective gap vs Gurobi (absolute and relative) · fraction matching or beating Gurobi · inference time · per-case CSV. 3 seeds, mean ± std</a:t>
+              <a:t>• Trained ρ anchors {1.0, 1.5, 2.0, 3.0}; the three held-out ρ values appear in NO training label</a:t>
             </a:r>
           </a:p>
           <a:p>
@@ -8017,7 +15908,7 @@
               <a:defRPr sz="1350" b="0"/>
             </a:pPr>
             <a:r>
-              <a:t>• Tuning used a validation slice of the training shard only; every number below comes from held-out shards</a:t>
+              <a:t>• Every label passes two checks at write time: flow-decomposed objective ≡ Gurobi ObjVal (1e-6) and every per-vehicle deadline re-validated</a:t>
             </a:r>
           </a:p>
         </p:txBody>
@@ -8030,7 +15921,188 @@
 </p:sld>
 </file>
 
-<file path=ppt/slides/slide23.xml><?xml version="1.0" encoding="utf-8"?>
+<file path=ppt/slides/slide28.xml><?xml version="1.0" encoding="utf-8"?>
+<p:sld xmlns:a="http://schemas.openxmlformats.org/drawingml/2006/main" xmlns:p="http://schemas.openxmlformats.org/presentationml/2006/main" xmlns:r="http://schemas.openxmlformats.org/officeDocument/2006/relationships">
+  <p:cSld>
+    <p:spTree>
+      <p:nvGrpSpPr>
+        <p:cNvPr id="1" name=""/>
+        <p:cNvGrpSpPr/>
+        <p:nvPr/>
+      </p:nvGrpSpPr>
+      <p:grpSpPr/>
+      <p:sp>
+        <p:nvSpPr>
+          <p:cNvPr id="7" name="文本占位符 6">
+            <a:extLst>
+              <a:ext uri="{FF2B5EF4-FFF2-40B4-BE49-F238E27FC236}">
+                <a16:creationId xmlns:a16="http://schemas.microsoft.com/office/drawing/2014/main" id="{33AE8DB3-4C29-0DE3-EB73-8D2BBFBB8CBF}"/>
+              </a:ext>
+            </a:extLst>
+          </p:cNvPr>
+          <p:cNvSpPr>
+            <a:spLocks noGrp="1"/>
+          </p:cNvSpPr>
+          <p:nvPr>
+            <p:ph type="body" sz="quarter" idx="11"/>
+          </p:nvPr>
+        </p:nvSpPr>
+        <p:spPr>
+          <a:xfrm>
+            <a:off x="336550" y="58738"/>
+            <a:ext cx="5759450" cy="622300"/>
+          </a:xfrm>
+        </p:spPr>
+        <p:txBody>
+          <a:bodyPr/>
+          <a:lstStyle/>
+          <a:p>
+            <a:r>
+              <a:rPr lang="en-US" altLang="zh-CN" dirty="0"/>
+              <a:t>Evaluation</a:t>
+            </a:r>
+            <a:endParaRPr lang="zh-CN" altLang="en-US" dirty="0"/>
+          </a:p>
+        </p:txBody>
+      </p:sp>
+      <p:sp>
+        <p:nvSpPr>
+          <p:cNvPr id="203" name="文本占位符 5">
+            <a:extLst>
+              <a:ext uri="{FF2B5EF4-FFF2-40B4-BE49-F238E27FC236}">
+                <a16:creationId xmlns:a16="http://schemas.microsoft.com/office/drawing/2014/main" id="{A219F0BA-71F5-BA11-CCBD-9327897B98CC}"/>
+              </a:ext>
+            </a:extLst>
+          </p:cNvPr>
+          <p:cNvSpPr>
+            <a:spLocks noGrp="1"/>
+          </p:cNvSpPr>
+          <p:nvPr>
+            <p:ph type="body" sz="quarter" idx="10"/>
+          </p:nvPr>
+        </p:nvSpPr>
+        <p:spPr>
+          <a:xfrm>
+            <a:off x="0" y="820290"/>
+            <a:ext cx="5878224" cy="638175"/>
+          </a:xfrm>
+        </p:spPr>
+        <p:txBody>
+          <a:bodyPr/>
+          <a:lstStyle/>
+          <a:p>
+            <a:r>
+              <a:rPr lang="en-US" altLang="zh-CN" sz="2800" dirty="0"/>
+              <a:t>Design</a:t>
+            </a:r>
+            <a:endParaRPr lang="zh-CN" altLang="en-US" sz="2800" dirty="0"/>
+          </a:p>
+        </p:txBody>
+      </p:sp>
+      <p:sp>
+        <p:nvSpPr>
+          <p:cNvPr id="204" name="TextBox 203"/>
+          <p:cNvSpPr txBox="1"/>
+          <p:nvPr/>
+        </p:nvSpPr>
+        <p:spPr>
+          <a:xfrm>
+            <a:off x="640080" y="1508760"/>
+            <a:ext cx="10881360" cy="914400"/>
+          </a:xfrm>
+          <a:prstGeom prst="rect">
+            <a:avLst/>
+          </a:prstGeom>
+          <a:noFill/>
+        </p:spPr>
+        <p:txBody>
+          <a:bodyPr wrap="square">
+            <a:spAutoFit/>
+          </a:bodyPr>
+          <a:lstStyle/>
+          <a:p>
+            <a:pPr>
+              <a:defRPr sz="1350" b="1"/>
+            </a:pPr>
+            <a:r>
+              <a:t>• Five layers, 2 300 cases, none seen in training:</a:t>
+            </a:r>
+          </a:p>
+          <a:p>
+            <a:pPr>
+              <a:defRPr sz="1200" b="0"/>
+            </a:pPr>
+            <a:r>
+              <a:t>   – L1 same-distribution — 800 fresh cases (trained ODs, new δ / task mixes)</a:t>
+            </a:r>
+          </a:p>
+          <a:p>
+            <a:pPr>
+              <a:defRPr sz="1200" b="0"/>
+            </a:pPr>
+            <a:r>
+              <a:t>   – L2 OD ZERO-SHOT — 400 cases on 4 OD pairs never trained (G1→G5, G6→G2, G4→G8, G7→G3)</a:t>
+            </a:r>
+          </a:p>
+          <a:p>
+            <a:pPr>
+              <a:defRPr sz="1200" b="0"/>
+            </a:pPr>
+            <a:r>
+              <a:t>   – L3 fleet extrapolation — 400 cases with V ∈ {5, 8}, trained on {2,3,4,6}</a:t>
+            </a:r>
+          </a:p>
+          <a:p>
+            <a:pPr>
+              <a:defRPr sz="1200" b="0"/>
+            </a:pPr>
+            <a:r>
+              <a:t>   – L4a UNSEEN budget, interpolation — 400 cases at ρ ∈ {1.25, 1.75}</a:t>
+            </a:r>
+          </a:p>
+          <a:p>
+            <a:pPr>
+              <a:defRPr sz="1200" b="0"/>
+            </a:pPr>
+            <a:r>
+              <a:t>   – L4b UNSEEN budget, extrapolation — 300 cases at ρ = 4.0, beyond the trained range</a:t>
+            </a:r>
+          </a:p>
+          <a:p>
+            <a:pPr>
+              <a:defRPr sz="1350" b="1"/>
+            </a:pPr>
+            <a:r>
+              <a:t>• Plus the RESPONSE CURVE: 60 fixed instances re-solved at every ρ by both Gurobi and the model — did it learn the budget as a continuous quantity or memorise four settings?</a:t>
+            </a:r>
+          </a:p>
+          <a:p>
+            <a:pPr>
+              <a:defRPr sz="1350" b="0"/>
+            </a:pPr>
+            <a:r>
+              <a:t>• Metrics: feasibility rate · objective gap vs Gurobi (absolute + relative) · fraction matching or beating Gurobi · inference time · per-case CSV. 3 seeds, mean ± std</a:t>
+            </a:r>
+          </a:p>
+          <a:p>
+            <a:pPr>
+              <a:defRPr sz="1350" b="0"/>
+            </a:pPr>
+            <a:r>
+              <a:t>• Tuning used a validation slice of the training shard only; every reported number is from held-out shards</a:t>
+            </a:r>
+          </a:p>
+        </p:txBody>
+      </p:sp>
+    </p:spTree>
+  </p:cSld>
+  <p:clrMapOvr>
+    <a:masterClrMapping/>
+  </p:clrMapOvr>
+</p:sld>
+</file>
+
+<file path=ppt/slides/slide29.xml><?xml version="1.0" encoding="utf-8"?>
 <p:sld xmlns:a="http://schemas.openxmlformats.org/drawingml/2006/main" xmlns:p="http://schemas.openxmlformats.org/presentationml/2006/main" xmlns:r="http://schemas.openxmlformats.org/officeDocument/2006/relationships">
   <p:cSld>
     <p:spTree>
@@ -8167,296 +16239,6 @@
             </a:pPr>
             <a:r>
               <a:t>• Unseen budgets (L4a, orange) cost about as much accuracy as an unseen fleet size — the budget generalises like the other conditioned attributes, not worse</a:t>
-            </a:r>
-          </a:p>
-        </p:txBody>
-      </p:sp>
-    </p:spTree>
-  </p:cSld>
-  <p:clrMapOvr>
-    <a:masterClrMapping/>
-  </p:clrMapOvr>
-</p:sld>
-</file>
-
-<file path=ppt/slides/slide24.xml><?xml version="1.0" encoding="utf-8"?>
-<p:sld xmlns:a="http://schemas.openxmlformats.org/drawingml/2006/main" xmlns:p="http://schemas.openxmlformats.org/presentationml/2006/main" xmlns:r="http://schemas.openxmlformats.org/officeDocument/2006/relationships">
-  <p:cSld>
-    <p:spTree>
-      <p:nvGrpSpPr>
-        <p:cNvPr id="1" name=""/>
-        <p:cNvGrpSpPr/>
-        <p:nvPr/>
-      </p:nvGrpSpPr>
-      <p:grpSpPr/>
-      <p:sp>
-        <p:nvSpPr>
-          <p:cNvPr id="7" name="文本占位符 6">
-            <a:extLst>
-              <a:ext uri="{FF2B5EF4-FFF2-40B4-BE49-F238E27FC236}">
-                <a16:creationId xmlns:a16="http://schemas.microsoft.com/office/drawing/2014/main" id="{33AE8DB3-4C29-0DE3-EB73-8D2BBFBB8CBF}"/>
-              </a:ext>
-            </a:extLst>
-          </p:cNvPr>
-          <p:cNvSpPr>
-            <a:spLocks noGrp="1"/>
-          </p:cNvSpPr>
-          <p:nvPr>
-            <p:ph type="body" sz="quarter" idx="11"/>
-          </p:nvPr>
-        </p:nvSpPr>
-        <p:spPr>
-          <a:xfrm>
-            <a:off x="336550" y="58738"/>
-            <a:ext cx="5759450" cy="622300"/>
-          </a:xfrm>
-        </p:spPr>
-        <p:txBody>
-          <a:bodyPr/>
-          <a:lstStyle/>
-          <a:p>
-            <a:r>
-              <a:rPr lang="en-US" altLang="zh-CN" dirty="0"/>
-              <a:t>Results</a:t>
-            </a:r>
-            <a:endParaRPr lang="zh-CN" altLang="en-US" dirty="0"/>
-          </a:p>
-        </p:txBody>
-      </p:sp>
-      <p:sp>
-        <p:nvSpPr>
-          <p:cNvPr id="203" name="文本占位符 5">
-            <a:extLst>
-              <a:ext uri="{FF2B5EF4-FFF2-40B4-BE49-F238E27FC236}">
-                <a16:creationId xmlns:a16="http://schemas.microsoft.com/office/drawing/2014/main" id="{A219F0BA-71F5-BA11-CCBD-9327897B98CC}"/>
-              </a:ext>
-            </a:extLst>
-          </p:cNvPr>
-          <p:cNvSpPr>
-            <a:spLocks noGrp="1"/>
-          </p:cNvSpPr>
-          <p:nvPr>
-            <p:ph type="body" sz="quarter" idx="10"/>
-          </p:nvPr>
-        </p:nvSpPr>
-        <p:spPr>
-          <a:xfrm>
-            <a:off x="0" y="820290"/>
-            <a:ext cx="5878224" cy="638175"/>
-          </a:xfrm>
-        </p:spPr>
-        <p:txBody>
-          <a:bodyPr/>
-          <a:lstStyle/>
-          <a:p>
-            <a:r>
-              <a:rPr lang="en-US" altLang="zh-CN" sz="2800" dirty="0"/>
-              <a:t>Budget response curve</a:t>
-            </a:r>
-            <a:endParaRPr lang="zh-CN" altLang="en-US" sz="2800" dirty="0"/>
-          </a:p>
-        </p:txBody>
-      </p:sp>
-      <p:pic>
-        <p:nvPicPr>
-          <p:cNvPr id="204" name="Picture 203" descr="figS2_response_curve.png"/>
-          <p:cNvPicPr>
-            <a:picLocks noChangeAspect="1"/>
-          </p:cNvPicPr>
-          <p:nvPr/>
-        </p:nvPicPr>
-        <p:blipFill>
-          <a:blip r:embed="rId2"/>
-          <a:stretch>
-            <a:fillRect/>
-          </a:stretch>
-        </p:blipFill>
-        <p:spPr>
-          <a:xfrm>
-            <a:off x="1981047" y="1371600"/>
-            <a:ext cx="8229600" cy="4053969"/>
-          </a:xfrm>
-          <a:prstGeom prst="rect">
-            <a:avLst/>
-          </a:prstGeom>
-        </p:spPr>
-      </p:pic>
-      <p:sp>
-        <p:nvSpPr>
-          <p:cNvPr id="205" name="TextBox 204"/>
-          <p:cNvSpPr txBox="1"/>
-          <p:nvPr/>
-        </p:nvSpPr>
-        <p:spPr>
-          <a:xfrm>
-            <a:off x="640080" y="5517008"/>
-            <a:ext cx="10881360" cy="914400"/>
-          </a:xfrm>
-          <a:prstGeom prst="rect">
-            <a:avLst/>
-          </a:prstGeom>
-          <a:noFill/>
-        </p:spPr>
-        <p:txBody>
-          <a:bodyPr wrap="square">
-            <a:spAutoFit/>
-          </a:bodyPr>
-          <a:lstStyle/>
-          <a:p>
-            <a:pPr>
-              <a:defRPr sz="1250" b="1"/>
-            </a:pPr>
-            <a:r>
-              <a:t>• The monotone budget response is reproduced across the whole range, including at ρ = 1.25 / 1.75 / 4.0 — values absent from every training label. At ρ = 1 the budget forces the min-time route and the model is EXACTLY optimal (60/60); the undershoot grows with slack (ρ = 4: 514 vs 708 cells), which is the limit of greedy decoding</a:t>
-            </a:r>
-          </a:p>
-        </p:txBody>
-      </p:sp>
-    </p:spTree>
-  </p:cSld>
-  <p:clrMapOvr>
-    <a:masterClrMapping/>
-  </p:clrMapOvr>
-</p:sld>
-</file>
-
-<file path=ppt/slides/slide25.xml><?xml version="1.0" encoding="utf-8"?>
-<p:sld xmlns:a="http://schemas.openxmlformats.org/drawingml/2006/main" xmlns:p="http://schemas.openxmlformats.org/presentationml/2006/main" xmlns:r="http://schemas.openxmlformats.org/officeDocument/2006/relationships">
-  <p:cSld>
-    <p:spTree>
-      <p:nvGrpSpPr>
-        <p:cNvPr id="1" name=""/>
-        <p:cNvGrpSpPr/>
-        <p:nvPr/>
-      </p:nvGrpSpPr>
-      <p:grpSpPr/>
-      <p:sp>
-        <p:nvSpPr>
-          <p:cNvPr id="7" name="文本占位符 6">
-            <a:extLst>
-              <a:ext uri="{FF2B5EF4-FFF2-40B4-BE49-F238E27FC236}">
-                <a16:creationId xmlns:a16="http://schemas.microsoft.com/office/drawing/2014/main" id="{33AE8DB3-4C29-0DE3-EB73-8D2BBFBB8CBF}"/>
-              </a:ext>
-            </a:extLst>
-          </p:cNvPr>
-          <p:cNvSpPr>
-            <a:spLocks noGrp="1"/>
-          </p:cNvSpPr>
-          <p:nvPr>
-            <p:ph type="body" sz="quarter" idx="11"/>
-          </p:nvPr>
-        </p:nvSpPr>
-        <p:spPr>
-          <a:xfrm>
-            <a:off x="336550" y="58738"/>
-            <a:ext cx="5759450" cy="622300"/>
-          </a:xfrm>
-        </p:spPr>
-        <p:txBody>
-          <a:bodyPr/>
-          <a:lstStyle/>
-          <a:p>
-            <a:r>
-              <a:rPr lang="en-US" altLang="zh-CN" dirty="0"/>
-              <a:t>Summary</a:t>
-            </a:r>
-            <a:endParaRPr lang="zh-CN" altLang="en-US" dirty="0"/>
-          </a:p>
-        </p:txBody>
-      </p:sp>
-      <p:sp>
-        <p:nvSpPr>
-          <p:cNvPr id="203" name="文本占位符 5">
-            <a:extLst>
-              <a:ext uri="{FF2B5EF4-FFF2-40B4-BE49-F238E27FC236}">
-                <a16:creationId xmlns:a16="http://schemas.microsoft.com/office/drawing/2014/main" id="{A219F0BA-71F5-BA11-CCBD-9327897B98CC}"/>
-              </a:ext>
-            </a:extLst>
-          </p:cNvPr>
-          <p:cNvSpPr>
-            <a:spLocks noGrp="1"/>
-          </p:cNvSpPr>
-          <p:nvPr>
-            <p:ph type="body" sz="quarter" idx="10"/>
-          </p:nvPr>
-        </p:nvSpPr>
-        <p:spPr>
-          <a:xfrm>
-            <a:off x="0" y="820290"/>
-            <a:ext cx="5878224" cy="638175"/>
-          </a:xfrm>
-        </p:spPr>
-        <p:txBody>
-          <a:bodyPr/>
-          <a:lstStyle/>
-          <a:p>
-            <a:r>
-              <a:rPr lang="en-US" altLang="zh-CN" sz="2800" dirty="0"/>
-              <a:t>Where this stands</a:t>
-            </a:r>
-            <a:endParaRPr lang="zh-CN" altLang="en-US" sz="2800" dirty="0"/>
-          </a:p>
-        </p:txBody>
-      </p:sp>
-      <p:sp>
-        <p:nvSpPr>
-          <p:cNvPr id="204" name="TextBox 203"/>
-          <p:cNvSpPr txBox="1"/>
-          <p:nvPr/>
-        </p:nvSpPr>
-        <p:spPr>
-          <a:xfrm>
-            <a:off x="640080" y="1554480"/>
-            <a:ext cx="10881360" cy="914400"/>
-          </a:xfrm>
-          <a:prstGeom prst="rect">
-            <a:avLst/>
-          </a:prstGeom>
-          <a:noFill/>
-        </p:spPr>
-        <p:txBody>
-          <a:bodyPr wrap="square">
-            <a:spAutoFit/>
-          </a:bodyPr>
-          <a:lstStyle/>
-          <a:p>
-            <a:pPr>
-              <a:defRPr sz="1400" b="1"/>
-            </a:pPr>
-            <a:r>
-              <a:t>• One recipe, verified end to end: Gurobi labels offline → 1.04 M-parameter Transformer → guaranteed-feasible millisecond inference, conditioned on each vehicle's own budget</a:t>
-            </a:r>
-          </a:p>
-          <a:p>
-            <a:pPr>
-              <a:defRPr sz="1400" b="0"/>
-            </a:pPr>
-            <a:r>
-              <a:t>• The control variable is now physical (shift length / energy), continuous, and demonstrably generalises to budgets never trained on</a:t>
-            </a:r>
-          </a:p>
-          <a:p>
-            <a:pPr>
-              <a:defRPr sz="1400" b="0"/>
-            </a:pPr>
-            <a:r>
-              <a:t>• Verification chain at every step: MILP ≡ flow decomposition ≡ simulator · budget MILP ≡ the full-horizon MILP at B ≥ H · per-case CSVs against Gurobi on every held-out layer</a:t>
-            </a:r>
-          </a:p>
-          <a:p>
-            <a:pPr>
-              <a:defRPr sz="1400" b="0"/>
-            </a:pPr>
-            <a:r>
-              <a:t>• Known and deliberately open: with uniform cell utility, overlap = 0 in ~92 % of optimal solutions, so coverage ≈ cost. The budget controls HOW MUCH to roam; making WHICH cells a real decision needs heterogeneous utility wᵢ — the next modelling step, not a fix</a:t>
-            </a:r>
-          </a:p>
-          <a:p>
-            <a:pPr>
-              <a:defRPr sz="1400" b="1"/>
-            </a:pPr>
-            <a:r>
-              <a:t>• Next levers, in order: multi-sample (non-greedy) decoding · wider ρ range for extrapolation · data-volume slope · heterogeneous wᵢ · then the 5×5 real network</a:t>
             </a:r>
           </a:p>
         </p:txBody>
@@ -8571,6 +16353,304 @@
         <p14:creationId xmlns:p14="http://schemas.microsoft.com/office/powerpoint/2010/main" val="35167972"/>
       </p:ext>
     </p:extLst>
+  </p:cSld>
+  <p:clrMapOvr>
+    <a:masterClrMapping/>
+  </p:clrMapOvr>
+</p:sld>
+</file>
+
+<file path=ppt/slides/slide30.xml><?xml version="1.0" encoding="utf-8"?>
+<p:sld xmlns:a="http://schemas.openxmlformats.org/drawingml/2006/main" xmlns:p="http://schemas.openxmlformats.org/presentationml/2006/main" xmlns:r="http://schemas.openxmlformats.org/officeDocument/2006/relationships">
+  <p:cSld>
+    <p:spTree>
+      <p:nvGrpSpPr>
+        <p:cNvPr id="1" name=""/>
+        <p:cNvGrpSpPr/>
+        <p:nvPr/>
+      </p:nvGrpSpPr>
+      <p:grpSpPr/>
+      <p:sp>
+        <p:nvSpPr>
+          <p:cNvPr id="7" name="文本占位符 6">
+            <a:extLst>
+              <a:ext uri="{FF2B5EF4-FFF2-40B4-BE49-F238E27FC236}">
+                <a16:creationId xmlns:a16="http://schemas.microsoft.com/office/drawing/2014/main" id="{33AE8DB3-4C29-0DE3-EB73-8D2BBFBB8CBF}"/>
+              </a:ext>
+            </a:extLst>
+          </p:cNvPr>
+          <p:cNvSpPr>
+            <a:spLocks noGrp="1"/>
+          </p:cNvSpPr>
+          <p:nvPr>
+            <p:ph type="body" sz="quarter" idx="11"/>
+          </p:nvPr>
+        </p:nvSpPr>
+        <p:spPr>
+          <a:xfrm>
+            <a:off x="336550" y="58738"/>
+            <a:ext cx="5759450" cy="622300"/>
+          </a:xfrm>
+        </p:spPr>
+        <p:txBody>
+          <a:bodyPr/>
+          <a:lstStyle/>
+          <a:p>
+            <a:r>
+              <a:rPr lang="en-US" altLang="zh-CN" dirty="0"/>
+              <a:t>Results</a:t>
+            </a:r>
+            <a:endParaRPr lang="zh-CN" altLang="en-US" dirty="0"/>
+          </a:p>
+        </p:txBody>
+      </p:sp>
+      <p:sp>
+        <p:nvSpPr>
+          <p:cNvPr id="203" name="文本占位符 5">
+            <a:extLst>
+              <a:ext uri="{FF2B5EF4-FFF2-40B4-BE49-F238E27FC236}">
+                <a16:creationId xmlns:a16="http://schemas.microsoft.com/office/drawing/2014/main" id="{A219F0BA-71F5-BA11-CCBD-9327897B98CC}"/>
+              </a:ext>
+            </a:extLst>
+          </p:cNvPr>
+          <p:cNvSpPr>
+            <a:spLocks noGrp="1"/>
+          </p:cNvSpPr>
+          <p:nvPr>
+            <p:ph type="body" sz="quarter" idx="10"/>
+          </p:nvPr>
+        </p:nvSpPr>
+        <p:spPr>
+          <a:xfrm>
+            <a:off x="0" y="820290"/>
+            <a:ext cx="5878224" cy="638175"/>
+          </a:xfrm>
+        </p:spPr>
+        <p:txBody>
+          <a:bodyPr/>
+          <a:lstStyle/>
+          <a:p>
+            <a:r>
+              <a:rPr lang="en-US" altLang="zh-CN" sz="2800" dirty="0"/>
+              <a:t>Budget response curve</a:t>
+            </a:r>
+            <a:endParaRPr lang="zh-CN" altLang="en-US" sz="2800" dirty="0"/>
+          </a:p>
+        </p:txBody>
+      </p:sp>
+      <p:pic>
+        <p:nvPicPr>
+          <p:cNvPr id="204" name="Picture 203" descr="figS2_response_curve.png"/>
+          <p:cNvPicPr>
+            <a:picLocks noChangeAspect="1"/>
+          </p:cNvPicPr>
+          <p:nvPr/>
+        </p:nvPicPr>
+        <p:blipFill>
+          <a:blip r:embed="rId2"/>
+          <a:stretch>
+            <a:fillRect/>
+          </a:stretch>
+        </p:blipFill>
+        <p:spPr>
+          <a:xfrm>
+            <a:off x="1981047" y="1371600"/>
+            <a:ext cx="8229600" cy="4053969"/>
+          </a:xfrm>
+          <a:prstGeom prst="rect">
+            <a:avLst/>
+          </a:prstGeom>
+        </p:spPr>
+      </p:pic>
+      <p:sp>
+        <p:nvSpPr>
+          <p:cNvPr id="205" name="TextBox 204"/>
+          <p:cNvSpPr txBox="1"/>
+          <p:nvPr/>
+        </p:nvSpPr>
+        <p:spPr>
+          <a:xfrm>
+            <a:off x="640080" y="5517008"/>
+            <a:ext cx="10881360" cy="914400"/>
+          </a:xfrm>
+          <a:prstGeom prst="rect">
+            <a:avLst/>
+          </a:prstGeom>
+          <a:noFill/>
+        </p:spPr>
+        <p:txBody>
+          <a:bodyPr wrap="square">
+            <a:spAutoFit/>
+          </a:bodyPr>
+          <a:lstStyle/>
+          <a:p>
+            <a:pPr>
+              <a:defRPr sz="1250" b="1"/>
+            </a:pPr>
+            <a:r>
+              <a:t>• Monotone response reproduced — including at ρ = 1.25 / 1.75 / 4.0, absent from every training label. At ρ = 1 the model is EXACTLY optimal (60/60); tracking degrades as slack grows (ρ = 4: 514 vs 708 cells) — the limit of greedy decoding</a:t>
+            </a:r>
+          </a:p>
+        </p:txBody>
+      </p:sp>
+    </p:spTree>
+  </p:cSld>
+  <p:clrMapOvr>
+    <a:masterClrMapping/>
+  </p:clrMapOvr>
+</p:sld>
+</file>
+
+<file path=ppt/slides/slide31.xml><?xml version="1.0" encoding="utf-8"?>
+<p:sld xmlns:a="http://schemas.openxmlformats.org/drawingml/2006/main" xmlns:p="http://schemas.openxmlformats.org/presentationml/2006/main" xmlns:r="http://schemas.openxmlformats.org/officeDocument/2006/relationships">
+  <p:cSld>
+    <p:spTree>
+      <p:nvGrpSpPr>
+        <p:cNvPr id="1" name=""/>
+        <p:cNvGrpSpPr/>
+        <p:nvPr/>
+      </p:nvGrpSpPr>
+      <p:grpSpPr/>
+      <p:sp>
+        <p:nvSpPr>
+          <p:cNvPr id="7" name="文本占位符 6">
+            <a:extLst>
+              <a:ext uri="{FF2B5EF4-FFF2-40B4-BE49-F238E27FC236}">
+                <a16:creationId xmlns:a16="http://schemas.microsoft.com/office/drawing/2014/main" id="{33AE8DB3-4C29-0DE3-EB73-8D2BBFBB8CBF}"/>
+              </a:ext>
+            </a:extLst>
+          </p:cNvPr>
+          <p:cNvSpPr>
+            <a:spLocks noGrp="1"/>
+          </p:cNvSpPr>
+          <p:nvPr>
+            <p:ph type="body" sz="quarter" idx="11"/>
+          </p:nvPr>
+        </p:nvSpPr>
+        <p:spPr>
+          <a:xfrm>
+            <a:off x="336550" y="58738"/>
+            <a:ext cx="5759450" cy="622300"/>
+          </a:xfrm>
+        </p:spPr>
+        <p:txBody>
+          <a:bodyPr/>
+          <a:lstStyle/>
+          <a:p>
+            <a:r>
+              <a:rPr lang="en-US" altLang="zh-CN" dirty="0"/>
+              <a:t>Summary</a:t>
+            </a:r>
+            <a:endParaRPr lang="zh-CN" altLang="en-US" dirty="0"/>
+          </a:p>
+        </p:txBody>
+      </p:sp>
+      <p:sp>
+        <p:nvSpPr>
+          <p:cNvPr id="203" name="文本占位符 5">
+            <a:extLst>
+              <a:ext uri="{FF2B5EF4-FFF2-40B4-BE49-F238E27FC236}">
+                <a16:creationId xmlns:a16="http://schemas.microsoft.com/office/drawing/2014/main" id="{A219F0BA-71F5-BA11-CCBD-9327897B98CC}"/>
+              </a:ext>
+            </a:extLst>
+          </p:cNvPr>
+          <p:cNvSpPr>
+            <a:spLocks noGrp="1"/>
+          </p:cNvSpPr>
+          <p:nvPr>
+            <p:ph type="body" sz="quarter" idx="10"/>
+          </p:nvPr>
+        </p:nvSpPr>
+        <p:spPr>
+          <a:xfrm>
+            <a:off x="0" y="820290"/>
+            <a:ext cx="5878224" cy="638175"/>
+          </a:xfrm>
+        </p:spPr>
+        <p:txBody>
+          <a:bodyPr/>
+          <a:lstStyle/>
+          <a:p>
+            <a:r>
+              <a:rPr lang="en-US" altLang="zh-CN" sz="2800" dirty="0"/>
+              <a:t>Where this stands</a:t>
+            </a:r>
+            <a:endParaRPr lang="zh-CN" altLang="en-US" sz="2800" dirty="0"/>
+          </a:p>
+        </p:txBody>
+      </p:sp>
+      <p:sp>
+        <p:nvSpPr>
+          <p:cNvPr id="204" name="TextBox 203"/>
+          <p:cNvSpPr txBox="1"/>
+          <p:nvPr/>
+        </p:nvSpPr>
+        <p:spPr>
+          <a:xfrm>
+            <a:off x="640080" y="1554480"/>
+            <a:ext cx="10881360" cy="914400"/>
+          </a:xfrm>
+          <a:prstGeom prst="rect">
+            <a:avLst/>
+          </a:prstGeom>
+          <a:noFill/>
+        </p:spPr>
+        <p:txBody>
+          <a:bodyPr wrap="square">
+            <a:spAutoFit/>
+          </a:bodyPr>
+          <a:lstStyle/>
+          <a:p>
+            <a:pPr>
+              <a:defRPr sz="1350" b="1"/>
+            </a:pPr>
+            <a:r>
+              <a:t>• One recipe, verified end to end: Gurobi labels offline → 1.04 M-parameter Transformer → guaranteed-feasible millisecond inference, conditioned on each vehicle's own budget</a:t>
+            </a:r>
+          </a:p>
+          <a:p>
+            <a:pPr>
+              <a:defRPr sz="1350" b="0"/>
+            </a:pPr>
+            <a:r>
+              <a:t>• The control variable is now physical (shift length / energy), continuous, and demonstrably generalises to budgets never trained on</a:t>
+            </a:r>
+          </a:p>
+          <a:p>
+            <a:pPr>
+              <a:defRPr sz="1350" b="0"/>
+            </a:pPr>
+            <a:r>
+              <a:t>• Positioning: the first learned amortised solver for this problem class — the bridge between the drive-by-sensing OR shelf (right problem, no learning) and the neural routing shelf (right method, different problem)</a:t>
+            </a:r>
+          </a:p>
+          <a:p>
+            <a:pPr>
+              <a:defRPr sz="1350" b="0"/>
+            </a:pPr>
+            <a:r>
+              <a:t>• Verification chain at every step: MILP ≡ flow decomposition ≡ simulator · budget MILP ≡ the full-horizon MILP at B ≥ H · per-case CSVs against Gurobi on every held-out layer</a:t>
+            </a:r>
+          </a:p>
+          <a:p>
+            <a:pPr>
+              <a:defRPr sz="1350" b="0"/>
+            </a:pPr>
+            <a:r>
+              <a:t>• Known and deliberately open: with uniform cell utility, overlap = 0 in ~92 % of optimal solutions, so coverage ≈ cost. The budget controls HOW MUCH to roam; making WHICH cells a real decision needs heterogeneous utility wᵢ — the next modelling step, not a fix</a:t>
+            </a:r>
+          </a:p>
+          <a:p>
+            <a:pPr>
+              <a:defRPr sz="1350" b="1"/>
+            </a:pPr>
+            <a:r>
+              <a:t>• Next levers, in order: multi-sample (non-greedy) decoding · wider ρ range for extrapolation · data-volume slope · heterogeneous wᵢ · then the 5×5 real network</a:t>
+            </a:r>
+          </a:p>
+        </p:txBody>
+      </p:sp>
+    </p:spTree>
   </p:cSld>
   <p:clrMapOvr>
     <a:masterClrMapping/>

--- a/experiments/20260804-budget-conditioning/ppt/sensing_routing_method_and_results.pptx
+++ b/experiments/20260804-budget-conditioning/ppt/sensing_routing_method_and_results.pptx
@@ -29,6 +29,7 @@
     <p:sldId id="342" r:id="rId36"/>
     <p:sldId id="343" r:id="rId37"/>
     <p:sldId id="344" r:id="rId38"/>
+    <p:sldId id="345" r:id="rId39"/>
   </p:sldIdLst>
   <p:sldSz cx="12192000" cy="6858000"/>
   <p:notesSz cx="6858000" cy="9144000"/>
@@ -8056,7 +8057,7 @@
           <a:p>
             <a:r>
               <a:rPr lang="en-US" altLang="zh-CN" sz="2800" dirty="0"/>
-              <a:t>How Bᵥ is set</a:t>
+              <a:t>Step 0: earliest arrival</a:t>
             </a:r>
             <a:endParaRPr lang="zh-CN" altLang="en-US" sz="2800" dirty="0"/>
           </a:p>
@@ -8070,8 +8071,8 @@
         </p:nvSpPr>
         <p:spPr>
           <a:xfrm>
-            <a:off x="685800" y="1371600"/>
-            <a:ext cx="10789920" cy="274320"/>
+            <a:off x="685800" y="1353312"/>
+            <a:ext cx="10881360" cy="274320"/>
           </a:xfrm>
           <a:prstGeom prst="rect">
             <a:avLst/>
@@ -8092,59 +8093,312 @@
               </a:defRPr>
             </a:pPr>
             <a:r>
-              <a:t>Bᵥ is NOT a fixed constant — it is derived per vehicle, per instance, from a slack ratio ρᵥ:</a:t>
+              <a:t>Before any budget can be set, we must know the fastest this vehicle could possibly make its trip TODAY — earliest arrival on the current network, under this case's congestion δ. One run per vehicle:</a:t>
             </a:r>
           </a:p>
         </p:txBody>
       </p:sp>
-      <p:pic>
-        <p:nvPicPr>
-          <p:cNvPr id="205" name="Picture 204" descr="eq_budget.png"/>
-          <p:cNvPicPr>
-            <a:picLocks noChangeAspect="1"/>
-          </p:cNvPicPr>
+      <p:sp>
+        <p:nvSpPr>
+          <p:cNvPr id="205" name="Rounded Rectangle 204"/>
+          <p:cNvSpPr/>
           <p:nvPr/>
-        </p:nvPicPr>
-        <p:blipFill>
-          <a:blip r:embed="rId2"/>
-          <a:stretch>
-            <a:fillRect/>
-          </a:stretch>
-        </p:blipFill>
+        </p:nvSpPr>
         <p:spPr>
           <a:xfrm>
-            <a:off x="3618865" y="1737360"/>
-            <a:ext cx="4953965" cy="365760"/>
+            <a:off x="685800" y="1956816"/>
+            <a:ext cx="8321040" cy="2514600"/>
           </a:xfrm>
-          <a:prstGeom prst="rect">
-            <a:avLst/>
+          <a:prstGeom prst="roundRect">
+            <a:avLst>
+              <a:gd name="adj" fmla="val 4000"/>
+            </a:avLst>
           </a:prstGeom>
+          <a:solidFill>
+            <a:srgbClr val="F7F7F5"/>
+          </a:solidFill>
+          <a:ln w="15240">
+            <a:solidFill>
+              <a:srgbClr val="C9C8C2"/>
+            </a:solidFill>
+          </a:ln>
+          <a:effectLst/>
         </p:spPr>
-      </p:pic>
-      <p:pic>
-        <p:nvPicPr>
-          <p:cNvPr id="206" name="Picture 205" descr="eq_taumin.png"/>
-          <p:cNvPicPr>
-            <a:picLocks noChangeAspect="1"/>
-          </p:cNvPicPr>
+        <p:style>
+          <a:lnRef idx="1">
+            <a:schemeClr val="accent1"/>
+          </a:lnRef>
+          <a:fillRef idx="3">
+            <a:schemeClr val="accent1"/>
+          </a:fillRef>
+          <a:effectRef idx="2">
+            <a:schemeClr val="accent1"/>
+          </a:effectRef>
+          <a:fontRef idx="minor">
+            <a:schemeClr val="lt1"/>
+          </a:fontRef>
+        </p:style>
+        <p:txBody>
+          <a:bodyPr rtlCol="0" anchor="ctr" wrap="none" lIns="128016" rIns="128016" tIns="54864" bIns="54864"/>
+          <a:lstStyle/>
+          <a:p>
+            <a:pPr algn="l">
+              <a:defRPr sz="960" b="1">
+                <a:solidFill>
+                  <a:srgbClr val="EB6834"/>
+                </a:solidFill>
+                <a:latin typeface="Courier New"/>
+              </a:defRPr>
+            </a:pPr>
+            <a:r>
+              <a:t>EarliestArrival(o, t₀, δ):        # one run per vehicle, on today's network</a:t>
+            </a:r>
+          </a:p>
+          <a:p>
+            <a:pPr algn="l">
+              <a:defRPr sz="960" b="0">
+                <a:solidFill>
+                  <a:srgbClr val="0B0B0B"/>
+                </a:solidFill>
+                <a:latin typeface="Courier New"/>
+              </a:defRPr>
+            </a:pPr>
+            <a:r>
+              <a:t>  entry[l] ← t₀  for every link l leaving gate o;  push (t₀, l)</a:t>
+            </a:r>
+          </a:p>
+          <a:p>
+            <a:pPr algn="l">
+              <a:defRPr sz="960" b="0">
+                <a:solidFill>
+                  <a:srgbClr val="0B0B0B"/>
+                </a:solidFill>
+                <a:latin typeface="Courier New"/>
+              </a:defRPr>
+            </a:pPr>
+            <a:r>
+              <a:t>  while queue not empty:</a:t>
+            </a:r>
+          </a:p>
+          <a:p>
+            <a:pPr algn="l">
+              <a:defRPr sz="960" b="0">
+                <a:solidFill>
+                  <a:srgbClr val="0B0B0B"/>
+                </a:solidFill>
+                <a:latin typeface="Courier New"/>
+              </a:defRPr>
+            </a:pPr>
+            <a:r>
+              <a:t>      (t, l) ← pop the SMALLEST entry time     # ordinary Dijkstra order</a:t>
+            </a:r>
+          </a:p>
+          <a:p>
+            <a:pPr algn="l">
+              <a:defRPr sz="960" b="0">
+                <a:solidFill>
+                  <a:srgbClr val="0B0B0B"/>
+                </a:solidFill>
+                <a:latin typeface="Courier New"/>
+              </a:defRPr>
+            </a:pPr>
+            <a:r>
+              <a:t>      if t &gt; entry[l]: continue                # stale label</a:t>
+            </a:r>
+          </a:p>
+          <a:p>
+            <a:pPr algn="l">
+              <a:defRPr sz="960" b="1">
+                <a:solidFill>
+                  <a:srgbClr val="EB6834"/>
+                </a:solidFill>
+                <a:latin typeface="Courier New"/>
+              </a:defRPr>
+            </a:pPr>
+            <a:r>
+              <a:t>      s ← t + c(l, t)      # exit time; the clock is INSIDE the cost</a:t>
+            </a:r>
+          </a:p>
+          <a:p>
+            <a:pPr algn="l">
+              <a:defRPr sz="960" b="0">
+                <a:solidFill>
+                  <a:srgbClr val="0B0B0B"/>
+                </a:solidFill>
+                <a:latin typeface="Courier New"/>
+              </a:defRPr>
+            </a:pPr>
+            <a:r>
+              <a:t>      if l ends at a gate g:  arrive[g] ← min(arrive[g], s)</a:t>
+            </a:r>
+          </a:p>
+          <a:p>
+            <a:pPr algn="l">
+              <a:defRPr sz="960" b="0">
+                <a:solidFill>
+                  <a:srgbClr val="0B0B0B"/>
+                </a:solidFill>
+                <a:latin typeface="Courier New"/>
+              </a:defRPr>
+            </a:pPr>
+            <a:r>
+              <a:t>      for every successor j of l (no U-turn):</a:t>
+            </a:r>
+          </a:p>
+          <a:p>
+            <a:pPr algn="l">
+              <a:defRPr sz="960" b="0">
+                <a:solidFill>
+                  <a:srgbClr val="0B0B0B"/>
+                </a:solidFill>
+                <a:latin typeface="Courier New"/>
+              </a:defRPr>
+            </a:pPr>
+            <a:r>
+              <a:t>          if s &lt; entry[j]:  entry[j] ← s;  push (s, j)</a:t>
+            </a:r>
+          </a:p>
+          <a:p>
+            <a:pPr algn="l">
+              <a:defRPr sz="960" b="0">
+                <a:solidFill>
+                  <a:srgbClr val="0B0B0B"/>
+                </a:solidFill>
+                <a:latin typeface="Courier New"/>
+              </a:defRPr>
+            </a:pPr>
+            <a:r>
+              <a:t>  return arrive                               # earliest arrival at EVERY gate</a:t>
+            </a:r>
+          </a:p>
+          <a:p>
+            <a:pPr algn="l">
+              <a:defRPr sz="960" b="0">
+                <a:solidFill>
+                  <a:srgbClr val="0B0B0B"/>
+                </a:solidFill>
+                <a:latin typeface="Courier New"/>
+              </a:defRPr>
+            </a:pPr>
+          </a:p>
+          <a:p>
+            <a:pPr algn="l">
+              <a:defRPr sz="960" b="1">
+                <a:solidFill>
+                  <a:srgbClr val="EB6834"/>
+                </a:solidFill>
+                <a:latin typeface="Courier New"/>
+              </a:defRPr>
+            </a:pPr>
+            <a:r>
+              <a:t>τᵐⁱⁿ_v = arrive[d_v] − t₀_v</a:t>
+            </a:r>
+          </a:p>
+        </p:txBody>
+      </p:sp>
+      <p:sp>
+        <p:nvSpPr>
+          <p:cNvPr id="206" name="Rounded Rectangle 205"/>
+          <p:cNvSpPr/>
           <p:nvPr/>
-        </p:nvPicPr>
-        <p:blipFill>
-          <a:blip r:embed="rId3"/>
-          <a:stretch>
-            <a:fillRect/>
-          </a:stretch>
-        </p:blipFill>
+        </p:nvSpPr>
         <p:spPr>
           <a:xfrm>
-            <a:off x="1918544" y="2212848"/>
-            <a:ext cx="8354607" cy="329184"/>
+            <a:off x="9235440" y="1956816"/>
+            <a:ext cx="2468880" cy="2514600"/>
           </a:xfrm>
-          <a:prstGeom prst="rect">
-            <a:avLst/>
+          <a:prstGeom prst="roundRect">
+            <a:avLst>
+              <a:gd name="adj" fmla="val 10000"/>
+            </a:avLst>
           </a:prstGeom>
+          <a:solidFill>
+            <a:srgbClr val="FDF1E9"/>
+          </a:solidFill>
+          <a:ln w="15240">
+            <a:solidFill>
+              <a:srgbClr val="EB6834"/>
+            </a:solidFill>
+          </a:ln>
+          <a:effectLst/>
         </p:spPr>
-      </p:pic>
+        <p:style>
+          <a:lnRef idx="1">
+            <a:schemeClr val="accent1"/>
+          </a:lnRef>
+          <a:fillRef idx="3">
+            <a:schemeClr val="accent1"/>
+          </a:fillRef>
+          <a:effectRef idx="2">
+            <a:schemeClr val="accent1"/>
+          </a:effectRef>
+          <a:fontRef idx="minor">
+            <a:schemeClr val="lt1"/>
+          </a:fontRef>
+        </p:style>
+        <p:txBody>
+          <a:bodyPr rtlCol="0" anchor="ctr" wrap="square" lIns="54864" rIns="54864" tIns="27432" bIns="27432"/>
+          <a:lstStyle/>
+          <a:p>
+            <a:pPr algn="ctr">
+              <a:defRPr sz="1050" b="1">
+                <a:solidFill>
+                  <a:srgbClr val="EB6834"/>
+                </a:solidFill>
+              </a:defRPr>
+            </a:pPr>
+            <a:r>
+              <a:t>Where it runs</a:t>
+            </a:r>
+          </a:p>
+          <a:p>
+            <a:pPr algn="ctr">
+              <a:defRPr sz="860">
+                <a:solidFill>
+                  <a:srgbClr val="52514E"/>
+                </a:solidFill>
+              </a:defRPr>
+            </a:pPr>
+            <a:r>
+              <a:t>① budget assignment:</a:t>
+            </a:r>
+            <a:br/>
+            <a:r>
+              <a:t>V runs per case</a:t>
+            </a:r>
+            <a:br/>
+            <a:r>
+              <a:t>(~41 000 in the farm)</a:t>
+            </a:r>
+            <a:br/>
+            <a:br/>
+            <a:r>
+              <a:t>② decoder mask:</a:t>
+            </a:r>
+            <a:br/>
+            <a:r>
+              <a:t>min_finish(l, t, d) —</a:t>
+            </a:r>
+            <a:br/>
+            <a:r>
+              <a:t>same algorithm from one</a:t>
+            </a:r>
+            <a:br/>
+            <a:r>
+              <a:t>link, memoised</a:t>
+            </a:r>
+            <a:br/>
+            <a:br/>
+            <a:r>
+              <a:t>③ horizon calibration:</a:t>
+            </a:r>
+            <a:br/>
+            <a:r>
+              <a:t>once, all 8 gates</a:t>
+            </a:r>
+          </a:p>
+        </p:txBody>
+      </p:sp>
       <p:sp>
         <p:nvSpPr>
           <p:cNvPr id="207" name="TextBox 206"/>
@@ -8153,8 +8407,8 @@
         </p:nvSpPr>
         <p:spPr>
           <a:xfrm>
-            <a:off x="640080" y="2724912"/>
-            <a:ext cx="10972800" cy="914400"/>
+            <a:off x="640080" y="4709160"/>
+            <a:ext cx="11064240" cy="914400"/>
           </a:xfrm>
           <a:prstGeom prst="rect">
             <a:avLst/>
@@ -8168,50 +8422,26 @@
           <a:lstStyle/>
           <a:p>
             <a:pPr>
-              <a:defRPr sz="1250" b="0"/>
+              <a:defRPr sz="1200" b="1"/>
             </a:pPr>
             <a:r>
-              <a:t>• Step 1 — draw the slack ratio ρᵥ.  Training farm: per vehicle from the anchors {1.0, 1.5, 2.0, 3.0}; in 35 % of fleets all vehicles share one ρ (homogeneous), in 65 % each vehicle draws its own (heterogeneous). At TEST time ρ is arbitrary — including values never seen in training ({1.25, 1.75} interpolation, 4.0 extrapolation)</a:t>
+              <a:t>• It is ordinary Dijkstra with ONE change: a label is a time, not a distance, and relaxing link l entered at time t costs c(l, t) — today's congestion δ sits inside c</a:t>
             </a:r>
           </a:p>
           <a:p>
             <a:pPr>
-              <a:defRPr sz="1250" b="0"/>
+              <a:defRPr sz="1200" b="0"/>
             </a:pPr>
             <a:r>
-              <a:t>• Step 2 — compute the feasibility floor τᵐⁱⁿᵥ.  Earliest arrival o→d departing at t₀ under THIS instance's congestion δ (time-dependent Dijkstra) — instance-specific, not a table lookup</a:t>
+              <a:t>• Why the greedy order stays correct: our costs are FIFO — t + c(l, t) never decreases in t (entering later can never mean exiting earlier), so the first label popped for a link is final, exactly the classic Dijkstra invariant</a:t>
             </a:r>
           </a:p>
           <a:p>
             <a:pPr>
-              <a:defRPr sz="1250" b="0"/>
+              <a:defRPr sz="1200" b="0"/>
             </a:pPr>
             <a:r>
-              <a:t>• Step 3 — Bᵥ = ⌈ρᵥ · τᵐⁱⁿᵥ⌉, floored at τᵐⁱⁿᵥ (a task is never born infeasible) and capped at H − t₀ᵥ (never beyond the coverage grid)</a:t>
-            </a:r>
-          </a:p>
-          <a:p>
-            <a:pPr>
-              <a:defRPr sz="1250" b="1"/>
-            </a:pPr>
-            <a:r>
-              <a:t>• Why a RATIO and not an absolute number: the same B = 100 is vacuous for a near OD (τᵐⁱⁿ = 14) and infeasible for a far one (τᵐⁱⁿ = 120). ρ is comparable across all ODs:  ρ = 1 ⇔ exactly the min-time trip;  ρ = 2 ⇔ twice the minimum time</a:t>
-            </a:r>
-          </a:p>
-          <a:p>
-            <a:pPr>
-              <a:defRPr sz="1250" b="0"/>
-            </a:pPr>
-            <a:r>
-              <a:t>• Worked example (the sweep instance, V = 3, τᵐⁱⁿ = [38, 120, 14]):  ρ = 1.5 for all ⇒  B = [57, 180, 21] — same slack semantics, very different absolute budgets</a:t>
-            </a:r>
-          </a:p>
-          <a:p>
-            <a:pPr>
-              <a:defRPr sz="1250" b="1"/>
-            </a:pPr>
-            <a:r>
-              <a:t>• Bᵥ then enters BOTH sides of the pipeline: the MILP constraint (labels) and the model input (conditioning) + the decoder feasibility mask</a:t>
+              <a:t>• One run touches at most 80 links → microseconds; ~41 000 runs across the whole farm are negligible next to the 0.90 s MILP solves. The mask's memoised queries are part of the 6–9 ms inference time</a:t>
             </a:r>
           </a:p>
         </p:txBody>
@@ -8334,6 +8564,246 @@
 </file>
 
 <file path=ppt/slides/slide20.xml><?xml version="1.0" encoding="utf-8"?>
+<p:sld xmlns:a="http://schemas.openxmlformats.org/drawingml/2006/main" xmlns:p="http://schemas.openxmlformats.org/presentationml/2006/main" xmlns:r="http://schemas.openxmlformats.org/officeDocument/2006/relationships">
+  <p:cSld>
+    <p:spTree>
+      <p:nvGrpSpPr>
+        <p:cNvPr id="1" name=""/>
+        <p:cNvGrpSpPr/>
+        <p:nvPr/>
+      </p:nvGrpSpPr>
+      <p:grpSpPr/>
+      <p:sp>
+        <p:nvSpPr>
+          <p:cNvPr id="7" name="文本占位符 6">
+            <a:extLst>
+              <a:ext uri="{FF2B5EF4-FFF2-40B4-BE49-F238E27FC236}">
+                <a16:creationId xmlns:a16="http://schemas.microsoft.com/office/drawing/2014/main" id="{33AE8DB3-4C29-0DE3-EB73-8D2BBFBB8CBF}"/>
+              </a:ext>
+            </a:extLst>
+          </p:cNvPr>
+          <p:cNvSpPr>
+            <a:spLocks noGrp="1"/>
+          </p:cNvSpPr>
+          <p:nvPr>
+            <p:ph type="body" sz="quarter" idx="11"/>
+          </p:nvPr>
+        </p:nvSpPr>
+        <p:spPr>
+          <a:xfrm>
+            <a:off x="336550" y="58738"/>
+            <a:ext cx="5759450" cy="622300"/>
+          </a:xfrm>
+        </p:spPr>
+        <p:txBody>
+          <a:bodyPr/>
+          <a:lstStyle/>
+          <a:p>
+            <a:r>
+              <a:rPr lang="en-US" altLang="zh-CN" dirty="0"/>
+              <a:t>Change (a) — objective</a:t>
+            </a:r>
+            <a:endParaRPr lang="zh-CN" altLang="en-US" dirty="0"/>
+          </a:p>
+        </p:txBody>
+      </p:sp>
+      <p:sp>
+        <p:nvSpPr>
+          <p:cNvPr id="203" name="文本占位符 5">
+            <a:extLst>
+              <a:ext uri="{FF2B5EF4-FFF2-40B4-BE49-F238E27FC236}">
+                <a16:creationId xmlns:a16="http://schemas.microsoft.com/office/drawing/2014/main" id="{A219F0BA-71F5-BA11-CCBD-9327897B98CC}"/>
+              </a:ext>
+            </a:extLst>
+          </p:cNvPr>
+          <p:cNvSpPr>
+            <a:spLocks noGrp="1"/>
+          </p:cNvSpPr>
+          <p:nvPr>
+            <p:ph type="body" sz="quarter" idx="10"/>
+          </p:nvPr>
+        </p:nvSpPr>
+        <p:spPr>
+          <a:xfrm>
+            <a:off x="0" y="820290"/>
+            <a:ext cx="5878224" cy="638175"/>
+          </a:xfrm>
+        </p:spPr>
+        <p:txBody>
+          <a:bodyPr/>
+          <a:lstStyle/>
+          <a:p>
+            <a:r>
+              <a:rPr lang="en-US" altLang="zh-CN" sz="2800" dirty="0"/>
+              <a:t>How Bᵥ is set</a:t>
+            </a:r>
+            <a:endParaRPr lang="zh-CN" altLang="en-US" sz="2800" dirty="0"/>
+          </a:p>
+        </p:txBody>
+      </p:sp>
+      <p:sp>
+        <p:nvSpPr>
+          <p:cNvPr id="204" name="TextBox 203"/>
+          <p:cNvSpPr txBox="1"/>
+          <p:nvPr/>
+        </p:nvSpPr>
+        <p:spPr>
+          <a:xfrm>
+            <a:off x="685800" y="1353312"/>
+            <a:ext cx="10881360" cy="274320"/>
+          </a:xfrm>
+          <a:prstGeom prst="rect">
+            <a:avLst/>
+          </a:prstGeom>
+          <a:noFill/>
+        </p:spPr>
+        <p:txBody>
+          <a:bodyPr wrap="square">
+            <a:spAutoFit/>
+          </a:bodyPr>
+          <a:lstStyle/>
+          <a:p>
+            <a:pPr algn="l">
+              <a:defRPr sz="1250" b="1">
+                <a:solidFill>
+                  <a:srgbClr val="52514E"/>
+                </a:solidFill>
+              </a:defRPr>
+            </a:pPr>
+            <a:r>
+              <a:t>In plain words: first compute the fastest this vehicle could make its trip today (τᵐⁱⁿᵥ, previous slide); the budget is that minimum times a slack factor — 'you get ρ× the minimum time'. Not a fixed constant: derived per vehicle, per instance.</a:t>
+            </a:r>
+          </a:p>
+        </p:txBody>
+      </p:sp>
+      <p:pic>
+        <p:nvPicPr>
+          <p:cNvPr id="205" name="Picture 204" descr="eq_budget.png"/>
+          <p:cNvPicPr>
+            <a:picLocks noChangeAspect="1"/>
+          </p:cNvPicPr>
+          <p:nvPr/>
+        </p:nvPicPr>
+        <p:blipFill>
+          <a:blip r:embed="rId2"/>
+          <a:stretch>
+            <a:fillRect/>
+          </a:stretch>
+        </p:blipFill>
+        <p:spPr>
+          <a:xfrm>
+            <a:off x="3618865" y="1883664"/>
+            <a:ext cx="4953965" cy="365760"/>
+          </a:xfrm>
+          <a:prstGeom prst="rect">
+            <a:avLst/>
+          </a:prstGeom>
+        </p:spPr>
+      </p:pic>
+      <p:pic>
+        <p:nvPicPr>
+          <p:cNvPr id="206" name="Picture 205" descr="eq_taumin.png"/>
+          <p:cNvPicPr>
+            <a:picLocks noChangeAspect="1"/>
+          </p:cNvPicPr>
+          <p:nvPr/>
+        </p:nvPicPr>
+        <p:blipFill>
+          <a:blip r:embed="rId3"/>
+          <a:stretch>
+            <a:fillRect/>
+          </a:stretch>
+        </p:blipFill>
+        <p:spPr>
+          <a:xfrm>
+            <a:off x="1918544" y="2359152"/>
+            <a:ext cx="8354607" cy="329184"/>
+          </a:xfrm>
+          <a:prstGeom prst="rect">
+            <a:avLst/>
+          </a:prstGeom>
+        </p:spPr>
+      </p:pic>
+      <p:sp>
+        <p:nvSpPr>
+          <p:cNvPr id="207" name="TextBox 206"/>
+          <p:cNvSpPr txBox="1"/>
+          <p:nvPr/>
+        </p:nvSpPr>
+        <p:spPr>
+          <a:xfrm>
+            <a:off x="640080" y="2852928"/>
+            <a:ext cx="10972800" cy="914400"/>
+          </a:xfrm>
+          <a:prstGeom prst="rect">
+            <a:avLst/>
+          </a:prstGeom>
+          <a:noFill/>
+        </p:spPr>
+        <p:txBody>
+          <a:bodyPr wrap="square">
+            <a:spAutoFit/>
+          </a:bodyPr>
+          <a:lstStyle/>
+          <a:p>
+            <a:pPr>
+              <a:defRPr sz="1250" b="0"/>
+            </a:pPr>
+            <a:r>
+              <a:t>• Step 1 — draw the slack ratio ρᵥ.  Training farm: per vehicle from the anchors {1.0, 1.5, 2.0, 3.0}; in 35 % of fleets all vehicles share one ρ (homogeneous), in 65 % each vehicle draws its own (heterogeneous). At TEST time ρ is arbitrary — including values never seen in training ({1.25, 1.75} interpolation, 4.0 extrapolation)</a:t>
+            </a:r>
+          </a:p>
+          <a:p>
+            <a:pPr>
+              <a:defRPr sz="1250" b="0"/>
+            </a:pPr>
+            <a:r>
+              <a:t>• Step 2 — the feasibility floor τᵐⁱⁿᵥ comes from the TD-Dijkstra run of the previous slide (earliest arrival o→d departing at t₀ under THIS instance's δ) — instance-specific, not a table lookup</a:t>
+            </a:r>
+          </a:p>
+          <a:p>
+            <a:pPr>
+              <a:defRPr sz="1250" b="0"/>
+            </a:pPr>
+            <a:r>
+              <a:t>• Step 3 — Bᵥ = ⌈ρᵥ · τᵐⁱⁿᵥ⌉, floored at τᵐⁱⁿᵥ (a task is never born infeasible) and capped at H − t₀ᵥ (never beyond the coverage grid)</a:t>
+            </a:r>
+          </a:p>
+          <a:p>
+            <a:pPr>
+              <a:defRPr sz="1250" b="1"/>
+            </a:pPr>
+            <a:r>
+              <a:t>• Why a RATIO and not an absolute number: the same B = 100 is vacuous for a near OD (τᵐⁱⁿ = 14) and infeasible for a far one (τᵐⁱⁿ = 120). ρ is comparable across all ODs:  ρ = 1 ⇔ exactly the min-time trip;  ρ = 2 ⇔ twice the minimum time</a:t>
+            </a:r>
+          </a:p>
+          <a:p>
+            <a:pPr>
+              <a:defRPr sz="1250" b="0"/>
+            </a:pPr>
+            <a:r>
+              <a:t>• Worked example (the sweep instance, V = 3, τᵐⁱⁿ = [38, 120, 14]):  ρ = 1.5 for all ⇒  B = [57, 180, 21] — same slack semantics, very different absolute budgets</a:t>
+            </a:r>
+          </a:p>
+          <a:p>
+            <a:pPr>
+              <a:defRPr sz="1250" b="1"/>
+            </a:pPr>
+            <a:r>
+              <a:t>• Bᵥ then enters BOTH sides of the pipeline: the MILP constraint (labels) and the model input (conditioning) + the decoder feasibility mask</a:t>
+            </a:r>
+          </a:p>
+        </p:txBody>
+      </p:sp>
+    </p:spTree>
+  </p:cSld>
+  <p:clrMapOvr>
+    <a:masterClrMapping/>
+  </p:clrMapOvr>
+</p:sld>
+</file>
+
+<file path=ppt/slides/slide21.xml><?xml version="1.0" encoding="utf-8"?>
 <p:sld xmlns:a="http://schemas.openxmlformats.org/drawingml/2006/main" xmlns:p="http://schemas.openxmlformats.org/presentationml/2006/main" xmlns:r="http://schemas.openxmlformats.org/officeDocument/2006/relationships">
   <p:cSld>
     <p:spTree>
@@ -10248,7 +10718,7 @@
 </p:sld>
 </file>
 
-<file path=ppt/slides/slide21.xml><?xml version="1.0" encoding="utf-8"?>
+<file path=ppt/slides/slide22.xml><?xml version="1.0" encoding="utf-8"?>
 <p:sld xmlns:a="http://schemas.openxmlformats.org/drawingml/2006/main" xmlns:p="http://schemas.openxmlformats.org/presentationml/2006/main" xmlns:r="http://schemas.openxmlformats.org/officeDocument/2006/relationships">
   <p:cSld>
     <p:spTree>
@@ -10429,7 +10899,7 @@
 </p:sld>
 </file>
 
-<file path=ppt/slides/slide22.xml><?xml version="1.0" encoding="utf-8"?>
+<file path=ppt/slides/slide23.xml><?xml version="1.0" encoding="utf-8"?>
 <p:sld xmlns:a="http://schemas.openxmlformats.org/drawingml/2006/main" xmlns:p="http://schemas.openxmlformats.org/presentationml/2006/main" xmlns:r="http://schemas.openxmlformats.org/officeDocument/2006/relationships">
   <p:cSld>
     <p:spTree>
@@ -11583,7 +12053,7 @@
 </p:sld>
 </file>
 
-<file path=ppt/slides/slide23.xml><?xml version="1.0" encoding="utf-8"?>
+<file path=ppt/slides/slide24.xml><?xml version="1.0" encoding="utf-8"?>
 <p:sld xmlns:a="http://schemas.openxmlformats.org/drawingml/2006/main" xmlns:p="http://schemas.openxmlformats.org/presentationml/2006/main" xmlns:r="http://schemas.openxmlformats.org/officeDocument/2006/relationships">
   <p:cSld>
     <p:spTree>
@@ -12354,7 +12824,7 @@
 </p:sld>
 </file>
 
-<file path=ppt/slides/slide24.xml><?xml version="1.0" encoding="utf-8"?>
+<file path=ppt/slides/slide25.xml><?xml version="1.0" encoding="utf-8"?>
 <p:sld xmlns:a="http://schemas.openxmlformats.org/drawingml/2006/main" xmlns:p="http://schemas.openxmlformats.org/presentationml/2006/main" xmlns:r="http://schemas.openxmlformats.org/officeDocument/2006/relationships">
   <p:cSld>
     <p:spTree>
@@ -13180,7 +13650,7 @@
 </p:sld>
 </file>
 
-<file path=ppt/slides/slide25.xml><?xml version="1.0" encoding="utf-8"?>
+<file path=ppt/slides/slide26.xml><?xml version="1.0" encoding="utf-8"?>
 <p:sld xmlns:a="http://schemas.openxmlformats.org/drawingml/2006/main" xmlns:p="http://schemas.openxmlformats.org/presentationml/2006/main" xmlns:r="http://schemas.openxmlformats.org/officeDocument/2006/relationships">
   <p:cSld>
     <p:spTree>
@@ -14476,7 +14946,7 @@
 </p:sld>
 </file>
 
-<file path=ppt/slides/slide26.xml><?xml version="1.0" encoding="utf-8"?>
+<file path=ppt/slides/slide27.xml><?xml version="1.0" encoding="utf-8"?>
 <p:sld xmlns:a="http://schemas.openxmlformats.org/drawingml/2006/main" xmlns:p="http://schemas.openxmlformats.org/presentationml/2006/main" xmlns:r="http://schemas.openxmlformats.org/officeDocument/2006/relationships">
   <p:cSld>
     <p:spTree>
@@ -15748,179 +16218,6 @@
 </p:sld>
 </file>
 
-<file path=ppt/slides/slide27.xml><?xml version="1.0" encoding="utf-8"?>
-<p:sld xmlns:a="http://schemas.openxmlformats.org/drawingml/2006/main" xmlns:p="http://schemas.openxmlformats.org/presentationml/2006/main" xmlns:r="http://schemas.openxmlformats.org/officeDocument/2006/relationships">
-  <p:cSld>
-    <p:spTree>
-      <p:nvGrpSpPr>
-        <p:cNvPr id="1" name=""/>
-        <p:cNvGrpSpPr/>
-        <p:nvPr/>
-      </p:nvGrpSpPr>
-      <p:grpSpPr/>
-      <p:sp>
-        <p:nvSpPr>
-          <p:cNvPr id="7" name="文本占位符 6">
-            <a:extLst>
-              <a:ext uri="{FF2B5EF4-FFF2-40B4-BE49-F238E27FC236}">
-                <a16:creationId xmlns:a16="http://schemas.microsoft.com/office/drawing/2014/main" id="{33AE8DB3-4C29-0DE3-EB73-8D2BBFBB8CBF}"/>
-              </a:ext>
-            </a:extLst>
-          </p:cNvPr>
-          <p:cNvSpPr>
-            <a:spLocks noGrp="1"/>
-          </p:cNvSpPr>
-          <p:nvPr>
-            <p:ph type="body" sz="quarter" idx="11"/>
-          </p:nvPr>
-        </p:nvSpPr>
-        <p:spPr>
-          <a:xfrm>
-            <a:off x="336550" y="58738"/>
-            <a:ext cx="5759450" cy="622300"/>
-          </a:xfrm>
-        </p:spPr>
-        <p:txBody>
-          <a:bodyPr/>
-          <a:lstStyle/>
-          <a:p>
-            <a:r>
-              <a:rPr lang="en-US" altLang="zh-CN" dirty="0"/>
-              <a:t>Data</a:t>
-            </a:r>
-            <a:endParaRPr lang="zh-CN" altLang="en-US" dirty="0"/>
-          </a:p>
-        </p:txBody>
-      </p:sp>
-      <p:sp>
-        <p:nvSpPr>
-          <p:cNvPr id="203" name="文本占位符 5">
-            <a:extLst>
-              <a:ext uri="{FF2B5EF4-FFF2-40B4-BE49-F238E27FC236}">
-                <a16:creationId xmlns:a16="http://schemas.microsoft.com/office/drawing/2014/main" id="{A219F0BA-71F5-BA11-CCBD-9327897B98CC}"/>
-              </a:ext>
-            </a:extLst>
-          </p:cNvPr>
-          <p:cNvSpPr>
-            <a:spLocks noGrp="1"/>
-          </p:cNvSpPr>
-          <p:nvPr>
-            <p:ph type="body" sz="quarter" idx="10"/>
-          </p:nvPr>
-        </p:nvSpPr>
-        <p:spPr>
-          <a:xfrm>
-            <a:off x="0" y="820290"/>
-            <a:ext cx="5878224" cy="638175"/>
-          </a:xfrm>
-        </p:spPr>
-        <p:txBody>
-          <a:bodyPr/>
-          <a:lstStyle/>
-          <a:p>
-            <a:r>
-              <a:rPr lang="en-US" altLang="zh-CN" sz="2800" dirty="0"/>
-              <a:t>Label set</a:t>
-            </a:r>
-            <a:endParaRPr lang="zh-CN" altLang="en-US" sz="2800" dirty="0"/>
-          </a:p>
-        </p:txBody>
-      </p:sp>
-      <p:sp>
-        <p:nvSpPr>
-          <p:cNvPr id="204" name="TextBox 203"/>
-          <p:cNvSpPr txBox="1"/>
-          <p:nvPr/>
-        </p:nvSpPr>
-        <p:spPr>
-          <a:xfrm>
-            <a:off x="640080" y="1508760"/>
-            <a:ext cx="10881360" cy="914400"/>
-          </a:xfrm>
-          <a:prstGeom prst="rect">
-            <a:avLst/>
-          </a:prstGeom>
-          <a:noFill/>
-        </p:spPr>
-        <p:txBody>
-          <a:bodyPr wrap="square">
-            <a:spAutoFit/>
-          </a:bodyPr>
-          <a:lstStyle/>
-          <a:p>
-            <a:pPr>
-              <a:defRPr sz="1350" b="1"/>
-            </a:pPr>
-            <a:r>
-              <a:t>• 10 780 Gurobi labels · 0 errors · 0 solves hit the 60 s cap · 0.90 s mean per case (tight budgets prune the time-expanded graph → labelling ~30× faster than the full-horizon farm) · ~17 min on 15 workers, fully resumable</a:t>
-            </a:r>
-          </a:p>
-          <a:p>
-            <a:pPr>
-              <a:defRPr sz="1350" b="1"/>
-            </a:pPr>
-            <a:r>
-              <a:t>• Shards:</a:t>
-            </a:r>
-          </a:p>
-          <a:p>
-            <a:pPr>
-              <a:defRPr sz="1200" b="0"/>
-            </a:pPr>
-            <a:r>
-              <a:t>   – train 8 000 · same-distribution test 800</a:t>
-            </a:r>
-          </a:p>
-          <a:p>
-            <a:pPr>
-              <a:defRPr sz="1200" b="0"/>
-            </a:pPr>
-            <a:r>
-              <a:t>   – OD zero-shot 400 (4 gate pairs never trained) · fleet extrapolation 400 (V ∈ {5,8})</a:t>
-            </a:r>
-          </a:p>
-          <a:p>
-            <a:pPr>
-              <a:defRPr sz="1200" b="0"/>
-            </a:pPr>
-            <a:r>
-              <a:t>   – UNSEEN-budget interpolation 400 (ρ ∈ {1.25, 1.75}) · extrapolation 300 (ρ = 4.0)</a:t>
-            </a:r>
-          </a:p>
-          <a:p>
-            <a:pPr>
-              <a:defRPr sz="1200" b="0"/>
-            </a:pPr>
-            <a:r>
-              <a:t>   – response curve: 60 fixed instances × 8 ρ values, re-solved by Gurobi at every ρ</a:t>
-            </a:r>
-          </a:p>
-          <a:p>
-            <a:pPr>
-              <a:defRPr sz="1350" b="0"/>
-            </a:pPr>
-            <a:r>
-              <a:t>• Trained ρ anchors {1.0, 1.5, 2.0, 3.0}; the three held-out ρ values appear in NO training label</a:t>
-            </a:r>
-          </a:p>
-          <a:p>
-            <a:pPr>
-              <a:defRPr sz="1350" b="0"/>
-            </a:pPr>
-            <a:r>
-              <a:t>• Every label passes two checks at write time: flow-decomposed objective ≡ Gurobi ObjVal (1e-6) and every per-vehicle deadline re-validated</a:t>
-            </a:r>
-          </a:p>
-        </p:txBody>
-      </p:sp>
-    </p:spTree>
-  </p:cSld>
-  <p:clrMapOvr>
-    <a:masterClrMapping/>
-  </p:clrMapOvr>
-</p:sld>
-</file>
-
 <file path=ppt/slides/slide28.xml><?xml version="1.0" encoding="utf-8"?>
 <p:sld xmlns:a="http://schemas.openxmlformats.org/drawingml/2006/main" xmlns:p="http://schemas.openxmlformats.org/presentationml/2006/main" xmlns:r="http://schemas.openxmlformats.org/officeDocument/2006/relationships">
   <p:cSld>
@@ -15959,7 +16256,7 @@
           <a:p>
             <a:r>
               <a:rPr lang="en-US" altLang="zh-CN" dirty="0"/>
-              <a:t>Evaluation</a:t>
+              <a:t>Data</a:t>
             </a:r>
             <a:endParaRPr lang="zh-CN" altLang="en-US" dirty="0"/>
           </a:p>
@@ -15993,7 +16290,7 @@
           <a:p>
             <a:r>
               <a:rPr lang="en-US" altLang="zh-CN" sz="2800" dirty="0"/>
-              <a:t>Design</a:t>
+              <a:t>Label set</a:t>
             </a:r>
             <a:endParaRPr lang="zh-CN" altLang="en-US" sz="2800" dirty="0"/>
           </a:p>
@@ -16025,7 +16322,15 @@
               <a:defRPr sz="1350" b="1"/>
             </a:pPr>
             <a:r>
-              <a:t>• Five layers, 2 300 cases, none seen in training:</a:t>
+              <a:t>• 10 780 Gurobi labels · 0 errors · 0 solves hit the 60 s cap · 0.90 s mean per case (tight budgets prune the time-expanded graph → labelling ~30× faster than the full-horizon farm) · ~17 min on 15 workers, fully resumable</a:t>
+            </a:r>
+          </a:p>
+          <a:p>
+            <a:pPr>
+              <a:defRPr sz="1350" b="1"/>
+            </a:pPr>
+            <a:r>
+              <a:t>• Shards:</a:t>
             </a:r>
           </a:p>
           <a:p>
@@ -16033,7 +16338,7 @@
               <a:defRPr sz="1200" b="0"/>
             </a:pPr>
             <a:r>
-              <a:t>   – L1 same-distribution — 800 fresh cases (trained ODs, new δ / task mixes)</a:t>
+              <a:t>   – train 8 000 · same-distribution test 800</a:t>
             </a:r>
           </a:p>
           <a:p>
@@ -16041,7 +16346,7 @@
               <a:defRPr sz="1200" b="0"/>
             </a:pPr>
             <a:r>
-              <a:t>   – L2 OD ZERO-SHOT — 400 cases on 4 OD pairs never trained (G1→G5, G6→G2, G4→G8, G7→G3)</a:t>
+              <a:t>   – OD zero-shot 400 (4 gate pairs never trained) · fleet extrapolation 400 (V ∈ {5,8})</a:t>
             </a:r>
           </a:p>
           <a:p>
@@ -16049,7 +16354,7 @@
               <a:defRPr sz="1200" b="0"/>
             </a:pPr>
             <a:r>
-              <a:t>   – L3 fleet extrapolation — 400 cases with V ∈ {5, 8}, trained on {2,3,4,6}</a:t>
+              <a:t>   – UNSEEN-budget interpolation 400 (ρ ∈ {1.25, 1.75}) · extrapolation 300 (ρ = 4.0)</a:t>
             </a:r>
           </a:p>
           <a:p>
@@ -16057,23 +16362,7 @@
               <a:defRPr sz="1200" b="0"/>
             </a:pPr>
             <a:r>
-              <a:t>   – L4a UNSEEN budget, interpolation — 400 cases at ρ ∈ {1.25, 1.75}</a:t>
-            </a:r>
-          </a:p>
-          <a:p>
-            <a:pPr>
-              <a:defRPr sz="1200" b="0"/>
-            </a:pPr>
-            <a:r>
-              <a:t>   – L4b UNSEEN budget, extrapolation — 300 cases at ρ = 4.0, beyond the trained range</a:t>
-            </a:r>
-          </a:p>
-          <a:p>
-            <a:pPr>
-              <a:defRPr sz="1350" b="1"/>
-            </a:pPr>
-            <a:r>
-              <a:t>• Plus the RESPONSE CURVE: 60 fixed instances re-solved at every ρ by both Gurobi and the model — did it learn the budget as a continuous quantity or memorise four settings?</a:t>
+              <a:t>   – response curve: 60 fixed instances × 8 ρ values, re-solved by Gurobi at every ρ</a:t>
             </a:r>
           </a:p>
           <a:p>
@@ -16081,7 +16370,7 @@
               <a:defRPr sz="1350" b="0"/>
             </a:pPr>
             <a:r>
-              <a:t>• Metrics: feasibility rate · objective gap vs Gurobi (absolute + relative) · fraction matching or beating Gurobi · inference time · per-case CSV. 3 seeds, mean ± std</a:t>
+              <a:t>• Trained ρ anchors {1.0, 1.5, 2.0, 3.0}; the three held-out ρ values appear in NO training label</a:t>
             </a:r>
           </a:p>
           <a:p>
@@ -16089,7 +16378,7 @@
               <a:defRPr sz="1350" b="0"/>
             </a:pPr>
             <a:r>
-              <a:t>• Tuning used a validation slice of the training shard only; every reported number is from held-out shards</a:t>
+              <a:t>• Every label passes two checks at write time: flow-decomposed objective ≡ Gurobi ObjVal (1e-6) and every per-vehicle deadline re-validated</a:t>
             </a:r>
           </a:p>
         </p:txBody>
@@ -16140,7 +16429,7 @@
           <a:p>
             <a:r>
               <a:rPr lang="en-US" altLang="zh-CN" dirty="0"/>
-              <a:t>Results</a:t>
+              <a:t>Evaluation</a:t>
             </a:r>
             <a:endParaRPr lang="zh-CN" altLang="en-US" dirty="0"/>
           </a:p>
@@ -16174,45 +16463,21 @@
           <a:p>
             <a:r>
               <a:rPr lang="en-US" altLang="zh-CN" sz="2800" dirty="0"/>
-              <a:t>Five-layer exam</a:t>
+              <a:t>Design</a:t>
             </a:r>
             <a:endParaRPr lang="zh-CN" altLang="en-US" sz="2800" dirty="0"/>
           </a:p>
         </p:txBody>
       </p:sp>
-      <p:pic>
-        <p:nvPicPr>
-          <p:cNvPr id="204" name="Picture 203" descr="figS3_layers.png"/>
-          <p:cNvPicPr>
-            <a:picLocks noChangeAspect="1"/>
-          </p:cNvPicPr>
-          <p:nvPr/>
-        </p:nvPicPr>
-        <p:blipFill>
-          <a:blip r:embed="rId2"/>
-          <a:stretch>
-            <a:fillRect/>
-          </a:stretch>
-        </p:blipFill>
-        <p:spPr>
-          <a:xfrm>
-            <a:off x="1798167" y="1371600"/>
-            <a:ext cx="8595360" cy="4052617"/>
-          </a:xfrm>
-          <a:prstGeom prst="rect">
-            <a:avLst/>
-          </a:prstGeom>
-        </p:spPr>
-      </p:pic>
       <p:sp>
         <p:nvSpPr>
-          <p:cNvPr id="205" name="TextBox 204"/>
+          <p:cNvPr id="204" name="TextBox 203"/>
           <p:cNvSpPr txBox="1"/>
           <p:nvPr/>
         </p:nvSpPr>
         <p:spPr>
           <a:xfrm>
-            <a:off x="640080" y="5515656"/>
+            <a:off x="640080" y="1508760"/>
             <a:ext cx="10881360" cy="914400"/>
           </a:xfrm>
           <a:prstGeom prst="rect">
@@ -16227,18 +16492,74 @@
           <a:lstStyle/>
           <a:p>
             <a:pPr>
-              <a:defRPr sz="1250" b="0"/>
+              <a:defRPr sz="1350" b="1"/>
             </a:pPr>
             <a:r>
-              <a:t>• 3 seeds × 60 epochs · 2 300 held-out cases, 100 % feasible in every layer · 6–9 ms per case · 274/800 of L1 match or beat Gurobi</a:t>
+              <a:t>• Five layers, 2 300 cases, none seen in training:</a:t>
             </a:r>
           </a:p>
           <a:p>
             <a:pPr>
-              <a:defRPr sz="1250" b="1"/>
+              <a:defRPr sz="1200" b="0"/>
             </a:pPr>
             <a:r>
-              <a:t>• Unseen budgets (L4a, orange) cost about as much accuracy as an unseen fleet size — the budget generalises like the other conditioned attributes, not worse</a:t>
+              <a:t>   – L1 same-distribution — 800 fresh cases (trained ODs, new δ / task mixes)</a:t>
+            </a:r>
+          </a:p>
+          <a:p>
+            <a:pPr>
+              <a:defRPr sz="1200" b="0"/>
+            </a:pPr>
+            <a:r>
+              <a:t>   – L2 OD ZERO-SHOT — 400 cases on 4 OD pairs never trained (G1→G5, G6→G2, G4→G8, G7→G3)</a:t>
+            </a:r>
+          </a:p>
+          <a:p>
+            <a:pPr>
+              <a:defRPr sz="1200" b="0"/>
+            </a:pPr>
+            <a:r>
+              <a:t>   – L3 fleet extrapolation — 400 cases with V ∈ {5, 8}, trained on {2,3,4,6}</a:t>
+            </a:r>
+          </a:p>
+          <a:p>
+            <a:pPr>
+              <a:defRPr sz="1200" b="0"/>
+            </a:pPr>
+            <a:r>
+              <a:t>   – L4a UNSEEN budget, interpolation — 400 cases at ρ ∈ {1.25, 1.75}</a:t>
+            </a:r>
+          </a:p>
+          <a:p>
+            <a:pPr>
+              <a:defRPr sz="1200" b="0"/>
+            </a:pPr>
+            <a:r>
+              <a:t>   – L4b UNSEEN budget, extrapolation — 300 cases at ρ = 4.0, beyond the trained range</a:t>
+            </a:r>
+          </a:p>
+          <a:p>
+            <a:pPr>
+              <a:defRPr sz="1350" b="1"/>
+            </a:pPr>
+            <a:r>
+              <a:t>• Plus the RESPONSE CURVE: 60 fixed instances re-solved at every ρ by both Gurobi and the model — did it learn the budget as a continuous quantity or memorise four settings?</a:t>
+            </a:r>
+          </a:p>
+          <a:p>
+            <a:pPr>
+              <a:defRPr sz="1350" b="0"/>
+            </a:pPr>
+            <a:r>
+              <a:t>• Metrics: feasibility rate · objective gap vs Gurobi (absolute + relative) · fraction matching or beating Gurobi · inference time · per-case CSV. 3 seeds, mean ± std</a:t>
+            </a:r>
+          </a:p>
+          <a:p>
+            <a:pPr>
+              <a:defRPr sz="1350" b="0"/>
+            </a:pPr>
+            <a:r>
+              <a:t>• Tuning used a validation slice of the training shard only; every reported number is from held-out shards</a:t>
             </a:r>
           </a:p>
         </p:txBody>
@@ -16432,6 +16753,155 @@
           <a:p>
             <a:r>
               <a:rPr lang="en-US" altLang="zh-CN" sz="2800" dirty="0"/>
+              <a:t>Five-layer exam</a:t>
+            </a:r>
+            <a:endParaRPr lang="zh-CN" altLang="en-US" sz="2800" dirty="0"/>
+          </a:p>
+        </p:txBody>
+      </p:sp>
+      <p:pic>
+        <p:nvPicPr>
+          <p:cNvPr id="204" name="Picture 203" descr="figS3_layers.png"/>
+          <p:cNvPicPr>
+            <a:picLocks noChangeAspect="1"/>
+          </p:cNvPicPr>
+          <p:nvPr/>
+        </p:nvPicPr>
+        <p:blipFill>
+          <a:blip r:embed="rId2"/>
+          <a:stretch>
+            <a:fillRect/>
+          </a:stretch>
+        </p:blipFill>
+        <p:spPr>
+          <a:xfrm>
+            <a:off x="1798167" y="1371600"/>
+            <a:ext cx="8595360" cy="4052617"/>
+          </a:xfrm>
+          <a:prstGeom prst="rect">
+            <a:avLst/>
+          </a:prstGeom>
+        </p:spPr>
+      </p:pic>
+      <p:sp>
+        <p:nvSpPr>
+          <p:cNvPr id="205" name="TextBox 204"/>
+          <p:cNvSpPr txBox="1"/>
+          <p:nvPr/>
+        </p:nvSpPr>
+        <p:spPr>
+          <a:xfrm>
+            <a:off x="640080" y="5515656"/>
+            <a:ext cx="10881360" cy="914400"/>
+          </a:xfrm>
+          <a:prstGeom prst="rect">
+            <a:avLst/>
+          </a:prstGeom>
+          <a:noFill/>
+        </p:spPr>
+        <p:txBody>
+          <a:bodyPr wrap="square">
+            <a:spAutoFit/>
+          </a:bodyPr>
+          <a:lstStyle/>
+          <a:p>
+            <a:pPr>
+              <a:defRPr sz="1250" b="0"/>
+            </a:pPr>
+            <a:r>
+              <a:t>• 3 seeds × 60 epochs · 2 300 held-out cases, 100 % feasible in every layer · 6–9 ms per case · 274/800 of L1 match or beat Gurobi</a:t>
+            </a:r>
+          </a:p>
+          <a:p>
+            <a:pPr>
+              <a:defRPr sz="1250" b="1"/>
+            </a:pPr>
+            <a:r>
+              <a:t>• Unseen budgets (L4a, orange) cost about as much accuracy as an unseen fleet size — the budget generalises like the other conditioned attributes, not worse</a:t>
+            </a:r>
+          </a:p>
+        </p:txBody>
+      </p:sp>
+    </p:spTree>
+  </p:cSld>
+  <p:clrMapOvr>
+    <a:masterClrMapping/>
+  </p:clrMapOvr>
+</p:sld>
+</file>
+
+<file path=ppt/slides/slide31.xml><?xml version="1.0" encoding="utf-8"?>
+<p:sld xmlns:a="http://schemas.openxmlformats.org/drawingml/2006/main" xmlns:p="http://schemas.openxmlformats.org/presentationml/2006/main" xmlns:r="http://schemas.openxmlformats.org/officeDocument/2006/relationships">
+  <p:cSld>
+    <p:spTree>
+      <p:nvGrpSpPr>
+        <p:cNvPr id="1" name=""/>
+        <p:cNvGrpSpPr/>
+        <p:nvPr/>
+      </p:nvGrpSpPr>
+      <p:grpSpPr/>
+      <p:sp>
+        <p:nvSpPr>
+          <p:cNvPr id="7" name="文本占位符 6">
+            <a:extLst>
+              <a:ext uri="{FF2B5EF4-FFF2-40B4-BE49-F238E27FC236}">
+                <a16:creationId xmlns:a16="http://schemas.microsoft.com/office/drawing/2014/main" id="{33AE8DB3-4C29-0DE3-EB73-8D2BBFBB8CBF}"/>
+              </a:ext>
+            </a:extLst>
+          </p:cNvPr>
+          <p:cNvSpPr>
+            <a:spLocks noGrp="1"/>
+          </p:cNvSpPr>
+          <p:nvPr>
+            <p:ph type="body" sz="quarter" idx="11"/>
+          </p:nvPr>
+        </p:nvSpPr>
+        <p:spPr>
+          <a:xfrm>
+            <a:off x="336550" y="58738"/>
+            <a:ext cx="5759450" cy="622300"/>
+          </a:xfrm>
+        </p:spPr>
+        <p:txBody>
+          <a:bodyPr/>
+          <a:lstStyle/>
+          <a:p>
+            <a:r>
+              <a:rPr lang="en-US" altLang="zh-CN" dirty="0"/>
+              <a:t>Results</a:t>
+            </a:r>
+            <a:endParaRPr lang="zh-CN" altLang="en-US" dirty="0"/>
+          </a:p>
+        </p:txBody>
+      </p:sp>
+      <p:sp>
+        <p:nvSpPr>
+          <p:cNvPr id="203" name="文本占位符 5">
+            <a:extLst>
+              <a:ext uri="{FF2B5EF4-FFF2-40B4-BE49-F238E27FC236}">
+                <a16:creationId xmlns:a16="http://schemas.microsoft.com/office/drawing/2014/main" id="{A219F0BA-71F5-BA11-CCBD-9327897B98CC}"/>
+              </a:ext>
+            </a:extLst>
+          </p:cNvPr>
+          <p:cNvSpPr>
+            <a:spLocks noGrp="1"/>
+          </p:cNvSpPr>
+          <p:nvPr>
+            <p:ph type="body" sz="quarter" idx="10"/>
+          </p:nvPr>
+        </p:nvSpPr>
+        <p:spPr>
+          <a:xfrm>
+            <a:off x="0" y="820290"/>
+            <a:ext cx="5878224" cy="638175"/>
+          </a:xfrm>
+        </p:spPr>
+        <p:txBody>
+          <a:bodyPr/>
+          <a:lstStyle/>
+          <a:p>
+            <a:r>
+              <a:rPr lang="en-US" altLang="zh-CN" sz="2800" dirty="0"/>
               <a:t>Budget response curve</a:t>
             </a:r>
             <a:endParaRPr lang="zh-CN" altLang="en-US" sz="2800" dirty="0"/>
@@ -16501,7 +16971,7 @@
 </p:sld>
 </file>
 
-<file path=ppt/slides/slide31.xml><?xml version="1.0" encoding="utf-8"?>
+<file path=ppt/slides/slide32.xml><?xml version="1.0" encoding="utf-8"?>
 <p:sld xmlns:a="http://schemas.openxmlformats.org/drawingml/2006/main" xmlns:p="http://schemas.openxmlformats.org/presentationml/2006/main" xmlns:r="http://schemas.openxmlformats.org/officeDocument/2006/relationships">
   <p:cSld>
     <p:spTree>

--- a/experiments/20260804-budget-conditioning/ppt/sensing_routing_method_and_results.pptx
+++ b/experiments/20260804-budget-conditioning/ppt/sensing_routing_method_and_results.pptx
@@ -30,6 +30,8 @@
     <p:sldId id="343" r:id="rId37"/>
     <p:sldId id="344" r:id="rId38"/>
     <p:sldId id="345" r:id="rId39"/>
+    <p:sldId id="346" r:id="rId40"/>
+    <p:sldId id="347" r:id="rId41"/>
   </p:sldIdLst>
   <p:sldSz cx="12192000" cy="6858000"/>
   <p:notesSz cx="6858000" cy="9144000"/>
@@ -6609,8 +6611,8 @@
         </p:nvSpPr>
         <p:spPr>
           <a:xfrm>
-            <a:off x="640080" y="5535931"/>
-            <a:ext cx="10881360" cy="914400"/>
+            <a:off x="1874519" y="5535931"/>
+            <a:ext cx="9692640" cy="914400"/>
           </a:xfrm>
           <a:prstGeom prst="rect">
             <a:avLst/>
@@ -6624,15 +6626,23 @@
           <a:lstStyle/>
           <a:p>
             <a:pPr>
-              <a:defRPr sz="1250" b="0"/>
+              <a:defRPr sz="1150" b="0"/>
             </a:pPr>
             <a:r>
-              <a:t>• Fixed bidirectional 4×4: 80 directed links, no U-turns · 8 gates (4 corners + 4 edge midpoints) · all 56 ordered OD pairs feasible (heatmap) · horizon H = 338</a:t>
+              <a:t>• Fixed bidirectional 4×4: 80 directed links, no U-turns · 8 gates (4 corners + 4 edge midpoints) · all 56 ordered OD pairs feasible · horizon H = 338. Link numbers = directed link ids 1–80 (E 1–20 · W 21–40 · S 41–60 · N 61–80) — the model's token ids; base(i) = min(id, reverse id) sets each street's base cost, so E/W streets are structurally faster than N/S</a:t>
             </a:r>
           </a:p>
           <a:p>
             <a:pPr>
-              <a:defRPr sz="1250" b="1"/>
+              <a:defRPr sz="1150" b="1"/>
+            </a:pPr>
+            <a:r>
+              <a:t>• Heatmap = earliest arrival departing t₀ = 0 on the δ = 0 day — ONE slice of a time-varying quantity (next two slides)</a:t>
+            </a:r>
+          </a:p>
+          <a:p>
+            <a:pPr>
+              <a:defRPr sz="1150" b="0"/>
             </a:pPr>
             <a:r>
               <a:t>• The network and the OD set are FIXED; what varies per case is δ, V, and each vehicle's (o, d, t₀, B)</a:t>
@@ -6649,6 +6659,320 @@
 </file>
 
 <file path=ppt/slides/slide15.xml><?xml version="1.0" encoding="utf-8"?>
+<p:sld xmlns:a="http://schemas.openxmlformats.org/drawingml/2006/main" xmlns:p="http://schemas.openxmlformats.org/presentationml/2006/main" xmlns:r="http://schemas.openxmlformats.org/officeDocument/2006/relationships">
+  <p:cSld>
+    <p:spTree>
+      <p:nvGrpSpPr>
+        <p:cNvPr id="1" name=""/>
+        <p:cNvGrpSpPr/>
+        <p:nvPr/>
+      </p:nvGrpSpPr>
+      <p:grpSpPr/>
+      <p:sp>
+        <p:nvSpPr>
+          <p:cNvPr id="7" name="文本占位符 6">
+            <a:extLst>
+              <a:ext uri="{FF2B5EF4-FFF2-40B4-BE49-F238E27FC236}">
+                <a16:creationId xmlns:a16="http://schemas.microsoft.com/office/drawing/2014/main" id="{33AE8DB3-4C29-0DE3-EB73-8D2BBFBB8CBF}"/>
+              </a:ext>
+            </a:extLst>
+          </p:cNvPr>
+          <p:cNvSpPr>
+            <a:spLocks noGrp="1"/>
+          </p:cNvSpPr>
+          <p:nvPr>
+            <p:ph type="body" sz="quarter" idx="11"/>
+          </p:nvPr>
+        </p:nvSpPr>
+        <p:spPr>
+          <a:xfrm>
+            <a:off x="336550" y="58738"/>
+            <a:ext cx="5759450" cy="622300"/>
+          </a:xfrm>
+        </p:spPr>
+        <p:txBody>
+          <a:bodyPr/>
+          <a:lstStyle/>
+          <a:p>
+            <a:r>
+              <a:rPr lang="en-US" altLang="zh-CN" dirty="0"/>
+              <a:t>The problem</a:t>
+            </a:r>
+            <a:endParaRPr lang="zh-CN" altLang="en-US" dirty="0"/>
+          </a:p>
+        </p:txBody>
+      </p:sp>
+      <p:sp>
+        <p:nvSpPr>
+          <p:cNvPr id="203" name="文本占位符 5">
+            <a:extLst>
+              <a:ext uri="{FF2B5EF4-FFF2-40B4-BE49-F238E27FC236}">
+                <a16:creationId xmlns:a16="http://schemas.microsoft.com/office/drawing/2014/main" id="{A219F0BA-71F5-BA11-CCBD-9327897B98CC}"/>
+              </a:ext>
+            </a:extLst>
+          </p:cNvPr>
+          <p:cNvSpPr>
+            <a:spLocks noGrp="1"/>
+          </p:cNvSpPr>
+          <p:nvPr>
+            <p:ph type="body" sz="quarter" idx="10"/>
+          </p:nvPr>
+        </p:nvSpPr>
+        <p:spPr>
+          <a:xfrm>
+            <a:off x="0" y="820290"/>
+            <a:ext cx="5878224" cy="638175"/>
+          </a:xfrm>
+        </p:spPr>
+        <p:txBody>
+          <a:bodyPr/>
+          <a:lstStyle/>
+          <a:p>
+            <a:r>
+              <a:rPr lang="en-US" altLang="zh-CN" sz="2800" dirty="0"/>
+              <a:t>Time-dependence</a:t>
+            </a:r>
+            <a:endParaRPr lang="zh-CN" altLang="en-US" sz="2800" dirty="0"/>
+          </a:p>
+        </p:txBody>
+      </p:sp>
+      <p:pic>
+        <p:nvPicPr>
+          <p:cNvPr id="204" name="Picture 203" descr="figA_td_travel.gif"/>
+          <p:cNvPicPr>
+            <a:picLocks noChangeAspect="1"/>
+          </p:cNvPicPr>
+          <p:nvPr/>
+        </p:nvPicPr>
+        <p:blipFill>
+          <a:blip r:embed="rId2"/>
+          <a:stretch>
+            <a:fillRect/>
+          </a:stretch>
+        </p:blipFill>
+        <p:spPr>
+          <a:xfrm>
+            <a:off x="1615287" y="1325880"/>
+            <a:ext cx="8961120" cy="3733800"/>
+          </a:xfrm>
+          <a:prstGeom prst="rect">
+            <a:avLst/>
+          </a:prstGeom>
+        </p:spPr>
+      </p:pic>
+      <p:sp>
+        <p:nvSpPr>
+          <p:cNvPr id="205" name="TextBox 204"/>
+          <p:cNvSpPr txBox="1"/>
+          <p:nvPr/>
+        </p:nvSpPr>
+        <p:spPr>
+          <a:xfrm>
+            <a:off x="1874519" y="5257800"/>
+            <a:ext cx="9692640" cy="914400"/>
+          </a:xfrm>
+          <a:prstGeom prst="rect">
+            <a:avLst/>
+          </a:prstGeom>
+          <a:noFill/>
+        </p:spPr>
+        <p:txBody>
+          <a:bodyPr wrap="square">
+            <a:spAutoFit/>
+          </a:bodyPr>
+          <a:lstStyle/>
+          <a:p>
+            <a:pPr>
+              <a:defRPr sz="1150" b="1"/>
+            </a:pPr>
+            <a:r>
+              <a:t>• The previous slide's heatmap is ONE frame of this animation: departing t₀ = 0 on the δ = 0 day. Re-running TD-Dijkstra at later departures: G1→G2 takes 2 / 47 / 92 and G7→G3 takes 159 / 555 / 955 at t₀ = 0 / 80 / 160 (* = would arrive after H = 338)</a:t>
+            </a:r>
+          </a:p>
+          <a:p>
+            <a:pPr>
+              <a:defRPr sz="1150" b="0"/>
+            </a:pPr>
+            <a:r>
+              <a:t>• Why: entry cost c(i,t) = (base(i)+t)//4 + 1 + δᵢ rises with t (FIFO staircase, +1 every 4 steps) — so earliest arrival depends on departure time, and the pipeline always uses the right one: Bᵥ at the vehicle's own t₀ᵥ, the decoder mask at the current decode time</a:t>
+            </a:r>
+          </a:p>
+          <a:p>
+            <a:pPr>
+              <a:defRPr sz="1150" b="0"/>
+            </a:pPr>
+            <a:r>
+              <a:t>• Animated GIF — plays in slideshow mode; in print this page shows the t₀ = 0 frame</a:t>
+            </a:r>
+          </a:p>
+        </p:txBody>
+      </p:sp>
+    </p:spTree>
+  </p:cSld>
+  <p:clrMapOvr>
+    <a:masterClrMapping/>
+  </p:clrMapOvr>
+</p:sld>
+</file>
+
+<file path=ppt/slides/slide16.xml><?xml version="1.0" encoding="utf-8"?>
+<p:sld xmlns:a="http://schemas.openxmlformats.org/drawingml/2006/main" xmlns:p="http://schemas.openxmlformats.org/presentationml/2006/main" xmlns:r="http://schemas.openxmlformats.org/officeDocument/2006/relationships">
+  <p:cSld>
+    <p:spTree>
+      <p:nvGrpSpPr>
+        <p:cNvPr id="1" name=""/>
+        <p:cNvGrpSpPr/>
+        <p:nvPr/>
+      </p:nvGrpSpPr>
+      <p:grpSpPr/>
+      <p:sp>
+        <p:nvSpPr>
+          <p:cNvPr id="7" name="文本占位符 6">
+            <a:extLst>
+              <a:ext uri="{FF2B5EF4-FFF2-40B4-BE49-F238E27FC236}">
+                <a16:creationId xmlns:a16="http://schemas.microsoft.com/office/drawing/2014/main" id="{33AE8DB3-4C29-0DE3-EB73-8D2BBFBB8CBF}"/>
+              </a:ext>
+            </a:extLst>
+          </p:cNvPr>
+          <p:cNvSpPr>
+            <a:spLocks noGrp="1"/>
+          </p:cNvSpPr>
+          <p:nvPr>
+            <p:ph type="body" sz="quarter" idx="11"/>
+          </p:nvPr>
+        </p:nvSpPr>
+        <p:spPr>
+          <a:xfrm>
+            <a:off x="336550" y="58738"/>
+            <a:ext cx="5759450" cy="622300"/>
+          </a:xfrm>
+        </p:spPr>
+        <p:txBody>
+          <a:bodyPr/>
+          <a:lstStyle/>
+          <a:p>
+            <a:r>
+              <a:rPr lang="en-US" altLang="zh-CN" dirty="0"/>
+              <a:t>The problem</a:t>
+            </a:r>
+            <a:endParaRPr lang="zh-CN" altLang="en-US" dirty="0"/>
+          </a:p>
+        </p:txBody>
+      </p:sp>
+      <p:sp>
+        <p:nvSpPr>
+          <p:cNvPr id="203" name="文本占位符 5">
+            <a:extLst>
+              <a:ext uri="{FF2B5EF4-FFF2-40B4-BE49-F238E27FC236}">
+                <a16:creationId xmlns:a16="http://schemas.microsoft.com/office/drawing/2014/main" id="{A219F0BA-71F5-BA11-CCBD-9327897B98CC}"/>
+              </a:ext>
+            </a:extLst>
+          </p:cNvPr>
+          <p:cNvSpPr>
+            <a:spLocks noGrp="1"/>
+          </p:cNvSpPr>
+          <p:nvPr>
+            <p:ph type="body" sz="quarter" idx="10"/>
+          </p:nvPr>
+        </p:nvSpPr>
+        <p:spPr>
+          <a:xfrm>
+            <a:off x="0" y="820290"/>
+            <a:ext cx="5878224" cy="638175"/>
+          </a:xfrm>
+        </p:spPr>
+        <p:txBody>
+          <a:bodyPr/>
+          <a:lstStyle/>
+          <a:p>
+            <a:r>
+              <a:rPr lang="en-US" altLang="zh-CN" sz="2800" dirty="0"/>
+              <a:t>Day-to-day: δ</a:t>
+            </a:r>
+            <a:endParaRPr lang="zh-CN" altLang="en-US" sz="2800" dirty="0"/>
+          </a:p>
+        </p:txBody>
+      </p:sp>
+      <p:pic>
+        <p:nvPicPr>
+          <p:cNvPr id="204" name="Picture 203" descr="figA_delta_day.png"/>
+          <p:cNvPicPr>
+            <a:picLocks noChangeAspect="1"/>
+          </p:cNvPicPr>
+          <p:nvPr/>
+        </p:nvPicPr>
+        <p:blipFill>
+          <a:blip r:embed="rId2"/>
+          <a:stretch>
+            <a:fillRect/>
+          </a:stretch>
+        </p:blipFill>
+        <p:spPr>
+          <a:xfrm>
+            <a:off x="1706727" y="1371600"/>
+            <a:ext cx="8778240" cy="3488788"/>
+          </a:xfrm>
+          <a:prstGeom prst="rect">
+            <a:avLst/>
+          </a:prstGeom>
+        </p:spPr>
+      </p:pic>
+      <p:sp>
+        <p:nvSpPr>
+          <p:cNvPr id="205" name="TextBox 204"/>
+          <p:cNvSpPr txBox="1"/>
+          <p:nvPr/>
+        </p:nvSpPr>
+        <p:spPr>
+          <a:xfrm>
+            <a:off x="1874519" y="5074920"/>
+            <a:ext cx="9692640" cy="914400"/>
+          </a:xfrm>
+          <a:prstGeom prst="rect">
+            <a:avLst/>
+          </a:prstGeom>
+          <a:noFill/>
+        </p:spPr>
+        <p:txBody>
+          <a:bodyPr wrap="square">
+            <a:spAutoFit/>
+          </a:bodyPr>
+          <a:lstStyle/>
+          <a:p>
+            <a:pPr>
+              <a:defRPr sz="1150" b="1"/>
+            </a:pPr>
+            <a:r>
+              <a:t>• δ ∈ {0,1}⁸⁰: one bit per DIRECTED link, drawn i.i.d. Bernoulli(½) per operating day (the farm's sampler); δᵢ = 1 adds +1 to EVERY traversal of link i that day</a:t>
+            </a:r>
+          </a:p>
+          <a:p>
+            <a:pPr>
+              <a:defRPr sz="1150" b="0"/>
+            </a:pPr>
+            <a:r>
+              <a:t>• An instance property shared by the whole fleet — not a vehicle attribute; the two directions of one street can differ (left: one-way congestion is visible)</a:t>
+            </a:r>
+          </a:p>
+          <a:p>
+            <a:pPr>
+              <a:defRPr sz="1150" b="0"/>
+            </a:pPr>
+            <a:r>
+              <a:t>• Effect at t₀ = 0 (right): this sampled day adds +0 … +19 steps across the 56 ODs. The model sees δ in the encoder: each link token = link_emb(i) + Proj(δᵢ) (encoder slide)</a:t>
+            </a:r>
+          </a:p>
+        </p:txBody>
+      </p:sp>
+    </p:spTree>
+  </p:cSld>
+  <p:clrMapOvr>
+    <a:masterClrMapping/>
+  </p:clrMapOvr>
+</p:sld>
+</file>
+
+<file path=ppt/slides/slide17.xml><?xml version="1.0" encoding="utf-8"?>
 <p:sld xmlns:a="http://schemas.openxmlformats.org/drawingml/2006/main" xmlns:p="http://schemas.openxmlformats.org/presentationml/2006/main" xmlns:r="http://schemas.openxmlformats.org/officeDocument/2006/relationships">
   <p:cSld>
     <p:spTree>
@@ -7217,7 +7541,7 @@
 </p:sld>
 </file>
 
-<file path=ppt/slides/slide16.xml><?xml version="1.0" encoding="utf-8"?>
+<file path=ppt/slides/slide18.xml><?xml version="1.0" encoding="utf-8"?>
 <p:sld xmlns:a="http://schemas.openxmlformats.org/drawingml/2006/main" xmlns:p="http://schemas.openxmlformats.org/presentationml/2006/main" xmlns:r="http://schemas.openxmlformats.org/officeDocument/2006/relationships">
   <p:cSld>
     <p:spTree>
@@ -7562,7 +7886,7 @@
 </p:sld>
 </file>
 
-<file path=ppt/slides/slide17.xml><?xml version="1.0" encoding="utf-8"?>
+<file path=ppt/slides/slide19.xml><?xml version="1.0" encoding="utf-8"?>
 <p:sld xmlns:a="http://schemas.openxmlformats.org/drawingml/2006/main" xmlns:p="http://schemas.openxmlformats.org/presentationml/2006/main" xmlns:r="http://schemas.openxmlformats.org/officeDocument/2006/relationships">
   <p:cSld>
     <p:spTree>
@@ -7832,616 +8156,6 @@
             </a:pPr>
             <a:r>
               <a:t>• That is change (a): keep α fixed (0.3/0.7, roam regime), move the control to the constraint — the per-vehicle budget Bᵥ. Next slide: both claims measured on one instance</a:t>
-            </a:r>
-          </a:p>
-        </p:txBody>
-      </p:sp>
-    </p:spTree>
-  </p:cSld>
-  <p:clrMapOvr>
-    <a:masterClrMapping/>
-  </p:clrMapOvr>
-</p:sld>
-</file>
-
-<file path=ppt/slides/slide18.xml><?xml version="1.0" encoding="utf-8"?>
-<p:sld xmlns:a="http://schemas.openxmlformats.org/drawingml/2006/main" xmlns:p="http://schemas.openxmlformats.org/presentationml/2006/main" xmlns:r="http://schemas.openxmlformats.org/officeDocument/2006/relationships">
-  <p:cSld>
-    <p:spTree>
-      <p:nvGrpSpPr>
-        <p:cNvPr id="1" name=""/>
-        <p:cNvGrpSpPr/>
-        <p:nvPr/>
-      </p:nvGrpSpPr>
-      <p:grpSpPr/>
-      <p:sp>
-        <p:nvSpPr>
-          <p:cNvPr id="7" name="文本占位符 6">
-            <a:extLst>
-              <a:ext uri="{FF2B5EF4-FFF2-40B4-BE49-F238E27FC236}">
-                <a16:creationId xmlns:a16="http://schemas.microsoft.com/office/drawing/2014/main" id="{33AE8DB3-4C29-0DE3-EB73-8D2BBFBB8CBF}"/>
-              </a:ext>
-            </a:extLst>
-          </p:cNvPr>
-          <p:cNvSpPr>
-            <a:spLocks noGrp="1"/>
-          </p:cNvSpPr>
-          <p:nvPr>
-            <p:ph type="body" sz="quarter" idx="11"/>
-          </p:nvPr>
-        </p:nvSpPr>
-        <p:spPr>
-          <a:xfrm>
-            <a:off x="336550" y="58738"/>
-            <a:ext cx="5759450" cy="622300"/>
-          </a:xfrm>
-        </p:spPr>
-        <p:txBody>
-          <a:bodyPr/>
-          <a:lstStyle/>
-          <a:p>
-            <a:r>
-              <a:rPr lang="en-US" altLang="zh-CN" dirty="0"/>
-              <a:t>Change (a) — objective</a:t>
-            </a:r>
-            <a:endParaRPr lang="zh-CN" altLang="en-US" dirty="0"/>
-          </a:p>
-        </p:txBody>
-      </p:sp>
-      <p:sp>
-        <p:nvSpPr>
-          <p:cNvPr id="203" name="文本占位符 5">
-            <a:extLst>
-              <a:ext uri="{FF2B5EF4-FFF2-40B4-BE49-F238E27FC236}">
-                <a16:creationId xmlns:a16="http://schemas.microsoft.com/office/drawing/2014/main" id="{A219F0BA-71F5-BA11-CCBD-9327897B98CC}"/>
-              </a:ext>
-            </a:extLst>
-          </p:cNvPr>
-          <p:cNvSpPr>
-            <a:spLocks noGrp="1"/>
-          </p:cNvSpPr>
-          <p:nvPr>
-            <p:ph type="body" sz="quarter" idx="10"/>
-          </p:nvPr>
-        </p:nvSpPr>
-        <p:spPr>
-          <a:xfrm>
-            <a:off x="0" y="820290"/>
-            <a:ext cx="5878224" cy="638175"/>
-          </a:xfrm>
-        </p:spPr>
-        <p:txBody>
-          <a:bodyPr/>
-          <a:lstStyle/>
-          <a:p>
-            <a:r>
-              <a:rPr lang="en-US" altLang="zh-CN" sz="2800" dirty="0"/>
-              <a:t>Switch vs dial — measured</a:t>
-            </a:r>
-            <a:endParaRPr lang="zh-CN" altLang="en-US" sz="2800" dirty="0"/>
-          </a:p>
-        </p:txBody>
-      </p:sp>
-      <p:pic>
-        <p:nvPicPr>
-          <p:cNvPr id="204" name="Picture 203" descr="figS1_knob_vs_switch.png"/>
-          <p:cNvPicPr>
-            <a:picLocks noChangeAspect="1"/>
-          </p:cNvPicPr>
-          <p:nvPr/>
-        </p:nvPicPr>
-        <p:blipFill>
-          <a:blip r:embed="rId2"/>
-          <a:stretch>
-            <a:fillRect/>
-          </a:stretch>
-        </p:blipFill>
-        <p:spPr>
-          <a:xfrm>
-            <a:off x="792327" y="1371600"/>
-            <a:ext cx="10607040" cy="4060090"/>
-          </a:xfrm>
-          <a:prstGeom prst="rect">
-            <a:avLst/>
-          </a:prstGeom>
-        </p:spPr>
-      </p:pic>
-      <p:sp>
-        <p:nvSpPr>
-          <p:cNvPr id="205" name="TextBox 204"/>
-          <p:cNvSpPr txBox="1"/>
-          <p:nvPr/>
-        </p:nvSpPr>
-        <p:spPr>
-          <a:xfrm>
-            <a:off x="640080" y="5523129"/>
-            <a:ext cx="10881360" cy="914400"/>
-          </a:xfrm>
-          <a:prstGeom prst="rect">
-            <a:avLst/>
-          </a:prstGeom>
-          <a:noFill/>
-        </p:spPr>
-        <p:txBody>
-          <a:bodyPr wrap="square">
-            <a:spAutoFit/>
-          </a:bodyPr>
-          <a:lstStyle/>
-          <a:p>
-            <a:pPr>
-              <a:defRPr sz="1250" b="0"/>
-            </a:pPr>
-            <a:r>
-              <a:t>• One fixed instance, one MILP, one solver, MIPGap 0.5 %. LEFT: 13 values of α₂ with the budget fixed at H → 2 distinct solutions (α₂ = 0.10–0.48 identical link-for-link). RIGHT: α frozen at 0.3/0.7, per-vehicle budget swept → 10 distinct, monotone solutions</a:t>
-            </a:r>
-          </a:p>
-        </p:txBody>
-      </p:sp>
-    </p:spTree>
-  </p:cSld>
-  <p:clrMapOvr>
-    <a:masterClrMapping/>
-  </p:clrMapOvr>
-</p:sld>
-</file>
-
-<file path=ppt/slides/slide19.xml><?xml version="1.0" encoding="utf-8"?>
-<p:sld xmlns:a="http://schemas.openxmlformats.org/drawingml/2006/main" xmlns:p="http://schemas.openxmlformats.org/presentationml/2006/main" xmlns:r="http://schemas.openxmlformats.org/officeDocument/2006/relationships">
-  <p:cSld>
-    <p:spTree>
-      <p:nvGrpSpPr>
-        <p:cNvPr id="1" name=""/>
-        <p:cNvGrpSpPr/>
-        <p:nvPr/>
-      </p:nvGrpSpPr>
-      <p:grpSpPr/>
-      <p:sp>
-        <p:nvSpPr>
-          <p:cNvPr id="7" name="文本占位符 6">
-            <a:extLst>
-              <a:ext uri="{FF2B5EF4-FFF2-40B4-BE49-F238E27FC236}">
-                <a16:creationId xmlns:a16="http://schemas.microsoft.com/office/drawing/2014/main" id="{33AE8DB3-4C29-0DE3-EB73-8D2BBFBB8CBF}"/>
-              </a:ext>
-            </a:extLst>
-          </p:cNvPr>
-          <p:cNvSpPr>
-            <a:spLocks noGrp="1"/>
-          </p:cNvSpPr>
-          <p:nvPr>
-            <p:ph type="body" sz="quarter" idx="11"/>
-          </p:nvPr>
-        </p:nvSpPr>
-        <p:spPr>
-          <a:xfrm>
-            <a:off x="336550" y="58738"/>
-            <a:ext cx="5759450" cy="622300"/>
-          </a:xfrm>
-        </p:spPr>
-        <p:txBody>
-          <a:bodyPr/>
-          <a:lstStyle/>
-          <a:p>
-            <a:r>
-              <a:rPr lang="en-US" altLang="zh-CN" dirty="0"/>
-              <a:t>Change (a) — objective</a:t>
-            </a:r>
-            <a:endParaRPr lang="zh-CN" altLang="en-US" dirty="0"/>
-          </a:p>
-        </p:txBody>
-      </p:sp>
-      <p:sp>
-        <p:nvSpPr>
-          <p:cNvPr id="203" name="文本占位符 5">
-            <a:extLst>
-              <a:ext uri="{FF2B5EF4-FFF2-40B4-BE49-F238E27FC236}">
-                <a16:creationId xmlns:a16="http://schemas.microsoft.com/office/drawing/2014/main" id="{A219F0BA-71F5-BA11-CCBD-9327897B98CC}"/>
-              </a:ext>
-            </a:extLst>
-          </p:cNvPr>
-          <p:cNvSpPr>
-            <a:spLocks noGrp="1"/>
-          </p:cNvSpPr>
-          <p:nvPr>
-            <p:ph type="body" sz="quarter" idx="10"/>
-          </p:nvPr>
-        </p:nvSpPr>
-        <p:spPr>
-          <a:xfrm>
-            <a:off x="0" y="820290"/>
-            <a:ext cx="5878224" cy="638175"/>
-          </a:xfrm>
-        </p:spPr>
-        <p:txBody>
-          <a:bodyPr/>
-          <a:lstStyle/>
-          <a:p>
-            <a:r>
-              <a:rPr lang="en-US" altLang="zh-CN" sz="2800" dirty="0"/>
-              <a:t>Step 0: earliest arrival</a:t>
-            </a:r>
-            <a:endParaRPr lang="zh-CN" altLang="en-US" sz="2800" dirty="0"/>
-          </a:p>
-        </p:txBody>
-      </p:sp>
-      <p:sp>
-        <p:nvSpPr>
-          <p:cNvPr id="204" name="TextBox 203"/>
-          <p:cNvSpPr txBox="1"/>
-          <p:nvPr/>
-        </p:nvSpPr>
-        <p:spPr>
-          <a:xfrm>
-            <a:off x="685800" y="1353312"/>
-            <a:ext cx="10881360" cy="274320"/>
-          </a:xfrm>
-          <a:prstGeom prst="rect">
-            <a:avLst/>
-          </a:prstGeom>
-          <a:noFill/>
-        </p:spPr>
-        <p:txBody>
-          <a:bodyPr wrap="square">
-            <a:spAutoFit/>
-          </a:bodyPr>
-          <a:lstStyle/>
-          <a:p>
-            <a:pPr algn="l">
-              <a:defRPr sz="1250" b="1">
-                <a:solidFill>
-                  <a:srgbClr val="52514E"/>
-                </a:solidFill>
-              </a:defRPr>
-            </a:pPr>
-            <a:r>
-              <a:t>Before any budget can be set, we must know the fastest this vehicle could possibly make its trip TODAY — earliest arrival on the current network, under this case's congestion δ. One run per vehicle:</a:t>
-            </a:r>
-          </a:p>
-        </p:txBody>
-      </p:sp>
-      <p:sp>
-        <p:nvSpPr>
-          <p:cNvPr id="205" name="Rounded Rectangle 204"/>
-          <p:cNvSpPr/>
-          <p:nvPr/>
-        </p:nvSpPr>
-        <p:spPr>
-          <a:xfrm>
-            <a:off x="685800" y="1956816"/>
-            <a:ext cx="8321040" cy="2514600"/>
-          </a:xfrm>
-          <a:prstGeom prst="roundRect">
-            <a:avLst>
-              <a:gd name="adj" fmla="val 4000"/>
-            </a:avLst>
-          </a:prstGeom>
-          <a:solidFill>
-            <a:srgbClr val="F7F7F5"/>
-          </a:solidFill>
-          <a:ln w="15240">
-            <a:solidFill>
-              <a:srgbClr val="C9C8C2"/>
-            </a:solidFill>
-          </a:ln>
-          <a:effectLst/>
-        </p:spPr>
-        <p:style>
-          <a:lnRef idx="1">
-            <a:schemeClr val="accent1"/>
-          </a:lnRef>
-          <a:fillRef idx="3">
-            <a:schemeClr val="accent1"/>
-          </a:fillRef>
-          <a:effectRef idx="2">
-            <a:schemeClr val="accent1"/>
-          </a:effectRef>
-          <a:fontRef idx="minor">
-            <a:schemeClr val="lt1"/>
-          </a:fontRef>
-        </p:style>
-        <p:txBody>
-          <a:bodyPr rtlCol="0" anchor="ctr" wrap="none" lIns="128016" rIns="128016" tIns="54864" bIns="54864"/>
-          <a:lstStyle/>
-          <a:p>
-            <a:pPr algn="l">
-              <a:defRPr sz="960" b="1">
-                <a:solidFill>
-                  <a:srgbClr val="EB6834"/>
-                </a:solidFill>
-                <a:latin typeface="Courier New"/>
-              </a:defRPr>
-            </a:pPr>
-            <a:r>
-              <a:t>EarliestArrival(o, t₀, δ):        # one run per vehicle, on today's network</a:t>
-            </a:r>
-          </a:p>
-          <a:p>
-            <a:pPr algn="l">
-              <a:defRPr sz="960" b="0">
-                <a:solidFill>
-                  <a:srgbClr val="0B0B0B"/>
-                </a:solidFill>
-                <a:latin typeface="Courier New"/>
-              </a:defRPr>
-            </a:pPr>
-            <a:r>
-              <a:t>  entry[l] ← t₀  for every link l leaving gate o;  push (t₀, l)</a:t>
-            </a:r>
-          </a:p>
-          <a:p>
-            <a:pPr algn="l">
-              <a:defRPr sz="960" b="0">
-                <a:solidFill>
-                  <a:srgbClr val="0B0B0B"/>
-                </a:solidFill>
-                <a:latin typeface="Courier New"/>
-              </a:defRPr>
-            </a:pPr>
-            <a:r>
-              <a:t>  while queue not empty:</a:t>
-            </a:r>
-          </a:p>
-          <a:p>
-            <a:pPr algn="l">
-              <a:defRPr sz="960" b="0">
-                <a:solidFill>
-                  <a:srgbClr val="0B0B0B"/>
-                </a:solidFill>
-                <a:latin typeface="Courier New"/>
-              </a:defRPr>
-            </a:pPr>
-            <a:r>
-              <a:t>      (t, l) ← pop the SMALLEST entry time     # ordinary Dijkstra order</a:t>
-            </a:r>
-          </a:p>
-          <a:p>
-            <a:pPr algn="l">
-              <a:defRPr sz="960" b="0">
-                <a:solidFill>
-                  <a:srgbClr val="0B0B0B"/>
-                </a:solidFill>
-                <a:latin typeface="Courier New"/>
-              </a:defRPr>
-            </a:pPr>
-            <a:r>
-              <a:t>      if t &gt; entry[l]: continue                # stale label</a:t>
-            </a:r>
-          </a:p>
-          <a:p>
-            <a:pPr algn="l">
-              <a:defRPr sz="960" b="1">
-                <a:solidFill>
-                  <a:srgbClr val="EB6834"/>
-                </a:solidFill>
-                <a:latin typeface="Courier New"/>
-              </a:defRPr>
-            </a:pPr>
-            <a:r>
-              <a:t>      s ← t + c(l, t)      # exit time; the clock is INSIDE the cost</a:t>
-            </a:r>
-          </a:p>
-          <a:p>
-            <a:pPr algn="l">
-              <a:defRPr sz="960" b="0">
-                <a:solidFill>
-                  <a:srgbClr val="0B0B0B"/>
-                </a:solidFill>
-                <a:latin typeface="Courier New"/>
-              </a:defRPr>
-            </a:pPr>
-            <a:r>
-              <a:t>      if l ends at a gate g:  arrive[g] ← min(arrive[g], s)</a:t>
-            </a:r>
-          </a:p>
-          <a:p>
-            <a:pPr algn="l">
-              <a:defRPr sz="960" b="0">
-                <a:solidFill>
-                  <a:srgbClr val="0B0B0B"/>
-                </a:solidFill>
-                <a:latin typeface="Courier New"/>
-              </a:defRPr>
-            </a:pPr>
-            <a:r>
-              <a:t>      for every successor j of l (no U-turn):</a:t>
-            </a:r>
-          </a:p>
-          <a:p>
-            <a:pPr algn="l">
-              <a:defRPr sz="960" b="0">
-                <a:solidFill>
-                  <a:srgbClr val="0B0B0B"/>
-                </a:solidFill>
-                <a:latin typeface="Courier New"/>
-              </a:defRPr>
-            </a:pPr>
-            <a:r>
-              <a:t>          if s &lt; entry[j]:  entry[j] ← s;  push (s, j)</a:t>
-            </a:r>
-          </a:p>
-          <a:p>
-            <a:pPr algn="l">
-              <a:defRPr sz="960" b="0">
-                <a:solidFill>
-                  <a:srgbClr val="0B0B0B"/>
-                </a:solidFill>
-                <a:latin typeface="Courier New"/>
-              </a:defRPr>
-            </a:pPr>
-            <a:r>
-              <a:t>  return arrive                               # earliest arrival at EVERY gate</a:t>
-            </a:r>
-          </a:p>
-          <a:p>
-            <a:pPr algn="l">
-              <a:defRPr sz="960" b="0">
-                <a:solidFill>
-                  <a:srgbClr val="0B0B0B"/>
-                </a:solidFill>
-                <a:latin typeface="Courier New"/>
-              </a:defRPr>
-            </a:pPr>
-          </a:p>
-          <a:p>
-            <a:pPr algn="l">
-              <a:defRPr sz="960" b="1">
-                <a:solidFill>
-                  <a:srgbClr val="EB6834"/>
-                </a:solidFill>
-                <a:latin typeface="Courier New"/>
-              </a:defRPr>
-            </a:pPr>
-            <a:r>
-              <a:t>τᵐⁱⁿ_v = arrive[d_v] − t₀_v</a:t>
-            </a:r>
-          </a:p>
-        </p:txBody>
-      </p:sp>
-      <p:sp>
-        <p:nvSpPr>
-          <p:cNvPr id="206" name="Rounded Rectangle 205"/>
-          <p:cNvSpPr/>
-          <p:nvPr/>
-        </p:nvSpPr>
-        <p:spPr>
-          <a:xfrm>
-            <a:off x="9235440" y="1956816"/>
-            <a:ext cx="2468880" cy="2514600"/>
-          </a:xfrm>
-          <a:prstGeom prst="roundRect">
-            <a:avLst>
-              <a:gd name="adj" fmla="val 10000"/>
-            </a:avLst>
-          </a:prstGeom>
-          <a:solidFill>
-            <a:srgbClr val="FDF1E9"/>
-          </a:solidFill>
-          <a:ln w="15240">
-            <a:solidFill>
-              <a:srgbClr val="EB6834"/>
-            </a:solidFill>
-          </a:ln>
-          <a:effectLst/>
-        </p:spPr>
-        <p:style>
-          <a:lnRef idx="1">
-            <a:schemeClr val="accent1"/>
-          </a:lnRef>
-          <a:fillRef idx="3">
-            <a:schemeClr val="accent1"/>
-          </a:fillRef>
-          <a:effectRef idx="2">
-            <a:schemeClr val="accent1"/>
-          </a:effectRef>
-          <a:fontRef idx="minor">
-            <a:schemeClr val="lt1"/>
-          </a:fontRef>
-        </p:style>
-        <p:txBody>
-          <a:bodyPr rtlCol="0" anchor="ctr" wrap="square" lIns="54864" rIns="54864" tIns="27432" bIns="27432"/>
-          <a:lstStyle/>
-          <a:p>
-            <a:pPr algn="ctr">
-              <a:defRPr sz="1050" b="1">
-                <a:solidFill>
-                  <a:srgbClr val="EB6834"/>
-                </a:solidFill>
-              </a:defRPr>
-            </a:pPr>
-            <a:r>
-              <a:t>Where it runs</a:t>
-            </a:r>
-          </a:p>
-          <a:p>
-            <a:pPr algn="ctr">
-              <a:defRPr sz="860">
-                <a:solidFill>
-                  <a:srgbClr val="52514E"/>
-                </a:solidFill>
-              </a:defRPr>
-            </a:pPr>
-            <a:r>
-              <a:t>① budget assignment:</a:t>
-            </a:r>
-            <a:br/>
-            <a:r>
-              <a:t>V runs per case</a:t>
-            </a:r>
-            <a:br/>
-            <a:r>
-              <a:t>(~41 000 in the farm)</a:t>
-            </a:r>
-            <a:br/>
-            <a:br/>
-            <a:r>
-              <a:t>② decoder mask:</a:t>
-            </a:r>
-            <a:br/>
-            <a:r>
-              <a:t>min_finish(l, t, d) —</a:t>
-            </a:r>
-            <a:br/>
-            <a:r>
-              <a:t>same algorithm from one</a:t>
-            </a:r>
-            <a:br/>
-            <a:r>
-              <a:t>link, memoised</a:t>
-            </a:r>
-            <a:br/>
-            <a:br/>
-            <a:r>
-              <a:t>③ horizon calibration:</a:t>
-            </a:r>
-            <a:br/>
-            <a:r>
-              <a:t>once, all 8 gates</a:t>
-            </a:r>
-          </a:p>
-        </p:txBody>
-      </p:sp>
-      <p:sp>
-        <p:nvSpPr>
-          <p:cNvPr id="207" name="TextBox 206"/>
-          <p:cNvSpPr txBox="1"/>
-          <p:nvPr/>
-        </p:nvSpPr>
-        <p:spPr>
-          <a:xfrm>
-            <a:off x="640080" y="4709160"/>
-            <a:ext cx="11064240" cy="914400"/>
-          </a:xfrm>
-          <a:prstGeom prst="rect">
-            <a:avLst/>
-          </a:prstGeom>
-          <a:noFill/>
-        </p:spPr>
-        <p:txBody>
-          <a:bodyPr wrap="square">
-            <a:spAutoFit/>
-          </a:bodyPr>
-          <a:lstStyle/>
-          <a:p>
-            <a:pPr>
-              <a:defRPr sz="1200" b="1"/>
-            </a:pPr>
-            <a:r>
-              <a:t>• It is ordinary Dijkstra with ONE change: a label is a time, not a distance, and relaxing link l entered at time t costs c(l, t) — today's congestion δ sits inside c</a:t>
-            </a:r>
-          </a:p>
-          <a:p>
-            <a:pPr>
-              <a:defRPr sz="1200" b="0"/>
-            </a:pPr>
-            <a:r>
-              <a:t>• Why the greedy order stays correct: our costs are FIFO — t + c(l, t) never decreases in t (entering later can never mean exiting earlier), so the first label popped for a link is final, exactly the classic Dijkstra invariant</a:t>
-            </a:r>
-          </a:p>
-          <a:p>
-            <a:pPr>
-              <a:defRPr sz="1200" b="0"/>
-            </a:pPr>
-            <a:r>
-              <a:t>• One run touches at most 80 links → microseconds; ~41 000 runs across the whole farm are negligible next to the 0.90 s MILP solves. The mask's memoised queries are part of the 6–9 ms inference time</a:t>
             </a:r>
           </a:p>
         </p:txBody>
@@ -8564,6 +8278,616 @@
 </file>
 
 <file path=ppt/slides/slide20.xml><?xml version="1.0" encoding="utf-8"?>
+<p:sld xmlns:a="http://schemas.openxmlformats.org/drawingml/2006/main" xmlns:p="http://schemas.openxmlformats.org/presentationml/2006/main" xmlns:r="http://schemas.openxmlformats.org/officeDocument/2006/relationships">
+  <p:cSld>
+    <p:spTree>
+      <p:nvGrpSpPr>
+        <p:cNvPr id="1" name=""/>
+        <p:cNvGrpSpPr/>
+        <p:nvPr/>
+      </p:nvGrpSpPr>
+      <p:grpSpPr/>
+      <p:sp>
+        <p:nvSpPr>
+          <p:cNvPr id="7" name="文本占位符 6">
+            <a:extLst>
+              <a:ext uri="{FF2B5EF4-FFF2-40B4-BE49-F238E27FC236}">
+                <a16:creationId xmlns:a16="http://schemas.microsoft.com/office/drawing/2014/main" id="{33AE8DB3-4C29-0DE3-EB73-8D2BBFBB8CBF}"/>
+              </a:ext>
+            </a:extLst>
+          </p:cNvPr>
+          <p:cNvSpPr>
+            <a:spLocks noGrp="1"/>
+          </p:cNvSpPr>
+          <p:nvPr>
+            <p:ph type="body" sz="quarter" idx="11"/>
+          </p:nvPr>
+        </p:nvSpPr>
+        <p:spPr>
+          <a:xfrm>
+            <a:off x="336550" y="58738"/>
+            <a:ext cx="5759450" cy="622300"/>
+          </a:xfrm>
+        </p:spPr>
+        <p:txBody>
+          <a:bodyPr/>
+          <a:lstStyle/>
+          <a:p>
+            <a:r>
+              <a:rPr lang="en-US" altLang="zh-CN" dirty="0"/>
+              <a:t>Change (a) — objective</a:t>
+            </a:r>
+            <a:endParaRPr lang="zh-CN" altLang="en-US" dirty="0"/>
+          </a:p>
+        </p:txBody>
+      </p:sp>
+      <p:sp>
+        <p:nvSpPr>
+          <p:cNvPr id="203" name="文本占位符 5">
+            <a:extLst>
+              <a:ext uri="{FF2B5EF4-FFF2-40B4-BE49-F238E27FC236}">
+                <a16:creationId xmlns:a16="http://schemas.microsoft.com/office/drawing/2014/main" id="{A219F0BA-71F5-BA11-CCBD-9327897B98CC}"/>
+              </a:ext>
+            </a:extLst>
+          </p:cNvPr>
+          <p:cNvSpPr>
+            <a:spLocks noGrp="1"/>
+          </p:cNvSpPr>
+          <p:nvPr>
+            <p:ph type="body" sz="quarter" idx="10"/>
+          </p:nvPr>
+        </p:nvSpPr>
+        <p:spPr>
+          <a:xfrm>
+            <a:off x="0" y="820290"/>
+            <a:ext cx="5878224" cy="638175"/>
+          </a:xfrm>
+        </p:spPr>
+        <p:txBody>
+          <a:bodyPr/>
+          <a:lstStyle/>
+          <a:p>
+            <a:r>
+              <a:rPr lang="en-US" altLang="zh-CN" sz="2800" dirty="0"/>
+              <a:t>Switch vs dial — measured</a:t>
+            </a:r>
+            <a:endParaRPr lang="zh-CN" altLang="en-US" sz="2800" dirty="0"/>
+          </a:p>
+        </p:txBody>
+      </p:sp>
+      <p:pic>
+        <p:nvPicPr>
+          <p:cNvPr id="204" name="Picture 203" descr="figS1_knob_vs_switch.png"/>
+          <p:cNvPicPr>
+            <a:picLocks noChangeAspect="1"/>
+          </p:cNvPicPr>
+          <p:nvPr/>
+        </p:nvPicPr>
+        <p:blipFill>
+          <a:blip r:embed="rId2"/>
+          <a:stretch>
+            <a:fillRect/>
+          </a:stretch>
+        </p:blipFill>
+        <p:spPr>
+          <a:xfrm>
+            <a:off x="792327" y="1371600"/>
+            <a:ext cx="10607040" cy="4060090"/>
+          </a:xfrm>
+          <a:prstGeom prst="rect">
+            <a:avLst/>
+          </a:prstGeom>
+        </p:spPr>
+      </p:pic>
+      <p:sp>
+        <p:nvSpPr>
+          <p:cNvPr id="205" name="TextBox 204"/>
+          <p:cNvSpPr txBox="1"/>
+          <p:nvPr/>
+        </p:nvSpPr>
+        <p:spPr>
+          <a:xfrm>
+            <a:off x="640080" y="5523129"/>
+            <a:ext cx="10881360" cy="914400"/>
+          </a:xfrm>
+          <a:prstGeom prst="rect">
+            <a:avLst/>
+          </a:prstGeom>
+          <a:noFill/>
+        </p:spPr>
+        <p:txBody>
+          <a:bodyPr wrap="square">
+            <a:spAutoFit/>
+          </a:bodyPr>
+          <a:lstStyle/>
+          <a:p>
+            <a:pPr>
+              <a:defRPr sz="1250" b="0"/>
+            </a:pPr>
+            <a:r>
+              <a:t>• One fixed instance, one MILP, one solver, MIPGap 0.5 %. LEFT: 13 values of α₂ with the budget fixed at H → 2 distinct solutions (α₂ = 0.10–0.48 identical link-for-link). RIGHT: α frozen at 0.3/0.7, per-vehicle budget swept → 10 distinct, monotone solutions</a:t>
+            </a:r>
+          </a:p>
+        </p:txBody>
+      </p:sp>
+    </p:spTree>
+  </p:cSld>
+  <p:clrMapOvr>
+    <a:masterClrMapping/>
+  </p:clrMapOvr>
+</p:sld>
+</file>
+
+<file path=ppt/slides/slide21.xml><?xml version="1.0" encoding="utf-8"?>
+<p:sld xmlns:a="http://schemas.openxmlformats.org/drawingml/2006/main" xmlns:p="http://schemas.openxmlformats.org/presentationml/2006/main" xmlns:r="http://schemas.openxmlformats.org/officeDocument/2006/relationships">
+  <p:cSld>
+    <p:spTree>
+      <p:nvGrpSpPr>
+        <p:cNvPr id="1" name=""/>
+        <p:cNvGrpSpPr/>
+        <p:nvPr/>
+      </p:nvGrpSpPr>
+      <p:grpSpPr/>
+      <p:sp>
+        <p:nvSpPr>
+          <p:cNvPr id="7" name="文本占位符 6">
+            <a:extLst>
+              <a:ext uri="{FF2B5EF4-FFF2-40B4-BE49-F238E27FC236}">
+                <a16:creationId xmlns:a16="http://schemas.microsoft.com/office/drawing/2014/main" id="{33AE8DB3-4C29-0DE3-EB73-8D2BBFBB8CBF}"/>
+              </a:ext>
+            </a:extLst>
+          </p:cNvPr>
+          <p:cNvSpPr>
+            <a:spLocks noGrp="1"/>
+          </p:cNvSpPr>
+          <p:nvPr>
+            <p:ph type="body" sz="quarter" idx="11"/>
+          </p:nvPr>
+        </p:nvSpPr>
+        <p:spPr>
+          <a:xfrm>
+            <a:off x="336550" y="58738"/>
+            <a:ext cx="5759450" cy="622300"/>
+          </a:xfrm>
+        </p:spPr>
+        <p:txBody>
+          <a:bodyPr/>
+          <a:lstStyle/>
+          <a:p>
+            <a:r>
+              <a:rPr lang="en-US" altLang="zh-CN" dirty="0"/>
+              <a:t>Change (a) — objective</a:t>
+            </a:r>
+            <a:endParaRPr lang="zh-CN" altLang="en-US" dirty="0"/>
+          </a:p>
+        </p:txBody>
+      </p:sp>
+      <p:sp>
+        <p:nvSpPr>
+          <p:cNvPr id="203" name="文本占位符 5">
+            <a:extLst>
+              <a:ext uri="{FF2B5EF4-FFF2-40B4-BE49-F238E27FC236}">
+                <a16:creationId xmlns:a16="http://schemas.microsoft.com/office/drawing/2014/main" id="{A219F0BA-71F5-BA11-CCBD-9327897B98CC}"/>
+              </a:ext>
+            </a:extLst>
+          </p:cNvPr>
+          <p:cNvSpPr>
+            <a:spLocks noGrp="1"/>
+          </p:cNvSpPr>
+          <p:nvPr>
+            <p:ph type="body" sz="quarter" idx="10"/>
+          </p:nvPr>
+        </p:nvSpPr>
+        <p:spPr>
+          <a:xfrm>
+            <a:off x="0" y="820290"/>
+            <a:ext cx="5878224" cy="638175"/>
+          </a:xfrm>
+        </p:spPr>
+        <p:txBody>
+          <a:bodyPr/>
+          <a:lstStyle/>
+          <a:p>
+            <a:r>
+              <a:rPr lang="en-US" altLang="zh-CN" sz="2800" dirty="0"/>
+              <a:t>Step 0: earliest arrival</a:t>
+            </a:r>
+            <a:endParaRPr lang="zh-CN" altLang="en-US" sz="2800" dirty="0"/>
+          </a:p>
+        </p:txBody>
+      </p:sp>
+      <p:sp>
+        <p:nvSpPr>
+          <p:cNvPr id="204" name="TextBox 203"/>
+          <p:cNvSpPr txBox="1"/>
+          <p:nvPr/>
+        </p:nvSpPr>
+        <p:spPr>
+          <a:xfrm>
+            <a:off x="685800" y="1353312"/>
+            <a:ext cx="10881360" cy="274320"/>
+          </a:xfrm>
+          <a:prstGeom prst="rect">
+            <a:avLst/>
+          </a:prstGeom>
+          <a:noFill/>
+        </p:spPr>
+        <p:txBody>
+          <a:bodyPr wrap="square">
+            <a:spAutoFit/>
+          </a:bodyPr>
+          <a:lstStyle/>
+          <a:p>
+            <a:pPr algn="l">
+              <a:defRPr sz="1250" b="1">
+                <a:solidFill>
+                  <a:srgbClr val="52514E"/>
+                </a:solidFill>
+              </a:defRPr>
+            </a:pPr>
+            <a:r>
+              <a:t>Before any budget can be set, we must know the fastest this vehicle could possibly make its trip TODAY — earliest arrival on the current network, under this case's congestion δ. One run per vehicle:</a:t>
+            </a:r>
+          </a:p>
+        </p:txBody>
+      </p:sp>
+      <p:sp>
+        <p:nvSpPr>
+          <p:cNvPr id="205" name="Rounded Rectangle 204"/>
+          <p:cNvSpPr/>
+          <p:nvPr/>
+        </p:nvSpPr>
+        <p:spPr>
+          <a:xfrm>
+            <a:off x="685800" y="1956816"/>
+            <a:ext cx="8321040" cy="2514600"/>
+          </a:xfrm>
+          <a:prstGeom prst="roundRect">
+            <a:avLst>
+              <a:gd name="adj" fmla="val 4000"/>
+            </a:avLst>
+          </a:prstGeom>
+          <a:solidFill>
+            <a:srgbClr val="F7F7F5"/>
+          </a:solidFill>
+          <a:ln w="15240">
+            <a:solidFill>
+              <a:srgbClr val="C9C8C2"/>
+            </a:solidFill>
+          </a:ln>
+          <a:effectLst/>
+        </p:spPr>
+        <p:style>
+          <a:lnRef idx="1">
+            <a:schemeClr val="accent1"/>
+          </a:lnRef>
+          <a:fillRef idx="3">
+            <a:schemeClr val="accent1"/>
+          </a:fillRef>
+          <a:effectRef idx="2">
+            <a:schemeClr val="accent1"/>
+          </a:effectRef>
+          <a:fontRef idx="minor">
+            <a:schemeClr val="lt1"/>
+          </a:fontRef>
+        </p:style>
+        <p:txBody>
+          <a:bodyPr rtlCol="0" anchor="ctr" wrap="none" lIns="128016" rIns="128016" tIns="54864" bIns="54864"/>
+          <a:lstStyle/>
+          <a:p>
+            <a:pPr algn="l">
+              <a:defRPr sz="960" b="1">
+                <a:solidFill>
+                  <a:srgbClr val="EB6834"/>
+                </a:solidFill>
+                <a:latin typeface="Courier New"/>
+              </a:defRPr>
+            </a:pPr>
+            <a:r>
+              <a:t>EarliestArrival(o, t₀, δ):        # one run per vehicle, on today's network</a:t>
+            </a:r>
+          </a:p>
+          <a:p>
+            <a:pPr algn="l">
+              <a:defRPr sz="960" b="0">
+                <a:solidFill>
+                  <a:srgbClr val="0B0B0B"/>
+                </a:solidFill>
+                <a:latin typeface="Courier New"/>
+              </a:defRPr>
+            </a:pPr>
+            <a:r>
+              <a:t>  entry[l] ← t₀  for every link l leaving gate o;  push (t₀, l)</a:t>
+            </a:r>
+          </a:p>
+          <a:p>
+            <a:pPr algn="l">
+              <a:defRPr sz="960" b="0">
+                <a:solidFill>
+                  <a:srgbClr val="0B0B0B"/>
+                </a:solidFill>
+                <a:latin typeface="Courier New"/>
+              </a:defRPr>
+            </a:pPr>
+            <a:r>
+              <a:t>  while queue not empty:</a:t>
+            </a:r>
+          </a:p>
+          <a:p>
+            <a:pPr algn="l">
+              <a:defRPr sz="960" b="0">
+                <a:solidFill>
+                  <a:srgbClr val="0B0B0B"/>
+                </a:solidFill>
+                <a:latin typeface="Courier New"/>
+              </a:defRPr>
+            </a:pPr>
+            <a:r>
+              <a:t>      (t, l) ← pop the SMALLEST entry time     # ordinary Dijkstra order</a:t>
+            </a:r>
+          </a:p>
+          <a:p>
+            <a:pPr algn="l">
+              <a:defRPr sz="960" b="0">
+                <a:solidFill>
+                  <a:srgbClr val="0B0B0B"/>
+                </a:solidFill>
+                <a:latin typeface="Courier New"/>
+              </a:defRPr>
+            </a:pPr>
+            <a:r>
+              <a:t>      if t &gt; entry[l]: continue                # stale label</a:t>
+            </a:r>
+          </a:p>
+          <a:p>
+            <a:pPr algn="l">
+              <a:defRPr sz="960" b="1">
+                <a:solidFill>
+                  <a:srgbClr val="EB6834"/>
+                </a:solidFill>
+                <a:latin typeface="Courier New"/>
+              </a:defRPr>
+            </a:pPr>
+            <a:r>
+              <a:t>      s ← t + c(l, t)      # exit time; the clock is INSIDE the cost</a:t>
+            </a:r>
+          </a:p>
+          <a:p>
+            <a:pPr algn="l">
+              <a:defRPr sz="960" b="0">
+                <a:solidFill>
+                  <a:srgbClr val="0B0B0B"/>
+                </a:solidFill>
+                <a:latin typeface="Courier New"/>
+              </a:defRPr>
+            </a:pPr>
+            <a:r>
+              <a:t>      if l ends at a gate g:  arrive[g] ← min(arrive[g], s)</a:t>
+            </a:r>
+          </a:p>
+          <a:p>
+            <a:pPr algn="l">
+              <a:defRPr sz="960" b="0">
+                <a:solidFill>
+                  <a:srgbClr val="0B0B0B"/>
+                </a:solidFill>
+                <a:latin typeface="Courier New"/>
+              </a:defRPr>
+            </a:pPr>
+            <a:r>
+              <a:t>      for every successor j of l (no U-turn):</a:t>
+            </a:r>
+          </a:p>
+          <a:p>
+            <a:pPr algn="l">
+              <a:defRPr sz="960" b="0">
+                <a:solidFill>
+                  <a:srgbClr val="0B0B0B"/>
+                </a:solidFill>
+                <a:latin typeface="Courier New"/>
+              </a:defRPr>
+            </a:pPr>
+            <a:r>
+              <a:t>          if s &lt; entry[j]:  entry[j] ← s;  push (s, j)</a:t>
+            </a:r>
+          </a:p>
+          <a:p>
+            <a:pPr algn="l">
+              <a:defRPr sz="960" b="0">
+                <a:solidFill>
+                  <a:srgbClr val="0B0B0B"/>
+                </a:solidFill>
+                <a:latin typeface="Courier New"/>
+              </a:defRPr>
+            </a:pPr>
+            <a:r>
+              <a:t>  return arrive                               # earliest arrival at EVERY gate</a:t>
+            </a:r>
+          </a:p>
+          <a:p>
+            <a:pPr algn="l">
+              <a:defRPr sz="960" b="0">
+                <a:solidFill>
+                  <a:srgbClr val="0B0B0B"/>
+                </a:solidFill>
+                <a:latin typeface="Courier New"/>
+              </a:defRPr>
+            </a:pPr>
+          </a:p>
+          <a:p>
+            <a:pPr algn="l">
+              <a:defRPr sz="960" b="1">
+                <a:solidFill>
+                  <a:srgbClr val="EB6834"/>
+                </a:solidFill>
+                <a:latin typeface="Courier New"/>
+              </a:defRPr>
+            </a:pPr>
+            <a:r>
+              <a:t>τᵐⁱⁿ_v = arrive[d_v] − t₀_v</a:t>
+            </a:r>
+          </a:p>
+        </p:txBody>
+      </p:sp>
+      <p:sp>
+        <p:nvSpPr>
+          <p:cNvPr id="206" name="Rounded Rectangle 205"/>
+          <p:cNvSpPr/>
+          <p:nvPr/>
+        </p:nvSpPr>
+        <p:spPr>
+          <a:xfrm>
+            <a:off x="9235440" y="1956816"/>
+            <a:ext cx="2468880" cy="2514600"/>
+          </a:xfrm>
+          <a:prstGeom prst="roundRect">
+            <a:avLst>
+              <a:gd name="adj" fmla="val 10000"/>
+            </a:avLst>
+          </a:prstGeom>
+          <a:solidFill>
+            <a:srgbClr val="FDF1E9"/>
+          </a:solidFill>
+          <a:ln w="15240">
+            <a:solidFill>
+              <a:srgbClr val="EB6834"/>
+            </a:solidFill>
+          </a:ln>
+          <a:effectLst/>
+        </p:spPr>
+        <p:style>
+          <a:lnRef idx="1">
+            <a:schemeClr val="accent1"/>
+          </a:lnRef>
+          <a:fillRef idx="3">
+            <a:schemeClr val="accent1"/>
+          </a:fillRef>
+          <a:effectRef idx="2">
+            <a:schemeClr val="accent1"/>
+          </a:effectRef>
+          <a:fontRef idx="minor">
+            <a:schemeClr val="lt1"/>
+          </a:fontRef>
+        </p:style>
+        <p:txBody>
+          <a:bodyPr rtlCol="0" anchor="ctr" wrap="square" lIns="54864" rIns="54864" tIns="27432" bIns="27432"/>
+          <a:lstStyle/>
+          <a:p>
+            <a:pPr algn="ctr">
+              <a:defRPr sz="1050" b="1">
+                <a:solidFill>
+                  <a:srgbClr val="EB6834"/>
+                </a:solidFill>
+              </a:defRPr>
+            </a:pPr>
+            <a:r>
+              <a:t>Where it runs</a:t>
+            </a:r>
+          </a:p>
+          <a:p>
+            <a:pPr algn="ctr">
+              <a:defRPr sz="860">
+                <a:solidFill>
+                  <a:srgbClr val="52514E"/>
+                </a:solidFill>
+              </a:defRPr>
+            </a:pPr>
+            <a:r>
+              <a:t>① budget assignment:</a:t>
+            </a:r>
+            <a:br/>
+            <a:r>
+              <a:t>V runs per case</a:t>
+            </a:r>
+            <a:br/>
+            <a:r>
+              <a:t>(~41 000 in the farm)</a:t>
+            </a:r>
+            <a:br/>
+            <a:br/>
+            <a:r>
+              <a:t>② decoder mask:</a:t>
+            </a:r>
+            <a:br/>
+            <a:r>
+              <a:t>min_finish(l, t, d) —</a:t>
+            </a:r>
+            <a:br/>
+            <a:r>
+              <a:t>same algorithm from one</a:t>
+            </a:r>
+            <a:br/>
+            <a:r>
+              <a:t>link, memoised</a:t>
+            </a:r>
+            <a:br/>
+            <a:br/>
+            <a:r>
+              <a:t>③ horizon calibration:</a:t>
+            </a:r>
+            <a:br/>
+            <a:r>
+              <a:t>once, all 8 gates</a:t>
+            </a:r>
+          </a:p>
+        </p:txBody>
+      </p:sp>
+      <p:sp>
+        <p:nvSpPr>
+          <p:cNvPr id="207" name="TextBox 206"/>
+          <p:cNvSpPr txBox="1"/>
+          <p:nvPr/>
+        </p:nvSpPr>
+        <p:spPr>
+          <a:xfrm>
+            <a:off x="640080" y="4709160"/>
+            <a:ext cx="11064240" cy="914400"/>
+          </a:xfrm>
+          <a:prstGeom prst="rect">
+            <a:avLst/>
+          </a:prstGeom>
+          <a:noFill/>
+        </p:spPr>
+        <p:txBody>
+          <a:bodyPr wrap="square">
+            <a:spAutoFit/>
+          </a:bodyPr>
+          <a:lstStyle/>
+          <a:p>
+            <a:pPr>
+              <a:defRPr sz="1200" b="1"/>
+            </a:pPr>
+            <a:r>
+              <a:t>• It is ordinary Dijkstra with ONE change: a label is a time, not a distance, and relaxing link l entered at time t costs c(l, t) — today's congestion δ sits inside c</a:t>
+            </a:r>
+          </a:p>
+          <a:p>
+            <a:pPr>
+              <a:defRPr sz="1200" b="0"/>
+            </a:pPr>
+            <a:r>
+              <a:t>• Why the greedy order stays correct: our costs are FIFO — t + c(l, t) never decreases in t (entering later can never mean exiting earlier), so the first label popped for a link is final, exactly the classic Dijkstra invariant</a:t>
+            </a:r>
+          </a:p>
+          <a:p>
+            <a:pPr>
+              <a:defRPr sz="1200" b="0"/>
+            </a:pPr>
+            <a:r>
+              <a:t>• One run touches at most 80 links → microseconds; ~41 000 runs across the whole farm are negligible next to the 0.90 s MILP solves. The mask's memoised queries are part of the 6–9 ms inference time</a:t>
+            </a:r>
+          </a:p>
+        </p:txBody>
+      </p:sp>
+    </p:spTree>
+  </p:cSld>
+  <p:clrMapOvr>
+    <a:masterClrMapping/>
+  </p:clrMapOvr>
+</p:sld>
+</file>
+
+<file path=ppt/slides/slide22.xml><?xml version="1.0" encoding="utf-8"?>
 <p:sld xmlns:a="http://schemas.openxmlformats.org/drawingml/2006/main" xmlns:p="http://schemas.openxmlformats.org/presentationml/2006/main" xmlns:r="http://schemas.openxmlformats.org/officeDocument/2006/relationships">
   <p:cSld>
     <p:spTree>
@@ -8803,7 +9127,7 @@
 </p:sld>
 </file>
 
-<file path=ppt/slides/slide21.xml><?xml version="1.0" encoding="utf-8"?>
+<file path=ppt/slides/slide23.xml><?xml version="1.0" encoding="utf-8"?>
 <p:sld xmlns:a="http://schemas.openxmlformats.org/drawingml/2006/main" xmlns:p="http://schemas.openxmlformats.org/presentationml/2006/main" xmlns:r="http://schemas.openxmlformats.org/officeDocument/2006/relationships">
   <p:cSld>
     <p:spTree>
@@ -10718,7 +11042,7 @@
 </p:sld>
 </file>
 
-<file path=ppt/slides/slide22.xml><?xml version="1.0" encoding="utf-8"?>
+<file path=ppt/slides/slide24.xml><?xml version="1.0" encoding="utf-8"?>
 <p:sld xmlns:a="http://schemas.openxmlformats.org/drawingml/2006/main" xmlns:p="http://schemas.openxmlformats.org/presentationml/2006/main" xmlns:r="http://schemas.openxmlformats.org/officeDocument/2006/relationships">
   <p:cSld>
     <p:spTree>
@@ -10899,7 +11223,7 @@
 </p:sld>
 </file>
 
-<file path=ppt/slides/slide23.xml><?xml version="1.0" encoding="utf-8"?>
+<file path=ppt/slides/slide25.xml><?xml version="1.0" encoding="utf-8"?>
 <p:sld xmlns:a="http://schemas.openxmlformats.org/drawingml/2006/main" xmlns:p="http://schemas.openxmlformats.org/presentationml/2006/main" xmlns:r="http://schemas.openxmlformats.org/officeDocument/2006/relationships">
   <p:cSld>
     <p:spTree>
@@ -12053,7 +12377,7 @@
 </p:sld>
 </file>
 
-<file path=ppt/slides/slide24.xml><?xml version="1.0" encoding="utf-8"?>
+<file path=ppt/slides/slide26.xml><?xml version="1.0" encoding="utf-8"?>
 <p:sld xmlns:a="http://schemas.openxmlformats.org/drawingml/2006/main" xmlns:p="http://schemas.openxmlformats.org/presentationml/2006/main" xmlns:r="http://schemas.openxmlformats.org/officeDocument/2006/relationships">
   <p:cSld>
     <p:spTree>
@@ -12824,7 +13148,7 @@
 </p:sld>
 </file>
 
-<file path=ppt/slides/slide25.xml><?xml version="1.0" encoding="utf-8"?>
+<file path=ppt/slides/slide27.xml><?xml version="1.0" encoding="utf-8"?>
 <p:sld xmlns:a="http://schemas.openxmlformats.org/drawingml/2006/main" xmlns:p="http://schemas.openxmlformats.org/presentationml/2006/main" xmlns:r="http://schemas.openxmlformats.org/officeDocument/2006/relationships">
   <p:cSld>
     <p:spTree>
@@ -13650,7 +13974,7 @@
 </p:sld>
 </file>
 
-<file path=ppt/slides/slide26.xml><?xml version="1.0" encoding="utf-8"?>
+<file path=ppt/slides/slide28.xml><?xml version="1.0" encoding="utf-8"?>
 <p:sld xmlns:a="http://schemas.openxmlformats.org/drawingml/2006/main" xmlns:p="http://schemas.openxmlformats.org/presentationml/2006/main" xmlns:r="http://schemas.openxmlformats.org/officeDocument/2006/relationships">
   <p:cSld>
     <p:spTree>
@@ -14946,7 +15270,7 @@
 </p:sld>
 </file>
 
-<file path=ppt/slides/slide27.xml><?xml version="1.0" encoding="utf-8"?>
+<file path=ppt/slides/slide29.xml><?xml version="1.0" encoding="utf-8"?>
 <p:sld xmlns:a="http://schemas.openxmlformats.org/drawingml/2006/main" xmlns:p="http://schemas.openxmlformats.org/presentationml/2006/main" xmlns:r="http://schemas.openxmlformats.org/officeDocument/2006/relationships">
   <p:cSld>
     <p:spTree>
@@ -16218,360 +16542,6 @@
 </p:sld>
 </file>
 
-<file path=ppt/slides/slide28.xml><?xml version="1.0" encoding="utf-8"?>
-<p:sld xmlns:a="http://schemas.openxmlformats.org/drawingml/2006/main" xmlns:p="http://schemas.openxmlformats.org/presentationml/2006/main" xmlns:r="http://schemas.openxmlformats.org/officeDocument/2006/relationships">
-  <p:cSld>
-    <p:spTree>
-      <p:nvGrpSpPr>
-        <p:cNvPr id="1" name=""/>
-        <p:cNvGrpSpPr/>
-        <p:nvPr/>
-      </p:nvGrpSpPr>
-      <p:grpSpPr/>
-      <p:sp>
-        <p:nvSpPr>
-          <p:cNvPr id="7" name="文本占位符 6">
-            <a:extLst>
-              <a:ext uri="{FF2B5EF4-FFF2-40B4-BE49-F238E27FC236}">
-                <a16:creationId xmlns:a16="http://schemas.microsoft.com/office/drawing/2014/main" id="{33AE8DB3-4C29-0DE3-EB73-8D2BBFBB8CBF}"/>
-              </a:ext>
-            </a:extLst>
-          </p:cNvPr>
-          <p:cNvSpPr>
-            <a:spLocks noGrp="1"/>
-          </p:cNvSpPr>
-          <p:nvPr>
-            <p:ph type="body" sz="quarter" idx="11"/>
-          </p:nvPr>
-        </p:nvSpPr>
-        <p:spPr>
-          <a:xfrm>
-            <a:off x="336550" y="58738"/>
-            <a:ext cx="5759450" cy="622300"/>
-          </a:xfrm>
-        </p:spPr>
-        <p:txBody>
-          <a:bodyPr/>
-          <a:lstStyle/>
-          <a:p>
-            <a:r>
-              <a:rPr lang="en-US" altLang="zh-CN" dirty="0"/>
-              <a:t>Data</a:t>
-            </a:r>
-            <a:endParaRPr lang="zh-CN" altLang="en-US" dirty="0"/>
-          </a:p>
-        </p:txBody>
-      </p:sp>
-      <p:sp>
-        <p:nvSpPr>
-          <p:cNvPr id="203" name="文本占位符 5">
-            <a:extLst>
-              <a:ext uri="{FF2B5EF4-FFF2-40B4-BE49-F238E27FC236}">
-                <a16:creationId xmlns:a16="http://schemas.microsoft.com/office/drawing/2014/main" id="{A219F0BA-71F5-BA11-CCBD-9327897B98CC}"/>
-              </a:ext>
-            </a:extLst>
-          </p:cNvPr>
-          <p:cNvSpPr>
-            <a:spLocks noGrp="1"/>
-          </p:cNvSpPr>
-          <p:nvPr>
-            <p:ph type="body" sz="quarter" idx="10"/>
-          </p:nvPr>
-        </p:nvSpPr>
-        <p:spPr>
-          <a:xfrm>
-            <a:off x="0" y="820290"/>
-            <a:ext cx="5878224" cy="638175"/>
-          </a:xfrm>
-        </p:spPr>
-        <p:txBody>
-          <a:bodyPr/>
-          <a:lstStyle/>
-          <a:p>
-            <a:r>
-              <a:rPr lang="en-US" altLang="zh-CN" sz="2800" dirty="0"/>
-              <a:t>Label set</a:t>
-            </a:r>
-            <a:endParaRPr lang="zh-CN" altLang="en-US" sz="2800" dirty="0"/>
-          </a:p>
-        </p:txBody>
-      </p:sp>
-      <p:sp>
-        <p:nvSpPr>
-          <p:cNvPr id="204" name="TextBox 203"/>
-          <p:cNvSpPr txBox="1"/>
-          <p:nvPr/>
-        </p:nvSpPr>
-        <p:spPr>
-          <a:xfrm>
-            <a:off x="640080" y="1508760"/>
-            <a:ext cx="10881360" cy="914400"/>
-          </a:xfrm>
-          <a:prstGeom prst="rect">
-            <a:avLst/>
-          </a:prstGeom>
-          <a:noFill/>
-        </p:spPr>
-        <p:txBody>
-          <a:bodyPr wrap="square">
-            <a:spAutoFit/>
-          </a:bodyPr>
-          <a:lstStyle/>
-          <a:p>
-            <a:pPr>
-              <a:defRPr sz="1350" b="1"/>
-            </a:pPr>
-            <a:r>
-              <a:t>• 10 780 Gurobi labels · 0 errors · 0 solves hit the 60 s cap · 0.90 s mean per case (tight budgets prune the time-expanded graph → labelling ~30× faster than the full-horizon farm) · ~17 min on 15 workers, fully resumable</a:t>
-            </a:r>
-          </a:p>
-          <a:p>
-            <a:pPr>
-              <a:defRPr sz="1350" b="1"/>
-            </a:pPr>
-            <a:r>
-              <a:t>• Shards:</a:t>
-            </a:r>
-          </a:p>
-          <a:p>
-            <a:pPr>
-              <a:defRPr sz="1200" b="0"/>
-            </a:pPr>
-            <a:r>
-              <a:t>   – train 8 000 · same-distribution test 800</a:t>
-            </a:r>
-          </a:p>
-          <a:p>
-            <a:pPr>
-              <a:defRPr sz="1200" b="0"/>
-            </a:pPr>
-            <a:r>
-              <a:t>   – OD zero-shot 400 (4 gate pairs never trained) · fleet extrapolation 400 (V ∈ {5,8})</a:t>
-            </a:r>
-          </a:p>
-          <a:p>
-            <a:pPr>
-              <a:defRPr sz="1200" b="0"/>
-            </a:pPr>
-            <a:r>
-              <a:t>   – UNSEEN-budget interpolation 400 (ρ ∈ {1.25, 1.75}) · extrapolation 300 (ρ = 4.0)</a:t>
-            </a:r>
-          </a:p>
-          <a:p>
-            <a:pPr>
-              <a:defRPr sz="1200" b="0"/>
-            </a:pPr>
-            <a:r>
-              <a:t>   – response curve: 60 fixed instances × 8 ρ values, re-solved by Gurobi at every ρ</a:t>
-            </a:r>
-          </a:p>
-          <a:p>
-            <a:pPr>
-              <a:defRPr sz="1350" b="0"/>
-            </a:pPr>
-            <a:r>
-              <a:t>• Trained ρ anchors {1.0, 1.5, 2.0, 3.0}; the three held-out ρ values appear in NO training label</a:t>
-            </a:r>
-          </a:p>
-          <a:p>
-            <a:pPr>
-              <a:defRPr sz="1350" b="0"/>
-            </a:pPr>
-            <a:r>
-              <a:t>• Every label passes two checks at write time: flow-decomposed objective ≡ Gurobi ObjVal (1e-6) and every per-vehicle deadline re-validated</a:t>
-            </a:r>
-          </a:p>
-        </p:txBody>
-      </p:sp>
-    </p:spTree>
-  </p:cSld>
-  <p:clrMapOvr>
-    <a:masterClrMapping/>
-  </p:clrMapOvr>
-</p:sld>
-</file>
-
-<file path=ppt/slides/slide29.xml><?xml version="1.0" encoding="utf-8"?>
-<p:sld xmlns:a="http://schemas.openxmlformats.org/drawingml/2006/main" xmlns:p="http://schemas.openxmlformats.org/presentationml/2006/main" xmlns:r="http://schemas.openxmlformats.org/officeDocument/2006/relationships">
-  <p:cSld>
-    <p:spTree>
-      <p:nvGrpSpPr>
-        <p:cNvPr id="1" name=""/>
-        <p:cNvGrpSpPr/>
-        <p:nvPr/>
-      </p:nvGrpSpPr>
-      <p:grpSpPr/>
-      <p:sp>
-        <p:nvSpPr>
-          <p:cNvPr id="7" name="文本占位符 6">
-            <a:extLst>
-              <a:ext uri="{FF2B5EF4-FFF2-40B4-BE49-F238E27FC236}">
-                <a16:creationId xmlns:a16="http://schemas.microsoft.com/office/drawing/2014/main" id="{33AE8DB3-4C29-0DE3-EB73-8D2BBFBB8CBF}"/>
-              </a:ext>
-            </a:extLst>
-          </p:cNvPr>
-          <p:cNvSpPr>
-            <a:spLocks noGrp="1"/>
-          </p:cNvSpPr>
-          <p:nvPr>
-            <p:ph type="body" sz="quarter" idx="11"/>
-          </p:nvPr>
-        </p:nvSpPr>
-        <p:spPr>
-          <a:xfrm>
-            <a:off x="336550" y="58738"/>
-            <a:ext cx="5759450" cy="622300"/>
-          </a:xfrm>
-        </p:spPr>
-        <p:txBody>
-          <a:bodyPr/>
-          <a:lstStyle/>
-          <a:p>
-            <a:r>
-              <a:rPr lang="en-US" altLang="zh-CN" dirty="0"/>
-              <a:t>Evaluation</a:t>
-            </a:r>
-            <a:endParaRPr lang="zh-CN" altLang="en-US" dirty="0"/>
-          </a:p>
-        </p:txBody>
-      </p:sp>
-      <p:sp>
-        <p:nvSpPr>
-          <p:cNvPr id="203" name="文本占位符 5">
-            <a:extLst>
-              <a:ext uri="{FF2B5EF4-FFF2-40B4-BE49-F238E27FC236}">
-                <a16:creationId xmlns:a16="http://schemas.microsoft.com/office/drawing/2014/main" id="{A219F0BA-71F5-BA11-CCBD-9327897B98CC}"/>
-              </a:ext>
-            </a:extLst>
-          </p:cNvPr>
-          <p:cNvSpPr>
-            <a:spLocks noGrp="1"/>
-          </p:cNvSpPr>
-          <p:nvPr>
-            <p:ph type="body" sz="quarter" idx="10"/>
-          </p:nvPr>
-        </p:nvSpPr>
-        <p:spPr>
-          <a:xfrm>
-            <a:off x="0" y="820290"/>
-            <a:ext cx="5878224" cy="638175"/>
-          </a:xfrm>
-        </p:spPr>
-        <p:txBody>
-          <a:bodyPr/>
-          <a:lstStyle/>
-          <a:p>
-            <a:r>
-              <a:rPr lang="en-US" altLang="zh-CN" sz="2800" dirty="0"/>
-              <a:t>Design</a:t>
-            </a:r>
-            <a:endParaRPr lang="zh-CN" altLang="en-US" sz="2800" dirty="0"/>
-          </a:p>
-        </p:txBody>
-      </p:sp>
-      <p:sp>
-        <p:nvSpPr>
-          <p:cNvPr id="204" name="TextBox 203"/>
-          <p:cNvSpPr txBox="1"/>
-          <p:nvPr/>
-        </p:nvSpPr>
-        <p:spPr>
-          <a:xfrm>
-            <a:off x="640080" y="1508760"/>
-            <a:ext cx="10881360" cy="914400"/>
-          </a:xfrm>
-          <a:prstGeom prst="rect">
-            <a:avLst/>
-          </a:prstGeom>
-          <a:noFill/>
-        </p:spPr>
-        <p:txBody>
-          <a:bodyPr wrap="square">
-            <a:spAutoFit/>
-          </a:bodyPr>
-          <a:lstStyle/>
-          <a:p>
-            <a:pPr>
-              <a:defRPr sz="1350" b="1"/>
-            </a:pPr>
-            <a:r>
-              <a:t>• Five layers, 2 300 cases, none seen in training:</a:t>
-            </a:r>
-          </a:p>
-          <a:p>
-            <a:pPr>
-              <a:defRPr sz="1200" b="0"/>
-            </a:pPr>
-            <a:r>
-              <a:t>   – L1 same-distribution — 800 fresh cases (trained ODs, new δ / task mixes)</a:t>
-            </a:r>
-          </a:p>
-          <a:p>
-            <a:pPr>
-              <a:defRPr sz="1200" b="0"/>
-            </a:pPr>
-            <a:r>
-              <a:t>   – L2 OD ZERO-SHOT — 400 cases on 4 OD pairs never trained (G1→G5, G6→G2, G4→G8, G7→G3)</a:t>
-            </a:r>
-          </a:p>
-          <a:p>
-            <a:pPr>
-              <a:defRPr sz="1200" b="0"/>
-            </a:pPr>
-            <a:r>
-              <a:t>   – L3 fleet extrapolation — 400 cases with V ∈ {5, 8}, trained on {2,3,4,6}</a:t>
-            </a:r>
-          </a:p>
-          <a:p>
-            <a:pPr>
-              <a:defRPr sz="1200" b="0"/>
-            </a:pPr>
-            <a:r>
-              <a:t>   – L4a UNSEEN budget, interpolation — 400 cases at ρ ∈ {1.25, 1.75}</a:t>
-            </a:r>
-          </a:p>
-          <a:p>
-            <a:pPr>
-              <a:defRPr sz="1200" b="0"/>
-            </a:pPr>
-            <a:r>
-              <a:t>   – L4b UNSEEN budget, extrapolation — 300 cases at ρ = 4.0, beyond the trained range</a:t>
-            </a:r>
-          </a:p>
-          <a:p>
-            <a:pPr>
-              <a:defRPr sz="1350" b="1"/>
-            </a:pPr>
-            <a:r>
-              <a:t>• Plus the RESPONSE CURVE: 60 fixed instances re-solved at every ρ by both Gurobi and the model — did it learn the budget as a continuous quantity or memorise four settings?</a:t>
-            </a:r>
-          </a:p>
-          <a:p>
-            <a:pPr>
-              <a:defRPr sz="1350" b="0"/>
-            </a:pPr>
-            <a:r>
-              <a:t>• Metrics: feasibility rate · objective gap vs Gurobi (absolute + relative) · fraction matching or beating Gurobi · inference time · per-case CSV. 3 seeds, mean ± std</a:t>
-            </a:r>
-          </a:p>
-          <a:p>
-            <a:pPr>
-              <a:defRPr sz="1350" b="0"/>
-            </a:pPr>
-            <a:r>
-              <a:t>• Tuning used a validation slice of the training shard only; every reported number is from held-out shards</a:t>
-            </a:r>
-          </a:p>
-        </p:txBody>
-      </p:sp>
-    </p:spTree>
-  </p:cSld>
-  <p:clrMapOvr>
-    <a:masterClrMapping/>
-  </p:clrMapOvr>
-</p:sld>
-</file>
-
 <file path=ppt/slides/slide3.xml><?xml version="1.0" encoding="utf-8"?>
 <p:sld xmlns:a="http://schemas.openxmlformats.org/drawingml/2006/main" xmlns:r="http://schemas.openxmlformats.org/officeDocument/2006/relationships" xmlns:p="http://schemas.openxmlformats.org/presentationml/2006/main">
   <p:cSld>
@@ -16719,6 +16689,360 @@
           <a:p>
             <a:r>
               <a:rPr lang="en-US" altLang="zh-CN" dirty="0"/>
+              <a:t>Data</a:t>
+            </a:r>
+            <a:endParaRPr lang="zh-CN" altLang="en-US" dirty="0"/>
+          </a:p>
+        </p:txBody>
+      </p:sp>
+      <p:sp>
+        <p:nvSpPr>
+          <p:cNvPr id="203" name="文本占位符 5">
+            <a:extLst>
+              <a:ext uri="{FF2B5EF4-FFF2-40B4-BE49-F238E27FC236}">
+                <a16:creationId xmlns:a16="http://schemas.microsoft.com/office/drawing/2014/main" id="{A219F0BA-71F5-BA11-CCBD-9327897B98CC}"/>
+              </a:ext>
+            </a:extLst>
+          </p:cNvPr>
+          <p:cNvSpPr>
+            <a:spLocks noGrp="1"/>
+          </p:cNvSpPr>
+          <p:nvPr>
+            <p:ph type="body" sz="quarter" idx="10"/>
+          </p:nvPr>
+        </p:nvSpPr>
+        <p:spPr>
+          <a:xfrm>
+            <a:off x="0" y="820290"/>
+            <a:ext cx="5878224" cy="638175"/>
+          </a:xfrm>
+        </p:spPr>
+        <p:txBody>
+          <a:bodyPr/>
+          <a:lstStyle/>
+          <a:p>
+            <a:r>
+              <a:rPr lang="en-US" altLang="zh-CN" sz="2800" dirty="0"/>
+              <a:t>Label set</a:t>
+            </a:r>
+            <a:endParaRPr lang="zh-CN" altLang="en-US" sz="2800" dirty="0"/>
+          </a:p>
+        </p:txBody>
+      </p:sp>
+      <p:sp>
+        <p:nvSpPr>
+          <p:cNvPr id="204" name="TextBox 203"/>
+          <p:cNvSpPr txBox="1"/>
+          <p:nvPr/>
+        </p:nvSpPr>
+        <p:spPr>
+          <a:xfrm>
+            <a:off x="640080" y="1508760"/>
+            <a:ext cx="10881360" cy="914400"/>
+          </a:xfrm>
+          <a:prstGeom prst="rect">
+            <a:avLst/>
+          </a:prstGeom>
+          <a:noFill/>
+        </p:spPr>
+        <p:txBody>
+          <a:bodyPr wrap="square">
+            <a:spAutoFit/>
+          </a:bodyPr>
+          <a:lstStyle/>
+          <a:p>
+            <a:pPr>
+              <a:defRPr sz="1350" b="1"/>
+            </a:pPr>
+            <a:r>
+              <a:t>• 10 780 Gurobi labels · 0 errors · 0 solves hit the 60 s cap · 0.90 s mean per case (tight budgets prune the time-expanded graph → labelling ~30× faster than the full-horizon farm) · ~17 min on 15 workers, fully resumable</a:t>
+            </a:r>
+          </a:p>
+          <a:p>
+            <a:pPr>
+              <a:defRPr sz="1350" b="1"/>
+            </a:pPr>
+            <a:r>
+              <a:t>• Shards:</a:t>
+            </a:r>
+          </a:p>
+          <a:p>
+            <a:pPr>
+              <a:defRPr sz="1200" b="0"/>
+            </a:pPr>
+            <a:r>
+              <a:t>   – train 8 000 · same-distribution test 800</a:t>
+            </a:r>
+          </a:p>
+          <a:p>
+            <a:pPr>
+              <a:defRPr sz="1200" b="0"/>
+            </a:pPr>
+            <a:r>
+              <a:t>   – OD zero-shot 400 (4 gate pairs never trained) · fleet extrapolation 400 (V ∈ {5,8})</a:t>
+            </a:r>
+          </a:p>
+          <a:p>
+            <a:pPr>
+              <a:defRPr sz="1200" b="0"/>
+            </a:pPr>
+            <a:r>
+              <a:t>   – UNSEEN-budget interpolation 400 (ρ ∈ {1.25, 1.75}) · extrapolation 300 (ρ = 4.0)</a:t>
+            </a:r>
+          </a:p>
+          <a:p>
+            <a:pPr>
+              <a:defRPr sz="1200" b="0"/>
+            </a:pPr>
+            <a:r>
+              <a:t>   – response curve: 60 fixed instances × 8 ρ values, re-solved by Gurobi at every ρ</a:t>
+            </a:r>
+          </a:p>
+          <a:p>
+            <a:pPr>
+              <a:defRPr sz="1350" b="0"/>
+            </a:pPr>
+            <a:r>
+              <a:t>• Trained ρ anchors {1.0, 1.5, 2.0, 3.0}; the three held-out ρ values appear in NO training label</a:t>
+            </a:r>
+          </a:p>
+          <a:p>
+            <a:pPr>
+              <a:defRPr sz="1350" b="0"/>
+            </a:pPr>
+            <a:r>
+              <a:t>• Every label passes two checks at write time: flow-decomposed objective ≡ Gurobi ObjVal (1e-6) and every per-vehicle deadline re-validated</a:t>
+            </a:r>
+          </a:p>
+        </p:txBody>
+      </p:sp>
+    </p:spTree>
+  </p:cSld>
+  <p:clrMapOvr>
+    <a:masterClrMapping/>
+  </p:clrMapOvr>
+</p:sld>
+</file>
+
+<file path=ppt/slides/slide31.xml><?xml version="1.0" encoding="utf-8"?>
+<p:sld xmlns:a="http://schemas.openxmlformats.org/drawingml/2006/main" xmlns:p="http://schemas.openxmlformats.org/presentationml/2006/main" xmlns:r="http://schemas.openxmlformats.org/officeDocument/2006/relationships">
+  <p:cSld>
+    <p:spTree>
+      <p:nvGrpSpPr>
+        <p:cNvPr id="1" name=""/>
+        <p:cNvGrpSpPr/>
+        <p:nvPr/>
+      </p:nvGrpSpPr>
+      <p:grpSpPr/>
+      <p:sp>
+        <p:nvSpPr>
+          <p:cNvPr id="7" name="文本占位符 6">
+            <a:extLst>
+              <a:ext uri="{FF2B5EF4-FFF2-40B4-BE49-F238E27FC236}">
+                <a16:creationId xmlns:a16="http://schemas.microsoft.com/office/drawing/2014/main" id="{33AE8DB3-4C29-0DE3-EB73-8D2BBFBB8CBF}"/>
+              </a:ext>
+            </a:extLst>
+          </p:cNvPr>
+          <p:cNvSpPr>
+            <a:spLocks noGrp="1"/>
+          </p:cNvSpPr>
+          <p:nvPr>
+            <p:ph type="body" sz="quarter" idx="11"/>
+          </p:nvPr>
+        </p:nvSpPr>
+        <p:spPr>
+          <a:xfrm>
+            <a:off x="336550" y="58738"/>
+            <a:ext cx="5759450" cy="622300"/>
+          </a:xfrm>
+        </p:spPr>
+        <p:txBody>
+          <a:bodyPr/>
+          <a:lstStyle/>
+          <a:p>
+            <a:r>
+              <a:rPr lang="en-US" altLang="zh-CN" dirty="0"/>
+              <a:t>Evaluation</a:t>
+            </a:r>
+            <a:endParaRPr lang="zh-CN" altLang="en-US" dirty="0"/>
+          </a:p>
+        </p:txBody>
+      </p:sp>
+      <p:sp>
+        <p:nvSpPr>
+          <p:cNvPr id="203" name="文本占位符 5">
+            <a:extLst>
+              <a:ext uri="{FF2B5EF4-FFF2-40B4-BE49-F238E27FC236}">
+                <a16:creationId xmlns:a16="http://schemas.microsoft.com/office/drawing/2014/main" id="{A219F0BA-71F5-BA11-CCBD-9327897B98CC}"/>
+              </a:ext>
+            </a:extLst>
+          </p:cNvPr>
+          <p:cNvSpPr>
+            <a:spLocks noGrp="1"/>
+          </p:cNvSpPr>
+          <p:nvPr>
+            <p:ph type="body" sz="quarter" idx="10"/>
+          </p:nvPr>
+        </p:nvSpPr>
+        <p:spPr>
+          <a:xfrm>
+            <a:off x="0" y="820290"/>
+            <a:ext cx="5878224" cy="638175"/>
+          </a:xfrm>
+        </p:spPr>
+        <p:txBody>
+          <a:bodyPr/>
+          <a:lstStyle/>
+          <a:p>
+            <a:r>
+              <a:rPr lang="en-US" altLang="zh-CN" sz="2800" dirty="0"/>
+              <a:t>Design</a:t>
+            </a:r>
+            <a:endParaRPr lang="zh-CN" altLang="en-US" sz="2800" dirty="0"/>
+          </a:p>
+        </p:txBody>
+      </p:sp>
+      <p:sp>
+        <p:nvSpPr>
+          <p:cNvPr id="204" name="TextBox 203"/>
+          <p:cNvSpPr txBox="1"/>
+          <p:nvPr/>
+        </p:nvSpPr>
+        <p:spPr>
+          <a:xfrm>
+            <a:off x="640080" y="1508760"/>
+            <a:ext cx="10881360" cy="914400"/>
+          </a:xfrm>
+          <a:prstGeom prst="rect">
+            <a:avLst/>
+          </a:prstGeom>
+          <a:noFill/>
+        </p:spPr>
+        <p:txBody>
+          <a:bodyPr wrap="square">
+            <a:spAutoFit/>
+          </a:bodyPr>
+          <a:lstStyle/>
+          <a:p>
+            <a:pPr>
+              <a:defRPr sz="1350" b="1"/>
+            </a:pPr>
+            <a:r>
+              <a:t>• Five layers, 2 300 cases, none seen in training:</a:t>
+            </a:r>
+          </a:p>
+          <a:p>
+            <a:pPr>
+              <a:defRPr sz="1200" b="0"/>
+            </a:pPr>
+            <a:r>
+              <a:t>   – L1 same-distribution — 800 fresh cases (trained ODs, new δ / task mixes)</a:t>
+            </a:r>
+          </a:p>
+          <a:p>
+            <a:pPr>
+              <a:defRPr sz="1200" b="0"/>
+            </a:pPr>
+            <a:r>
+              <a:t>   – L2 OD ZERO-SHOT — 400 cases on 4 OD pairs never trained (G1→G5, G6→G2, G4→G8, G7→G3)</a:t>
+            </a:r>
+          </a:p>
+          <a:p>
+            <a:pPr>
+              <a:defRPr sz="1200" b="0"/>
+            </a:pPr>
+            <a:r>
+              <a:t>   – L3 fleet extrapolation — 400 cases with V ∈ {5, 8}, trained on {2,3,4,6}</a:t>
+            </a:r>
+          </a:p>
+          <a:p>
+            <a:pPr>
+              <a:defRPr sz="1200" b="0"/>
+            </a:pPr>
+            <a:r>
+              <a:t>   – L4a UNSEEN budget, interpolation — 400 cases at ρ ∈ {1.25, 1.75}</a:t>
+            </a:r>
+          </a:p>
+          <a:p>
+            <a:pPr>
+              <a:defRPr sz="1200" b="0"/>
+            </a:pPr>
+            <a:r>
+              <a:t>   – L4b UNSEEN budget, extrapolation — 300 cases at ρ = 4.0, beyond the trained range</a:t>
+            </a:r>
+          </a:p>
+          <a:p>
+            <a:pPr>
+              <a:defRPr sz="1350" b="1"/>
+            </a:pPr>
+            <a:r>
+              <a:t>• Plus the RESPONSE CURVE: 60 fixed instances re-solved at every ρ by both Gurobi and the model — did it learn the budget as a continuous quantity or memorise four settings?</a:t>
+            </a:r>
+          </a:p>
+          <a:p>
+            <a:pPr>
+              <a:defRPr sz="1350" b="0"/>
+            </a:pPr>
+            <a:r>
+              <a:t>• Metrics: feasibility rate · objective gap vs Gurobi (absolute + relative) · fraction matching or beating Gurobi · inference time · per-case CSV. 3 seeds, mean ± std</a:t>
+            </a:r>
+          </a:p>
+          <a:p>
+            <a:pPr>
+              <a:defRPr sz="1350" b="0"/>
+            </a:pPr>
+            <a:r>
+              <a:t>• Tuning used a validation slice of the training shard only; every reported number is from held-out shards</a:t>
+            </a:r>
+          </a:p>
+        </p:txBody>
+      </p:sp>
+    </p:spTree>
+  </p:cSld>
+  <p:clrMapOvr>
+    <a:masterClrMapping/>
+  </p:clrMapOvr>
+</p:sld>
+</file>
+
+<file path=ppt/slides/slide32.xml><?xml version="1.0" encoding="utf-8"?>
+<p:sld xmlns:a="http://schemas.openxmlformats.org/drawingml/2006/main" xmlns:p="http://schemas.openxmlformats.org/presentationml/2006/main" xmlns:r="http://schemas.openxmlformats.org/officeDocument/2006/relationships">
+  <p:cSld>
+    <p:spTree>
+      <p:nvGrpSpPr>
+        <p:cNvPr id="1" name=""/>
+        <p:cNvGrpSpPr/>
+        <p:nvPr/>
+      </p:nvGrpSpPr>
+      <p:grpSpPr/>
+      <p:sp>
+        <p:nvSpPr>
+          <p:cNvPr id="7" name="文本占位符 6">
+            <a:extLst>
+              <a:ext uri="{FF2B5EF4-FFF2-40B4-BE49-F238E27FC236}">
+                <a16:creationId xmlns:a16="http://schemas.microsoft.com/office/drawing/2014/main" id="{33AE8DB3-4C29-0DE3-EB73-8D2BBFBB8CBF}"/>
+              </a:ext>
+            </a:extLst>
+          </p:cNvPr>
+          <p:cNvSpPr>
+            <a:spLocks noGrp="1"/>
+          </p:cNvSpPr>
+          <p:nvPr>
+            <p:ph type="body" sz="quarter" idx="11"/>
+          </p:nvPr>
+        </p:nvSpPr>
+        <p:spPr>
+          <a:xfrm>
+            <a:off x="336550" y="58738"/>
+            <a:ext cx="5759450" cy="622300"/>
+          </a:xfrm>
+        </p:spPr>
+        <p:txBody>
+          <a:bodyPr/>
+          <a:lstStyle/>
+          <a:p>
+            <a:r>
+              <a:rPr lang="en-US" altLang="zh-CN" dirty="0"/>
               <a:t>Results</a:t>
             </a:r>
             <a:endParaRPr lang="zh-CN" altLang="en-US" dirty="0"/>
@@ -16830,7 +17154,7 @@
 </p:sld>
 </file>
 
-<file path=ppt/slides/slide31.xml><?xml version="1.0" encoding="utf-8"?>
+<file path=ppt/slides/slide33.xml><?xml version="1.0" encoding="utf-8"?>
 <p:sld xmlns:a="http://schemas.openxmlformats.org/drawingml/2006/main" xmlns:p="http://schemas.openxmlformats.org/presentationml/2006/main" xmlns:r="http://schemas.openxmlformats.org/officeDocument/2006/relationships">
   <p:cSld>
     <p:spTree>
@@ -16971,7 +17295,7 @@
 </p:sld>
 </file>
 
-<file path=ppt/slides/slide32.xml><?xml version="1.0" encoding="utf-8"?>
+<file path=ppt/slides/slide34.xml><?xml version="1.0" encoding="utf-8"?>
 <p:sld xmlns:a="http://schemas.openxmlformats.org/drawingml/2006/main" xmlns:p="http://schemas.openxmlformats.org/presentationml/2006/main" xmlns:r="http://schemas.openxmlformats.org/officeDocument/2006/relationships">
   <p:cSld>
     <p:spTree>
